--- a/The Selection Journey.pptx
+++ b/The Selection Journey.pptx
@@ -189,6 +189,14 @@
 </p:presentation>
 </file>
 
+<file path=ppt/revisionInfo.xml><?xml version="1.0" encoding="utf-8"?>
+<p1510:revInfo xmlns:a="http://schemas.openxmlformats.org/drawingml/2006/main" xmlns:r="http://schemas.openxmlformats.org/officeDocument/2006/relationships" xmlns:p1510="http://schemas.microsoft.com/office/powerpoint/2015/10/main">
+  <p1510:revLst>
+    <p1510:client id="{00000000-0000-0000-0000-000000000000}" v="17" dt="2026-10-07T05:03:00.264"/>
+  </p1510:revLst>
+</p1510:revInfo>
+</file>
+
 <file path=ppt/changesInfos/changesInfo1.xml><?xml version="1.0" encoding="utf-8"?>
 <pc:chgInfo xmlns:a="http://schemas.openxmlformats.org/drawingml/2006/main" xmlns:r="http://schemas.openxmlformats.org/officeDocument/2006/relationships" xmlns:ac="http://schemas.microsoft.com/office/drawing/2013/main/command" xmlns:pc="http://schemas.microsoft.com/office/powerpoint/2013/main/command">
   <pc:docChgLst>
@@ -222,12 +230,549 @@
       <pc:docMkLst>
         <pc:docMk/>
       </pc:docMkLst>
-      <pc:sldChg chg="del">
-        <pc:chgData name="Bryan Sun" userId="851caa7714272873" providerId="LiveId" clId="{1DF0C224-3A3E-55A6-A8D1-F8F2208D385B}" dt="2026-10-02T10:05:09.373" v="0" actId="2696"/>
+    </pc:docChg>
+  </pc:docChgLst>
+  <pc:docChgLst>
+    <pc:chgData name="Bryan Sun" userId="851caa7714272873" providerId="Windows Live" clId="Web-{00000000-0000-0000-0000-000000000000}"/>
+    <pc:docChg chg="addSld delSld modSld modSection">
+      <pc:chgData name="Bryan Sun" userId="851caa7714272873" providerId="Windows Live" clId="Web-{00000000-0000-0000-0000-000000000000}" dt="2026-10-07T05:03:00.264" v="133"/>
+      <pc:docMkLst>
+        <pc:docMk/>
+      </pc:docMkLst>
+      <pc:sldChg chg="addSp delSp new del">
+        <pc:chgData name="Bryan Sun" userId="851caa7714272873" providerId="Windows Live" clId="Web-{00000000-0000-0000-0000-000000000000}" dt="2026-10-07T05:03:00.264" v="133"/>
         <pc:sldMkLst>
           <pc:docMk/>
-          <pc:sldMk cId="0" sldId="274"/>
+          <pc:sldMk cId="371598909" sldId="278"/>
         </pc:sldMkLst>
+        <pc:spChg chg="add del">
+          <ac:chgData name="Bryan Sun" userId="851caa7714272873" providerId="Windows Live" clId="Web-{00000000-0000-0000-0000-000000000000}" dt="2026-10-07T05:02:57.998" v="132"/>
+          <ac:spMkLst>
+            <pc:docMk/>
+            <pc:sldMk cId="371598909" sldId="278"/>
+            <ac:spMk id="5" creationId="{1AA79736-8821-6ECF-152C-D549049E6169}"/>
+          </ac:spMkLst>
+        </pc:spChg>
+        <pc:spChg chg="add del">
+          <ac:chgData name="Bryan Sun" userId="851caa7714272873" providerId="Windows Live" clId="Web-{00000000-0000-0000-0000-000000000000}" dt="2026-10-07T05:02:57.998" v="131"/>
+          <ac:spMkLst>
+            <pc:docMk/>
+            <pc:sldMk cId="371598909" sldId="278"/>
+            <ac:spMk id="7" creationId="{24043622-C646-80F5-B2BB-65121CDCC5F9}"/>
+          </ac:spMkLst>
+        </pc:spChg>
+        <pc:spChg chg="add del">
+          <ac:chgData name="Bryan Sun" userId="851caa7714272873" providerId="Windows Live" clId="Web-{00000000-0000-0000-0000-000000000000}" dt="2026-10-07T05:02:57.998" v="130"/>
+          <ac:spMkLst>
+            <pc:docMk/>
+            <pc:sldMk cId="371598909" sldId="278"/>
+            <ac:spMk id="9" creationId="{FF242ADF-63CD-67E1-B15D-759C20A61E25}"/>
+          </ac:spMkLst>
+        </pc:spChg>
+        <pc:spChg chg="add del">
+          <ac:chgData name="Bryan Sun" userId="851caa7714272873" providerId="Windows Live" clId="Web-{00000000-0000-0000-0000-000000000000}" dt="2026-10-07T05:02:57.998" v="129"/>
+          <ac:spMkLst>
+            <pc:docMk/>
+            <pc:sldMk cId="371598909" sldId="278"/>
+            <ac:spMk id="11" creationId="{6D13A2D8-3C66-7C52-857A-37FCDEDF34FC}"/>
+          </ac:spMkLst>
+        </pc:spChg>
+        <pc:spChg chg="add del">
+          <ac:chgData name="Bryan Sun" userId="851caa7714272873" providerId="Windows Live" clId="Web-{00000000-0000-0000-0000-000000000000}" dt="2026-10-07T05:02:57.998" v="128"/>
+          <ac:spMkLst>
+            <pc:docMk/>
+            <pc:sldMk cId="371598909" sldId="278"/>
+            <ac:spMk id="13" creationId="{330E9E6A-23F6-E46E-BDE2-4BEAEF95583D}"/>
+          </ac:spMkLst>
+        </pc:spChg>
+        <pc:spChg chg="add del">
+          <ac:chgData name="Bryan Sun" userId="851caa7714272873" providerId="Windows Live" clId="Web-{00000000-0000-0000-0000-000000000000}" dt="2026-10-07T05:02:57.998" v="127"/>
+          <ac:spMkLst>
+            <pc:docMk/>
+            <pc:sldMk cId="371598909" sldId="278"/>
+            <ac:spMk id="15" creationId="{28687015-D45B-49B8-ADB4-8913B1010C30}"/>
+          </ac:spMkLst>
+        </pc:spChg>
+        <pc:spChg chg="add del">
+          <ac:chgData name="Bryan Sun" userId="851caa7714272873" providerId="Windows Live" clId="Web-{00000000-0000-0000-0000-000000000000}" dt="2026-10-07T05:02:57.998" v="126"/>
+          <ac:spMkLst>
+            <pc:docMk/>
+            <pc:sldMk cId="371598909" sldId="278"/>
+            <ac:spMk id="17" creationId="{4B04F514-06BB-24A6-AC00-5A3A4C8594CE}"/>
+          </ac:spMkLst>
+        </pc:spChg>
+        <pc:spChg chg="add del">
+          <ac:chgData name="Bryan Sun" userId="851caa7714272873" providerId="Windows Live" clId="Web-{00000000-0000-0000-0000-000000000000}" dt="2026-10-07T05:02:57.998" v="125"/>
+          <ac:spMkLst>
+            <pc:docMk/>
+            <pc:sldMk cId="371598909" sldId="278"/>
+            <ac:spMk id="19" creationId="{60D88AEA-5982-12B7-A9C7-6A50A8B422CE}"/>
+          </ac:spMkLst>
+        </pc:spChg>
+        <pc:spChg chg="add del">
+          <ac:chgData name="Bryan Sun" userId="851caa7714272873" providerId="Windows Live" clId="Web-{00000000-0000-0000-0000-000000000000}" dt="2026-10-07T05:02:57.998" v="124"/>
+          <ac:spMkLst>
+            <pc:docMk/>
+            <pc:sldMk cId="371598909" sldId="278"/>
+            <ac:spMk id="21" creationId="{140250C9-7881-DFE6-153A-A46F6D91049E}"/>
+          </ac:spMkLst>
+        </pc:spChg>
+        <pc:spChg chg="add del">
+          <ac:chgData name="Bryan Sun" userId="851caa7714272873" providerId="Windows Live" clId="Web-{00000000-0000-0000-0000-000000000000}" dt="2026-10-07T05:02:57.998" v="123"/>
+          <ac:spMkLst>
+            <pc:docMk/>
+            <pc:sldMk cId="371598909" sldId="278"/>
+            <ac:spMk id="23" creationId="{0A14D730-232C-6F2A-6A43-DFE89B3646AA}"/>
+          </ac:spMkLst>
+        </pc:spChg>
+        <pc:spChg chg="add del">
+          <ac:chgData name="Bryan Sun" userId="851caa7714272873" providerId="Windows Live" clId="Web-{00000000-0000-0000-0000-000000000000}" dt="2026-10-07T05:02:57.998" v="122"/>
+          <ac:spMkLst>
+            <pc:docMk/>
+            <pc:sldMk cId="371598909" sldId="278"/>
+            <ac:spMk id="25" creationId="{A963CB7B-83CF-CF3F-6BC5-29E43FCECB44}"/>
+          </ac:spMkLst>
+        </pc:spChg>
+        <pc:spChg chg="add del">
+          <ac:chgData name="Bryan Sun" userId="851caa7714272873" providerId="Windows Live" clId="Web-{00000000-0000-0000-0000-000000000000}" dt="2026-10-07T05:02:57.998" v="121"/>
+          <ac:spMkLst>
+            <pc:docMk/>
+            <pc:sldMk cId="371598909" sldId="278"/>
+            <ac:spMk id="27" creationId="{ECC76C33-0928-A1A0-09ED-230E2F8479CB}"/>
+          </ac:spMkLst>
+        </pc:spChg>
+        <pc:spChg chg="add del">
+          <ac:chgData name="Bryan Sun" userId="851caa7714272873" providerId="Windows Live" clId="Web-{00000000-0000-0000-0000-000000000000}" dt="2026-10-07T05:02:57.998" v="120"/>
+          <ac:spMkLst>
+            <pc:docMk/>
+            <pc:sldMk cId="371598909" sldId="278"/>
+            <ac:spMk id="29" creationId="{DF5C9298-6E9B-6B0A-386B-6B753E57BCB8}"/>
+          </ac:spMkLst>
+        </pc:spChg>
+        <pc:spChg chg="add del">
+          <ac:chgData name="Bryan Sun" userId="851caa7714272873" providerId="Windows Live" clId="Web-{00000000-0000-0000-0000-000000000000}" dt="2026-10-07T05:02:57.998" v="119"/>
+          <ac:spMkLst>
+            <pc:docMk/>
+            <pc:sldMk cId="371598909" sldId="278"/>
+            <ac:spMk id="31" creationId="{A2102820-B101-0EA0-6FAE-7DF09665F770}"/>
+          </ac:spMkLst>
+        </pc:spChg>
+        <pc:spChg chg="add del">
+          <ac:chgData name="Bryan Sun" userId="851caa7714272873" providerId="Windows Live" clId="Web-{00000000-0000-0000-0000-000000000000}" dt="2026-10-07T05:02:57.998" v="118"/>
+          <ac:spMkLst>
+            <pc:docMk/>
+            <pc:sldMk cId="371598909" sldId="278"/>
+            <ac:spMk id="33" creationId="{44315CDE-76D6-BBB7-65C7-9740B0DDF4D7}"/>
+          </ac:spMkLst>
+        </pc:spChg>
+        <pc:spChg chg="add del">
+          <ac:chgData name="Bryan Sun" userId="851caa7714272873" providerId="Windows Live" clId="Web-{00000000-0000-0000-0000-000000000000}" dt="2026-10-07T05:02:57.998" v="117"/>
+          <ac:spMkLst>
+            <pc:docMk/>
+            <pc:sldMk cId="371598909" sldId="278"/>
+            <ac:spMk id="35" creationId="{6F8DC7E5-CB61-AB9D-3190-3B774DABCD5B}"/>
+          </ac:spMkLst>
+        </pc:spChg>
+        <pc:spChg chg="add del">
+          <ac:chgData name="Bryan Sun" userId="851caa7714272873" providerId="Windows Live" clId="Web-{00000000-0000-0000-0000-000000000000}" dt="2026-10-07T05:02:57.998" v="116"/>
+          <ac:spMkLst>
+            <pc:docMk/>
+            <pc:sldMk cId="371598909" sldId="278"/>
+            <ac:spMk id="37" creationId="{D7693638-3F5E-3A69-623E-F8171474F0D9}"/>
+          </ac:spMkLst>
+        </pc:spChg>
+        <pc:spChg chg="add del">
+          <ac:chgData name="Bryan Sun" userId="851caa7714272873" providerId="Windows Live" clId="Web-{00000000-0000-0000-0000-000000000000}" dt="2026-10-07T05:02:57.998" v="115"/>
+          <ac:spMkLst>
+            <pc:docMk/>
+            <pc:sldMk cId="371598909" sldId="278"/>
+            <ac:spMk id="39" creationId="{482D290A-7068-EBBA-6496-F810FD344CDA}"/>
+          </ac:spMkLst>
+        </pc:spChg>
+        <pc:spChg chg="add del">
+          <ac:chgData name="Bryan Sun" userId="851caa7714272873" providerId="Windows Live" clId="Web-{00000000-0000-0000-0000-000000000000}" dt="2026-10-07T05:02:57.998" v="114"/>
+          <ac:spMkLst>
+            <pc:docMk/>
+            <pc:sldMk cId="371598909" sldId="278"/>
+            <ac:spMk id="41" creationId="{D45435AD-ADAD-D842-4CD4-EC08D04528A6}"/>
+          </ac:spMkLst>
+        </pc:spChg>
+        <pc:spChg chg="add del">
+          <ac:chgData name="Bryan Sun" userId="851caa7714272873" providerId="Windows Live" clId="Web-{00000000-0000-0000-0000-000000000000}" dt="2026-10-07T05:02:57.998" v="113"/>
+          <ac:spMkLst>
+            <pc:docMk/>
+            <pc:sldMk cId="371598909" sldId="278"/>
+            <ac:spMk id="43" creationId="{568137BA-BCE9-37CD-B2E1-682093C9252D}"/>
+          </ac:spMkLst>
+        </pc:spChg>
+        <pc:spChg chg="add del">
+          <ac:chgData name="Bryan Sun" userId="851caa7714272873" providerId="Windows Live" clId="Web-{00000000-0000-0000-0000-000000000000}" dt="2026-10-07T05:02:57.998" v="112"/>
+          <ac:spMkLst>
+            <pc:docMk/>
+            <pc:sldMk cId="371598909" sldId="278"/>
+            <ac:spMk id="45" creationId="{700B0AA4-3130-3FBF-129C-D9928BAE7F89}"/>
+          </ac:spMkLst>
+        </pc:spChg>
+        <pc:spChg chg="add del">
+          <ac:chgData name="Bryan Sun" userId="851caa7714272873" providerId="Windows Live" clId="Web-{00000000-0000-0000-0000-000000000000}" dt="2026-10-07T05:02:57.998" v="111"/>
+          <ac:spMkLst>
+            <pc:docMk/>
+            <pc:sldMk cId="371598909" sldId="278"/>
+            <ac:spMk id="47" creationId="{973D67DA-C270-D72C-9AFF-995CDECF6CFB}"/>
+          </ac:spMkLst>
+        </pc:spChg>
+        <pc:spChg chg="add del">
+          <ac:chgData name="Bryan Sun" userId="851caa7714272873" providerId="Windows Live" clId="Web-{00000000-0000-0000-0000-000000000000}" dt="2026-10-07T05:02:57.998" v="110"/>
+          <ac:spMkLst>
+            <pc:docMk/>
+            <pc:sldMk cId="371598909" sldId="278"/>
+            <ac:spMk id="49" creationId="{6DA4AB16-8C4C-58FA-5B12-FE786203171E}"/>
+          </ac:spMkLst>
+        </pc:spChg>
+        <pc:spChg chg="add del">
+          <ac:chgData name="Bryan Sun" userId="851caa7714272873" providerId="Windows Live" clId="Web-{00000000-0000-0000-0000-000000000000}" dt="2026-10-07T05:02:57.998" v="109"/>
+          <ac:spMkLst>
+            <pc:docMk/>
+            <pc:sldMk cId="371598909" sldId="278"/>
+            <ac:spMk id="51" creationId="{E82958B4-D0F1-621C-015E-C01803BC35FE}"/>
+          </ac:spMkLst>
+        </pc:spChg>
+        <pc:spChg chg="add del">
+          <ac:chgData name="Bryan Sun" userId="851caa7714272873" providerId="Windows Live" clId="Web-{00000000-0000-0000-0000-000000000000}" dt="2026-10-07T05:02:57.998" v="108"/>
+          <ac:spMkLst>
+            <pc:docMk/>
+            <pc:sldMk cId="371598909" sldId="278"/>
+            <ac:spMk id="53" creationId="{44E88E37-3ABA-958C-5D4A-CDA44DE5BB03}"/>
+          </ac:spMkLst>
+        </pc:spChg>
+        <pc:spChg chg="add del">
+          <ac:chgData name="Bryan Sun" userId="851caa7714272873" providerId="Windows Live" clId="Web-{00000000-0000-0000-0000-000000000000}" dt="2026-10-07T05:02:57.998" v="107"/>
+          <ac:spMkLst>
+            <pc:docMk/>
+            <pc:sldMk cId="371598909" sldId="278"/>
+            <ac:spMk id="55" creationId="{B6C5032C-60C1-A9C1-46CE-2462704A3C2F}"/>
+          </ac:spMkLst>
+        </pc:spChg>
+        <pc:spChg chg="add del">
+          <ac:chgData name="Bryan Sun" userId="851caa7714272873" providerId="Windows Live" clId="Web-{00000000-0000-0000-0000-000000000000}" dt="2026-10-07T05:02:57.998" v="106"/>
+          <ac:spMkLst>
+            <pc:docMk/>
+            <pc:sldMk cId="371598909" sldId="278"/>
+            <ac:spMk id="57" creationId="{60C2939A-FB02-803A-2977-D83ECA224C2B}"/>
+          </ac:spMkLst>
+        </pc:spChg>
+        <pc:spChg chg="add del">
+          <ac:chgData name="Bryan Sun" userId="851caa7714272873" providerId="Windows Live" clId="Web-{00000000-0000-0000-0000-000000000000}" dt="2026-10-07T05:02:57.998" v="105"/>
+          <ac:spMkLst>
+            <pc:docMk/>
+            <pc:sldMk cId="371598909" sldId="278"/>
+            <ac:spMk id="59" creationId="{0251F339-9C29-F983-9E36-5FFAC5FC917C}"/>
+          </ac:spMkLst>
+        </pc:spChg>
+        <pc:spChg chg="add del">
+          <ac:chgData name="Bryan Sun" userId="851caa7714272873" providerId="Windows Live" clId="Web-{00000000-0000-0000-0000-000000000000}" dt="2026-10-07T05:02:57.998" v="104"/>
+          <ac:spMkLst>
+            <pc:docMk/>
+            <pc:sldMk cId="371598909" sldId="278"/>
+            <ac:spMk id="61" creationId="{72E98325-134F-C604-C82B-5D4BA44C0E33}"/>
+          </ac:spMkLst>
+        </pc:spChg>
+        <pc:spChg chg="add del">
+          <ac:chgData name="Bryan Sun" userId="851caa7714272873" providerId="Windows Live" clId="Web-{00000000-0000-0000-0000-000000000000}" dt="2026-10-07T05:02:57.998" v="103"/>
+          <ac:spMkLst>
+            <pc:docMk/>
+            <pc:sldMk cId="371598909" sldId="278"/>
+            <ac:spMk id="63" creationId="{952A07A9-21F8-9D4B-EDEF-67EE3A56130D}"/>
+          </ac:spMkLst>
+        </pc:spChg>
+        <pc:spChg chg="add del">
+          <ac:chgData name="Bryan Sun" userId="851caa7714272873" providerId="Windows Live" clId="Web-{00000000-0000-0000-0000-000000000000}" dt="2026-10-07T05:02:57.998" v="102"/>
+          <ac:spMkLst>
+            <pc:docMk/>
+            <pc:sldMk cId="371598909" sldId="278"/>
+            <ac:spMk id="65" creationId="{0465EB5E-31D4-AFA6-7B79-056E0FD6CB5E}"/>
+          </ac:spMkLst>
+        </pc:spChg>
+        <pc:spChg chg="add del">
+          <ac:chgData name="Bryan Sun" userId="851caa7714272873" providerId="Windows Live" clId="Web-{00000000-0000-0000-0000-000000000000}" dt="2026-10-07T05:02:57.998" v="101"/>
+          <ac:spMkLst>
+            <pc:docMk/>
+            <pc:sldMk cId="371598909" sldId="278"/>
+            <ac:spMk id="67" creationId="{1256BE89-3712-00A4-26A0-82F148891C6B}"/>
+          </ac:spMkLst>
+        </pc:spChg>
+        <pc:spChg chg="add del">
+          <ac:chgData name="Bryan Sun" userId="851caa7714272873" providerId="Windows Live" clId="Web-{00000000-0000-0000-0000-000000000000}" dt="2026-10-07T05:02:57.998" v="100"/>
+          <ac:spMkLst>
+            <pc:docMk/>
+            <pc:sldMk cId="371598909" sldId="278"/>
+            <ac:spMk id="69" creationId="{3C4371E6-06F8-CC43-14E1-666997FBF46F}"/>
+          </ac:spMkLst>
+        </pc:spChg>
+        <pc:spChg chg="add del">
+          <ac:chgData name="Bryan Sun" userId="851caa7714272873" providerId="Windows Live" clId="Web-{00000000-0000-0000-0000-000000000000}" dt="2026-10-07T05:02:55.201" v="99"/>
+          <ac:spMkLst>
+            <pc:docMk/>
+            <pc:sldMk cId="371598909" sldId="278"/>
+            <ac:spMk id="71" creationId="{50E69439-4A27-4351-1CBD-D2C8B33464DF}"/>
+          </ac:spMkLst>
+        </pc:spChg>
+        <pc:spChg chg="add del">
+          <ac:chgData name="Bryan Sun" userId="851caa7714272873" providerId="Windows Live" clId="Web-{00000000-0000-0000-0000-000000000000}" dt="2026-10-07T05:02:55.201" v="98"/>
+          <ac:spMkLst>
+            <pc:docMk/>
+            <pc:sldMk cId="371598909" sldId="278"/>
+            <ac:spMk id="73" creationId="{89A49D5B-9A34-E028-8D56-92EC9EE97D2A}"/>
+          </ac:spMkLst>
+        </pc:spChg>
+        <pc:spChg chg="add del">
+          <ac:chgData name="Bryan Sun" userId="851caa7714272873" providerId="Windows Live" clId="Web-{00000000-0000-0000-0000-000000000000}" dt="2026-10-07T05:02:55.201" v="97"/>
+          <ac:spMkLst>
+            <pc:docMk/>
+            <pc:sldMk cId="371598909" sldId="278"/>
+            <ac:spMk id="75" creationId="{6C1F8AC9-68B1-0BDC-7439-86F222DA8F92}"/>
+          </ac:spMkLst>
+        </pc:spChg>
+        <pc:spChg chg="add del">
+          <ac:chgData name="Bryan Sun" userId="851caa7714272873" providerId="Windows Live" clId="Web-{00000000-0000-0000-0000-000000000000}" dt="2026-10-07T05:02:55.201" v="96"/>
+          <ac:spMkLst>
+            <pc:docMk/>
+            <pc:sldMk cId="371598909" sldId="278"/>
+            <ac:spMk id="77" creationId="{F6F998AC-FE2C-D2FF-5633-B430ABE6A3C9}"/>
+          </ac:spMkLst>
+        </pc:spChg>
+        <pc:spChg chg="add del">
+          <ac:chgData name="Bryan Sun" userId="851caa7714272873" providerId="Windows Live" clId="Web-{00000000-0000-0000-0000-000000000000}" dt="2026-10-07T05:02:55.201" v="95"/>
+          <ac:spMkLst>
+            <pc:docMk/>
+            <pc:sldMk cId="371598909" sldId="278"/>
+            <ac:spMk id="79" creationId="{0CD58514-ED15-E889-76B9-6307BFBFFF37}"/>
+          </ac:spMkLst>
+        </pc:spChg>
+        <pc:spChg chg="add del">
+          <ac:chgData name="Bryan Sun" userId="851caa7714272873" providerId="Windows Live" clId="Web-{00000000-0000-0000-0000-000000000000}" dt="2026-10-07T05:02:55.201" v="94"/>
+          <ac:spMkLst>
+            <pc:docMk/>
+            <pc:sldMk cId="371598909" sldId="278"/>
+            <ac:spMk id="81" creationId="{3E89A220-7C9A-D52A-A5E4-4B9470DDD598}"/>
+          </ac:spMkLst>
+        </pc:spChg>
+        <pc:spChg chg="add del">
+          <ac:chgData name="Bryan Sun" userId="851caa7714272873" providerId="Windows Live" clId="Web-{00000000-0000-0000-0000-000000000000}" dt="2026-10-07T05:02:55.201" v="93"/>
+          <ac:spMkLst>
+            <pc:docMk/>
+            <pc:sldMk cId="371598909" sldId="278"/>
+            <ac:spMk id="83" creationId="{D5041900-4441-3919-774A-E34043C02A6C}"/>
+          </ac:spMkLst>
+        </pc:spChg>
+        <pc:spChg chg="add del">
+          <ac:chgData name="Bryan Sun" userId="851caa7714272873" providerId="Windows Live" clId="Web-{00000000-0000-0000-0000-000000000000}" dt="2026-10-07T05:02:55.201" v="92"/>
+          <ac:spMkLst>
+            <pc:docMk/>
+            <pc:sldMk cId="371598909" sldId="278"/>
+            <ac:spMk id="85" creationId="{22B298AA-8B1E-48E1-4BDB-015FE81FA74C}"/>
+          </ac:spMkLst>
+        </pc:spChg>
+        <pc:spChg chg="add del">
+          <ac:chgData name="Bryan Sun" userId="851caa7714272873" providerId="Windows Live" clId="Web-{00000000-0000-0000-0000-000000000000}" dt="2026-10-07T05:02:55.201" v="91"/>
+          <ac:spMkLst>
+            <pc:docMk/>
+            <pc:sldMk cId="371598909" sldId="278"/>
+            <ac:spMk id="87" creationId="{0CAAA3C6-E984-D8B3-EBCD-AE8302A2A809}"/>
+          </ac:spMkLst>
+        </pc:spChg>
+        <pc:spChg chg="add del">
+          <ac:chgData name="Bryan Sun" userId="851caa7714272873" providerId="Windows Live" clId="Web-{00000000-0000-0000-0000-000000000000}" dt="2026-10-07T05:02:55.201" v="90"/>
+          <ac:spMkLst>
+            <pc:docMk/>
+            <pc:sldMk cId="371598909" sldId="278"/>
+            <ac:spMk id="89" creationId="{26F5A0E2-04AE-EF29-00B0-3936F37B184B}"/>
+          </ac:spMkLst>
+        </pc:spChg>
+        <pc:spChg chg="add del">
+          <ac:chgData name="Bryan Sun" userId="851caa7714272873" providerId="Windows Live" clId="Web-{00000000-0000-0000-0000-000000000000}" dt="2026-10-07T05:02:55.201" v="89"/>
+          <ac:spMkLst>
+            <pc:docMk/>
+            <pc:sldMk cId="371598909" sldId="278"/>
+            <ac:spMk id="91" creationId="{FFDC1418-4DC5-A7F1-CD3B-354FF6C9AA69}"/>
+          </ac:spMkLst>
+        </pc:spChg>
+        <pc:spChg chg="add del">
+          <ac:chgData name="Bryan Sun" userId="851caa7714272873" providerId="Windows Live" clId="Web-{00000000-0000-0000-0000-000000000000}" dt="2026-10-07T05:02:55.201" v="88"/>
+          <ac:spMkLst>
+            <pc:docMk/>
+            <pc:sldMk cId="371598909" sldId="278"/>
+            <ac:spMk id="93" creationId="{60D72C10-BAC0-CF5E-1C71-11410756B67E}"/>
+          </ac:spMkLst>
+        </pc:spChg>
+        <pc:spChg chg="add del">
+          <ac:chgData name="Bryan Sun" userId="851caa7714272873" providerId="Windows Live" clId="Web-{00000000-0000-0000-0000-000000000000}" dt="2026-10-07T05:02:55.201" v="87"/>
+          <ac:spMkLst>
+            <pc:docMk/>
+            <pc:sldMk cId="371598909" sldId="278"/>
+            <ac:spMk id="95" creationId="{607E1CC0-65FE-C42C-90E5-405E93866499}"/>
+          </ac:spMkLst>
+        </pc:spChg>
+        <pc:spChg chg="add del">
+          <ac:chgData name="Bryan Sun" userId="851caa7714272873" providerId="Windows Live" clId="Web-{00000000-0000-0000-0000-000000000000}" dt="2026-10-07T05:02:55.201" v="86"/>
+          <ac:spMkLst>
+            <pc:docMk/>
+            <pc:sldMk cId="371598909" sldId="278"/>
+            <ac:spMk id="97" creationId="{FC51566E-4192-0C87-F322-81FC9AC06518}"/>
+          </ac:spMkLst>
+        </pc:spChg>
+        <pc:spChg chg="add del">
+          <ac:chgData name="Bryan Sun" userId="851caa7714272873" providerId="Windows Live" clId="Web-{00000000-0000-0000-0000-000000000000}" dt="2026-10-07T05:02:55.201" v="85"/>
+          <ac:spMkLst>
+            <pc:docMk/>
+            <pc:sldMk cId="371598909" sldId="278"/>
+            <ac:spMk id="99" creationId="{0F648AE1-BC64-7E9E-339E-302E2EF8BA33}"/>
+          </ac:spMkLst>
+        </pc:spChg>
+        <pc:spChg chg="add del">
+          <ac:chgData name="Bryan Sun" userId="851caa7714272873" providerId="Windows Live" clId="Web-{00000000-0000-0000-0000-000000000000}" dt="2026-10-07T05:02:55.201" v="84"/>
+          <ac:spMkLst>
+            <pc:docMk/>
+            <pc:sldMk cId="371598909" sldId="278"/>
+            <ac:spMk id="101" creationId="{DC0A80F5-9CC9-330E-4C2A-1D0BC41E336D}"/>
+          </ac:spMkLst>
+        </pc:spChg>
+        <pc:spChg chg="add del">
+          <ac:chgData name="Bryan Sun" userId="851caa7714272873" providerId="Windows Live" clId="Web-{00000000-0000-0000-0000-000000000000}" dt="2026-10-07T05:02:55.201" v="83"/>
+          <ac:spMkLst>
+            <pc:docMk/>
+            <pc:sldMk cId="371598909" sldId="278"/>
+            <ac:spMk id="103" creationId="{B2F03304-2CF4-B6BC-68FA-070B13B9806F}"/>
+          </ac:spMkLst>
+        </pc:spChg>
+        <pc:spChg chg="add del">
+          <ac:chgData name="Bryan Sun" userId="851caa7714272873" providerId="Windows Live" clId="Web-{00000000-0000-0000-0000-000000000000}" dt="2026-10-07T05:02:55.201" v="82"/>
+          <ac:spMkLst>
+            <pc:docMk/>
+            <pc:sldMk cId="371598909" sldId="278"/>
+            <ac:spMk id="105" creationId="{33239614-9069-DAC7-4DC0-D5E058D80EDF}"/>
+          </ac:spMkLst>
+        </pc:spChg>
+        <pc:spChg chg="add del">
+          <ac:chgData name="Bryan Sun" userId="851caa7714272873" providerId="Windows Live" clId="Web-{00000000-0000-0000-0000-000000000000}" dt="2026-10-07T05:02:55.201" v="81"/>
+          <ac:spMkLst>
+            <pc:docMk/>
+            <pc:sldMk cId="371598909" sldId="278"/>
+            <ac:spMk id="107" creationId="{3909C49F-C342-E4CB-D94E-3EEBD8ABF542}"/>
+          </ac:spMkLst>
+        </pc:spChg>
+        <pc:spChg chg="add del">
+          <ac:chgData name="Bryan Sun" userId="851caa7714272873" providerId="Windows Live" clId="Web-{00000000-0000-0000-0000-000000000000}" dt="2026-10-07T05:02:55.201" v="80"/>
+          <ac:spMkLst>
+            <pc:docMk/>
+            <pc:sldMk cId="371598909" sldId="278"/>
+            <ac:spMk id="109" creationId="{F44163E8-ECBF-CAE0-1E89-6A5862ECD720}"/>
+          </ac:spMkLst>
+        </pc:spChg>
+        <pc:spChg chg="add del">
+          <ac:chgData name="Bryan Sun" userId="851caa7714272873" providerId="Windows Live" clId="Web-{00000000-0000-0000-0000-000000000000}" dt="2026-10-07T05:02:55.201" v="79"/>
+          <ac:spMkLst>
+            <pc:docMk/>
+            <pc:sldMk cId="371598909" sldId="278"/>
+            <ac:spMk id="111" creationId="{4B86643E-E29C-D3AD-1565-C4B211F97D75}"/>
+          </ac:spMkLst>
+        </pc:spChg>
+        <pc:spChg chg="add del">
+          <ac:chgData name="Bryan Sun" userId="851caa7714272873" providerId="Windows Live" clId="Web-{00000000-0000-0000-0000-000000000000}" dt="2026-10-07T05:02:55.201" v="78"/>
+          <ac:spMkLst>
+            <pc:docMk/>
+            <pc:sldMk cId="371598909" sldId="278"/>
+            <ac:spMk id="113" creationId="{D87BD5AA-F440-E386-9357-0643AC9642D4}"/>
+          </ac:spMkLst>
+        </pc:spChg>
+        <pc:spChg chg="add del">
+          <ac:chgData name="Bryan Sun" userId="851caa7714272873" providerId="Windows Live" clId="Web-{00000000-0000-0000-0000-000000000000}" dt="2026-10-07T05:02:55.201" v="77"/>
+          <ac:spMkLst>
+            <pc:docMk/>
+            <pc:sldMk cId="371598909" sldId="278"/>
+            <ac:spMk id="115" creationId="{63561E45-FE77-5E5E-0868-F7EBEDB4907F}"/>
+          </ac:spMkLst>
+        </pc:spChg>
+        <pc:spChg chg="add del">
+          <ac:chgData name="Bryan Sun" userId="851caa7714272873" providerId="Windows Live" clId="Web-{00000000-0000-0000-0000-000000000000}" dt="2026-10-07T05:02:55.201" v="76"/>
+          <ac:spMkLst>
+            <pc:docMk/>
+            <pc:sldMk cId="371598909" sldId="278"/>
+            <ac:spMk id="117" creationId="{D1160D12-45D7-8130-C558-C0B11DDC3D14}"/>
+          </ac:spMkLst>
+        </pc:spChg>
+        <pc:spChg chg="add del">
+          <ac:chgData name="Bryan Sun" userId="851caa7714272873" providerId="Windows Live" clId="Web-{00000000-0000-0000-0000-000000000000}" dt="2026-10-07T05:02:55.201" v="75"/>
+          <ac:spMkLst>
+            <pc:docMk/>
+            <pc:sldMk cId="371598909" sldId="278"/>
+            <ac:spMk id="119" creationId="{02A23E15-2053-C858-0451-3C70297A0D23}"/>
+          </ac:spMkLst>
+        </pc:spChg>
+        <pc:spChg chg="add del">
+          <ac:chgData name="Bryan Sun" userId="851caa7714272873" providerId="Windows Live" clId="Web-{00000000-0000-0000-0000-000000000000}" dt="2026-10-07T05:02:55.201" v="74"/>
+          <ac:spMkLst>
+            <pc:docMk/>
+            <pc:sldMk cId="371598909" sldId="278"/>
+            <ac:spMk id="121" creationId="{08403F5B-3E74-A7A9-8AE4-451DA89D2ED9}"/>
+          </ac:spMkLst>
+        </pc:spChg>
+        <pc:spChg chg="add del">
+          <ac:chgData name="Bryan Sun" userId="851caa7714272873" providerId="Windows Live" clId="Web-{00000000-0000-0000-0000-000000000000}" dt="2026-10-07T05:02:55.201" v="73"/>
+          <ac:spMkLst>
+            <pc:docMk/>
+            <pc:sldMk cId="371598909" sldId="278"/>
+            <ac:spMk id="123" creationId="{E24EFCB5-4F80-28A5-D9C1-F5FD823A5816}"/>
+          </ac:spMkLst>
+        </pc:spChg>
+        <pc:spChg chg="add del">
+          <ac:chgData name="Bryan Sun" userId="851caa7714272873" providerId="Windows Live" clId="Web-{00000000-0000-0000-0000-000000000000}" dt="2026-10-07T05:02:55.201" v="72"/>
+          <ac:spMkLst>
+            <pc:docMk/>
+            <pc:sldMk cId="371598909" sldId="278"/>
+            <ac:spMk id="125" creationId="{3294603D-BB40-FABF-37CA-CFA3C0DB8399}"/>
+          </ac:spMkLst>
+        </pc:spChg>
+        <pc:spChg chg="add del">
+          <ac:chgData name="Bryan Sun" userId="851caa7714272873" providerId="Windows Live" clId="Web-{00000000-0000-0000-0000-000000000000}" dt="2026-10-07T05:02:55.201" v="71"/>
+          <ac:spMkLst>
+            <pc:docMk/>
+            <pc:sldMk cId="371598909" sldId="278"/>
+            <ac:spMk id="127" creationId="{47C97F4D-385E-2680-43F6-436323F36F50}"/>
+          </ac:spMkLst>
+        </pc:spChg>
+        <pc:spChg chg="add del">
+          <ac:chgData name="Bryan Sun" userId="851caa7714272873" providerId="Windows Live" clId="Web-{00000000-0000-0000-0000-000000000000}" dt="2026-10-07T05:02:55.201" v="70"/>
+          <ac:spMkLst>
+            <pc:docMk/>
+            <pc:sldMk cId="371598909" sldId="278"/>
+            <ac:spMk id="129" creationId="{CA49CD8D-0735-56CB-1935-A2D15060A99B}"/>
+          </ac:spMkLst>
+        </pc:spChg>
+        <pc:spChg chg="add del">
+          <ac:chgData name="Bryan Sun" userId="851caa7714272873" providerId="Windows Live" clId="Web-{00000000-0000-0000-0000-000000000000}" dt="2026-10-07T05:02:55.201" v="69"/>
+          <ac:spMkLst>
+            <pc:docMk/>
+            <pc:sldMk cId="371598909" sldId="278"/>
+            <ac:spMk id="131" creationId="{3C6F24E6-5C87-6C57-A02E-7164931D0A55}"/>
+          </ac:spMkLst>
+        </pc:spChg>
+        <pc:spChg chg="add del">
+          <ac:chgData name="Bryan Sun" userId="851caa7714272873" providerId="Windows Live" clId="Web-{00000000-0000-0000-0000-000000000000}" dt="2026-10-07T05:02:55.201" v="68"/>
+          <ac:spMkLst>
+            <pc:docMk/>
+            <pc:sldMk cId="371598909" sldId="278"/>
+            <ac:spMk id="133" creationId="{5DB14AEF-75A1-AE85-E3C7-13F8CC31A5B2}"/>
+          </ac:spMkLst>
+        </pc:spChg>
+        <pc:spChg chg="add del">
+          <ac:chgData name="Bryan Sun" userId="851caa7714272873" providerId="Windows Live" clId="Web-{00000000-0000-0000-0000-000000000000}" dt="2026-10-07T05:02:55.201" v="67"/>
+          <ac:spMkLst>
+            <pc:docMk/>
+            <pc:sldMk cId="371598909" sldId="278"/>
+            <ac:spMk id="135" creationId="{13E9631C-7A27-807C-2450-CCD7004B5F2B}"/>
+          </ac:spMkLst>
+        </pc:spChg>
       </pc:sldChg>
     </pc:docChg>
   </pc:docChgLst>
@@ -3219,7 +3764,7 @@
         </p:nvGraphicFramePr>
         <p:xfrm>
           <a:off x="812800" y="1638300"/>
-          <a:ext cx="10566400" cy="914400"/>
+          <a:ext cx="10566400" cy="2551176"/>
         </p:xfrm>
         <a:graphic>
           <a:graphicData uri="http://schemas.openxmlformats.org/drawingml/2006/table">
@@ -4400,7 +4945,7 @@
         </p:nvGraphicFramePr>
         <p:xfrm>
           <a:off x="812800" y="1638300"/>
-          <a:ext cx="10566400" cy="914400"/>
+          <a:ext cx="10566400" cy="2935224"/>
         </p:xfrm>
         <a:graphic>
           <a:graphicData uri="http://schemas.openxmlformats.org/drawingml/2006/table">
@@ -9126,7 +9671,7 @@
         </p:nvGraphicFramePr>
         <p:xfrm>
           <a:off x="812800" y="1638300"/>
-          <a:ext cx="10566400" cy="2389632"/>
+          <a:ext cx="10566400" cy="2602992"/>
         </p:xfrm>
         <a:graphic>
           <a:graphicData uri="http://schemas.openxmlformats.org/drawingml/2006/table">
@@ -11879,1304 +12424,6 @@
       <p:graphicFrame>
         <p:nvGraphicFramePr>
           <p:cNvPr id="22" name="Table 0"/>
-          <p:cNvGraphicFramePr>
-            <a:graphicFrameLocks noGrp="1"/>
-          </p:cNvGraphicFramePr>
-          <p:nvPr>
-            <p:extLst>
-              <p:ext uri="{D42A27DB-BD31-4B8C-83A1-F6EECF244321}">
-                <p14:modId xmlns:p14="http://schemas.microsoft.com/office/powerpoint/2010/main" val="1579011935"/>
-              </p:ext>
-            </p:extLst>
-          </p:nvPr>
-        </p:nvGraphicFramePr>
-        <p:xfrm>
-          <a:off x="812800" y="1638300"/>
-          <a:ext cx="10566400" cy="3200400"/>
-        </p:xfrm>
-        <a:graphic>
-          <a:graphicData uri="http://schemas.openxmlformats.org/drawingml/2006/table">
-            <a:tbl>
-              <a:tblPr/>
-              <a:tblGrid>
-                <a:gridCol w="1584960">
-                  <a:extLst>
-                    <a:ext uri="{9D8B030D-6E8A-4147-A177-3AD203B41FA5}">
-                      <a16:colId xmlns:a16="http://schemas.microsoft.com/office/drawing/2014/main" val="20000"/>
-                    </a:ext>
-                  </a:extLst>
-                </a:gridCol>
-                <a:gridCol w="4226560">
-                  <a:extLst>
-                    <a:ext uri="{9D8B030D-6E8A-4147-A177-3AD203B41FA5}">
-                      <a16:colId xmlns:a16="http://schemas.microsoft.com/office/drawing/2014/main" val="20001"/>
-                    </a:ext>
-                  </a:extLst>
-                </a:gridCol>
-                <a:gridCol w="1796288">
-                  <a:extLst>
-                    <a:ext uri="{9D8B030D-6E8A-4147-A177-3AD203B41FA5}">
-                      <a16:colId xmlns:a16="http://schemas.microsoft.com/office/drawing/2014/main" val="20002"/>
-                    </a:ext>
-                  </a:extLst>
-                </a:gridCol>
-                <a:gridCol w="2958592">
-                  <a:extLst>
-                    <a:ext uri="{9D8B030D-6E8A-4147-A177-3AD203B41FA5}">
-                      <a16:colId xmlns:a16="http://schemas.microsoft.com/office/drawing/2014/main" val="20003"/>
-                    </a:ext>
-                  </a:extLst>
-                </a:gridCol>
-              </a:tblGrid>
-              <a:tr h="0">
-                <a:tc>
-                  <a:txBody>
-                    <a:bodyPr/>
-                    <a:lstStyle/>
-                    <a:p>
-                      <a:pPr marL="0" indent="0">
-                        <a:buNone/>
-                      </a:pPr>
-                      <a:r>
-                        <a:rPr lang="en-US" sz="1200" b="1" dirty="0">
-                          <a:solidFill>
-                            <a:srgbClr val="1F2328"/>
-                          </a:solidFill>
-                          <a:latin typeface="Mulish" pitchFamily="34" charset="0"/>
-                          <a:ea typeface="Mulish" pitchFamily="34" charset="-122"/>
-                          <a:cs typeface="Mulish" pitchFamily="34" charset="-120"/>
-                        </a:rPr>
-                        <a:t>Area</a:t>
-                      </a:r>
-                      <a:endParaRPr lang="en-US" sz="1200" dirty="0">
-                        <a:latin typeface="Mulish" charset="0"/>
-                        <a:ea typeface="Mulish" charset="0"/>
-                        <a:cs typeface="Mulish" charset="0"/>
-                      </a:endParaRPr>
-                    </a:p>
-                  </a:txBody>
-                  <a:tcPr marT="64008" marB="64008">
-                    <a:lnL w="0" cap="flat" cmpd="sng" algn="ctr">
-                      <a:noFill/>
-                    </a:lnL>
-                    <a:lnR w="0" cap="flat" cmpd="sng" algn="ctr">
-                      <a:noFill/>
-                    </a:lnR>
-                    <a:lnT w="0" cap="flat" cmpd="sng" algn="ctr">
-                      <a:noFill/>
-                    </a:lnT>
-                    <a:lnB w="19050" cap="flat" cmpd="sng" algn="ctr">
-                      <a:solidFill>
-                        <a:srgbClr val="1F2328"/>
-                      </a:solidFill>
-                      <a:prstDash val="solid"/>
-                      <a:round/>
-                      <a:headEnd type="none" w="med" len="med"/>
-                      <a:tailEnd type="none" w="med" len="med"/>
-                    </a:lnB>
-                    <a:solidFill>
-                      <a:srgbClr val="FFFFFF"/>
-                    </a:solidFill>
-                  </a:tcPr>
-                </a:tc>
-                <a:tc>
-                  <a:txBody>
-                    <a:bodyPr/>
-                    <a:lstStyle/>
-                    <a:p>
-                      <a:pPr marL="0" indent="0">
-                        <a:buNone/>
-                      </a:pPr>
-                      <a:r>
-                        <a:rPr lang="en-US" sz="1200" b="1" dirty="0">
-                          <a:solidFill>
-                            <a:srgbClr val="1F2328"/>
-                          </a:solidFill>
-                          <a:latin typeface="Mulish" pitchFamily="34" charset="0"/>
-                          <a:ea typeface="Mulish" pitchFamily="34" charset="-122"/>
-                          <a:cs typeface="Mulish" pitchFamily="34" charset="-120"/>
-                        </a:rPr>
-                        <a:t>Included (✓, ✓q, ✓p)</a:t>
-                      </a:r>
-                      <a:endParaRPr lang="en-US" sz="1200" dirty="0">
-                        <a:latin typeface="Mulish" charset="0"/>
-                        <a:ea typeface="Mulish" charset="0"/>
-                        <a:cs typeface="Mulish" charset="0"/>
-                      </a:endParaRPr>
-                    </a:p>
-                  </a:txBody>
-                  <a:tcPr marT="64008" marB="64008">
-                    <a:lnL w="0" cap="flat" cmpd="sng" algn="ctr">
-                      <a:noFill/>
-                    </a:lnL>
-                    <a:lnR w="0" cap="flat" cmpd="sng" algn="ctr">
-                      <a:noFill/>
-                    </a:lnR>
-                    <a:lnT w="0" cap="flat" cmpd="sng" algn="ctr">
-                      <a:noFill/>
-                    </a:lnT>
-                    <a:lnB w="19050" cap="flat" cmpd="sng" algn="ctr">
-                      <a:solidFill>
-                        <a:srgbClr val="1F2328"/>
-                      </a:solidFill>
-                      <a:prstDash val="solid"/>
-                      <a:round/>
-                      <a:headEnd type="none" w="med" len="med"/>
-                      <a:tailEnd type="none" w="med" len="med"/>
-                    </a:lnB>
-                    <a:solidFill>
-                      <a:srgbClr val="FFFFFF"/>
-                    </a:solidFill>
-                  </a:tcPr>
-                </a:tc>
-                <a:tc>
-                  <a:txBody>
-                    <a:bodyPr/>
-                    <a:lstStyle/>
-                    <a:p>
-                      <a:pPr marL="0" indent="0">
-                        <a:buNone/>
-                      </a:pPr>
-                      <a:r>
-                        <a:rPr lang="en-US" sz="1200" b="1" dirty="0">
-                          <a:solidFill>
-                            <a:srgbClr val="1F2328"/>
-                          </a:solidFill>
-                          <a:latin typeface="Mulish" pitchFamily="34" charset="0"/>
-                          <a:ea typeface="Mulish" pitchFamily="34" charset="-122"/>
-                          <a:cs typeface="Mulish" pitchFamily="34" charset="-120"/>
-                        </a:rPr>
-                        <a:t>Outside of focus (?)</a:t>
-                      </a:r>
-                      <a:endParaRPr lang="en-US" sz="1200" dirty="0">
-                        <a:latin typeface="Mulish" charset="0"/>
-                        <a:ea typeface="Mulish" charset="0"/>
-                        <a:cs typeface="Mulish" charset="0"/>
-                      </a:endParaRPr>
-                    </a:p>
-                  </a:txBody>
-                  <a:tcPr marT="64008" marB="64008">
-                    <a:lnL w="0" cap="flat" cmpd="sng" algn="ctr">
-                      <a:noFill/>
-                    </a:lnL>
-                    <a:lnR w="0" cap="flat" cmpd="sng" algn="ctr">
-                      <a:noFill/>
-                    </a:lnR>
-                    <a:lnT w="0" cap="flat" cmpd="sng" algn="ctr">
-                      <a:noFill/>
-                    </a:lnT>
-                    <a:lnB w="19050" cap="flat" cmpd="sng" algn="ctr">
-                      <a:solidFill>
-                        <a:srgbClr val="1F2328"/>
-                      </a:solidFill>
-                      <a:prstDash val="solid"/>
-                      <a:round/>
-                      <a:headEnd type="none" w="med" len="med"/>
-                      <a:tailEnd type="none" w="med" len="med"/>
-                    </a:lnB>
-                    <a:solidFill>
-                      <a:srgbClr val="FFFFFF"/>
-                    </a:solidFill>
-                  </a:tcPr>
-                </a:tc>
-                <a:tc>
-                  <a:txBody>
-                    <a:bodyPr/>
-                    <a:lstStyle/>
-                    <a:p>
-                      <a:pPr marL="0" indent="0">
-                        <a:buNone/>
-                      </a:pPr>
-                      <a:r>
-                        <a:rPr lang="en-US" sz="1200" b="1" dirty="0">
-                          <a:solidFill>
-                            <a:srgbClr val="1F2328"/>
-                          </a:solidFill>
-                          <a:latin typeface="Mulish" pitchFamily="34" charset="0"/>
-                          <a:ea typeface="Mulish" pitchFamily="34" charset="-122"/>
-                          <a:cs typeface="Mulish" pitchFamily="34" charset="-120"/>
-                        </a:rPr>
-                        <a:t>Excluded (✗)</a:t>
-                      </a:r>
-                      <a:endParaRPr lang="en-US" sz="1200" dirty="0">
-                        <a:latin typeface="Mulish" charset="0"/>
-                        <a:ea typeface="Mulish" charset="0"/>
-                        <a:cs typeface="Mulish" charset="0"/>
-                      </a:endParaRPr>
-                    </a:p>
-                  </a:txBody>
-                  <a:tcPr marT="64008" marB="64008">
-                    <a:lnL w="0" cap="flat" cmpd="sng" algn="ctr">
-                      <a:noFill/>
-                    </a:lnL>
-                    <a:lnR w="0" cap="flat" cmpd="sng" algn="ctr">
-                      <a:noFill/>
-                    </a:lnR>
-                    <a:lnT w="0" cap="flat" cmpd="sng" algn="ctr">
-                      <a:noFill/>
-                    </a:lnT>
-                    <a:lnB w="19050" cap="flat" cmpd="sng" algn="ctr">
-                      <a:solidFill>
-                        <a:srgbClr val="1F2328"/>
-                      </a:solidFill>
-                      <a:prstDash val="solid"/>
-                      <a:round/>
-                      <a:headEnd type="none" w="med" len="med"/>
-                      <a:tailEnd type="none" w="med" len="med"/>
-                    </a:lnB>
-                    <a:solidFill>
-                      <a:srgbClr val="FFFFFF"/>
-                    </a:solidFill>
-                  </a:tcPr>
-                </a:tc>
-                <a:extLst>
-                  <a:ext uri="{0D108BD9-81ED-4DB2-BD59-A6C34878D82A}">
-                    <a16:rowId xmlns:a16="http://schemas.microsoft.com/office/drawing/2014/main" val="10000"/>
-                  </a:ext>
-                </a:extLst>
-              </a:tr>
-              <a:tr h="0">
-                <a:tc>
-                  <a:txBody>
-                    <a:bodyPr/>
-                    <a:lstStyle/>
-                    <a:p>
-                      <a:pPr marL="0" indent="0">
-                        <a:buNone/>
-                      </a:pPr>
-                      <a:r>
-                        <a:rPr lang="en-US" sz="1200" dirty="0">
-                          <a:solidFill>
-                            <a:srgbClr val="1F2328"/>
-                          </a:solidFill>
-                          <a:latin typeface="Mulish" pitchFamily="34" charset="0"/>
-                          <a:ea typeface="Mulish" pitchFamily="34" charset="-122"/>
-                          <a:cs typeface="Mulish" pitchFamily="34" charset="-120"/>
-                        </a:rPr>
-                        <a:t>Arithmetic and geometry</a:t>
-                      </a:r>
-                      <a:endParaRPr lang="en-US" sz="1200" dirty="0">
-                        <a:latin typeface="Mulish" charset="0"/>
-                        <a:ea typeface="Mulish" charset="0"/>
-                        <a:cs typeface="Mulish" charset="0"/>
-                      </a:endParaRPr>
-                    </a:p>
-                  </a:txBody>
-                  <a:tcPr marT="64008" marB="64008">
-                    <a:lnL w="0" cap="flat" cmpd="sng" algn="ctr">
-                      <a:noFill/>
-                    </a:lnL>
-                    <a:lnR w="0" cap="flat" cmpd="sng" algn="ctr">
-                      <a:noFill/>
-                    </a:lnR>
-                    <a:lnT w="19050" cap="flat" cmpd="sng" algn="ctr">
-                      <a:solidFill>
-                        <a:srgbClr val="1F2328"/>
-                      </a:solidFill>
-                      <a:prstDash val="solid"/>
-                      <a:round/>
-                      <a:headEnd type="none" w="med" len="med"/>
-                      <a:tailEnd type="none" w="med" len="med"/>
-                    </a:lnT>
-                    <a:lnB w="9525" cap="flat" cmpd="sng" algn="ctr">
-                      <a:solidFill>
-                        <a:srgbClr val="DADDE0"/>
-                      </a:solidFill>
-                      <a:prstDash val="solid"/>
-                      <a:round/>
-                      <a:headEnd type="none" w="med" len="med"/>
-                      <a:tailEnd type="none" w="med" len="med"/>
-                    </a:lnB>
-                    <a:solidFill>
-                      <a:srgbClr val="FFFFFF"/>
-                    </a:solidFill>
-                  </a:tcPr>
-                </a:tc>
-                <a:tc>
-                  <a:txBody>
-                    <a:bodyPr/>
-                    <a:lstStyle/>
-                    <a:p>
-                      <a:pPr marL="0" indent="0">
-                        <a:buNone/>
-                      </a:pPr>
-                      <a:r>
-                        <a:rPr lang="en-US" sz="1200" dirty="0">
-                          <a:solidFill>
-                            <a:srgbClr val="1F2328"/>
-                          </a:solidFill>
-                          <a:latin typeface="Mulish" pitchFamily="34" charset="0"/>
-                          <a:ea typeface="Mulish" pitchFamily="34" charset="-122"/>
-                          <a:cs typeface="Mulish" pitchFamily="34" charset="-120"/>
-                        </a:rPr>
-                        <a:t>Integers, parity, divisibility; modular addition, subtraction, multiplication; fractions; points, vectors, polygons in the plane; primes; Euclidean distance; Pythagoras</a:t>
-                      </a:r>
-                      <a:endParaRPr lang="en-US" sz="1200" dirty="0">
-                        <a:latin typeface="Mulish" charset="0"/>
-                        <a:ea typeface="Mulish" charset="0"/>
-                        <a:cs typeface="Mulish" charset="0"/>
-                      </a:endParaRPr>
-                    </a:p>
-                  </a:txBody>
-                  <a:tcPr marT="64008" marB="64008">
-                    <a:lnL w="0" cap="flat" cmpd="sng" algn="ctr">
-                      <a:noFill/>
-                    </a:lnL>
-                    <a:lnR w="0" cap="flat" cmpd="sng" algn="ctr">
-                      <a:noFill/>
-                    </a:lnR>
-                    <a:lnT w="19050" cap="flat" cmpd="sng" algn="ctr">
-                      <a:solidFill>
-                        <a:srgbClr val="1F2328"/>
-                      </a:solidFill>
-                      <a:prstDash val="solid"/>
-                      <a:round/>
-                      <a:headEnd type="none" w="med" len="med"/>
-                      <a:tailEnd type="none" w="med" len="med"/>
-                    </a:lnT>
-                    <a:lnB w="9525" cap="flat" cmpd="sng" algn="ctr">
-                      <a:solidFill>
-                        <a:srgbClr val="DADDE0"/>
-                      </a:solidFill>
-                      <a:prstDash val="solid"/>
-                      <a:round/>
-                      <a:headEnd type="none" w="med" len="med"/>
-                      <a:tailEnd type="none" w="med" len="med"/>
-                    </a:lnB>
-                    <a:solidFill>
-                      <a:srgbClr val="FFFFFF"/>
-                    </a:solidFill>
-                  </a:tcPr>
-                </a:tc>
-                <a:tc>
-                  <a:txBody>
-                    <a:bodyPr/>
-                    <a:lstStyle/>
-                    <a:p>
-                      <a:pPr marL="0" indent="0">
-                        <a:buNone/>
-                      </a:pPr>
-                      <a:r>
-                        <a:rPr lang="en-US" sz="1200" dirty="0">
-                          <a:solidFill>
-                            <a:srgbClr val="1F2328"/>
-                          </a:solidFill>
-                          <a:latin typeface="Mulish" pitchFamily="34" charset="0"/>
-                          <a:ea typeface="Mulish" pitchFamily="34" charset="-122"/>
-                          <a:cs typeface="Mulish" pitchFamily="34" charset="-120"/>
-                        </a:rPr>
-                        <a:t>—</a:t>
-                      </a:r>
-                      <a:endParaRPr lang="en-US" sz="1200" dirty="0">
-                        <a:latin typeface="Mulish" charset="0"/>
-                        <a:ea typeface="Mulish" charset="0"/>
-                        <a:cs typeface="Mulish" charset="0"/>
-                      </a:endParaRPr>
-                    </a:p>
-                  </a:txBody>
-                  <a:tcPr marT="64008" marB="64008">
-                    <a:lnL w="0" cap="flat" cmpd="sng" algn="ctr">
-                      <a:noFill/>
-                    </a:lnL>
-                    <a:lnR w="0" cap="flat" cmpd="sng" algn="ctr">
-                      <a:noFill/>
-                    </a:lnR>
-                    <a:lnT w="19050" cap="flat" cmpd="sng" algn="ctr">
-                      <a:solidFill>
-                        <a:srgbClr val="1F2328"/>
-                      </a:solidFill>
-                      <a:prstDash val="solid"/>
-                      <a:round/>
-                      <a:headEnd type="none" w="med" len="med"/>
-                      <a:tailEnd type="none" w="med" len="med"/>
-                    </a:lnT>
-                    <a:lnB w="9525" cap="flat" cmpd="sng" algn="ctr">
-                      <a:solidFill>
-                        <a:srgbClr val="DADDE0"/>
-                      </a:solidFill>
-                      <a:prstDash val="solid"/>
-                      <a:round/>
-                      <a:headEnd type="none" w="med" len="med"/>
-                      <a:tailEnd type="none" w="med" len="med"/>
-                    </a:lnB>
-                    <a:solidFill>
-                      <a:srgbClr val="FFFFFF"/>
-                    </a:solidFill>
-                  </a:tcPr>
-                </a:tc>
-                <a:tc>
-                  <a:txBody>
-                    <a:bodyPr/>
-                    <a:lstStyle/>
-                    <a:p>
-                      <a:pPr marL="0" indent="0">
-                        <a:buNone/>
-                      </a:pPr>
-                      <a:r>
-                        <a:rPr lang="en-US" sz="1200" dirty="0">
-                          <a:solidFill>
-                            <a:srgbClr val="1F2328"/>
-                          </a:solidFill>
-                          <a:latin typeface="Mulish" pitchFamily="34" charset="0"/>
-                          <a:ea typeface="Mulish" pitchFamily="34" charset="-122"/>
-                          <a:cs typeface="Mulish" pitchFamily="34" charset="-120"/>
-                        </a:rPr>
-                        <a:t>3D geometry; floating-point precision work; modular division and inverses; complex numbers; conics; trigonometry</a:t>
-                      </a:r>
-                      <a:endParaRPr lang="en-US" sz="1200" dirty="0">
-                        <a:latin typeface="Mulish" charset="0"/>
-                        <a:ea typeface="Mulish" charset="0"/>
-                        <a:cs typeface="Mulish" charset="0"/>
-                      </a:endParaRPr>
-                    </a:p>
-                  </a:txBody>
-                  <a:tcPr marT="64008" marB="64008">
-                    <a:lnL w="0" cap="flat" cmpd="sng" algn="ctr">
-                      <a:noFill/>
-                    </a:lnL>
-                    <a:lnR w="0" cap="flat" cmpd="sng" algn="ctr">
-                      <a:noFill/>
-                    </a:lnR>
-                    <a:lnT w="19050" cap="flat" cmpd="sng" algn="ctr">
-                      <a:solidFill>
-                        <a:srgbClr val="1F2328"/>
-                      </a:solidFill>
-                      <a:prstDash val="solid"/>
-                      <a:round/>
-                      <a:headEnd type="none" w="med" len="med"/>
-                      <a:tailEnd type="none" w="med" len="med"/>
-                    </a:lnT>
-                    <a:lnB w="9525" cap="flat" cmpd="sng" algn="ctr">
-                      <a:solidFill>
-                        <a:srgbClr val="DADDE0"/>
-                      </a:solidFill>
-                      <a:prstDash val="solid"/>
-                      <a:round/>
-                      <a:headEnd type="none" w="med" len="med"/>
-                      <a:tailEnd type="none" w="med" len="med"/>
-                    </a:lnB>
-                    <a:solidFill>
-                      <a:srgbClr val="FFFFFF"/>
-                    </a:solidFill>
-                  </a:tcPr>
-                </a:tc>
-                <a:extLst>
-                  <a:ext uri="{0D108BD9-81ED-4DB2-BD59-A6C34878D82A}">
-                    <a16:rowId xmlns:a16="http://schemas.microsoft.com/office/drawing/2014/main" val="10001"/>
-                  </a:ext>
-                </a:extLst>
-              </a:tr>
-              <a:tr h="0">
-                <a:tc>
-                  <a:txBody>
-                    <a:bodyPr/>
-                    <a:lstStyle/>
-                    <a:p>
-                      <a:pPr marL="0" indent="0">
-                        <a:buNone/>
-                      </a:pPr>
-                      <a:r>
-                        <a:rPr lang="en-US" sz="1200" dirty="0">
-                          <a:solidFill>
-                            <a:srgbClr val="1F2328"/>
-                          </a:solidFill>
-                          <a:latin typeface="Mulish" pitchFamily="34" charset="0"/>
-                          <a:ea typeface="Mulish" pitchFamily="34" charset="-122"/>
-                          <a:cs typeface="Mulish" pitchFamily="34" charset="-120"/>
-                        </a:rPr>
-                        <a:t>Discrete maths</a:t>
-                      </a:r>
-                      <a:endParaRPr lang="en-US" sz="1200" dirty="0">
-                        <a:latin typeface="Mulish" charset="0"/>
-                        <a:ea typeface="Mulish" charset="0"/>
-                        <a:cs typeface="Mulish" charset="0"/>
-                      </a:endParaRPr>
-                    </a:p>
-                  </a:txBody>
-                  <a:tcPr marT="64008" marB="64008">
-                    <a:lnL w="0" cap="flat" cmpd="sng" algn="ctr">
-                      <a:noFill/>
-                    </a:lnL>
-                    <a:lnR w="0" cap="flat" cmpd="sng" algn="ctr">
-                      <a:noFill/>
-                    </a:lnR>
-                    <a:lnT w="9525" cap="flat" cmpd="sng" algn="ctr">
-                      <a:solidFill>
-                        <a:srgbClr val="DADDE0"/>
-                      </a:solidFill>
-                      <a:prstDash val="solid"/>
-                      <a:round/>
-                      <a:headEnd type="none" w="med" len="med"/>
-                      <a:tailEnd type="none" w="med" len="med"/>
-                    </a:lnT>
-                    <a:lnB w="9525" cap="flat" cmpd="sng" algn="ctr">
-                      <a:solidFill>
-                        <a:srgbClr val="DADDE0"/>
-                      </a:solidFill>
-                      <a:prstDash val="solid"/>
-                      <a:round/>
-                      <a:headEnd type="none" w="med" len="med"/>
-                      <a:tailEnd type="none" w="med" len="med"/>
-                    </a:lnB>
-                    <a:solidFill>
-                      <a:srgbClr val="FFFFFF"/>
-                    </a:solidFill>
-                  </a:tcPr>
-                </a:tc>
-                <a:tc>
-                  <a:txBody>
-                    <a:bodyPr/>
-                    <a:lstStyle/>
-                    <a:p>
-                      <a:pPr marL="0" indent="0">
-                        <a:buNone/>
-                      </a:pPr>
-                      <a:r>
-                        <a:rPr lang="en-US" sz="1200" dirty="0">
-                          <a:solidFill>
-                            <a:srgbClr val="1F2328"/>
-                          </a:solidFill>
-                          <a:latin typeface="Mulish" pitchFamily="34" charset="0"/>
-                          <a:ea typeface="Mulish" pitchFamily="34" charset="-122"/>
-                          <a:cs typeface="Mulish" pitchFamily="34" charset="-120"/>
-                        </a:rPr>
-                        <a:t>Functions, relations, sets; basic logic; proofs including induction; counting (permutations, combinations, binomial coefficients, inclusion-exclusion, pigeonhole); graph and tree vocabulary; centroids; planar graphs</a:t>
-                      </a:r>
-                      <a:endParaRPr lang="en-US" sz="1200" dirty="0">
-                        <a:latin typeface="Mulish" charset="0"/>
-                        <a:ea typeface="Mulish" charset="0"/>
-                        <a:cs typeface="Mulish" charset="0"/>
-                      </a:endParaRPr>
-                    </a:p>
-                  </a:txBody>
-                  <a:tcPr marT="64008" marB="64008">
-                    <a:lnL w="0" cap="flat" cmpd="sng" algn="ctr">
-                      <a:noFill/>
-                    </a:lnL>
-                    <a:lnR w="0" cap="flat" cmpd="sng" algn="ctr">
-                      <a:noFill/>
-                    </a:lnR>
-                    <a:lnT w="9525" cap="flat" cmpd="sng" algn="ctr">
-                      <a:solidFill>
-                        <a:srgbClr val="DADDE0"/>
-                      </a:solidFill>
-                      <a:prstDash val="solid"/>
-                      <a:round/>
-                      <a:headEnd type="none" w="med" len="med"/>
-                      <a:tailEnd type="none" w="med" len="med"/>
-                    </a:lnT>
-                    <a:lnB w="9525" cap="flat" cmpd="sng" algn="ctr">
-                      <a:solidFill>
-                        <a:srgbClr val="DADDE0"/>
-                      </a:solidFill>
-                      <a:prstDash val="solid"/>
-                      <a:round/>
-                      <a:headEnd type="none" w="med" len="med"/>
-                      <a:tailEnd type="none" w="med" len="med"/>
-                    </a:lnB>
-                    <a:solidFill>
-                      <a:srgbClr val="FFFFFF"/>
-                    </a:solidFill>
-                  </a:tcPr>
-                </a:tc>
-                <a:tc>
-                  <a:txBody>
-                    <a:bodyPr/>
-                    <a:lstStyle/>
-                    <a:p>
-                      <a:pPr marL="0" indent="0">
-                        <a:buNone/>
-                      </a:pPr>
-                      <a:r>
-                        <a:rPr lang="en-US" sz="1200" dirty="0">
-                          <a:solidFill>
-                            <a:srgbClr val="1F2328"/>
-                          </a:solidFill>
-                          <a:latin typeface="Mulish" pitchFamily="34" charset="0"/>
-                          <a:ea typeface="Mulish" pitchFamily="34" charset="-122"/>
-                          <a:cs typeface="Mulish" pitchFamily="34" charset="-120"/>
-                        </a:rPr>
-                        <a:t>Discrete probability (finite cases)</a:t>
-                      </a:r>
-                      <a:endParaRPr lang="en-US" sz="1200" dirty="0">
-                        <a:latin typeface="Mulish" charset="0"/>
-                        <a:ea typeface="Mulish" charset="0"/>
-                        <a:cs typeface="Mulish" charset="0"/>
-                      </a:endParaRPr>
-                    </a:p>
-                  </a:txBody>
-                  <a:tcPr marT="64008" marB="64008">
-                    <a:lnL w="0" cap="flat" cmpd="sng" algn="ctr">
-                      <a:noFill/>
-                    </a:lnL>
-                    <a:lnR w="0" cap="flat" cmpd="sng" algn="ctr">
-                      <a:noFill/>
-                    </a:lnR>
-                    <a:lnT w="9525" cap="flat" cmpd="sng" algn="ctr">
-                      <a:solidFill>
-                        <a:srgbClr val="DADDE0"/>
-                      </a:solidFill>
-                      <a:prstDash val="solid"/>
-                      <a:round/>
-                      <a:headEnd type="none" w="med" len="med"/>
-                      <a:tailEnd type="none" w="med" len="med"/>
-                    </a:lnT>
-                    <a:lnB w="9525" cap="flat" cmpd="sng" algn="ctr">
-                      <a:solidFill>
-                        <a:srgbClr val="DADDE0"/>
-                      </a:solidFill>
-                      <a:prstDash val="solid"/>
-                      <a:round/>
-                      <a:headEnd type="none" w="med" len="med"/>
-                      <a:tailEnd type="none" w="med" len="med"/>
-                    </a:lnB>
-                    <a:solidFill>
-                      <a:srgbClr val="FFFFFF"/>
-                    </a:solidFill>
-                  </a:tcPr>
-                </a:tc>
-                <a:tc>
-                  <a:txBody>
-                    <a:bodyPr/>
-                    <a:lstStyle/>
-                    <a:p>
-                      <a:pPr marL="0" indent="0">
-                        <a:buNone/>
-                      </a:pPr>
-                      <a:r>
-                        <a:rPr lang="en-US" sz="1200" dirty="0">
-                          <a:solidFill>
-                            <a:srgbClr val="1F2328"/>
-                          </a:solidFill>
-                          <a:latin typeface="Mulish" pitchFamily="34" charset="0"/>
-                          <a:ea typeface="Mulish" pitchFamily="34" charset="-122"/>
-                          <a:cs typeface="Mulish" pitchFamily="34" charset="-120"/>
-                        </a:rPr>
-                        <a:t>Solving recurrences; Burnside lemma; hypergraphs; treewidth; linear algebra and FFT; calculus; statistics</a:t>
-                      </a:r>
-                      <a:endParaRPr lang="en-US" sz="1200" dirty="0">
-                        <a:latin typeface="Mulish" charset="0"/>
-                        <a:ea typeface="Mulish" charset="0"/>
-                        <a:cs typeface="Mulish" charset="0"/>
-                      </a:endParaRPr>
-                    </a:p>
-                  </a:txBody>
-                  <a:tcPr marT="64008" marB="64008">
-                    <a:lnL w="0" cap="flat" cmpd="sng" algn="ctr">
-                      <a:noFill/>
-                    </a:lnL>
-                    <a:lnR w="0" cap="flat" cmpd="sng" algn="ctr">
-                      <a:noFill/>
-                    </a:lnR>
-                    <a:lnT w="9525" cap="flat" cmpd="sng" algn="ctr">
-                      <a:solidFill>
-                        <a:srgbClr val="DADDE0"/>
-                      </a:solidFill>
-                      <a:prstDash val="solid"/>
-                      <a:round/>
-                      <a:headEnd type="none" w="med" len="med"/>
-                      <a:tailEnd type="none" w="med" len="med"/>
-                    </a:lnT>
-                    <a:lnB w="9525" cap="flat" cmpd="sng" algn="ctr">
-                      <a:solidFill>
-                        <a:srgbClr val="DADDE0"/>
-                      </a:solidFill>
-                      <a:prstDash val="solid"/>
-                      <a:round/>
-                      <a:headEnd type="none" w="med" len="med"/>
-                      <a:tailEnd type="none" w="med" len="med"/>
-                    </a:lnB>
-                    <a:solidFill>
-                      <a:srgbClr val="FFFFFF"/>
-                    </a:solidFill>
-                  </a:tcPr>
-                </a:tc>
-                <a:extLst>
-                  <a:ext uri="{0D108BD9-81ED-4DB2-BD59-A6C34878D82A}">
-                    <a16:rowId xmlns:a16="http://schemas.microsoft.com/office/drawing/2014/main" val="10002"/>
-                  </a:ext>
-                </a:extLst>
-              </a:tr>
-              <a:tr h="0">
-                <a:tc>
-                  <a:txBody>
-                    <a:bodyPr/>
-                    <a:lstStyle/>
-                    <a:p>
-                      <a:pPr marL="0" indent="0">
-                        <a:buNone/>
-                      </a:pPr>
-                      <a:r>
-                        <a:rPr lang="en-US" sz="1200" dirty="0">
-                          <a:solidFill>
-                            <a:srgbClr val="1F2328"/>
-                          </a:solidFill>
-                          <a:latin typeface="Mulish" pitchFamily="34" charset="0"/>
-                          <a:ea typeface="Mulish" pitchFamily="34" charset="-122"/>
-                          <a:cs typeface="Mulish" pitchFamily="34" charset="-120"/>
-                        </a:rPr>
-                        <a:t>Programming</a:t>
-                      </a:r>
-                      <a:endParaRPr lang="en-US" sz="1200" dirty="0">
-                        <a:latin typeface="Mulish" charset="0"/>
-                        <a:ea typeface="Mulish" charset="0"/>
-                        <a:cs typeface="Mulish" charset="0"/>
-                      </a:endParaRPr>
-                    </a:p>
-                  </a:txBody>
-                  <a:tcPr marT="64008" marB="64008">
-                    <a:lnL w="0" cap="flat" cmpd="sng" algn="ctr">
-                      <a:noFill/>
-                    </a:lnL>
-                    <a:lnR w="0" cap="flat" cmpd="sng" algn="ctr">
-                      <a:noFill/>
-                    </a:lnR>
-                    <a:lnT w="9525" cap="flat" cmpd="sng" algn="ctr">
-                      <a:solidFill>
-                        <a:srgbClr val="DADDE0"/>
-                      </a:solidFill>
-                      <a:prstDash val="solid"/>
-                      <a:round/>
-                      <a:headEnd type="none" w="med" len="med"/>
-                      <a:tailEnd type="none" w="med" len="med"/>
-                    </a:lnT>
-                    <a:lnB w="9525" cap="flat" cmpd="sng" algn="ctr">
-                      <a:solidFill>
-                        <a:srgbClr val="DADDE0"/>
-                      </a:solidFill>
-                      <a:prstDash val="solid"/>
-                      <a:round/>
-                      <a:headEnd type="none" w="med" len="med"/>
-                      <a:tailEnd type="none" w="med" len="med"/>
-                    </a:lnB>
-                    <a:solidFill>
-                      <a:srgbClr val="FFFFFF"/>
-                    </a:solidFill>
-                  </a:tcPr>
-                </a:tc>
-                <a:tc>
-                  <a:txBody>
-                    <a:bodyPr/>
-                    <a:lstStyle/>
-                    <a:p>
-                      <a:pPr marL="0" indent="0">
-                        <a:buNone/>
-                      </a:pPr>
-                      <a:r>
-                        <a:rPr lang="en-US" sz="1200" dirty="0">
-                          <a:solidFill>
-                            <a:srgbClr val="1F2328"/>
-                          </a:solidFill>
-                          <a:latin typeface="Mulish" pitchFamily="34" charset="0"/>
-                          <a:ea typeface="Mulish" pitchFamily="34" charset="-122"/>
-                          <a:cs typeface="Mulish" pitchFamily="34" charset="-120"/>
-                        </a:rPr>
-                        <a:t>Language basics, arrays, strings, recursion, divide and conquer, backtracking, linked structures, pointers, simple floating point; interactive tasks</a:t>
-                      </a:r>
-                      <a:endParaRPr lang="en-US" sz="1200" dirty="0">
-                        <a:latin typeface="Mulish" charset="0"/>
-                        <a:ea typeface="Mulish" charset="0"/>
-                        <a:cs typeface="Mulish" charset="0"/>
-                      </a:endParaRPr>
-                    </a:p>
-                  </a:txBody>
-                  <a:tcPr marT="64008" marB="64008">
-                    <a:lnL w="0" cap="flat" cmpd="sng" algn="ctr">
-                      <a:noFill/>
-                    </a:lnL>
-                    <a:lnR w="0" cap="flat" cmpd="sng" algn="ctr">
-                      <a:noFill/>
-                    </a:lnR>
-                    <a:lnT w="9525" cap="flat" cmpd="sng" algn="ctr">
-                      <a:solidFill>
-                        <a:srgbClr val="DADDE0"/>
-                      </a:solidFill>
-                      <a:prstDash val="solid"/>
-                      <a:round/>
-                      <a:headEnd type="none" w="med" len="med"/>
-                      <a:tailEnd type="none" w="med" len="med"/>
-                    </a:lnT>
-                    <a:lnB w="9525" cap="flat" cmpd="sng" algn="ctr">
-                      <a:solidFill>
-                        <a:srgbClr val="DADDE0"/>
-                      </a:solidFill>
-                      <a:prstDash val="solid"/>
-                      <a:round/>
-                      <a:headEnd type="none" w="med" len="med"/>
-                      <a:tailEnd type="none" w="med" len="med"/>
-                    </a:lnB>
-                    <a:solidFill>
-                      <a:srgbClr val="FFFFFF"/>
-                    </a:solidFill>
-                  </a:tcPr>
-                </a:tc>
-                <a:tc>
-                  <a:txBody>
-                    <a:bodyPr/>
-                    <a:lstStyle/>
-                    <a:p>
-                      <a:pPr marL="0" indent="0">
-                        <a:buNone/>
-                      </a:pPr>
-                      <a:r>
-                        <a:rPr lang="en-US" sz="1200" dirty="0">
-                          <a:solidFill>
-                            <a:srgbClr val="1F2328"/>
-                          </a:solidFill>
-                          <a:latin typeface="Mulish" pitchFamily="34" charset="0"/>
-                          <a:ea typeface="Mulish" pitchFamily="34" charset="-122"/>
-                          <a:cs typeface="Mulish" pitchFamily="34" charset="-120"/>
-                        </a:rPr>
-                        <a:t>Memory representation; heap allocation; exact fractions</a:t>
-                      </a:r>
-                      <a:endParaRPr lang="en-US" sz="1200" dirty="0">
-                        <a:latin typeface="Mulish" charset="0"/>
-                        <a:ea typeface="Mulish" charset="0"/>
-                        <a:cs typeface="Mulish" charset="0"/>
-                      </a:endParaRPr>
-                    </a:p>
-                  </a:txBody>
-                  <a:tcPr marT="64008" marB="64008">
-                    <a:lnL w="0" cap="flat" cmpd="sng" algn="ctr">
-                      <a:noFill/>
-                    </a:lnL>
-                    <a:lnR w="0" cap="flat" cmpd="sng" algn="ctr">
-                      <a:noFill/>
-                    </a:lnR>
-                    <a:lnT w="9525" cap="flat" cmpd="sng" algn="ctr">
-                      <a:solidFill>
-                        <a:srgbClr val="DADDE0"/>
-                      </a:solidFill>
-                      <a:prstDash val="solid"/>
-                      <a:round/>
-                      <a:headEnd type="none" w="med" len="med"/>
-                      <a:tailEnd type="none" w="med" len="med"/>
-                    </a:lnT>
-                    <a:lnB w="9525" cap="flat" cmpd="sng" algn="ctr">
-                      <a:solidFill>
-                        <a:srgbClr val="DADDE0"/>
-                      </a:solidFill>
-                      <a:prstDash val="solid"/>
-                      <a:round/>
-                      <a:headEnd type="none" w="med" len="med"/>
-                      <a:tailEnd type="none" w="med" len="med"/>
-                    </a:lnB>
-                    <a:solidFill>
-                      <a:srgbClr val="FFFFFF"/>
-                    </a:solidFill>
-                  </a:tcPr>
-                </a:tc>
-                <a:tc>
-                  <a:txBody>
-                    <a:bodyPr/>
-                    <a:lstStyle/>
-                    <a:p>
-                      <a:pPr marL="0" indent="0">
-                        <a:buNone/>
-                      </a:pPr>
-                      <a:r>
-                        <a:rPr lang="en-US" sz="1200" dirty="0">
-                          <a:solidFill>
-                            <a:srgbClr val="1F2328"/>
-                          </a:solidFill>
-                          <a:latin typeface="Mulish" pitchFamily="34" charset="0"/>
-                          <a:ea typeface="Mulish" pitchFamily="34" charset="-122"/>
-                          <a:cs typeface="Mulish" pitchFamily="34" charset="-120"/>
-                        </a:rPr>
-                        <a:t>Non-trivial floating-point calculations</a:t>
-                      </a:r>
-                      <a:endParaRPr lang="en-US" sz="1200" dirty="0">
-                        <a:latin typeface="Mulish" charset="0"/>
-                        <a:ea typeface="Mulish" charset="0"/>
-                        <a:cs typeface="Mulish" charset="0"/>
-                      </a:endParaRPr>
-                    </a:p>
-                  </a:txBody>
-                  <a:tcPr marT="64008" marB="64008">
-                    <a:lnL w="0" cap="flat" cmpd="sng" algn="ctr">
-                      <a:noFill/>
-                    </a:lnL>
-                    <a:lnR w="0" cap="flat" cmpd="sng" algn="ctr">
-                      <a:noFill/>
-                    </a:lnR>
-                    <a:lnT w="9525" cap="flat" cmpd="sng" algn="ctr">
-                      <a:solidFill>
-                        <a:srgbClr val="DADDE0"/>
-                      </a:solidFill>
-                      <a:prstDash val="solid"/>
-                      <a:round/>
-                      <a:headEnd type="none" w="med" len="med"/>
-                      <a:tailEnd type="none" w="med" len="med"/>
-                    </a:lnT>
-                    <a:lnB w="9525" cap="flat" cmpd="sng" algn="ctr">
-                      <a:solidFill>
-                        <a:srgbClr val="DADDE0"/>
-                      </a:solidFill>
-                      <a:prstDash val="solid"/>
-                      <a:round/>
-                      <a:headEnd type="none" w="med" len="med"/>
-                      <a:tailEnd type="none" w="med" len="med"/>
-                    </a:lnB>
-                    <a:solidFill>
-                      <a:srgbClr val="FFFFFF"/>
-                    </a:solidFill>
-                  </a:tcPr>
-                </a:tc>
-                <a:extLst>
-                  <a:ext uri="{0D108BD9-81ED-4DB2-BD59-A6C34878D82A}">
-                    <a16:rowId xmlns:a16="http://schemas.microsoft.com/office/drawing/2014/main" val="10003"/>
-                  </a:ext>
-                </a:extLst>
-              </a:tr>
-              <a:tr h="0">
-                <a:tc>
-                  <a:txBody>
-                    <a:bodyPr/>
-                    <a:lstStyle/>
-                    <a:p>
-                      <a:pPr marL="0" indent="0">
-                        <a:buNone/>
-                      </a:pPr>
-                      <a:r>
-                        <a:rPr lang="en-US" sz="1200" dirty="0">
-                          <a:solidFill>
-                            <a:srgbClr val="1F2328"/>
-                          </a:solidFill>
-                          <a:latin typeface="Mulish" pitchFamily="34" charset="0"/>
-                          <a:ea typeface="Mulish" pitchFamily="34" charset="-122"/>
-                          <a:cs typeface="Mulish" pitchFamily="34" charset="-120"/>
-                        </a:rPr>
-                        <a:t>Analysis and strategies</a:t>
-                      </a:r>
-                      <a:endParaRPr lang="en-US" sz="1200" dirty="0">
-                        <a:latin typeface="Mulish" charset="0"/>
-                        <a:ea typeface="Mulish" charset="0"/>
-                        <a:cs typeface="Mulish" charset="0"/>
-                      </a:endParaRPr>
-                    </a:p>
-                  </a:txBody>
-                  <a:tcPr marT="64008" marB="64008">
-                    <a:lnL w="0" cap="flat" cmpd="sng" algn="ctr">
-                      <a:noFill/>
-                    </a:lnL>
-                    <a:lnR w="0" cap="flat" cmpd="sng" algn="ctr">
-                      <a:noFill/>
-                    </a:lnR>
-                    <a:lnT w="9525" cap="flat" cmpd="sng" algn="ctr">
-                      <a:solidFill>
-                        <a:srgbClr val="DADDE0"/>
-                      </a:solidFill>
-                      <a:prstDash val="solid"/>
-                      <a:round/>
-                      <a:headEnd type="none" w="med" len="med"/>
-                      <a:tailEnd type="none" w="med" len="med"/>
-                    </a:lnT>
-                    <a:lnB w="9525" cap="flat" cmpd="sng" algn="ctr">
-                      <a:solidFill>
-                        <a:srgbClr val="DADDE0"/>
-                      </a:solidFill>
-                      <a:prstDash val="solid"/>
-                      <a:round/>
-                      <a:headEnd type="none" w="med" len="med"/>
-                      <a:tailEnd type="none" w="med" len="med"/>
-                    </a:lnB>
-                    <a:solidFill>
-                      <a:srgbClr val="FFFFFF"/>
-                    </a:solidFill>
-                  </a:tcPr>
-                </a:tc>
-                <a:tc>
-                  <a:txBody>
-                    <a:bodyPr/>
-                    <a:lstStyle/>
-                    <a:p>
-                      <a:pPr marL="0" indent="0">
-                        <a:buNone/>
-                      </a:pPr>
-                      <a:r>
-                        <a:rPr lang="en-US" sz="1200" dirty="0">
-                          <a:solidFill>
-                            <a:srgbClr val="1F2328"/>
-                          </a:solidFill>
-                          <a:latin typeface="Mulish" pitchFamily="34" charset="0"/>
-                          <a:ea typeface="Mulish" pitchFamily="34" charset="-122"/>
-                          <a:cs typeface="Mulish" pitchFamily="34" charset="-120"/>
-                        </a:rPr>
-                        <a:t>Big O; amortized analysis; brute force; greedy; divide and conquer; branch and bound; dynamic programming</a:t>
-                      </a:r>
-                      <a:endParaRPr lang="en-US" sz="1200" dirty="0">
-                        <a:latin typeface="Mulish" charset="0"/>
-                        <a:ea typeface="Mulish" charset="0"/>
-                        <a:cs typeface="Mulish" charset="0"/>
-                      </a:endParaRPr>
-                    </a:p>
-                  </a:txBody>
-                  <a:tcPr marT="64008" marB="64008">
-                    <a:lnL w="0" cap="flat" cmpd="sng" algn="ctr">
-                      <a:noFill/>
-                    </a:lnL>
-                    <a:lnR w="0" cap="flat" cmpd="sng" algn="ctr">
-                      <a:noFill/>
-                    </a:lnR>
-                    <a:lnT w="9525" cap="flat" cmpd="sng" algn="ctr">
-                      <a:solidFill>
-                        <a:srgbClr val="DADDE0"/>
-                      </a:solidFill>
-                      <a:prstDash val="solid"/>
-                      <a:round/>
-                      <a:headEnd type="none" w="med" len="med"/>
-                      <a:tailEnd type="none" w="med" len="med"/>
-                    </a:lnT>
-                    <a:lnB w="9525" cap="flat" cmpd="sng" algn="ctr">
-                      <a:solidFill>
-                        <a:srgbClr val="DADDE0"/>
-                      </a:solidFill>
-                      <a:prstDash val="solid"/>
-                      <a:round/>
-                      <a:headEnd type="none" w="med" len="med"/>
-                      <a:tailEnd type="none" w="med" len="med"/>
-                    </a:lnB>
-                    <a:solidFill>
-                      <a:srgbClr val="FFFFFF"/>
-                    </a:solidFill>
-                  </a:tcPr>
-                </a:tc>
-                <a:tc>
-                  <a:txBody>
-                    <a:bodyPr/>
-                    <a:lstStyle/>
-                    <a:p>
-                      <a:pPr marL="0" indent="0">
-                        <a:buNone/>
-                      </a:pPr>
-                      <a:r>
-                        <a:rPr lang="en-US" sz="1200" dirty="0">
-                          <a:solidFill>
-                            <a:srgbClr val="1F2328"/>
-                          </a:solidFill>
-                          <a:latin typeface="Mulish" pitchFamily="34" charset="0"/>
-                          <a:ea typeface="Mulish" pitchFamily="34" charset="-122"/>
-                          <a:cs typeface="Mulish" pitchFamily="34" charset="-120"/>
-                        </a:rPr>
-                        <a:t>Heuristics; randomized and approximation algorithms</a:t>
-                      </a:r>
-                      <a:endParaRPr lang="en-US" sz="1200" dirty="0">
-                        <a:latin typeface="Mulish" charset="0"/>
-                        <a:ea typeface="Mulish" charset="0"/>
-                        <a:cs typeface="Mulish" charset="0"/>
-                      </a:endParaRPr>
-                    </a:p>
-                  </a:txBody>
-                  <a:tcPr marT="64008" marB="64008">
-                    <a:lnL w="0" cap="flat" cmpd="sng" algn="ctr">
-                      <a:noFill/>
-                    </a:lnL>
-                    <a:lnR w="0" cap="flat" cmpd="sng" algn="ctr">
-                      <a:noFill/>
-                    </a:lnR>
-                    <a:lnT w="9525" cap="flat" cmpd="sng" algn="ctr">
-                      <a:solidFill>
-                        <a:srgbClr val="DADDE0"/>
-                      </a:solidFill>
-                      <a:prstDash val="solid"/>
-                      <a:round/>
-                      <a:headEnd type="none" w="med" len="med"/>
-                      <a:tailEnd type="none" w="med" len="med"/>
-                    </a:lnT>
-                    <a:lnB w="9525" cap="flat" cmpd="sng" algn="ctr">
-                      <a:solidFill>
-                        <a:srgbClr val="DADDE0"/>
-                      </a:solidFill>
-                      <a:prstDash val="solid"/>
-                      <a:round/>
-                      <a:headEnd type="none" w="med" len="med"/>
-                      <a:tailEnd type="none" w="med" len="med"/>
-                    </a:lnB>
-                    <a:solidFill>
-                      <a:srgbClr val="FFFFFF"/>
-                    </a:solidFill>
-                  </a:tcPr>
-                </a:tc>
-                <a:tc>
-                  <a:txBody>
-                    <a:bodyPr/>
-                    <a:lstStyle/>
-                    <a:p>
-                      <a:pPr marL="0" indent="0">
-                        <a:buNone/>
-                      </a:pPr>
-                      <a:r>
-                        <a:rPr lang="en-US" sz="1200" dirty="0">
-                          <a:solidFill>
-                            <a:srgbClr val="1F2328"/>
-                          </a:solidFill>
-                          <a:latin typeface="Mulish" pitchFamily="34" charset="0"/>
-                          <a:ea typeface="Mulish" pitchFamily="34" charset="-122"/>
-                          <a:cs typeface="Mulish" pitchFamily="34" charset="-120"/>
-                        </a:rPr>
-                        <a:t>Average-case analysis; recurrence-based analysis; clustering; numerical optimization</a:t>
-                      </a:r>
-                      <a:endParaRPr lang="en-US" sz="1200" dirty="0">
-                        <a:latin typeface="Mulish" charset="0"/>
-                        <a:ea typeface="Mulish" charset="0"/>
-                        <a:cs typeface="Mulish" charset="0"/>
-                      </a:endParaRPr>
-                    </a:p>
-                  </a:txBody>
-                  <a:tcPr marT="64008" marB="64008">
-                    <a:lnL w="0" cap="flat" cmpd="sng" algn="ctr">
-                      <a:noFill/>
-                    </a:lnL>
-                    <a:lnR w="0" cap="flat" cmpd="sng" algn="ctr">
-                      <a:noFill/>
-                    </a:lnR>
-                    <a:lnT w="9525" cap="flat" cmpd="sng" algn="ctr">
-                      <a:solidFill>
-                        <a:srgbClr val="DADDE0"/>
-                      </a:solidFill>
-                      <a:prstDash val="solid"/>
-                      <a:round/>
-                      <a:headEnd type="none" w="med" len="med"/>
-                      <a:tailEnd type="none" w="med" len="med"/>
-                    </a:lnT>
-                    <a:lnB w="9525" cap="flat" cmpd="sng" algn="ctr">
-                      <a:solidFill>
-                        <a:srgbClr val="DADDE0"/>
-                      </a:solidFill>
-                      <a:prstDash val="solid"/>
-                      <a:round/>
-                      <a:headEnd type="none" w="med" len="med"/>
-                      <a:tailEnd type="none" w="med" len="med"/>
-                    </a:lnB>
-                    <a:solidFill>
-                      <a:srgbClr val="FFFFFF"/>
-                    </a:solidFill>
-                  </a:tcPr>
-                </a:tc>
-                <a:extLst>
-                  <a:ext uri="{0D108BD9-81ED-4DB2-BD59-A6C34878D82A}">
-                    <a16:rowId xmlns:a16="http://schemas.microsoft.com/office/drawing/2014/main" val="10004"/>
-                  </a:ext>
-                </a:extLst>
-              </a:tr>
-            </a:tbl>
-          </a:graphicData>
-        </a:graphic>
-      </p:graphicFrame>
-    </p:spTree>
-  </p:cSld>
-  <p:clrMapOvr>
-    <a:masterClrMapping/>
-  </p:clrMapOvr>
-</p:sld>
-</file>
-
-<file path=ppt/slides/slide21.xml><?xml version="1.0" encoding="utf-8"?>
-<p:sld xmlns:a="http://schemas.openxmlformats.org/drawingml/2006/main" xmlns:r="http://schemas.openxmlformats.org/officeDocument/2006/relationships" xmlns:p="http://schemas.openxmlformats.org/presentationml/2006/main">
-  <p:cSld name="Slide 22">
-    <p:spTree>
-      <p:nvGrpSpPr>
-        <p:cNvPr id="1" name=""/>
-        <p:cNvGrpSpPr/>
-        <p:nvPr/>
-      </p:nvGrpSpPr>
-      <p:grpSpPr>
-        <a:xfrm>
-          <a:off x="0" y="0"/>
-          <a:ext cx="0" cy="0"/>
-          <a:chOff x="0" y="0"/>
-          <a:chExt cx="0" cy="0"/>
-        </a:xfrm>
-      </p:grpSpPr>
-      <p:sp>
-        <p:nvSpPr>
-          <p:cNvPr id="2" name="Text 1"/>
-          <p:cNvSpPr>
-            <a:spLocks noGrp="1"/>
-          </p:cNvSpPr>
-          <p:nvPr>
-            <p:ph type="body" idx="101" hasCustomPrompt="1"/>
-          </p:nvPr>
-        </p:nvSpPr>
-        <p:spPr>
-          <a:xfrm>
-            <a:off x="812800" y="609600"/>
-            <a:ext cx="10566400" cy="279400"/>
-          </a:xfrm>
-          <a:prstGeom prst="rect">
-            <a:avLst/>
-          </a:prstGeom>
-          <a:noFill/>
-          <a:ln/>
-        </p:spPr>
-        <p:txBody>
-          <a:bodyPr wrap="square" lIns="0" tIns="0" rIns="0" bIns="0" rtlCol="0" anchor="t"/>
-          <a:lstStyle/>
-          <a:p>
-            <a:pPr marL="0" indent="0">
-              <a:buNone/>
-            </a:pPr>
-            <a:r>
-              <a:rPr lang="en-US" sz="1200" b="1" kern="0" spc="200" dirty="0">
-                <a:solidFill>
-                  <a:srgbClr val="287673"/>
-                </a:solidFill>
-                <a:latin typeface="Mulish" pitchFamily="34" charset="0"/>
-                <a:ea typeface="Mulish" pitchFamily="34" charset="-122"/>
-                <a:cs typeface="Mulish" pitchFamily="34" charset="-120"/>
-              </a:rPr>
-              <a:t>ADDENDUM · IOI SYLLABUS 2025 · 3 OF 3</a:t>
-            </a:r>
-            <a:endParaRPr lang="en-US" sz="1200" dirty="0"/>
-          </a:p>
-        </p:txBody>
-      </p:sp>
-      <p:sp>
-        <p:nvSpPr>
-          <p:cNvPr id="3" name="Text 1"/>
-          <p:cNvSpPr>
-            <a:spLocks noGrp="1"/>
-          </p:cNvSpPr>
-          <p:nvPr>
-            <p:ph type="title" idx="102" hasCustomPrompt="1"/>
-          </p:nvPr>
-        </p:nvSpPr>
-        <p:spPr>
-          <a:xfrm>
-            <a:off x="812800" y="952500"/>
-            <a:ext cx="10566400" cy="482600"/>
-          </a:xfrm>
-          <a:prstGeom prst="rect">
-            <a:avLst/>
-          </a:prstGeom>
-          <a:noFill/>
-          <a:ln/>
-        </p:spPr>
-        <p:txBody>
-          <a:bodyPr wrap="square" lIns="0" tIns="0" rIns="0" bIns="0" rtlCol="0" anchor="t"/>
-          <a:lstStyle/>
-          <a:p>
-            <a:pPr marL="0" indent="0" algn="l">
-              <a:buNone/>
-            </a:pPr>
-            <a:r>
-              <a:rPr lang="en-US" sz="2600" b="1" kern="0" spc="200" dirty="0">
-                <a:solidFill>
-                  <a:srgbClr val="1F2328"/>
-                </a:solidFill>
-                <a:latin typeface="Jost" pitchFamily="34" charset="0"/>
-                <a:ea typeface="Jost" pitchFamily="34" charset="-122"/>
-                <a:cs typeface="Jost" pitchFamily="34" charset="-120"/>
-              </a:rPr>
-              <a:t>ALGORITHMS AND DATA STRUCTURES</a:t>
-            </a:r>
-            <a:endParaRPr lang="en-US" sz="2600" dirty="0"/>
-          </a:p>
-        </p:txBody>
-      </p:sp>
-      <p:graphicFrame>
-        <p:nvGraphicFramePr>
-          <p:cNvPr id="23" name="Table 0"/>
           <p:cNvGraphicFramePr>
             <a:graphicFrameLocks noGrp="1"/>
           </p:cNvGraphicFramePr>
@@ -13451,6 +12698,1304 @@
                           <a:ea typeface="Mulish" pitchFamily="34" charset="-122"/>
                           <a:cs typeface="Mulish" pitchFamily="34" charset="-120"/>
                         </a:rPr>
+                        <a:t>Arithmetic and geometry</a:t>
+                      </a:r>
+                      <a:endParaRPr lang="en-US" sz="1200" dirty="0">
+                        <a:latin typeface="Mulish" charset="0"/>
+                        <a:ea typeface="Mulish" charset="0"/>
+                        <a:cs typeface="Mulish" charset="0"/>
+                      </a:endParaRPr>
+                    </a:p>
+                  </a:txBody>
+                  <a:tcPr marT="64008" marB="64008">
+                    <a:lnL w="0" cap="flat" cmpd="sng" algn="ctr">
+                      <a:noFill/>
+                    </a:lnL>
+                    <a:lnR w="0" cap="flat" cmpd="sng" algn="ctr">
+                      <a:noFill/>
+                    </a:lnR>
+                    <a:lnT w="19050" cap="flat" cmpd="sng" algn="ctr">
+                      <a:solidFill>
+                        <a:srgbClr val="1F2328"/>
+                      </a:solidFill>
+                      <a:prstDash val="solid"/>
+                      <a:round/>
+                      <a:headEnd type="none" w="med" len="med"/>
+                      <a:tailEnd type="none" w="med" len="med"/>
+                    </a:lnT>
+                    <a:lnB w="9525" cap="flat" cmpd="sng" algn="ctr">
+                      <a:solidFill>
+                        <a:srgbClr val="DADDE0"/>
+                      </a:solidFill>
+                      <a:prstDash val="solid"/>
+                      <a:round/>
+                      <a:headEnd type="none" w="med" len="med"/>
+                      <a:tailEnd type="none" w="med" len="med"/>
+                    </a:lnB>
+                    <a:solidFill>
+                      <a:srgbClr val="FFFFFF"/>
+                    </a:solidFill>
+                  </a:tcPr>
+                </a:tc>
+                <a:tc>
+                  <a:txBody>
+                    <a:bodyPr/>
+                    <a:lstStyle/>
+                    <a:p>
+                      <a:pPr marL="0" indent="0">
+                        <a:buNone/>
+                      </a:pPr>
+                      <a:r>
+                        <a:rPr lang="en-US" sz="1200" dirty="0">
+                          <a:solidFill>
+                            <a:srgbClr val="1F2328"/>
+                          </a:solidFill>
+                          <a:latin typeface="Mulish" pitchFamily="34" charset="0"/>
+                          <a:ea typeface="Mulish" pitchFamily="34" charset="-122"/>
+                          <a:cs typeface="Mulish" pitchFamily="34" charset="-120"/>
+                        </a:rPr>
+                        <a:t>Integers, parity, divisibility; modular addition, subtraction, multiplication; fractions; points, vectors, polygons in the plane; primes; Euclidean distance; Pythagoras</a:t>
+                      </a:r>
+                      <a:endParaRPr lang="en-US" sz="1200" dirty="0">
+                        <a:latin typeface="Mulish" charset="0"/>
+                        <a:ea typeface="Mulish" charset="0"/>
+                        <a:cs typeface="Mulish" charset="0"/>
+                      </a:endParaRPr>
+                    </a:p>
+                  </a:txBody>
+                  <a:tcPr marT="64008" marB="64008">
+                    <a:lnL w="0" cap="flat" cmpd="sng" algn="ctr">
+                      <a:noFill/>
+                    </a:lnL>
+                    <a:lnR w="0" cap="flat" cmpd="sng" algn="ctr">
+                      <a:noFill/>
+                    </a:lnR>
+                    <a:lnT w="19050" cap="flat" cmpd="sng" algn="ctr">
+                      <a:solidFill>
+                        <a:srgbClr val="1F2328"/>
+                      </a:solidFill>
+                      <a:prstDash val="solid"/>
+                      <a:round/>
+                      <a:headEnd type="none" w="med" len="med"/>
+                      <a:tailEnd type="none" w="med" len="med"/>
+                    </a:lnT>
+                    <a:lnB w="9525" cap="flat" cmpd="sng" algn="ctr">
+                      <a:solidFill>
+                        <a:srgbClr val="DADDE0"/>
+                      </a:solidFill>
+                      <a:prstDash val="solid"/>
+                      <a:round/>
+                      <a:headEnd type="none" w="med" len="med"/>
+                      <a:tailEnd type="none" w="med" len="med"/>
+                    </a:lnB>
+                    <a:solidFill>
+                      <a:srgbClr val="FFFFFF"/>
+                    </a:solidFill>
+                  </a:tcPr>
+                </a:tc>
+                <a:tc>
+                  <a:txBody>
+                    <a:bodyPr/>
+                    <a:lstStyle/>
+                    <a:p>
+                      <a:pPr marL="0" indent="0">
+                        <a:buNone/>
+                      </a:pPr>
+                      <a:r>
+                        <a:rPr lang="en-US" sz="1200" dirty="0">
+                          <a:solidFill>
+                            <a:srgbClr val="1F2328"/>
+                          </a:solidFill>
+                          <a:latin typeface="Mulish" pitchFamily="34" charset="0"/>
+                          <a:ea typeface="Mulish" pitchFamily="34" charset="-122"/>
+                          <a:cs typeface="Mulish" pitchFamily="34" charset="-120"/>
+                        </a:rPr>
+                        <a:t>—</a:t>
+                      </a:r>
+                      <a:endParaRPr lang="en-US" sz="1200" dirty="0">
+                        <a:latin typeface="Mulish" charset="0"/>
+                        <a:ea typeface="Mulish" charset="0"/>
+                        <a:cs typeface="Mulish" charset="0"/>
+                      </a:endParaRPr>
+                    </a:p>
+                  </a:txBody>
+                  <a:tcPr marT="64008" marB="64008">
+                    <a:lnL w="0" cap="flat" cmpd="sng" algn="ctr">
+                      <a:noFill/>
+                    </a:lnL>
+                    <a:lnR w="0" cap="flat" cmpd="sng" algn="ctr">
+                      <a:noFill/>
+                    </a:lnR>
+                    <a:lnT w="19050" cap="flat" cmpd="sng" algn="ctr">
+                      <a:solidFill>
+                        <a:srgbClr val="1F2328"/>
+                      </a:solidFill>
+                      <a:prstDash val="solid"/>
+                      <a:round/>
+                      <a:headEnd type="none" w="med" len="med"/>
+                      <a:tailEnd type="none" w="med" len="med"/>
+                    </a:lnT>
+                    <a:lnB w="9525" cap="flat" cmpd="sng" algn="ctr">
+                      <a:solidFill>
+                        <a:srgbClr val="DADDE0"/>
+                      </a:solidFill>
+                      <a:prstDash val="solid"/>
+                      <a:round/>
+                      <a:headEnd type="none" w="med" len="med"/>
+                      <a:tailEnd type="none" w="med" len="med"/>
+                    </a:lnB>
+                    <a:solidFill>
+                      <a:srgbClr val="FFFFFF"/>
+                    </a:solidFill>
+                  </a:tcPr>
+                </a:tc>
+                <a:tc>
+                  <a:txBody>
+                    <a:bodyPr/>
+                    <a:lstStyle/>
+                    <a:p>
+                      <a:pPr marL="0" indent="0">
+                        <a:buNone/>
+                      </a:pPr>
+                      <a:r>
+                        <a:rPr lang="en-US" sz="1200" dirty="0">
+                          <a:solidFill>
+                            <a:srgbClr val="1F2328"/>
+                          </a:solidFill>
+                          <a:latin typeface="Mulish" pitchFamily="34" charset="0"/>
+                          <a:ea typeface="Mulish" pitchFamily="34" charset="-122"/>
+                          <a:cs typeface="Mulish" pitchFamily="34" charset="-120"/>
+                        </a:rPr>
+                        <a:t>3D geometry; floating-point precision work; modular division and inverses; complex numbers; conics; trigonometry</a:t>
+                      </a:r>
+                      <a:endParaRPr lang="en-US" sz="1200" dirty="0">
+                        <a:latin typeface="Mulish" charset="0"/>
+                        <a:ea typeface="Mulish" charset="0"/>
+                        <a:cs typeface="Mulish" charset="0"/>
+                      </a:endParaRPr>
+                    </a:p>
+                  </a:txBody>
+                  <a:tcPr marT="64008" marB="64008">
+                    <a:lnL w="0" cap="flat" cmpd="sng" algn="ctr">
+                      <a:noFill/>
+                    </a:lnL>
+                    <a:lnR w="0" cap="flat" cmpd="sng" algn="ctr">
+                      <a:noFill/>
+                    </a:lnR>
+                    <a:lnT w="19050" cap="flat" cmpd="sng" algn="ctr">
+                      <a:solidFill>
+                        <a:srgbClr val="1F2328"/>
+                      </a:solidFill>
+                      <a:prstDash val="solid"/>
+                      <a:round/>
+                      <a:headEnd type="none" w="med" len="med"/>
+                      <a:tailEnd type="none" w="med" len="med"/>
+                    </a:lnT>
+                    <a:lnB w="9525" cap="flat" cmpd="sng" algn="ctr">
+                      <a:solidFill>
+                        <a:srgbClr val="DADDE0"/>
+                      </a:solidFill>
+                      <a:prstDash val="solid"/>
+                      <a:round/>
+                      <a:headEnd type="none" w="med" len="med"/>
+                      <a:tailEnd type="none" w="med" len="med"/>
+                    </a:lnB>
+                    <a:solidFill>
+                      <a:srgbClr val="FFFFFF"/>
+                    </a:solidFill>
+                  </a:tcPr>
+                </a:tc>
+                <a:extLst>
+                  <a:ext uri="{0D108BD9-81ED-4DB2-BD59-A6C34878D82A}">
+                    <a16:rowId xmlns:a16="http://schemas.microsoft.com/office/drawing/2014/main" val="10001"/>
+                  </a:ext>
+                </a:extLst>
+              </a:tr>
+              <a:tr h="0">
+                <a:tc>
+                  <a:txBody>
+                    <a:bodyPr/>
+                    <a:lstStyle/>
+                    <a:p>
+                      <a:pPr marL="0" indent="0">
+                        <a:buNone/>
+                      </a:pPr>
+                      <a:r>
+                        <a:rPr lang="en-US" sz="1200" dirty="0">
+                          <a:solidFill>
+                            <a:srgbClr val="1F2328"/>
+                          </a:solidFill>
+                          <a:latin typeface="Mulish" pitchFamily="34" charset="0"/>
+                          <a:ea typeface="Mulish" pitchFamily="34" charset="-122"/>
+                          <a:cs typeface="Mulish" pitchFamily="34" charset="-120"/>
+                        </a:rPr>
+                        <a:t>Discrete maths</a:t>
+                      </a:r>
+                      <a:endParaRPr lang="en-US" sz="1200" dirty="0">
+                        <a:latin typeface="Mulish" charset="0"/>
+                        <a:ea typeface="Mulish" charset="0"/>
+                        <a:cs typeface="Mulish" charset="0"/>
+                      </a:endParaRPr>
+                    </a:p>
+                  </a:txBody>
+                  <a:tcPr marT="64008" marB="64008">
+                    <a:lnL w="0" cap="flat" cmpd="sng" algn="ctr">
+                      <a:noFill/>
+                    </a:lnL>
+                    <a:lnR w="0" cap="flat" cmpd="sng" algn="ctr">
+                      <a:noFill/>
+                    </a:lnR>
+                    <a:lnT w="9525" cap="flat" cmpd="sng" algn="ctr">
+                      <a:solidFill>
+                        <a:srgbClr val="DADDE0"/>
+                      </a:solidFill>
+                      <a:prstDash val="solid"/>
+                      <a:round/>
+                      <a:headEnd type="none" w="med" len="med"/>
+                      <a:tailEnd type="none" w="med" len="med"/>
+                    </a:lnT>
+                    <a:lnB w="9525" cap="flat" cmpd="sng" algn="ctr">
+                      <a:solidFill>
+                        <a:srgbClr val="DADDE0"/>
+                      </a:solidFill>
+                      <a:prstDash val="solid"/>
+                      <a:round/>
+                      <a:headEnd type="none" w="med" len="med"/>
+                      <a:tailEnd type="none" w="med" len="med"/>
+                    </a:lnB>
+                    <a:solidFill>
+                      <a:srgbClr val="FFFFFF"/>
+                    </a:solidFill>
+                  </a:tcPr>
+                </a:tc>
+                <a:tc>
+                  <a:txBody>
+                    <a:bodyPr/>
+                    <a:lstStyle/>
+                    <a:p>
+                      <a:pPr marL="0" indent="0">
+                        <a:buNone/>
+                      </a:pPr>
+                      <a:r>
+                        <a:rPr lang="en-US" sz="1200" dirty="0">
+                          <a:solidFill>
+                            <a:srgbClr val="1F2328"/>
+                          </a:solidFill>
+                          <a:latin typeface="Mulish" pitchFamily="34" charset="0"/>
+                          <a:ea typeface="Mulish" pitchFamily="34" charset="-122"/>
+                          <a:cs typeface="Mulish" pitchFamily="34" charset="-120"/>
+                        </a:rPr>
+                        <a:t>Functions, relations, sets; basic logic; proofs including induction; counting (permutations, combinations, binomial coefficients, inclusion-exclusion, pigeonhole); graph and tree vocabulary; centroids; planar graphs</a:t>
+                      </a:r>
+                      <a:endParaRPr lang="en-US" sz="1200" dirty="0">
+                        <a:latin typeface="Mulish" charset="0"/>
+                        <a:ea typeface="Mulish" charset="0"/>
+                        <a:cs typeface="Mulish" charset="0"/>
+                      </a:endParaRPr>
+                    </a:p>
+                  </a:txBody>
+                  <a:tcPr marT="64008" marB="64008">
+                    <a:lnL w="0" cap="flat" cmpd="sng" algn="ctr">
+                      <a:noFill/>
+                    </a:lnL>
+                    <a:lnR w="0" cap="flat" cmpd="sng" algn="ctr">
+                      <a:noFill/>
+                    </a:lnR>
+                    <a:lnT w="9525" cap="flat" cmpd="sng" algn="ctr">
+                      <a:solidFill>
+                        <a:srgbClr val="DADDE0"/>
+                      </a:solidFill>
+                      <a:prstDash val="solid"/>
+                      <a:round/>
+                      <a:headEnd type="none" w="med" len="med"/>
+                      <a:tailEnd type="none" w="med" len="med"/>
+                    </a:lnT>
+                    <a:lnB w="9525" cap="flat" cmpd="sng" algn="ctr">
+                      <a:solidFill>
+                        <a:srgbClr val="DADDE0"/>
+                      </a:solidFill>
+                      <a:prstDash val="solid"/>
+                      <a:round/>
+                      <a:headEnd type="none" w="med" len="med"/>
+                      <a:tailEnd type="none" w="med" len="med"/>
+                    </a:lnB>
+                    <a:solidFill>
+                      <a:srgbClr val="FFFFFF"/>
+                    </a:solidFill>
+                  </a:tcPr>
+                </a:tc>
+                <a:tc>
+                  <a:txBody>
+                    <a:bodyPr/>
+                    <a:lstStyle/>
+                    <a:p>
+                      <a:pPr marL="0" indent="0">
+                        <a:buNone/>
+                      </a:pPr>
+                      <a:r>
+                        <a:rPr lang="en-US" sz="1200" dirty="0">
+                          <a:solidFill>
+                            <a:srgbClr val="1F2328"/>
+                          </a:solidFill>
+                          <a:latin typeface="Mulish" pitchFamily="34" charset="0"/>
+                          <a:ea typeface="Mulish" pitchFamily="34" charset="-122"/>
+                          <a:cs typeface="Mulish" pitchFamily="34" charset="-120"/>
+                        </a:rPr>
+                        <a:t>Discrete probability (finite cases)</a:t>
+                      </a:r>
+                      <a:endParaRPr lang="en-US" sz="1200" dirty="0">
+                        <a:latin typeface="Mulish" charset="0"/>
+                        <a:ea typeface="Mulish" charset="0"/>
+                        <a:cs typeface="Mulish" charset="0"/>
+                      </a:endParaRPr>
+                    </a:p>
+                  </a:txBody>
+                  <a:tcPr marT="64008" marB="64008">
+                    <a:lnL w="0" cap="flat" cmpd="sng" algn="ctr">
+                      <a:noFill/>
+                    </a:lnL>
+                    <a:lnR w="0" cap="flat" cmpd="sng" algn="ctr">
+                      <a:noFill/>
+                    </a:lnR>
+                    <a:lnT w="9525" cap="flat" cmpd="sng" algn="ctr">
+                      <a:solidFill>
+                        <a:srgbClr val="DADDE0"/>
+                      </a:solidFill>
+                      <a:prstDash val="solid"/>
+                      <a:round/>
+                      <a:headEnd type="none" w="med" len="med"/>
+                      <a:tailEnd type="none" w="med" len="med"/>
+                    </a:lnT>
+                    <a:lnB w="9525" cap="flat" cmpd="sng" algn="ctr">
+                      <a:solidFill>
+                        <a:srgbClr val="DADDE0"/>
+                      </a:solidFill>
+                      <a:prstDash val="solid"/>
+                      <a:round/>
+                      <a:headEnd type="none" w="med" len="med"/>
+                      <a:tailEnd type="none" w="med" len="med"/>
+                    </a:lnB>
+                    <a:solidFill>
+                      <a:srgbClr val="FFFFFF"/>
+                    </a:solidFill>
+                  </a:tcPr>
+                </a:tc>
+                <a:tc>
+                  <a:txBody>
+                    <a:bodyPr/>
+                    <a:lstStyle/>
+                    <a:p>
+                      <a:pPr marL="0" indent="0">
+                        <a:buNone/>
+                      </a:pPr>
+                      <a:r>
+                        <a:rPr lang="en-US" sz="1200" dirty="0">
+                          <a:solidFill>
+                            <a:srgbClr val="1F2328"/>
+                          </a:solidFill>
+                          <a:latin typeface="Mulish" pitchFamily="34" charset="0"/>
+                          <a:ea typeface="Mulish" pitchFamily="34" charset="-122"/>
+                          <a:cs typeface="Mulish" pitchFamily="34" charset="-120"/>
+                        </a:rPr>
+                        <a:t>Solving recurrences; Burnside lemma; hypergraphs; treewidth; linear algebra and FFT; calculus; statistics</a:t>
+                      </a:r>
+                      <a:endParaRPr lang="en-US" sz="1200" dirty="0">
+                        <a:latin typeface="Mulish" charset="0"/>
+                        <a:ea typeface="Mulish" charset="0"/>
+                        <a:cs typeface="Mulish" charset="0"/>
+                      </a:endParaRPr>
+                    </a:p>
+                  </a:txBody>
+                  <a:tcPr marT="64008" marB="64008">
+                    <a:lnL w="0" cap="flat" cmpd="sng" algn="ctr">
+                      <a:noFill/>
+                    </a:lnL>
+                    <a:lnR w="0" cap="flat" cmpd="sng" algn="ctr">
+                      <a:noFill/>
+                    </a:lnR>
+                    <a:lnT w="9525" cap="flat" cmpd="sng" algn="ctr">
+                      <a:solidFill>
+                        <a:srgbClr val="DADDE0"/>
+                      </a:solidFill>
+                      <a:prstDash val="solid"/>
+                      <a:round/>
+                      <a:headEnd type="none" w="med" len="med"/>
+                      <a:tailEnd type="none" w="med" len="med"/>
+                    </a:lnT>
+                    <a:lnB w="9525" cap="flat" cmpd="sng" algn="ctr">
+                      <a:solidFill>
+                        <a:srgbClr val="DADDE0"/>
+                      </a:solidFill>
+                      <a:prstDash val="solid"/>
+                      <a:round/>
+                      <a:headEnd type="none" w="med" len="med"/>
+                      <a:tailEnd type="none" w="med" len="med"/>
+                    </a:lnB>
+                    <a:solidFill>
+                      <a:srgbClr val="FFFFFF"/>
+                    </a:solidFill>
+                  </a:tcPr>
+                </a:tc>
+                <a:extLst>
+                  <a:ext uri="{0D108BD9-81ED-4DB2-BD59-A6C34878D82A}">
+                    <a16:rowId xmlns:a16="http://schemas.microsoft.com/office/drawing/2014/main" val="10002"/>
+                  </a:ext>
+                </a:extLst>
+              </a:tr>
+              <a:tr h="0">
+                <a:tc>
+                  <a:txBody>
+                    <a:bodyPr/>
+                    <a:lstStyle/>
+                    <a:p>
+                      <a:pPr marL="0" indent="0">
+                        <a:buNone/>
+                      </a:pPr>
+                      <a:r>
+                        <a:rPr lang="en-US" sz="1200" dirty="0">
+                          <a:solidFill>
+                            <a:srgbClr val="1F2328"/>
+                          </a:solidFill>
+                          <a:latin typeface="Mulish" pitchFamily="34" charset="0"/>
+                          <a:ea typeface="Mulish" pitchFamily="34" charset="-122"/>
+                          <a:cs typeface="Mulish" pitchFamily="34" charset="-120"/>
+                        </a:rPr>
+                        <a:t>Programming</a:t>
+                      </a:r>
+                      <a:endParaRPr lang="en-US" sz="1200" dirty="0">
+                        <a:latin typeface="Mulish" charset="0"/>
+                        <a:ea typeface="Mulish" charset="0"/>
+                        <a:cs typeface="Mulish" charset="0"/>
+                      </a:endParaRPr>
+                    </a:p>
+                  </a:txBody>
+                  <a:tcPr marT="64008" marB="64008">
+                    <a:lnL w="0" cap="flat" cmpd="sng" algn="ctr">
+                      <a:noFill/>
+                    </a:lnL>
+                    <a:lnR w="0" cap="flat" cmpd="sng" algn="ctr">
+                      <a:noFill/>
+                    </a:lnR>
+                    <a:lnT w="9525" cap="flat" cmpd="sng" algn="ctr">
+                      <a:solidFill>
+                        <a:srgbClr val="DADDE0"/>
+                      </a:solidFill>
+                      <a:prstDash val="solid"/>
+                      <a:round/>
+                      <a:headEnd type="none" w="med" len="med"/>
+                      <a:tailEnd type="none" w="med" len="med"/>
+                    </a:lnT>
+                    <a:lnB w="9525" cap="flat" cmpd="sng" algn="ctr">
+                      <a:solidFill>
+                        <a:srgbClr val="DADDE0"/>
+                      </a:solidFill>
+                      <a:prstDash val="solid"/>
+                      <a:round/>
+                      <a:headEnd type="none" w="med" len="med"/>
+                      <a:tailEnd type="none" w="med" len="med"/>
+                    </a:lnB>
+                    <a:solidFill>
+                      <a:srgbClr val="FFFFFF"/>
+                    </a:solidFill>
+                  </a:tcPr>
+                </a:tc>
+                <a:tc>
+                  <a:txBody>
+                    <a:bodyPr/>
+                    <a:lstStyle/>
+                    <a:p>
+                      <a:pPr marL="0" indent="0">
+                        <a:buNone/>
+                      </a:pPr>
+                      <a:r>
+                        <a:rPr lang="en-US" sz="1200" dirty="0">
+                          <a:solidFill>
+                            <a:srgbClr val="1F2328"/>
+                          </a:solidFill>
+                          <a:latin typeface="Mulish" pitchFamily="34" charset="0"/>
+                          <a:ea typeface="Mulish" pitchFamily="34" charset="-122"/>
+                          <a:cs typeface="Mulish" pitchFamily="34" charset="-120"/>
+                        </a:rPr>
+                        <a:t>Language basics, arrays, strings, recursion, divide and conquer, backtracking, linked structures, pointers, simple floating point; interactive tasks</a:t>
+                      </a:r>
+                      <a:endParaRPr lang="en-US" sz="1200" dirty="0">
+                        <a:latin typeface="Mulish" charset="0"/>
+                        <a:ea typeface="Mulish" charset="0"/>
+                        <a:cs typeface="Mulish" charset="0"/>
+                      </a:endParaRPr>
+                    </a:p>
+                  </a:txBody>
+                  <a:tcPr marT="64008" marB="64008">
+                    <a:lnL w="0" cap="flat" cmpd="sng" algn="ctr">
+                      <a:noFill/>
+                    </a:lnL>
+                    <a:lnR w="0" cap="flat" cmpd="sng" algn="ctr">
+                      <a:noFill/>
+                    </a:lnR>
+                    <a:lnT w="9525" cap="flat" cmpd="sng" algn="ctr">
+                      <a:solidFill>
+                        <a:srgbClr val="DADDE0"/>
+                      </a:solidFill>
+                      <a:prstDash val="solid"/>
+                      <a:round/>
+                      <a:headEnd type="none" w="med" len="med"/>
+                      <a:tailEnd type="none" w="med" len="med"/>
+                    </a:lnT>
+                    <a:lnB w="9525" cap="flat" cmpd="sng" algn="ctr">
+                      <a:solidFill>
+                        <a:srgbClr val="DADDE0"/>
+                      </a:solidFill>
+                      <a:prstDash val="solid"/>
+                      <a:round/>
+                      <a:headEnd type="none" w="med" len="med"/>
+                      <a:tailEnd type="none" w="med" len="med"/>
+                    </a:lnB>
+                    <a:solidFill>
+                      <a:srgbClr val="FFFFFF"/>
+                    </a:solidFill>
+                  </a:tcPr>
+                </a:tc>
+                <a:tc>
+                  <a:txBody>
+                    <a:bodyPr/>
+                    <a:lstStyle/>
+                    <a:p>
+                      <a:pPr marL="0" indent="0">
+                        <a:buNone/>
+                      </a:pPr>
+                      <a:r>
+                        <a:rPr lang="en-US" sz="1200" dirty="0">
+                          <a:solidFill>
+                            <a:srgbClr val="1F2328"/>
+                          </a:solidFill>
+                          <a:latin typeface="Mulish" pitchFamily="34" charset="0"/>
+                          <a:ea typeface="Mulish" pitchFamily="34" charset="-122"/>
+                          <a:cs typeface="Mulish" pitchFamily="34" charset="-120"/>
+                        </a:rPr>
+                        <a:t>Memory representation; heap allocation; exact fractions</a:t>
+                      </a:r>
+                      <a:endParaRPr lang="en-US" sz="1200" dirty="0">
+                        <a:latin typeface="Mulish" charset="0"/>
+                        <a:ea typeface="Mulish" charset="0"/>
+                        <a:cs typeface="Mulish" charset="0"/>
+                      </a:endParaRPr>
+                    </a:p>
+                  </a:txBody>
+                  <a:tcPr marT="64008" marB="64008">
+                    <a:lnL w="0" cap="flat" cmpd="sng" algn="ctr">
+                      <a:noFill/>
+                    </a:lnL>
+                    <a:lnR w="0" cap="flat" cmpd="sng" algn="ctr">
+                      <a:noFill/>
+                    </a:lnR>
+                    <a:lnT w="9525" cap="flat" cmpd="sng" algn="ctr">
+                      <a:solidFill>
+                        <a:srgbClr val="DADDE0"/>
+                      </a:solidFill>
+                      <a:prstDash val="solid"/>
+                      <a:round/>
+                      <a:headEnd type="none" w="med" len="med"/>
+                      <a:tailEnd type="none" w="med" len="med"/>
+                    </a:lnT>
+                    <a:lnB w="9525" cap="flat" cmpd="sng" algn="ctr">
+                      <a:solidFill>
+                        <a:srgbClr val="DADDE0"/>
+                      </a:solidFill>
+                      <a:prstDash val="solid"/>
+                      <a:round/>
+                      <a:headEnd type="none" w="med" len="med"/>
+                      <a:tailEnd type="none" w="med" len="med"/>
+                    </a:lnB>
+                    <a:solidFill>
+                      <a:srgbClr val="FFFFFF"/>
+                    </a:solidFill>
+                  </a:tcPr>
+                </a:tc>
+                <a:tc>
+                  <a:txBody>
+                    <a:bodyPr/>
+                    <a:lstStyle/>
+                    <a:p>
+                      <a:pPr marL="0" indent="0">
+                        <a:buNone/>
+                      </a:pPr>
+                      <a:r>
+                        <a:rPr lang="en-US" sz="1200" dirty="0">
+                          <a:solidFill>
+                            <a:srgbClr val="1F2328"/>
+                          </a:solidFill>
+                          <a:latin typeface="Mulish" pitchFamily="34" charset="0"/>
+                          <a:ea typeface="Mulish" pitchFamily="34" charset="-122"/>
+                          <a:cs typeface="Mulish" pitchFamily="34" charset="-120"/>
+                        </a:rPr>
+                        <a:t>Non-trivial floating-point calculations</a:t>
+                      </a:r>
+                      <a:endParaRPr lang="en-US" sz="1200" dirty="0">
+                        <a:latin typeface="Mulish" charset="0"/>
+                        <a:ea typeface="Mulish" charset="0"/>
+                        <a:cs typeface="Mulish" charset="0"/>
+                      </a:endParaRPr>
+                    </a:p>
+                  </a:txBody>
+                  <a:tcPr marT="64008" marB="64008">
+                    <a:lnL w="0" cap="flat" cmpd="sng" algn="ctr">
+                      <a:noFill/>
+                    </a:lnL>
+                    <a:lnR w="0" cap="flat" cmpd="sng" algn="ctr">
+                      <a:noFill/>
+                    </a:lnR>
+                    <a:lnT w="9525" cap="flat" cmpd="sng" algn="ctr">
+                      <a:solidFill>
+                        <a:srgbClr val="DADDE0"/>
+                      </a:solidFill>
+                      <a:prstDash val="solid"/>
+                      <a:round/>
+                      <a:headEnd type="none" w="med" len="med"/>
+                      <a:tailEnd type="none" w="med" len="med"/>
+                    </a:lnT>
+                    <a:lnB w="9525" cap="flat" cmpd="sng" algn="ctr">
+                      <a:solidFill>
+                        <a:srgbClr val="DADDE0"/>
+                      </a:solidFill>
+                      <a:prstDash val="solid"/>
+                      <a:round/>
+                      <a:headEnd type="none" w="med" len="med"/>
+                      <a:tailEnd type="none" w="med" len="med"/>
+                    </a:lnB>
+                    <a:solidFill>
+                      <a:srgbClr val="FFFFFF"/>
+                    </a:solidFill>
+                  </a:tcPr>
+                </a:tc>
+                <a:extLst>
+                  <a:ext uri="{0D108BD9-81ED-4DB2-BD59-A6C34878D82A}">
+                    <a16:rowId xmlns:a16="http://schemas.microsoft.com/office/drawing/2014/main" val="10003"/>
+                  </a:ext>
+                </a:extLst>
+              </a:tr>
+              <a:tr h="0">
+                <a:tc>
+                  <a:txBody>
+                    <a:bodyPr/>
+                    <a:lstStyle/>
+                    <a:p>
+                      <a:pPr marL="0" indent="0">
+                        <a:buNone/>
+                      </a:pPr>
+                      <a:r>
+                        <a:rPr lang="en-US" sz="1200" dirty="0">
+                          <a:solidFill>
+                            <a:srgbClr val="1F2328"/>
+                          </a:solidFill>
+                          <a:latin typeface="Mulish" pitchFamily="34" charset="0"/>
+                          <a:ea typeface="Mulish" pitchFamily="34" charset="-122"/>
+                          <a:cs typeface="Mulish" pitchFamily="34" charset="-120"/>
+                        </a:rPr>
+                        <a:t>Analysis and strategies</a:t>
+                      </a:r>
+                      <a:endParaRPr lang="en-US" sz="1200" dirty="0">
+                        <a:latin typeface="Mulish" charset="0"/>
+                        <a:ea typeface="Mulish" charset="0"/>
+                        <a:cs typeface="Mulish" charset="0"/>
+                      </a:endParaRPr>
+                    </a:p>
+                  </a:txBody>
+                  <a:tcPr marT="64008" marB="64008">
+                    <a:lnL w="0" cap="flat" cmpd="sng" algn="ctr">
+                      <a:noFill/>
+                    </a:lnL>
+                    <a:lnR w="0" cap="flat" cmpd="sng" algn="ctr">
+                      <a:noFill/>
+                    </a:lnR>
+                    <a:lnT w="9525" cap="flat" cmpd="sng" algn="ctr">
+                      <a:solidFill>
+                        <a:srgbClr val="DADDE0"/>
+                      </a:solidFill>
+                      <a:prstDash val="solid"/>
+                      <a:round/>
+                      <a:headEnd type="none" w="med" len="med"/>
+                      <a:tailEnd type="none" w="med" len="med"/>
+                    </a:lnT>
+                    <a:lnB w="9525" cap="flat" cmpd="sng" algn="ctr">
+                      <a:solidFill>
+                        <a:srgbClr val="DADDE0"/>
+                      </a:solidFill>
+                      <a:prstDash val="solid"/>
+                      <a:round/>
+                      <a:headEnd type="none" w="med" len="med"/>
+                      <a:tailEnd type="none" w="med" len="med"/>
+                    </a:lnB>
+                    <a:solidFill>
+                      <a:srgbClr val="FFFFFF"/>
+                    </a:solidFill>
+                  </a:tcPr>
+                </a:tc>
+                <a:tc>
+                  <a:txBody>
+                    <a:bodyPr/>
+                    <a:lstStyle/>
+                    <a:p>
+                      <a:pPr marL="0" indent="0">
+                        <a:buNone/>
+                      </a:pPr>
+                      <a:r>
+                        <a:rPr lang="en-US" sz="1200" dirty="0">
+                          <a:solidFill>
+                            <a:srgbClr val="1F2328"/>
+                          </a:solidFill>
+                          <a:latin typeface="Mulish" pitchFamily="34" charset="0"/>
+                          <a:ea typeface="Mulish" pitchFamily="34" charset="-122"/>
+                          <a:cs typeface="Mulish" pitchFamily="34" charset="-120"/>
+                        </a:rPr>
+                        <a:t>Big O; amortized analysis; brute force; greedy; divide and conquer; branch and bound; dynamic programming</a:t>
+                      </a:r>
+                      <a:endParaRPr lang="en-US" sz="1200" dirty="0">
+                        <a:latin typeface="Mulish" charset="0"/>
+                        <a:ea typeface="Mulish" charset="0"/>
+                        <a:cs typeface="Mulish" charset="0"/>
+                      </a:endParaRPr>
+                    </a:p>
+                  </a:txBody>
+                  <a:tcPr marT="64008" marB="64008">
+                    <a:lnL w="0" cap="flat" cmpd="sng" algn="ctr">
+                      <a:noFill/>
+                    </a:lnL>
+                    <a:lnR w="0" cap="flat" cmpd="sng" algn="ctr">
+                      <a:noFill/>
+                    </a:lnR>
+                    <a:lnT w="9525" cap="flat" cmpd="sng" algn="ctr">
+                      <a:solidFill>
+                        <a:srgbClr val="DADDE0"/>
+                      </a:solidFill>
+                      <a:prstDash val="solid"/>
+                      <a:round/>
+                      <a:headEnd type="none" w="med" len="med"/>
+                      <a:tailEnd type="none" w="med" len="med"/>
+                    </a:lnT>
+                    <a:lnB w="9525" cap="flat" cmpd="sng" algn="ctr">
+                      <a:solidFill>
+                        <a:srgbClr val="DADDE0"/>
+                      </a:solidFill>
+                      <a:prstDash val="solid"/>
+                      <a:round/>
+                      <a:headEnd type="none" w="med" len="med"/>
+                      <a:tailEnd type="none" w="med" len="med"/>
+                    </a:lnB>
+                    <a:solidFill>
+                      <a:srgbClr val="FFFFFF"/>
+                    </a:solidFill>
+                  </a:tcPr>
+                </a:tc>
+                <a:tc>
+                  <a:txBody>
+                    <a:bodyPr/>
+                    <a:lstStyle/>
+                    <a:p>
+                      <a:pPr marL="0" indent="0">
+                        <a:buNone/>
+                      </a:pPr>
+                      <a:r>
+                        <a:rPr lang="en-US" sz="1200" dirty="0">
+                          <a:solidFill>
+                            <a:srgbClr val="1F2328"/>
+                          </a:solidFill>
+                          <a:latin typeface="Mulish" pitchFamily="34" charset="0"/>
+                          <a:ea typeface="Mulish" pitchFamily="34" charset="-122"/>
+                          <a:cs typeface="Mulish" pitchFamily="34" charset="-120"/>
+                        </a:rPr>
+                        <a:t>Heuristics; randomized and approximation algorithms</a:t>
+                      </a:r>
+                      <a:endParaRPr lang="en-US" sz="1200" dirty="0">
+                        <a:latin typeface="Mulish" charset="0"/>
+                        <a:ea typeface="Mulish" charset="0"/>
+                        <a:cs typeface="Mulish" charset="0"/>
+                      </a:endParaRPr>
+                    </a:p>
+                  </a:txBody>
+                  <a:tcPr marT="64008" marB="64008">
+                    <a:lnL w="0" cap="flat" cmpd="sng" algn="ctr">
+                      <a:noFill/>
+                    </a:lnL>
+                    <a:lnR w="0" cap="flat" cmpd="sng" algn="ctr">
+                      <a:noFill/>
+                    </a:lnR>
+                    <a:lnT w="9525" cap="flat" cmpd="sng" algn="ctr">
+                      <a:solidFill>
+                        <a:srgbClr val="DADDE0"/>
+                      </a:solidFill>
+                      <a:prstDash val="solid"/>
+                      <a:round/>
+                      <a:headEnd type="none" w="med" len="med"/>
+                      <a:tailEnd type="none" w="med" len="med"/>
+                    </a:lnT>
+                    <a:lnB w="9525" cap="flat" cmpd="sng" algn="ctr">
+                      <a:solidFill>
+                        <a:srgbClr val="DADDE0"/>
+                      </a:solidFill>
+                      <a:prstDash val="solid"/>
+                      <a:round/>
+                      <a:headEnd type="none" w="med" len="med"/>
+                      <a:tailEnd type="none" w="med" len="med"/>
+                    </a:lnB>
+                    <a:solidFill>
+                      <a:srgbClr val="FFFFFF"/>
+                    </a:solidFill>
+                  </a:tcPr>
+                </a:tc>
+                <a:tc>
+                  <a:txBody>
+                    <a:bodyPr/>
+                    <a:lstStyle/>
+                    <a:p>
+                      <a:pPr marL="0" indent="0">
+                        <a:buNone/>
+                      </a:pPr>
+                      <a:r>
+                        <a:rPr lang="en-US" sz="1200" dirty="0">
+                          <a:solidFill>
+                            <a:srgbClr val="1F2328"/>
+                          </a:solidFill>
+                          <a:latin typeface="Mulish" pitchFamily="34" charset="0"/>
+                          <a:ea typeface="Mulish" pitchFamily="34" charset="-122"/>
+                          <a:cs typeface="Mulish" pitchFamily="34" charset="-120"/>
+                        </a:rPr>
+                        <a:t>Average-case analysis; recurrence-based analysis; clustering; numerical optimization</a:t>
+                      </a:r>
+                      <a:endParaRPr lang="en-US" sz="1200" dirty="0">
+                        <a:latin typeface="Mulish" charset="0"/>
+                        <a:ea typeface="Mulish" charset="0"/>
+                        <a:cs typeface="Mulish" charset="0"/>
+                      </a:endParaRPr>
+                    </a:p>
+                  </a:txBody>
+                  <a:tcPr marT="64008" marB="64008">
+                    <a:lnL w="0" cap="flat" cmpd="sng" algn="ctr">
+                      <a:noFill/>
+                    </a:lnL>
+                    <a:lnR w="0" cap="flat" cmpd="sng" algn="ctr">
+                      <a:noFill/>
+                    </a:lnR>
+                    <a:lnT w="9525" cap="flat" cmpd="sng" algn="ctr">
+                      <a:solidFill>
+                        <a:srgbClr val="DADDE0"/>
+                      </a:solidFill>
+                      <a:prstDash val="solid"/>
+                      <a:round/>
+                      <a:headEnd type="none" w="med" len="med"/>
+                      <a:tailEnd type="none" w="med" len="med"/>
+                    </a:lnT>
+                    <a:lnB w="9525" cap="flat" cmpd="sng" algn="ctr">
+                      <a:solidFill>
+                        <a:srgbClr val="DADDE0"/>
+                      </a:solidFill>
+                      <a:prstDash val="solid"/>
+                      <a:round/>
+                      <a:headEnd type="none" w="med" len="med"/>
+                      <a:tailEnd type="none" w="med" len="med"/>
+                    </a:lnB>
+                    <a:solidFill>
+                      <a:srgbClr val="FFFFFF"/>
+                    </a:solidFill>
+                  </a:tcPr>
+                </a:tc>
+                <a:extLst>
+                  <a:ext uri="{0D108BD9-81ED-4DB2-BD59-A6C34878D82A}">
+                    <a16:rowId xmlns:a16="http://schemas.microsoft.com/office/drawing/2014/main" val="10004"/>
+                  </a:ext>
+                </a:extLst>
+              </a:tr>
+            </a:tbl>
+          </a:graphicData>
+        </a:graphic>
+      </p:graphicFrame>
+    </p:spTree>
+  </p:cSld>
+  <p:clrMapOvr>
+    <a:masterClrMapping/>
+  </p:clrMapOvr>
+</p:sld>
+</file>
+
+<file path=ppt/slides/slide21.xml><?xml version="1.0" encoding="utf-8"?>
+<p:sld xmlns:a="http://schemas.openxmlformats.org/drawingml/2006/main" xmlns:r="http://schemas.openxmlformats.org/officeDocument/2006/relationships" xmlns:p="http://schemas.openxmlformats.org/presentationml/2006/main">
+  <p:cSld name="Slide 22">
+    <p:spTree>
+      <p:nvGrpSpPr>
+        <p:cNvPr id="1" name=""/>
+        <p:cNvGrpSpPr/>
+        <p:nvPr/>
+      </p:nvGrpSpPr>
+      <p:grpSpPr>
+        <a:xfrm>
+          <a:off x="0" y="0"/>
+          <a:ext cx="0" cy="0"/>
+          <a:chOff x="0" y="0"/>
+          <a:chExt cx="0" cy="0"/>
+        </a:xfrm>
+      </p:grpSpPr>
+      <p:sp>
+        <p:nvSpPr>
+          <p:cNvPr id="2" name="Text 1"/>
+          <p:cNvSpPr>
+            <a:spLocks noGrp="1"/>
+          </p:cNvSpPr>
+          <p:nvPr>
+            <p:ph type="body" idx="101" hasCustomPrompt="1"/>
+          </p:nvPr>
+        </p:nvSpPr>
+        <p:spPr>
+          <a:xfrm>
+            <a:off x="812800" y="609600"/>
+            <a:ext cx="10566400" cy="279400"/>
+          </a:xfrm>
+          <a:prstGeom prst="rect">
+            <a:avLst/>
+          </a:prstGeom>
+          <a:noFill/>
+          <a:ln/>
+        </p:spPr>
+        <p:txBody>
+          <a:bodyPr wrap="square" lIns="0" tIns="0" rIns="0" bIns="0" rtlCol="0" anchor="t"/>
+          <a:lstStyle/>
+          <a:p>
+            <a:pPr marL="0" indent="0">
+              <a:buNone/>
+            </a:pPr>
+            <a:r>
+              <a:rPr lang="en-US" sz="1200" b="1" kern="0" spc="200" dirty="0">
+                <a:solidFill>
+                  <a:srgbClr val="287673"/>
+                </a:solidFill>
+                <a:latin typeface="Mulish" pitchFamily="34" charset="0"/>
+                <a:ea typeface="Mulish" pitchFamily="34" charset="-122"/>
+                <a:cs typeface="Mulish" pitchFamily="34" charset="-120"/>
+              </a:rPr>
+              <a:t>ADDENDUM · IOI SYLLABUS 2025 · 3 OF 3</a:t>
+            </a:r>
+            <a:endParaRPr lang="en-US" sz="1200" dirty="0"/>
+          </a:p>
+        </p:txBody>
+      </p:sp>
+      <p:sp>
+        <p:nvSpPr>
+          <p:cNvPr id="3" name="Text 1"/>
+          <p:cNvSpPr>
+            <a:spLocks noGrp="1"/>
+          </p:cNvSpPr>
+          <p:nvPr>
+            <p:ph type="title" idx="102" hasCustomPrompt="1"/>
+          </p:nvPr>
+        </p:nvSpPr>
+        <p:spPr>
+          <a:xfrm>
+            <a:off x="812800" y="952500"/>
+            <a:ext cx="10566400" cy="482600"/>
+          </a:xfrm>
+          <a:prstGeom prst="rect">
+            <a:avLst/>
+          </a:prstGeom>
+          <a:noFill/>
+          <a:ln/>
+        </p:spPr>
+        <p:txBody>
+          <a:bodyPr wrap="square" lIns="0" tIns="0" rIns="0" bIns="0" rtlCol="0" anchor="t"/>
+          <a:lstStyle/>
+          <a:p>
+            <a:pPr marL="0" indent="0" algn="l">
+              <a:buNone/>
+            </a:pPr>
+            <a:r>
+              <a:rPr lang="en-US" sz="2600" b="1" kern="0" spc="200" dirty="0">
+                <a:solidFill>
+                  <a:srgbClr val="1F2328"/>
+                </a:solidFill>
+                <a:latin typeface="Jost" pitchFamily="34" charset="0"/>
+                <a:ea typeface="Jost" pitchFamily="34" charset="-122"/>
+                <a:cs typeface="Jost" pitchFamily="34" charset="-120"/>
+              </a:rPr>
+              <a:t>ALGORITHMS AND DATA STRUCTURES</a:t>
+            </a:r>
+            <a:endParaRPr lang="en-US" sz="2600" dirty="0"/>
+          </a:p>
+        </p:txBody>
+      </p:sp>
+      <p:graphicFrame>
+        <p:nvGraphicFramePr>
+          <p:cNvPr id="23" name="Table 0"/>
+          <p:cNvGraphicFramePr>
+            <a:graphicFrameLocks noGrp="1"/>
+          </p:cNvGraphicFramePr>
+          <p:nvPr>
+            <p:extLst>
+              <p:ext uri="{D42A27DB-BD31-4B8C-83A1-F6EECF244321}">
+                <p14:modId xmlns:p14="http://schemas.microsoft.com/office/powerpoint/2010/main" val="1579011935"/>
+              </p:ext>
+            </p:extLst>
+          </p:nvPr>
+        </p:nvGraphicFramePr>
+        <p:xfrm>
+          <a:off x="812800" y="1638300"/>
+          <a:ext cx="10566400" cy="4297680"/>
+        </p:xfrm>
+        <a:graphic>
+          <a:graphicData uri="http://schemas.openxmlformats.org/drawingml/2006/table">
+            <a:tbl>
+              <a:tblPr/>
+              <a:tblGrid>
+                <a:gridCol w="1584960">
+                  <a:extLst>
+                    <a:ext uri="{9D8B030D-6E8A-4147-A177-3AD203B41FA5}">
+                      <a16:colId xmlns:a16="http://schemas.microsoft.com/office/drawing/2014/main" val="20000"/>
+                    </a:ext>
+                  </a:extLst>
+                </a:gridCol>
+                <a:gridCol w="4226560">
+                  <a:extLst>
+                    <a:ext uri="{9D8B030D-6E8A-4147-A177-3AD203B41FA5}">
+                      <a16:colId xmlns:a16="http://schemas.microsoft.com/office/drawing/2014/main" val="20001"/>
+                    </a:ext>
+                  </a:extLst>
+                </a:gridCol>
+                <a:gridCol w="1796288">
+                  <a:extLst>
+                    <a:ext uri="{9D8B030D-6E8A-4147-A177-3AD203B41FA5}">
+                      <a16:colId xmlns:a16="http://schemas.microsoft.com/office/drawing/2014/main" val="20002"/>
+                    </a:ext>
+                  </a:extLst>
+                </a:gridCol>
+                <a:gridCol w="2958592">
+                  <a:extLst>
+                    <a:ext uri="{9D8B030D-6E8A-4147-A177-3AD203B41FA5}">
+                      <a16:colId xmlns:a16="http://schemas.microsoft.com/office/drawing/2014/main" val="20003"/>
+                    </a:ext>
+                  </a:extLst>
+                </a:gridCol>
+              </a:tblGrid>
+              <a:tr h="0">
+                <a:tc>
+                  <a:txBody>
+                    <a:bodyPr/>
+                    <a:lstStyle/>
+                    <a:p>
+                      <a:pPr marL="0" indent="0">
+                        <a:buNone/>
+                      </a:pPr>
+                      <a:r>
+                        <a:rPr lang="en-US" sz="1200" b="1" dirty="0">
+                          <a:solidFill>
+                            <a:srgbClr val="1F2328"/>
+                          </a:solidFill>
+                          <a:latin typeface="Mulish" pitchFamily="34" charset="0"/>
+                          <a:ea typeface="Mulish" pitchFamily="34" charset="-122"/>
+                          <a:cs typeface="Mulish" pitchFamily="34" charset="-120"/>
+                        </a:rPr>
+                        <a:t>Area</a:t>
+                      </a:r>
+                      <a:endParaRPr lang="en-US" sz="1200" dirty="0">
+                        <a:latin typeface="Mulish" charset="0"/>
+                        <a:ea typeface="Mulish" charset="0"/>
+                        <a:cs typeface="Mulish" charset="0"/>
+                      </a:endParaRPr>
+                    </a:p>
+                  </a:txBody>
+                  <a:tcPr marT="64008" marB="64008">
+                    <a:lnL w="0" cap="flat" cmpd="sng" algn="ctr">
+                      <a:noFill/>
+                    </a:lnL>
+                    <a:lnR w="0" cap="flat" cmpd="sng" algn="ctr">
+                      <a:noFill/>
+                    </a:lnR>
+                    <a:lnT w="0" cap="flat" cmpd="sng" algn="ctr">
+                      <a:noFill/>
+                    </a:lnT>
+                    <a:lnB w="19050" cap="flat" cmpd="sng" algn="ctr">
+                      <a:solidFill>
+                        <a:srgbClr val="1F2328"/>
+                      </a:solidFill>
+                      <a:prstDash val="solid"/>
+                      <a:round/>
+                      <a:headEnd type="none" w="med" len="med"/>
+                      <a:tailEnd type="none" w="med" len="med"/>
+                    </a:lnB>
+                    <a:solidFill>
+                      <a:srgbClr val="FFFFFF"/>
+                    </a:solidFill>
+                  </a:tcPr>
+                </a:tc>
+                <a:tc>
+                  <a:txBody>
+                    <a:bodyPr/>
+                    <a:lstStyle/>
+                    <a:p>
+                      <a:pPr marL="0" indent="0">
+                        <a:buNone/>
+                      </a:pPr>
+                      <a:r>
+                        <a:rPr lang="en-US" sz="1200" b="1" dirty="0">
+                          <a:solidFill>
+                            <a:srgbClr val="1F2328"/>
+                          </a:solidFill>
+                          <a:latin typeface="Mulish" pitchFamily="34" charset="0"/>
+                          <a:ea typeface="Mulish" pitchFamily="34" charset="-122"/>
+                          <a:cs typeface="Mulish" pitchFamily="34" charset="-120"/>
+                        </a:rPr>
+                        <a:t>Included (✓, ✓q, ✓p)</a:t>
+                      </a:r>
+                      <a:endParaRPr lang="en-US" sz="1200" dirty="0">
+                        <a:latin typeface="Mulish" charset="0"/>
+                        <a:ea typeface="Mulish" charset="0"/>
+                        <a:cs typeface="Mulish" charset="0"/>
+                      </a:endParaRPr>
+                    </a:p>
+                  </a:txBody>
+                  <a:tcPr marT="64008" marB="64008">
+                    <a:lnL w="0" cap="flat" cmpd="sng" algn="ctr">
+                      <a:noFill/>
+                    </a:lnL>
+                    <a:lnR w="0" cap="flat" cmpd="sng" algn="ctr">
+                      <a:noFill/>
+                    </a:lnR>
+                    <a:lnT w="0" cap="flat" cmpd="sng" algn="ctr">
+                      <a:noFill/>
+                    </a:lnT>
+                    <a:lnB w="19050" cap="flat" cmpd="sng" algn="ctr">
+                      <a:solidFill>
+                        <a:srgbClr val="1F2328"/>
+                      </a:solidFill>
+                      <a:prstDash val="solid"/>
+                      <a:round/>
+                      <a:headEnd type="none" w="med" len="med"/>
+                      <a:tailEnd type="none" w="med" len="med"/>
+                    </a:lnB>
+                    <a:solidFill>
+                      <a:srgbClr val="FFFFFF"/>
+                    </a:solidFill>
+                  </a:tcPr>
+                </a:tc>
+                <a:tc>
+                  <a:txBody>
+                    <a:bodyPr/>
+                    <a:lstStyle/>
+                    <a:p>
+                      <a:pPr marL="0" indent="0">
+                        <a:buNone/>
+                      </a:pPr>
+                      <a:r>
+                        <a:rPr lang="en-US" sz="1200" b="1" dirty="0">
+                          <a:solidFill>
+                            <a:srgbClr val="1F2328"/>
+                          </a:solidFill>
+                          <a:latin typeface="Mulish" pitchFamily="34" charset="0"/>
+                          <a:ea typeface="Mulish" pitchFamily="34" charset="-122"/>
+                          <a:cs typeface="Mulish" pitchFamily="34" charset="-120"/>
+                        </a:rPr>
+                        <a:t>Outside of focus (?)</a:t>
+                      </a:r>
+                      <a:endParaRPr lang="en-US" sz="1200" dirty="0">
+                        <a:latin typeface="Mulish" charset="0"/>
+                        <a:ea typeface="Mulish" charset="0"/>
+                        <a:cs typeface="Mulish" charset="0"/>
+                      </a:endParaRPr>
+                    </a:p>
+                  </a:txBody>
+                  <a:tcPr marT="64008" marB="64008">
+                    <a:lnL w="0" cap="flat" cmpd="sng" algn="ctr">
+                      <a:noFill/>
+                    </a:lnL>
+                    <a:lnR w="0" cap="flat" cmpd="sng" algn="ctr">
+                      <a:noFill/>
+                    </a:lnR>
+                    <a:lnT w="0" cap="flat" cmpd="sng" algn="ctr">
+                      <a:noFill/>
+                    </a:lnT>
+                    <a:lnB w="19050" cap="flat" cmpd="sng" algn="ctr">
+                      <a:solidFill>
+                        <a:srgbClr val="1F2328"/>
+                      </a:solidFill>
+                      <a:prstDash val="solid"/>
+                      <a:round/>
+                      <a:headEnd type="none" w="med" len="med"/>
+                      <a:tailEnd type="none" w="med" len="med"/>
+                    </a:lnB>
+                    <a:solidFill>
+                      <a:srgbClr val="FFFFFF"/>
+                    </a:solidFill>
+                  </a:tcPr>
+                </a:tc>
+                <a:tc>
+                  <a:txBody>
+                    <a:bodyPr/>
+                    <a:lstStyle/>
+                    <a:p>
+                      <a:pPr marL="0" indent="0">
+                        <a:buNone/>
+                      </a:pPr>
+                      <a:r>
+                        <a:rPr lang="en-US" sz="1200" b="1" dirty="0">
+                          <a:solidFill>
+                            <a:srgbClr val="1F2328"/>
+                          </a:solidFill>
+                          <a:latin typeface="Mulish" pitchFamily="34" charset="0"/>
+                          <a:ea typeface="Mulish" pitchFamily="34" charset="-122"/>
+                          <a:cs typeface="Mulish" pitchFamily="34" charset="-120"/>
+                        </a:rPr>
+                        <a:t>Excluded (✗)</a:t>
+                      </a:r>
+                      <a:endParaRPr lang="en-US" sz="1200" dirty="0">
+                        <a:latin typeface="Mulish" charset="0"/>
+                        <a:ea typeface="Mulish" charset="0"/>
+                        <a:cs typeface="Mulish" charset="0"/>
+                      </a:endParaRPr>
+                    </a:p>
+                  </a:txBody>
+                  <a:tcPr marT="64008" marB="64008">
+                    <a:lnL w="0" cap="flat" cmpd="sng" algn="ctr">
+                      <a:noFill/>
+                    </a:lnL>
+                    <a:lnR w="0" cap="flat" cmpd="sng" algn="ctr">
+                      <a:noFill/>
+                    </a:lnR>
+                    <a:lnT w="0" cap="flat" cmpd="sng" algn="ctr">
+                      <a:noFill/>
+                    </a:lnT>
+                    <a:lnB w="19050" cap="flat" cmpd="sng" algn="ctr">
+                      <a:solidFill>
+                        <a:srgbClr val="1F2328"/>
+                      </a:solidFill>
+                      <a:prstDash val="solid"/>
+                      <a:round/>
+                      <a:headEnd type="none" w="med" len="med"/>
+                      <a:tailEnd type="none" w="med" len="med"/>
+                    </a:lnB>
+                    <a:solidFill>
+                      <a:srgbClr val="FFFFFF"/>
+                    </a:solidFill>
+                  </a:tcPr>
+                </a:tc>
+                <a:extLst>
+                  <a:ext uri="{0D108BD9-81ED-4DB2-BD59-A6C34878D82A}">
+                    <a16:rowId xmlns:a16="http://schemas.microsoft.com/office/drawing/2014/main" val="10000"/>
+                  </a:ext>
+                </a:extLst>
+              </a:tr>
+              <a:tr h="0">
+                <a:tc>
+                  <a:txBody>
+                    <a:bodyPr/>
+                    <a:lstStyle/>
+                    <a:p>
+                      <a:pPr marL="0" indent="0">
+                        <a:buNone/>
+                      </a:pPr>
+                      <a:r>
+                        <a:rPr lang="en-US" sz="1200" dirty="0">
+                          <a:solidFill>
+                            <a:srgbClr val="1F2328"/>
+                          </a:solidFill>
+                          <a:latin typeface="Mulish" pitchFamily="34" charset="0"/>
+                          <a:ea typeface="Mulish" pitchFamily="34" charset="-122"/>
+                          <a:cs typeface="Mulish" pitchFamily="34" charset="-120"/>
+                        </a:rPr>
                         <a:t>Algorithms</a:t>
                       </a:r>
                       <a:endParaRPr lang="en-US" sz="1200" dirty="0">
@@ -14488,7 +15033,7 @@
         </p:nvGraphicFramePr>
         <p:xfrm>
           <a:off x="812800" y="1638300"/>
-          <a:ext cx="10566400" cy="914400"/>
+          <a:ext cx="10566400" cy="2602992"/>
         </p:xfrm>
         <a:graphic>
           <a:graphicData uri="http://schemas.openxmlformats.org/drawingml/2006/table">

--- a/The Selection Journey.pptx
+++ b/The Selection Journey.pptx
@@ -189,20 +189,12 @@
 </p:presentation>
 </file>
 
-<file path=ppt/revisionInfo.xml><?xml version="1.0" encoding="utf-8"?>
-<p1510:revInfo xmlns:a="http://schemas.openxmlformats.org/drawingml/2006/main" xmlns:r="http://schemas.openxmlformats.org/officeDocument/2006/relationships" xmlns:p1510="http://schemas.microsoft.com/office/powerpoint/2015/10/main">
-  <p1510:revLst>
-    <p1510:client id="{00000000-0000-0000-0000-000000000000}" v="17" dt="2026-10-07T05:03:00.264"/>
-  </p1510:revLst>
-</p1510:revInfo>
-</file>
-
 <file path=ppt/changesInfos/changesInfo1.xml><?xml version="1.0" encoding="utf-8"?>
 <pc:chgInfo xmlns:a="http://schemas.openxmlformats.org/drawingml/2006/main" xmlns:r="http://schemas.openxmlformats.org/officeDocument/2006/relationships" xmlns:ac="http://schemas.microsoft.com/office/drawing/2013/main/command" xmlns:pc="http://schemas.microsoft.com/office/powerpoint/2013/main/command">
   <pc:docChgLst>
     <pc:chgData name="Bryan Sun" userId="851caa7714272873" providerId="LiveId" clId="{9CD94D5E-0A18-4CEF-A655-0E4C15651F93}"/>
-    <pc:docChg chg="modSld">
-      <pc:chgData name="Bryan Sun" userId="851caa7714272873" providerId="LiveId" clId="{9CD94D5E-0A18-4CEF-A655-0E4C15651F93}" dt="2026-10-02T22:59:42.639" v="48" actId="20577"/>
+    <pc:docChg chg="custSel modSld">
+      <pc:chgData name="Bryan Sun" userId="851caa7714272873" providerId="LiveId" clId="{9CD94D5E-0A18-4CEF-A655-0E4C15651F93}" dt="2026-10-09T23:19:55.730" v="49" actId="7634"/>
       <pc:docMkLst>
         <pc:docMk/>
       </pc:docMkLst>
@@ -220,6 +212,66 @@
             <ac:spMk id="2" creationId="{00000000-0000-0000-0000-000000000000}"/>
           </ac:spMkLst>
         </pc:spChg>
+      </pc:sldChg>
+      <pc:sldChg chg="addSp mod">
+        <pc:chgData name="Bryan Sun" userId="851caa7714272873" providerId="LiveId" clId="{9CD94D5E-0A18-4CEF-A655-0E4C15651F93}" dt="2026-10-09T23:19:55.730" v="49" actId="7634"/>
+        <pc:sldMkLst>
+          <pc:docMk/>
+          <pc:sldMk cId="0" sldId="257"/>
+        </pc:sldMkLst>
+        <pc:inkChg chg="add">
+          <ac:chgData name="Bryan Sun" userId="851caa7714272873" providerId="LiveId" clId="{9CD94D5E-0A18-4CEF-A655-0E4C15651F93}" dt="2026-10-09T23:19:55.730" v="49" actId="7634"/>
+          <ac:inkMkLst>
+            <pc:docMk/>
+            <pc:sldMk cId="0" sldId="257"/>
+            <ac:inkMk id="38" creationId="{0BC59E27-8FF2-43F1-8BF5-9C0ED9E2D947}"/>
+          </ac:inkMkLst>
+        </pc:inkChg>
+      </pc:sldChg>
+      <pc:sldChg chg="addSp mod">
+        <pc:chgData name="Bryan Sun" userId="851caa7714272873" providerId="LiveId" clId="{9CD94D5E-0A18-4CEF-A655-0E4C15651F93}" dt="2026-10-09T23:19:55.730" v="49" actId="7634"/>
+        <pc:sldMkLst>
+          <pc:docMk/>
+          <pc:sldMk cId="0" sldId="263"/>
+        </pc:sldMkLst>
+        <pc:inkChg chg="add">
+          <ac:chgData name="Bryan Sun" userId="851caa7714272873" providerId="LiveId" clId="{9CD94D5E-0A18-4CEF-A655-0E4C15651F93}" dt="2026-10-09T23:19:55.730" v="49" actId="7634"/>
+          <ac:inkMkLst>
+            <pc:docMk/>
+            <pc:sldMk cId="0" sldId="263"/>
+            <ac:inkMk id="9" creationId="{451E6347-03E3-2E39-D35A-7BDF9A66BE91}"/>
+          </ac:inkMkLst>
+        </pc:inkChg>
+      </pc:sldChg>
+      <pc:sldChg chg="addSp mod">
+        <pc:chgData name="Bryan Sun" userId="851caa7714272873" providerId="LiveId" clId="{9CD94D5E-0A18-4CEF-A655-0E4C15651F93}" dt="2026-10-09T23:19:55.730" v="49" actId="7634"/>
+        <pc:sldMkLst>
+          <pc:docMk/>
+          <pc:sldMk cId="0" sldId="265"/>
+        </pc:sldMkLst>
+        <pc:inkChg chg="add">
+          <ac:chgData name="Bryan Sun" userId="851caa7714272873" providerId="LiveId" clId="{9CD94D5E-0A18-4CEF-A655-0E4C15651F93}" dt="2026-10-09T23:19:55.730" v="49" actId="7634"/>
+          <ac:inkMkLst>
+            <pc:docMk/>
+            <pc:sldMk cId="0" sldId="265"/>
+            <ac:inkMk id="4" creationId="{8905E4CF-77D9-2A46-62E9-CD127ABE0F7A}"/>
+          </ac:inkMkLst>
+        </pc:inkChg>
+      </pc:sldChg>
+      <pc:sldChg chg="addSp mod">
+        <pc:chgData name="Bryan Sun" userId="851caa7714272873" providerId="LiveId" clId="{9CD94D5E-0A18-4CEF-A655-0E4C15651F93}" dt="2026-10-09T23:19:55.730" v="49" actId="7634"/>
+        <pc:sldMkLst>
+          <pc:docMk/>
+          <pc:sldMk cId="0" sldId="269"/>
+        </pc:sldMkLst>
+        <pc:inkChg chg="add">
+          <ac:chgData name="Bryan Sun" userId="851caa7714272873" providerId="LiveId" clId="{9CD94D5E-0A18-4CEF-A655-0E4C15651F93}" dt="2026-10-09T23:19:55.730" v="49" actId="7634"/>
+          <ac:inkMkLst>
+            <pc:docMk/>
+            <pc:sldMk cId="0" sldId="269"/>
+            <ac:inkMk id="8" creationId="{73A50A1C-CEF5-7170-CF6E-B1F7E179C0B9}"/>
+          </ac:inkMkLst>
+        </pc:inkChg>
       </pc:sldChg>
     </pc:docChg>
   </pc:docChgLst>
@@ -239,544 +291,323 @@
       <pc:docMkLst>
         <pc:docMk/>
       </pc:docMkLst>
-      <pc:sldChg chg="addSp delSp new del">
-        <pc:chgData name="Bryan Sun" userId="851caa7714272873" providerId="Windows Live" clId="Web-{00000000-0000-0000-0000-000000000000}" dt="2026-10-07T05:03:00.264" v="133"/>
-        <pc:sldMkLst>
-          <pc:docMk/>
-          <pc:sldMk cId="371598909" sldId="278"/>
-        </pc:sldMkLst>
-        <pc:spChg chg="add del">
-          <ac:chgData name="Bryan Sun" userId="851caa7714272873" providerId="Windows Live" clId="Web-{00000000-0000-0000-0000-000000000000}" dt="2026-10-07T05:02:57.998" v="132"/>
-          <ac:spMkLst>
-            <pc:docMk/>
-            <pc:sldMk cId="371598909" sldId="278"/>
-            <ac:spMk id="5" creationId="{1AA79736-8821-6ECF-152C-D549049E6169}"/>
-          </ac:spMkLst>
-        </pc:spChg>
-        <pc:spChg chg="add del">
-          <ac:chgData name="Bryan Sun" userId="851caa7714272873" providerId="Windows Live" clId="Web-{00000000-0000-0000-0000-000000000000}" dt="2026-10-07T05:02:57.998" v="131"/>
-          <ac:spMkLst>
-            <pc:docMk/>
-            <pc:sldMk cId="371598909" sldId="278"/>
-            <ac:spMk id="7" creationId="{24043622-C646-80F5-B2BB-65121CDCC5F9}"/>
-          </ac:spMkLst>
-        </pc:spChg>
-        <pc:spChg chg="add del">
-          <ac:chgData name="Bryan Sun" userId="851caa7714272873" providerId="Windows Live" clId="Web-{00000000-0000-0000-0000-000000000000}" dt="2026-10-07T05:02:57.998" v="130"/>
-          <ac:spMkLst>
-            <pc:docMk/>
-            <pc:sldMk cId="371598909" sldId="278"/>
-            <ac:spMk id="9" creationId="{FF242ADF-63CD-67E1-B15D-759C20A61E25}"/>
-          </ac:spMkLst>
-        </pc:spChg>
-        <pc:spChg chg="add del">
-          <ac:chgData name="Bryan Sun" userId="851caa7714272873" providerId="Windows Live" clId="Web-{00000000-0000-0000-0000-000000000000}" dt="2026-10-07T05:02:57.998" v="129"/>
-          <ac:spMkLst>
-            <pc:docMk/>
-            <pc:sldMk cId="371598909" sldId="278"/>
-            <ac:spMk id="11" creationId="{6D13A2D8-3C66-7C52-857A-37FCDEDF34FC}"/>
-          </ac:spMkLst>
-        </pc:spChg>
-        <pc:spChg chg="add del">
-          <ac:chgData name="Bryan Sun" userId="851caa7714272873" providerId="Windows Live" clId="Web-{00000000-0000-0000-0000-000000000000}" dt="2026-10-07T05:02:57.998" v="128"/>
-          <ac:spMkLst>
-            <pc:docMk/>
-            <pc:sldMk cId="371598909" sldId="278"/>
-            <ac:spMk id="13" creationId="{330E9E6A-23F6-E46E-BDE2-4BEAEF95583D}"/>
-          </ac:spMkLst>
-        </pc:spChg>
-        <pc:spChg chg="add del">
-          <ac:chgData name="Bryan Sun" userId="851caa7714272873" providerId="Windows Live" clId="Web-{00000000-0000-0000-0000-000000000000}" dt="2026-10-07T05:02:57.998" v="127"/>
-          <ac:spMkLst>
-            <pc:docMk/>
-            <pc:sldMk cId="371598909" sldId="278"/>
-            <ac:spMk id="15" creationId="{28687015-D45B-49B8-ADB4-8913B1010C30}"/>
-          </ac:spMkLst>
-        </pc:spChg>
-        <pc:spChg chg="add del">
-          <ac:chgData name="Bryan Sun" userId="851caa7714272873" providerId="Windows Live" clId="Web-{00000000-0000-0000-0000-000000000000}" dt="2026-10-07T05:02:57.998" v="126"/>
-          <ac:spMkLst>
-            <pc:docMk/>
-            <pc:sldMk cId="371598909" sldId="278"/>
-            <ac:spMk id="17" creationId="{4B04F514-06BB-24A6-AC00-5A3A4C8594CE}"/>
-          </ac:spMkLst>
-        </pc:spChg>
-        <pc:spChg chg="add del">
-          <ac:chgData name="Bryan Sun" userId="851caa7714272873" providerId="Windows Live" clId="Web-{00000000-0000-0000-0000-000000000000}" dt="2026-10-07T05:02:57.998" v="125"/>
-          <ac:spMkLst>
-            <pc:docMk/>
-            <pc:sldMk cId="371598909" sldId="278"/>
-            <ac:spMk id="19" creationId="{60D88AEA-5982-12B7-A9C7-6A50A8B422CE}"/>
-          </ac:spMkLst>
-        </pc:spChg>
-        <pc:spChg chg="add del">
-          <ac:chgData name="Bryan Sun" userId="851caa7714272873" providerId="Windows Live" clId="Web-{00000000-0000-0000-0000-000000000000}" dt="2026-10-07T05:02:57.998" v="124"/>
-          <ac:spMkLst>
-            <pc:docMk/>
-            <pc:sldMk cId="371598909" sldId="278"/>
-            <ac:spMk id="21" creationId="{140250C9-7881-DFE6-153A-A46F6D91049E}"/>
-          </ac:spMkLst>
-        </pc:spChg>
-        <pc:spChg chg="add del">
-          <ac:chgData name="Bryan Sun" userId="851caa7714272873" providerId="Windows Live" clId="Web-{00000000-0000-0000-0000-000000000000}" dt="2026-10-07T05:02:57.998" v="123"/>
-          <ac:spMkLst>
-            <pc:docMk/>
-            <pc:sldMk cId="371598909" sldId="278"/>
-            <ac:spMk id="23" creationId="{0A14D730-232C-6F2A-6A43-DFE89B3646AA}"/>
-          </ac:spMkLst>
-        </pc:spChg>
-        <pc:spChg chg="add del">
-          <ac:chgData name="Bryan Sun" userId="851caa7714272873" providerId="Windows Live" clId="Web-{00000000-0000-0000-0000-000000000000}" dt="2026-10-07T05:02:57.998" v="122"/>
-          <ac:spMkLst>
-            <pc:docMk/>
-            <pc:sldMk cId="371598909" sldId="278"/>
-            <ac:spMk id="25" creationId="{A963CB7B-83CF-CF3F-6BC5-29E43FCECB44}"/>
-          </ac:spMkLst>
-        </pc:spChg>
-        <pc:spChg chg="add del">
-          <ac:chgData name="Bryan Sun" userId="851caa7714272873" providerId="Windows Live" clId="Web-{00000000-0000-0000-0000-000000000000}" dt="2026-10-07T05:02:57.998" v="121"/>
-          <ac:spMkLst>
-            <pc:docMk/>
-            <pc:sldMk cId="371598909" sldId="278"/>
-            <ac:spMk id="27" creationId="{ECC76C33-0928-A1A0-09ED-230E2F8479CB}"/>
-          </ac:spMkLst>
-        </pc:spChg>
-        <pc:spChg chg="add del">
-          <ac:chgData name="Bryan Sun" userId="851caa7714272873" providerId="Windows Live" clId="Web-{00000000-0000-0000-0000-000000000000}" dt="2026-10-07T05:02:57.998" v="120"/>
-          <ac:spMkLst>
-            <pc:docMk/>
-            <pc:sldMk cId="371598909" sldId="278"/>
-            <ac:spMk id="29" creationId="{DF5C9298-6E9B-6B0A-386B-6B753E57BCB8}"/>
-          </ac:spMkLst>
-        </pc:spChg>
-        <pc:spChg chg="add del">
-          <ac:chgData name="Bryan Sun" userId="851caa7714272873" providerId="Windows Live" clId="Web-{00000000-0000-0000-0000-000000000000}" dt="2026-10-07T05:02:57.998" v="119"/>
-          <ac:spMkLst>
-            <pc:docMk/>
-            <pc:sldMk cId="371598909" sldId="278"/>
-            <ac:spMk id="31" creationId="{A2102820-B101-0EA0-6FAE-7DF09665F770}"/>
-          </ac:spMkLst>
-        </pc:spChg>
-        <pc:spChg chg="add del">
-          <ac:chgData name="Bryan Sun" userId="851caa7714272873" providerId="Windows Live" clId="Web-{00000000-0000-0000-0000-000000000000}" dt="2026-10-07T05:02:57.998" v="118"/>
-          <ac:spMkLst>
-            <pc:docMk/>
-            <pc:sldMk cId="371598909" sldId="278"/>
-            <ac:spMk id="33" creationId="{44315CDE-76D6-BBB7-65C7-9740B0DDF4D7}"/>
-          </ac:spMkLst>
-        </pc:spChg>
-        <pc:spChg chg="add del">
-          <ac:chgData name="Bryan Sun" userId="851caa7714272873" providerId="Windows Live" clId="Web-{00000000-0000-0000-0000-000000000000}" dt="2026-10-07T05:02:57.998" v="117"/>
-          <ac:spMkLst>
-            <pc:docMk/>
-            <pc:sldMk cId="371598909" sldId="278"/>
-            <ac:spMk id="35" creationId="{6F8DC7E5-CB61-AB9D-3190-3B774DABCD5B}"/>
-          </ac:spMkLst>
-        </pc:spChg>
-        <pc:spChg chg="add del">
-          <ac:chgData name="Bryan Sun" userId="851caa7714272873" providerId="Windows Live" clId="Web-{00000000-0000-0000-0000-000000000000}" dt="2026-10-07T05:02:57.998" v="116"/>
-          <ac:spMkLst>
-            <pc:docMk/>
-            <pc:sldMk cId="371598909" sldId="278"/>
-            <ac:spMk id="37" creationId="{D7693638-3F5E-3A69-623E-F8171474F0D9}"/>
-          </ac:spMkLst>
-        </pc:spChg>
-        <pc:spChg chg="add del">
-          <ac:chgData name="Bryan Sun" userId="851caa7714272873" providerId="Windows Live" clId="Web-{00000000-0000-0000-0000-000000000000}" dt="2026-10-07T05:02:57.998" v="115"/>
-          <ac:spMkLst>
-            <pc:docMk/>
-            <pc:sldMk cId="371598909" sldId="278"/>
-            <ac:spMk id="39" creationId="{482D290A-7068-EBBA-6496-F810FD344CDA}"/>
-          </ac:spMkLst>
-        </pc:spChg>
-        <pc:spChg chg="add del">
-          <ac:chgData name="Bryan Sun" userId="851caa7714272873" providerId="Windows Live" clId="Web-{00000000-0000-0000-0000-000000000000}" dt="2026-10-07T05:02:57.998" v="114"/>
-          <ac:spMkLst>
-            <pc:docMk/>
-            <pc:sldMk cId="371598909" sldId="278"/>
-            <ac:spMk id="41" creationId="{D45435AD-ADAD-D842-4CD4-EC08D04528A6}"/>
-          </ac:spMkLst>
-        </pc:spChg>
-        <pc:spChg chg="add del">
-          <ac:chgData name="Bryan Sun" userId="851caa7714272873" providerId="Windows Live" clId="Web-{00000000-0000-0000-0000-000000000000}" dt="2026-10-07T05:02:57.998" v="113"/>
-          <ac:spMkLst>
-            <pc:docMk/>
-            <pc:sldMk cId="371598909" sldId="278"/>
-            <ac:spMk id="43" creationId="{568137BA-BCE9-37CD-B2E1-682093C9252D}"/>
-          </ac:spMkLst>
-        </pc:spChg>
-        <pc:spChg chg="add del">
-          <ac:chgData name="Bryan Sun" userId="851caa7714272873" providerId="Windows Live" clId="Web-{00000000-0000-0000-0000-000000000000}" dt="2026-10-07T05:02:57.998" v="112"/>
-          <ac:spMkLst>
-            <pc:docMk/>
-            <pc:sldMk cId="371598909" sldId="278"/>
-            <ac:spMk id="45" creationId="{700B0AA4-3130-3FBF-129C-D9928BAE7F89}"/>
-          </ac:spMkLst>
-        </pc:spChg>
-        <pc:spChg chg="add del">
-          <ac:chgData name="Bryan Sun" userId="851caa7714272873" providerId="Windows Live" clId="Web-{00000000-0000-0000-0000-000000000000}" dt="2026-10-07T05:02:57.998" v="111"/>
-          <ac:spMkLst>
-            <pc:docMk/>
-            <pc:sldMk cId="371598909" sldId="278"/>
-            <ac:spMk id="47" creationId="{973D67DA-C270-D72C-9AFF-995CDECF6CFB}"/>
-          </ac:spMkLst>
-        </pc:spChg>
-        <pc:spChg chg="add del">
-          <ac:chgData name="Bryan Sun" userId="851caa7714272873" providerId="Windows Live" clId="Web-{00000000-0000-0000-0000-000000000000}" dt="2026-10-07T05:02:57.998" v="110"/>
-          <ac:spMkLst>
-            <pc:docMk/>
-            <pc:sldMk cId="371598909" sldId="278"/>
-            <ac:spMk id="49" creationId="{6DA4AB16-8C4C-58FA-5B12-FE786203171E}"/>
-          </ac:spMkLst>
-        </pc:spChg>
-        <pc:spChg chg="add del">
-          <ac:chgData name="Bryan Sun" userId="851caa7714272873" providerId="Windows Live" clId="Web-{00000000-0000-0000-0000-000000000000}" dt="2026-10-07T05:02:57.998" v="109"/>
-          <ac:spMkLst>
-            <pc:docMk/>
-            <pc:sldMk cId="371598909" sldId="278"/>
-            <ac:spMk id="51" creationId="{E82958B4-D0F1-621C-015E-C01803BC35FE}"/>
-          </ac:spMkLst>
-        </pc:spChg>
-        <pc:spChg chg="add del">
-          <ac:chgData name="Bryan Sun" userId="851caa7714272873" providerId="Windows Live" clId="Web-{00000000-0000-0000-0000-000000000000}" dt="2026-10-07T05:02:57.998" v="108"/>
-          <ac:spMkLst>
-            <pc:docMk/>
-            <pc:sldMk cId="371598909" sldId="278"/>
-            <ac:spMk id="53" creationId="{44E88E37-3ABA-958C-5D4A-CDA44DE5BB03}"/>
-          </ac:spMkLst>
-        </pc:spChg>
-        <pc:spChg chg="add del">
-          <ac:chgData name="Bryan Sun" userId="851caa7714272873" providerId="Windows Live" clId="Web-{00000000-0000-0000-0000-000000000000}" dt="2026-10-07T05:02:57.998" v="107"/>
-          <ac:spMkLst>
-            <pc:docMk/>
-            <pc:sldMk cId="371598909" sldId="278"/>
-            <ac:spMk id="55" creationId="{B6C5032C-60C1-A9C1-46CE-2462704A3C2F}"/>
-          </ac:spMkLst>
-        </pc:spChg>
-        <pc:spChg chg="add del">
-          <ac:chgData name="Bryan Sun" userId="851caa7714272873" providerId="Windows Live" clId="Web-{00000000-0000-0000-0000-000000000000}" dt="2026-10-07T05:02:57.998" v="106"/>
-          <ac:spMkLst>
-            <pc:docMk/>
-            <pc:sldMk cId="371598909" sldId="278"/>
-            <ac:spMk id="57" creationId="{60C2939A-FB02-803A-2977-D83ECA224C2B}"/>
-          </ac:spMkLst>
-        </pc:spChg>
-        <pc:spChg chg="add del">
-          <ac:chgData name="Bryan Sun" userId="851caa7714272873" providerId="Windows Live" clId="Web-{00000000-0000-0000-0000-000000000000}" dt="2026-10-07T05:02:57.998" v="105"/>
-          <ac:spMkLst>
-            <pc:docMk/>
-            <pc:sldMk cId="371598909" sldId="278"/>
-            <ac:spMk id="59" creationId="{0251F339-9C29-F983-9E36-5FFAC5FC917C}"/>
-          </ac:spMkLst>
-        </pc:spChg>
-        <pc:spChg chg="add del">
-          <ac:chgData name="Bryan Sun" userId="851caa7714272873" providerId="Windows Live" clId="Web-{00000000-0000-0000-0000-000000000000}" dt="2026-10-07T05:02:57.998" v="104"/>
-          <ac:spMkLst>
-            <pc:docMk/>
-            <pc:sldMk cId="371598909" sldId="278"/>
-            <ac:spMk id="61" creationId="{72E98325-134F-C604-C82B-5D4BA44C0E33}"/>
-          </ac:spMkLst>
-        </pc:spChg>
-        <pc:spChg chg="add del">
-          <ac:chgData name="Bryan Sun" userId="851caa7714272873" providerId="Windows Live" clId="Web-{00000000-0000-0000-0000-000000000000}" dt="2026-10-07T05:02:57.998" v="103"/>
-          <ac:spMkLst>
-            <pc:docMk/>
-            <pc:sldMk cId="371598909" sldId="278"/>
-            <ac:spMk id="63" creationId="{952A07A9-21F8-9D4B-EDEF-67EE3A56130D}"/>
-          </ac:spMkLst>
-        </pc:spChg>
-        <pc:spChg chg="add del">
-          <ac:chgData name="Bryan Sun" userId="851caa7714272873" providerId="Windows Live" clId="Web-{00000000-0000-0000-0000-000000000000}" dt="2026-10-07T05:02:57.998" v="102"/>
-          <ac:spMkLst>
-            <pc:docMk/>
-            <pc:sldMk cId="371598909" sldId="278"/>
-            <ac:spMk id="65" creationId="{0465EB5E-31D4-AFA6-7B79-056E0FD6CB5E}"/>
-          </ac:spMkLst>
-        </pc:spChg>
-        <pc:spChg chg="add del">
-          <ac:chgData name="Bryan Sun" userId="851caa7714272873" providerId="Windows Live" clId="Web-{00000000-0000-0000-0000-000000000000}" dt="2026-10-07T05:02:57.998" v="101"/>
-          <ac:spMkLst>
-            <pc:docMk/>
-            <pc:sldMk cId="371598909" sldId="278"/>
-            <ac:spMk id="67" creationId="{1256BE89-3712-00A4-26A0-82F148891C6B}"/>
-          </ac:spMkLst>
-        </pc:spChg>
-        <pc:spChg chg="add del">
-          <ac:chgData name="Bryan Sun" userId="851caa7714272873" providerId="Windows Live" clId="Web-{00000000-0000-0000-0000-000000000000}" dt="2026-10-07T05:02:57.998" v="100"/>
-          <ac:spMkLst>
-            <pc:docMk/>
-            <pc:sldMk cId="371598909" sldId="278"/>
-            <ac:spMk id="69" creationId="{3C4371E6-06F8-CC43-14E1-666997FBF46F}"/>
-          </ac:spMkLst>
-        </pc:spChg>
-        <pc:spChg chg="add del">
-          <ac:chgData name="Bryan Sun" userId="851caa7714272873" providerId="Windows Live" clId="Web-{00000000-0000-0000-0000-000000000000}" dt="2026-10-07T05:02:55.201" v="99"/>
-          <ac:spMkLst>
-            <pc:docMk/>
-            <pc:sldMk cId="371598909" sldId="278"/>
-            <ac:spMk id="71" creationId="{50E69439-4A27-4351-1CBD-D2C8B33464DF}"/>
-          </ac:spMkLst>
-        </pc:spChg>
-        <pc:spChg chg="add del">
-          <ac:chgData name="Bryan Sun" userId="851caa7714272873" providerId="Windows Live" clId="Web-{00000000-0000-0000-0000-000000000000}" dt="2026-10-07T05:02:55.201" v="98"/>
-          <ac:spMkLst>
-            <pc:docMk/>
-            <pc:sldMk cId="371598909" sldId="278"/>
-            <ac:spMk id="73" creationId="{89A49D5B-9A34-E028-8D56-92EC9EE97D2A}"/>
-          </ac:spMkLst>
-        </pc:spChg>
-        <pc:spChg chg="add del">
-          <ac:chgData name="Bryan Sun" userId="851caa7714272873" providerId="Windows Live" clId="Web-{00000000-0000-0000-0000-000000000000}" dt="2026-10-07T05:02:55.201" v="97"/>
-          <ac:spMkLst>
-            <pc:docMk/>
-            <pc:sldMk cId="371598909" sldId="278"/>
-            <ac:spMk id="75" creationId="{6C1F8AC9-68B1-0BDC-7439-86F222DA8F92}"/>
-          </ac:spMkLst>
-        </pc:spChg>
-        <pc:spChg chg="add del">
-          <ac:chgData name="Bryan Sun" userId="851caa7714272873" providerId="Windows Live" clId="Web-{00000000-0000-0000-0000-000000000000}" dt="2026-10-07T05:02:55.201" v="96"/>
-          <ac:spMkLst>
-            <pc:docMk/>
-            <pc:sldMk cId="371598909" sldId="278"/>
-            <ac:spMk id="77" creationId="{F6F998AC-FE2C-D2FF-5633-B430ABE6A3C9}"/>
-          </ac:spMkLst>
-        </pc:spChg>
-        <pc:spChg chg="add del">
-          <ac:chgData name="Bryan Sun" userId="851caa7714272873" providerId="Windows Live" clId="Web-{00000000-0000-0000-0000-000000000000}" dt="2026-10-07T05:02:55.201" v="95"/>
-          <ac:spMkLst>
-            <pc:docMk/>
-            <pc:sldMk cId="371598909" sldId="278"/>
-            <ac:spMk id="79" creationId="{0CD58514-ED15-E889-76B9-6307BFBFFF37}"/>
-          </ac:spMkLst>
-        </pc:spChg>
-        <pc:spChg chg="add del">
-          <ac:chgData name="Bryan Sun" userId="851caa7714272873" providerId="Windows Live" clId="Web-{00000000-0000-0000-0000-000000000000}" dt="2026-10-07T05:02:55.201" v="94"/>
-          <ac:spMkLst>
-            <pc:docMk/>
-            <pc:sldMk cId="371598909" sldId="278"/>
-            <ac:spMk id="81" creationId="{3E89A220-7C9A-D52A-A5E4-4B9470DDD598}"/>
-          </ac:spMkLst>
-        </pc:spChg>
-        <pc:spChg chg="add del">
-          <ac:chgData name="Bryan Sun" userId="851caa7714272873" providerId="Windows Live" clId="Web-{00000000-0000-0000-0000-000000000000}" dt="2026-10-07T05:02:55.201" v="93"/>
-          <ac:spMkLst>
-            <pc:docMk/>
-            <pc:sldMk cId="371598909" sldId="278"/>
-            <ac:spMk id="83" creationId="{D5041900-4441-3919-774A-E34043C02A6C}"/>
-          </ac:spMkLst>
-        </pc:spChg>
-        <pc:spChg chg="add del">
-          <ac:chgData name="Bryan Sun" userId="851caa7714272873" providerId="Windows Live" clId="Web-{00000000-0000-0000-0000-000000000000}" dt="2026-10-07T05:02:55.201" v="92"/>
-          <ac:spMkLst>
-            <pc:docMk/>
-            <pc:sldMk cId="371598909" sldId="278"/>
-            <ac:spMk id="85" creationId="{22B298AA-8B1E-48E1-4BDB-015FE81FA74C}"/>
-          </ac:spMkLst>
-        </pc:spChg>
-        <pc:spChg chg="add del">
-          <ac:chgData name="Bryan Sun" userId="851caa7714272873" providerId="Windows Live" clId="Web-{00000000-0000-0000-0000-000000000000}" dt="2026-10-07T05:02:55.201" v="91"/>
-          <ac:spMkLst>
-            <pc:docMk/>
-            <pc:sldMk cId="371598909" sldId="278"/>
-            <ac:spMk id="87" creationId="{0CAAA3C6-E984-D8B3-EBCD-AE8302A2A809}"/>
-          </ac:spMkLst>
-        </pc:spChg>
-        <pc:spChg chg="add del">
-          <ac:chgData name="Bryan Sun" userId="851caa7714272873" providerId="Windows Live" clId="Web-{00000000-0000-0000-0000-000000000000}" dt="2026-10-07T05:02:55.201" v="90"/>
-          <ac:spMkLst>
-            <pc:docMk/>
-            <pc:sldMk cId="371598909" sldId="278"/>
-            <ac:spMk id="89" creationId="{26F5A0E2-04AE-EF29-00B0-3936F37B184B}"/>
-          </ac:spMkLst>
-        </pc:spChg>
-        <pc:spChg chg="add del">
-          <ac:chgData name="Bryan Sun" userId="851caa7714272873" providerId="Windows Live" clId="Web-{00000000-0000-0000-0000-000000000000}" dt="2026-10-07T05:02:55.201" v="89"/>
-          <ac:spMkLst>
-            <pc:docMk/>
-            <pc:sldMk cId="371598909" sldId="278"/>
-            <ac:spMk id="91" creationId="{FFDC1418-4DC5-A7F1-CD3B-354FF6C9AA69}"/>
-          </ac:spMkLst>
-        </pc:spChg>
-        <pc:spChg chg="add del">
-          <ac:chgData name="Bryan Sun" userId="851caa7714272873" providerId="Windows Live" clId="Web-{00000000-0000-0000-0000-000000000000}" dt="2026-10-07T05:02:55.201" v="88"/>
-          <ac:spMkLst>
-            <pc:docMk/>
-            <pc:sldMk cId="371598909" sldId="278"/>
-            <ac:spMk id="93" creationId="{60D72C10-BAC0-CF5E-1C71-11410756B67E}"/>
-          </ac:spMkLst>
-        </pc:spChg>
-        <pc:spChg chg="add del">
-          <ac:chgData name="Bryan Sun" userId="851caa7714272873" providerId="Windows Live" clId="Web-{00000000-0000-0000-0000-000000000000}" dt="2026-10-07T05:02:55.201" v="87"/>
-          <ac:spMkLst>
-            <pc:docMk/>
-            <pc:sldMk cId="371598909" sldId="278"/>
-            <ac:spMk id="95" creationId="{607E1CC0-65FE-C42C-90E5-405E93866499}"/>
-          </ac:spMkLst>
-        </pc:spChg>
-        <pc:spChg chg="add del">
-          <ac:chgData name="Bryan Sun" userId="851caa7714272873" providerId="Windows Live" clId="Web-{00000000-0000-0000-0000-000000000000}" dt="2026-10-07T05:02:55.201" v="86"/>
-          <ac:spMkLst>
-            <pc:docMk/>
-            <pc:sldMk cId="371598909" sldId="278"/>
-            <ac:spMk id="97" creationId="{FC51566E-4192-0C87-F322-81FC9AC06518}"/>
-          </ac:spMkLst>
-        </pc:spChg>
-        <pc:spChg chg="add del">
-          <ac:chgData name="Bryan Sun" userId="851caa7714272873" providerId="Windows Live" clId="Web-{00000000-0000-0000-0000-000000000000}" dt="2026-10-07T05:02:55.201" v="85"/>
-          <ac:spMkLst>
-            <pc:docMk/>
-            <pc:sldMk cId="371598909" sldId="278"/>
-            <ac:spMk id="99" creationId="{0F648AE1-BC64-7E9E-339E-302E2EF8BA33}"/>
-          </ac:spMkLst>
-        </pc:spChg>
-        <pc:spChg chg="add del">
-          <ac:chgData name="Bryan Sun" userId="851caa7714272873" providerId="Windows Live" clId="Web-{00000000-0000-0000-0000-000000000000}" dt="2026-10-07T05:02:55.201" v="84"/>
-          <ac:spMkLst>
-            <pc:docMk/>
-            <pc:sldMk cId="371598909" sldId="278"/>
-            <ac:spMk id="101" creationId="{DC0A80F5-9CC9-330E-4C2A-1D0BC41E336D}"/>
-          </ac:spMkLst>
-        </pc:spChg>
-        <pc:spChg chg="add del">
-          <ac:chgData name="Bryan Sun" userId="851caa7714272873" providerId="Windows Live" clId="Web-{00000000-0000-0000-0000-000000000000}" dt="2026-10-07T05:02:55.201" v="83"/>
-          <ac:spMkLst>
-            <pc:docMk/>
-            <pc:sldMk cId="371598909" sldId="278"/>
-            <ac:spMk id="103" creationId="{B2F03304-2CF4-B6BC-68FA-070B13B9806F}"/>
-          </ac:spMkLst>
-        </pc:spChg>
-        <pc:spChg chg="add del">
-          <ac:chgData name="Bryan Sun" userId="851caa7714272873" providerId="Windows Live" clId="Web-{00000000-0000-0000-0000-000000000000}" dt="2026-10-07T05:02:55.201" v="82"/>
-          <ac:spMkLst>
-            <pc:docMk/>
-            <pc:sldMk cId="371598909" sldId="278"/>
-            <ac:spMk id="105" creationId="{33239614-9069-DAC7-4DC0-D5E058D80EDF}"/>
-          </ac:spMkLst>
-        </pc:spChg>
-        <pc:spChg chg="add del">
-          <ac:chgData name="Bryan Sun" userId="851caa7714272873" providerId="Windows Live" clId="Web-{00000000-0000-0000-0000-000000000000}" dt="2026-10-07T05:02:55.201" v="81"/>
-          <ac:spMkLst>
-            <pc:docMk/>
-            <pc:sldMk cId="371598909" sldId="278"/>
-            <ac:spMk id="107" creationId="{3909C49F-C342-E4CB-D94E-3EEBD8ABF542}"/>
-          </ac:spMkLst>
-        </pc:spChg>
-        <pc:spChg chg="add del">
-          <ac:chgData name="Bryan Sun" userId="851caa7714272873" providerId="Windows Live" clId="Web-{00000000-0000-0000-0000-000000000000}" dt="2026-10-07T05:02:55.201" v="80"/>
-          <ac:spMkLst>
-            <pc:docMk/>
-            <pc:sldMk cId="371598909" sldId="278"/>
-            <ac:spMk id="109" creationId="{F44163E8-ECBF-CAE0-1E89-6A5862ECD720}"/>
-          </ac:spMkLst>
-        </pc:spChg>
-        <pc:spChg chg="add del">
-          <ac:chgData name="Bryan Sun" userId="851caa7714272873" providerId="Windows Live" clId="Web-{00000000-0000-0000-0000-000000000000}" dt="2026-10-07T05:02:55.201" v="79"/>
-          <ac:spMkLst>
-            <pc:docMk/>
-            <pc:sldMk cId="371598909" sldId="278"/>
-            <ac:spMk id="111" creationId="{4B86643E-E29C-D3AD-1565-C4B211F97D75}"/>
-          </ac:spMkLst>
-        </pc:spChg>
-        <pc:spChg chg="add del">
-          <ac:chgData name="Bryan Sun" userId="851caa7714272873" providerId="Windows Live" clId="Web-{00000000-0000-0000-0000-000000000000}" dt="2026-10-07T05:02:55.201" v="78"/>
-          <ac:spMkLst>
-            <pc:docMk/>
-            <pc:sldMk cId="371598909" sldId="278"/>
-            <ac:spMk id="113" creationId="{D87BD5AA-F440-E386-9357-0643AC9642D4}"/>
-          </ac:spMkLst>
-        </pc:spChg>
-        <pc:spChg chg="add del">
-          <ac:chgData name="Bryan Sun" userId="851caa7714272873" providerId="Windows Live" clId="Web-{00000000-0000-0000-0000-000000000000}" dt="2026-10-07T05:02:55.201" v="77"/>
-          <ac:spMkLst>
-            <pc:docMk/>
-            <pc:sldMk cId="371598909" sldId="278"/>
-            <ac:spMk id="115" creationId="{63561E45-FE77-5E5E-0868-F7EBEDB4907F}"/>
-          </ac:spMkLst>
-        </pc:spChg>
-        <pc:spChg chg="add del">
-          <ac:chgData name="Bryan Sun" userId="851caa7714272873" providerId="Windows Live" clId="Web-{00000000-0000-0000-0000-000000000000}" dt="2026-10-07T05:02:55.201" v="76"/>
-          <ac:spMkLst>
-            <pc:docMk/>
-            <pc:sldMk cId="371598909" sldId="278"/>
-            <ac:spMk id="117" creationId="{D1160D12-45D7-8130-C558-C0B11DDC3D14}"/>
-          </ac:spMkLst>
-        </pc:spChg>
-        <pc:spChg chg="add del">
-          <ac:chgData name="Bryan Sun" userId="851caa7714272873" providerId="Windows Live" clId="Web-{00000000-0000-0000-0000-000000000000}" dt="2026-10-07T05:02:55.201" v="75"/>
-          <ac:spMkLst>
-            <pc:docMk/>
-            <pc:sldMk cId="371598909" sldId="278"/>
-            <ac:spMk id="119" creationId="{02A23E15-2053-C858-0451-3C70297A0D23}"/>
-          </ac:spMkLst>
-        </pc:spChg>
-        <pc:spChg chg="add del">
-          <ac:chgData name="Bryan Sun" userId="851caa7714272873" providerId="Windows Live" clId="Web-{00000000-0000-0000-0000-000000000000}" dt="2026-10-07T05:02:55.201" v="74"/>
-          <ac:spMkLst>
-            <pc:docMk/>
-            <pc:sldMk cId="371598909" sldId="278"/>
-            <ac:spMk id="121" creationId="{08403F5B-3E74-A7A9-8AE4-451DA89D2ED9}"/>
-          </ac:spMkLst>
-        </pc:spChg>
-        <pc:spChg chg="add del">
-          <ac:chgData name="Bryan Sun" userId="851caa7714272873" providerId="Windows Live" clId="Web-{00000000-0000-0000-0000-000000000000}" dt="2026-10-07T05:02:55.201" v="73"/>
-          <ac:spMkLst>
-            <pc:docMk/>
-            <pc:sldMk cId="371598909" sldId="278"/>
-            <ac:spMk id="123" creationId="{E24EFCB5-4F80-28A5-D9C1-F5FD823A5816}"/>
-          </ac:spMkLst>
-        </pc:spChg>
-        <pc:spChg chg="add del">
-          <ac:chgData name="Bryan Sun" userId="851caa7714272873" providerId="Windows Live" clId="Web-{00000000-0000-0000-0000-000000000000}" dt="2026-10-07T05:02:55.201" v="72"/>
-          <ac:spMkLst>
-            <pc:docMk/>
-            <pc:sldMk cId="371598909" sldId="278"/>
-            <ac:spMk id="125" creationId="{3294603D-BB40-FABF-37CA-CFA3C0DB8399}"/>
-          </ac:spMkLst>
-        </pc:spChg>
-        <pc:spChg chg="add del">
-          <ac:chgData name="Bryan Sun" userId="851caa7714272873" providerId="Windows Live" clId="Web-{00000000-0000-0000-0000-000000000000}" dt="2026-10-07T05:02:55.201" v="71"/>
-          <ac:spMkLst>
-            <pc:docMk/>
-            <pc:sldMk cId="371598909" sldId="278"/>
-            <ac:spMk id="127" creationId="{47C97F4D-385E-2680-43F6-436323F36F50}"/>
-          </ac:spMkLst>
-        </pc:spChg>
-        <pc:spChg chg="add del">
-          <ac:chgData name="Bryan Sun" userId="851caa7714272873" providerId="Windows Live" clId="Web-{00000000-0000-0000-0000-000000000000}" dt="2026-10-07T05:02:55.201" v="70"/>
-          <ac:spMkLst>
-            <pc:docMk/>
-            <pc:sldMk cId="371598909" sldId="278"/>
-            <ac:spMk id="129" creationId="{CA49CD8D-0735-56CB-1935-A2D15060A99B}"/>
-          </ac:spMkLst>
-        </pc:spChg>
-        <pc:spChg chg="add del">
-          <ac:chgData name="Bryan Sun" userId="851caa7714272873" providerId="Windows Live" clId="Web-{00000000-0000-0000-0000-000000000000}" dt="2026-10-07T05:02:55.201" v="69"/>
-          <ac:spMkLst>
-            <pc:docMk/>
-            <pc:sldMk cId="371598909" sldId="278"/>
-            <ac:spMk id="131" creationId="{3C6F24E6-5C87-6C57-A02E-7164931D0A55}"/>
-          </ac:spMkLst>
-        </pc:spChg>
-        <pc:spChg chg="add del">
-          <ac:chgData name="Bryan Sun" userId="851caa7714272873" providerId="Windows Live" clId="Web-{00000000-0000-0000-0000-000000000000}" dt="2026-10-07T05:02:55.201" v="68"/>
-          <ac:spMkLst>
-            <pc:docMk/>
-            <pc:sldMk cId="371598909" sldId="278"/>
-            <ac:spMk id="133" creationId="{5DB14AEF-75A1-AE85-E3C7-13F8CC31A5B2}"/>
-          </ac:spMkLst>
-        </pc:spChg>
-        <pc:spChg chg="add del">
-          <ac:chgData name="Bryan Sun" userId="851caa7714272873" providerId="Windows Live" clId="Web-{00000000-0000-0000-0000-000000000000}" dt="2026-10-07T05:02:55.201" v="67"/>
-          <ac:spMkLst>
-            <pc:docMk/>
-            <pc:sldMk cId="371598909" sldId="278"/>
-            <ac:spMk id="135" creationId="{13E9631C-7A27-807C-2450-CCD7004B5F2B}"/>
-          </ac:spMkLst>
-        </pc:spChg>
-      </pc:sldChg>
     </pc:docChg>
   </pc:docChgLst>
 </pc:chgInfo>
+</file>
+
+<file path=ppt/ink/ink1.xml><?xml version="1.0" encoding="utf-8"?>
+<inkml:ink xmlns:inkml="http://www.w3.org/2003/InkML">
+  <inkml:definitions>
+    <inkml:context xml:id="ctx0">
+      <inkml:inkSource xml:id="inkSrc0">
+        <inkml:traceFormat>
+          <inkml:channel name="X" type="integer" min="-2.14748E9" max="2.14748E9" units="cm"/>
+          <inkml:channel name="Y" type="integer" min="-2.14748E9" max="2.14748E9" units="cm"/>
+          <inkml:channel name="F" type="integer" max="32767" units="dev"/>
+        </inkml:traceFormat>
+        <inkml:channelProperties>
+          <inkml:channelProperty channel="X" name="resolution" value="1000" units="1/cm"/>
+          <inkml:channelProperty channel="Y" name="resolution" value="1000" units="1/cm"/>
+          <inkml:channelProperty channel="F" name="resolution" value="0" units="1/dev"/>
+        </inkml:channelProperties>
+      </inkml:inkSource>
+    </inkml:context>
+    <inkml:brush xml:id="br0">
+      <inkml:brushProperty name="width" value="0.09086" units="cm"/>
+      <inkml:brushProperty name="height" value="0.09086" units="cm"/>
+      <inkml:brushProperty name="color" value="#FF0000"/>
+    </inkml:brush>
+  </inkml:definitions>
+  <inkml:trace contextRef="#ctx0" brushRef="#br0">7392 7508 7800,'-9'7'454,"1"-5"0,3 7 101,-1-4 0,-1-1 0,3 7-338,-1 2 1,-1-4 0,6 2 0,0 2-28,0 2 1,0 7-1,0 2 1,0 0-11,0-1 0,0 5 1,2-4-1,2 0-55,1 0 1,1 0-1,-6-4 1,0 2 24,0-2 0,0 6 0,0 1 1,0 5 34,0 1 1,0 7-1,0 4 1,0 6-86,0 5 1,0 4-1,0 5 1,0-3-29,0-6 0,0-4 0,0-1 0,0 1-61,0 4 1,0 2 0,0 6 0,0-3-83,0 3 1,0 3 0,0 4 0,-2 2-49,-4-3 0,5-2 0,-5-5 0,4-1 32,2 1 1,0-10 0,0-5-1,0-4-40,0-7 0,0 5 1,0-3-1,0-1-100,0-2 1,0-9-1,0-4-618,0-4-1432,0-9 586,0-1 1691,-7-23 0,0-44 0,3-33 0,-2-3 0,0 15 0,-1 1 0,1-1 0,0 1 0</inkml:trace>
+  <inkml:trace contextRef="#ctx0" brushRef="#br0">7392 7590 11830,'-9'2'886,"1"4"0,3 5-507,-1 3 1,-7 10-1,2 6 1,-3 5-168,-3 3 0,-1 8 0,-2-2 1,-4 4-280,-2 2 1,4-3 0,-4-1-1,0-4-301,1-1 0,6-4 1,1-10-1,7-5-623,4-3 0,-1-10 0,5-6-1120,-3-6 2111,1-14 0,19-75 0,-5 35 0,1-1 0</inkml:trace>
+  <inkml:trace contextRef="#ctx0" brushRef="#br0">7260 7656 7690,'7'-16'451,"-5"5"1,5 2 464,0 1 0,-3 3 0,7 5-606,2 0 0,2 7 0,1 4 0,1 4-168,-1 1 0,1 3 0,-1 1 0,1 4-72,-1 2 0,-5-4 0,0 3 1,2 1-210,2 0 0,2-6 0,-3 2 1,-1-4-364,-2-1 0,-5-2 0,3-2 1,0-4-1658,0-2 2159,-5-1 0,3-36 0,-7-7 0</inkml:trace>
+  <inkml:trace contextRef="#ctx0" brushRef="#br0">6201 10501 7728,'-16'-8'973,"-1"-1"2119,1 0-2261,6 2 1,-2 10-576,6 8 1,0 2-1,6 17 1,0 4-140,0 9 0,0 6 0,-1 8 1,-3 9-203,-2 10 0,-5 6 0,6 5 0,-1-1-336,-1-5 0,5-8 0,-3-12 0,3-8-456,2-7 1,2-20 0,3-17-498,6-11 0,-2-16 1374,2-15 0,-8-19 0,-2-10 0,3-9 0,-1 1 0</inkml:trace>
+  <inkml:trace contextRef="#ctx0" brushRef="#br0">6135 10732 7770,'-9'-27'0,"3"1"0,4 0 578,2 0 1,0 12 0,0-3 0,2 4 139,4 4 0,3-4 0,8 8-389,-1 1 0,6 15 1,0 7-1,-2 8-166,-1 9 0,-3 6 0,1 10 1,-1 4-219,1 6 0,-1 3 0,1 0 0,0-3-438,-1-6 0,-5 0 0,0-3 1,0-6-1303,-2-4 1,4-5 1794,-7-10 0,-38-69 0,-13-24 0</inkml:trace>
+  <inkml:trace contextRef="#ctx0" brushRef="#br0">6135 11013 7770,'-17'9'313,"1"-3"873,-1-4 1,8 0-769,4 3 0,10-3 1,6 4-1,6-6-354,5-6 1,2 2-1,5-7 1,-1-2-288,1-1 0,-3-3 1,0 1-1,-1-1-157,1 1 1,-6-6 0,4 0-1,-2 1-128,0 3 0,2 7 0,-4 2 0,4 1-955,2 5 1463,-6 1 0,48 2 0,4 0 0</inkml:trace>
+  <inkml:trace contextRef="#ctx0" brushRef="#br0">6648 10633 7770,'-17'-2'517,"1"-2"3157,-1-1-3081,8-1 1,9 1-1,13-2 1,7-1-391,7 1 1,5-6 0,1 4 0,-2-2-857,-3 0 0,3 2 0,-5-4 0,1 4-884,1 1 1,-8 1-1,2 3 532,-4-1 0,-3-3 1006,-4 3 1,-11 5 0,-11-2 354,-4 6 0,1 8 0,1-1 0,4 6 914,1 5 1,-3 4-1,6 7 1,1 0-589,2 0 1,4 2 0,2 4 0,3 5-716,2 3 0,2 1 1,6-4-1,-1-5-669,1-4 1,-1-2 0,-1-2 0,-2-3-174,-2-6 1,-7-4 0,-1-1 874,-6-1 0,-36-21 0,-14-6 0</inkml:trace>
+  <inkml:trace contextRef="#ctx0" brushRef="#br0">6780 11179 7770,'-17'0'509,"3"1"1,1 3 121,2 2 1,7 1 0,0-3-232,8 1 1,5 1 0,10-8 0,3-4-379,5-5 0,5-3 0,2-3 0,5-1-701,5-4 0,4 1 0,3-4 1,3-1-492,1 0 1,5-1 1169,-4-6 0,-8-19 0,3-10 0,1-5 0,0 0 0</inkml:trace>
+  <inkml:trace contextRef="#ctx0" brushRef="#br0">7541 10567 7770,'-8'-9'817,"5"1"0,-8 8 322,-2 0 1,-2 2 0,0 5-583,4 10 1,-2 3 0,8 11-1,1 6-59,2 4 1,4 3-1,4 5 1,5-1-468,3-4 1,10-3 0,4-12 0,5-5-554,6-8 1,1-12 0,6-6-1,-4-12-95,-1-12 0,-3-15 0,-7-6 0,-5-8 89,-9-4 1,-8 5 0,-9-1 0,0 4 411,0 1 0,-9 8 0,-6 5 0,-7 8 843,-4 7 1,-3 5-1,-8 6 1,-1 6 155,1 3 0,0 9 0,0 6 1,-3 7-736,-2 8 0,10 3 0,1 2 0,5 0-1031,6 0 0,4 0 0,5 0 883,5 1 0,19-23 0,5-6 0</inkml:trace>
+  <inkml:trace contextRef="#ctx0" brushRef="#br0">6234 12386 7770,'-16'0'364,"7"-2"0,1-2 0,3-3 61,-1-2 0,2-4 0,12-7 0,7-4-218,5-2 1,9-1 0,-1-7 0,5 1-553,5 0 1,-3 8 0,4 3-1,-4 5-410,-2 6 0,-6 4 0,-1 7 94,-2 0 1,-9 1 660,-10 5 0,-25 11 0,-8 8 0</inkml:trace>
+  <inkml:trace contextRef="#ctx0" brushRef="#br0">6433 12171 7770,'-17'16'459,"1"-5"1,1 0-1,2 2-68,2 2 0,7 2 0,-1-1 1,3 1 59,2-1 0,0 1 0,2-1 0,2 3-363,1 3 1,8-2 0,-2 7 0,4 1-248,1-2 1,1 5 0,-1-5 0,1-1-665,-1-3 0,-5-1 0,0-1 1,0 4 822,-1 1 0,-40 32 0,-16 13 0</inkml:trace>
+  <inkml:trace contextRef="#ctx0" brushRef="#br0">6333 13064 7770,'-5'16'0,"-1"1"1003,3-1 1,-5 1-426,3-1 0,1-6 0,10-5 1,5-5-292,3-5 1,5-12 0,1-12 0,4-8-147,2-7 0,7-11 1,7-4-1,1 0-656,-1 4 0,-1-2 1,-8 4-1,-2 3-345,-1 4 0,-14 15 1,3 2-1,-4 7 214,-4 7 1,-2 8 646,-7-4 1,0 9 0,0 2-1,0 9 646,0 6 0,0 3 0,0 4 1,2 6 277,4 3 0,-3 4 0,7 1 1,-1 3-486,0-2 0,-3-2 1,3-4-1,0-2-671,0-1 0,-5-13 1,3-1-277,0-5 0,-3-12 1,5-12-1,-1-7-25,-5-4 0,-1-7 0,-2-5 0,0-1 295,0-1 1,0 7 0,0-2-1,0 7 998,0 4 1,0 2-89,0 6 0,2 6 0,2 7 0,3 8-66,2 12 1,0 1 0,4 10 0,-2-1-558,2-1 1,2 5-1,0-5 1,-3 0-607,-1-4 1,0-4-1,4-1 1,-2-3-1623,-2-3 1,0-3 2177,6-8 0,-1-37 0,1-9 0</inkml:trace>
+  <inkml:trace contextRef="#ctx0" brushRef="#br0">7193 12386 7768,'-16'7'291,"5"-5"1,2 5 753,1 1 0,10-5 0,11 8 1,5 2-352,4 2 1,6 1-1,-4 1 1,2 0-697,3-1 0,-3 2 1,-1 3-1,-1-1-307,-4-5 0,-3 1 0,-4-7 149,-2 1 0,-7-5 0,1-10 0,-3-8-7,-2-8 0,-7-4 0,-4-8 1,-4-2 154,-2-4 0,6 2 0,0-5 0,-2 2-285,-1 3 0,-1 8 1,2 3-1,4 0-1230,2 0 1,-1 4 1526,3-5 0,10-8 0,-3-7 0</inkml:trace>
+  <inkml:trace contextRef="#ctx0" brushRef="#br0">7375 11906 7738,'0'9'4284,"8"-1"-6127,3-8 1843,-4 0 0,15 14 0,-4 5 0</inkml:trace>
+  <inkml:trace contextRef="#ctx0" brushRef="#br0">7524 12254 7738,'0'25'285,"0"-3"0,0 2 0,2-2 0,2 0-48,1 2 0,8-5 0,-4 3 0,2-6-1881,0-5 1644,0-4 0,-2-65 0,-1-16 0</inkml:trace>
+  <inkml:trace contextRef="#ctx0" brushRef="#br0">7640 11559 7738,'-17'0'94,"6"0"2096,0 0-1737,8 0 0,1 2 0,9 1 0,0 5-88,1 1 0,5-3 0,-2 5 0,3 3-161,3 6 0,-1 1 1,3 8-1,1 8-48,2 11 1,6 9 0,-4 11 0,1 3-308,5 6 0,-5 2 1,1-3-1,-2-14-592,-4-16 1,-1-20 0,-5-22-1,-1-10 743,-2-11 0,-29-65 0,8 29 0,0-1 0</inkml:trace>
+  <inkml:trace contextRef="#ctx0" brushRef="#br0">7656 11989 7738,'-9'7'1027,"-4"-3"-15,8 7 1,1-9-630,10-2 1,3-2 0,9-11 0,4-5-350,6-8 0,3 0 0,2-3 0,0-4-315,0-4 1,0-2-1,0 6 1,1 0-341,-1 0 1,0 6 0,-2 1 0,-4 4 34,-5 7 0,-3 1 1,-3 6 113,1-1 851,-1-2 1,-6 4-1,-7 7 287,-6 9 0,1 13 0,-4 7 1,4 8 200,2 7 1,0 6 0,0 5-1,0 4-417,0-1 0,0 7 0,0-6 0,2-2-244,4-8 0,1-14 0,6-13 1,-2-5-515,2-6 0,2-8 0,1-14 0,1-11-574,-1-7 0,-1-12 0,-4-5 0,-4-5 429,1-4 0,-7 0 0,5 7 0,-4 4 1093,-2 5 0,0 6 406,0 6 0,2 12-480,3 15 0,-1 7 0,7 10 1,2 1-937,1 4 1,-3-3 0,0 3-1,2-4-3047,2-1 3417,2-1 0,6 1 0,3-1 0</inkml:trace>
+  <inkml:trace contextRef="#ctx0" brushRef="#br0">8582 11741 7733,'0'18'282,"0"2"0,-1 3 1040,-5-3 1,4-2 0,-1-3-656,6-4 0,6-7 0,8-16 0,-1-11-600,1-12 1,-6-9 0,0-13 0,0-10-484,-2-8 0,-1 0 1,-8-1-1,0 1-49,0 0 1,-13 1-1,-6 1 1,-3 9 109,-2 5 0,-5 11 0,3 11 1,1 10 490,3 10 0,3 10 1,5 12-1,1 8 374,2 7 1,5 13 0,-3 12 0,2 4 138,3 6 0,2 4 1,4 11-1,2 3-174,1 5 1,8 6 0,0-9 0,7 1-479,8-5 1,3-12 0,2-13 0,2-15-465,3-12 0,-1-16 1,5-4-1,-1-14-236,-4-11 1,-10-5-1,-5-2 1,-5-2 245,-6-4 1,2 3 0,-8-7 0,-1 3 328,-2 3 1,-4-3 0,-2-1-1,-1 3 391,1 3 1,-3 0 746,1 13 0,1 11 1,5 16-401,0 16 0,1 15 0,5 8 0,5 4-377,4 2 0,1-8 0,1-3 0,-1-4-234,1-2 1,1-2 0,2-4 0,4-6-353,2-9 0,-4-4 0,6-8 0,1-4-405,2-7 1,2-2 0,-1-14 0,-3-5 212,-2-4 1,-6-5 0,-1-5-1,-7 2 289,-8-2 0,-3 0 1,-2 2-1,0 6 134,0 3 0,-2 11 0,-1 6 0,-5 7 91,-1 3 1,4-3 292,-6 6 0,7-8-106,-2 2 0,3 3 0,-1 1 10,-2 0-76,1 5 0,3-6 1,-2 10 286,-1 4 0,-2-4 76,1 3 0,2-1 136,-7 1-457,8-3 181,-5 6 204,8-8-186,0 0 1,6 7-1,1 4-95,2 4 1,2 1 0,4 3-1,-2 1-277,-2 2 1,6 7 0,5-3 0,0 0-272,2-4 1,-4-4 0,5-3-1,1-4-110,0-6 1,0-12 0,1-10-1,-5-8-39,-3-7 1,-8-2-1,-2-3 1,-2-2 379,-3 2 1,-2 4 0,-4 4 0,-4 3 383,-5 2 0,-3 2 1,-3 6 134,1-1 0,-1 8 1,0 4-1,1 3-50,-1 2 0,1 9 0,-1 7 0,1 8-55,-1 2 1,1 11-1,1-4 1,2 4-152,2 3 0,6-5 0,-5 4 0,3-6-413,3-6 0,4-5 0,6-11 1,7-5-381,7-4 1,0-17 0,6-9 0,0-11-8,-1-9 0,-4-9 1,2-4-1,0 0 245,-1 0 1,-2 0 0,-7 4 0,-2-1 592,2 7 0,-1 1 0,1 14 325,-2 12 0,-5 11 0,5 16 0,2 10 96,1 9 0,3 10 0,-1 5 0,1 1-314,0 4 0,-1-6 0,-1-1 0,-2-4-183,-2-2 1,-2-5 0,4-3-1020,-2-1 0,-6-9 299,6-10 1,-7-10-1,1-6 1,-3-6 223,-2-5 0,0 2 1,0-6-1,-2 1 316,-3-1 0,3 4 0,-3-4 1,3 0 323,2 1 1,0 4 167,0-1 1,2 11 0,3 6-1,6 5-76,4 5 1,1 6-1,1 10 1,-1 1-309,1-2 1,5-4 0,2-3-1,0-4-528,0-1 1,0-5 0,-2-8 0,3-6-152,1-4 1,3-11-1,-7-7 1,-1-9 285,-3-6 1,-3-1-1,-4 1 1,-6 4 298,-3 5 1,-4 6 0,-3 6 0,-6 6 494,-4 9 0,-1 4 0,-1 10 0,2 4 226,4 5 0,-3 9 0,3 6 0,-2 3-192,2 6 1,-2 2 0,5-2 0,1 1-310,0 3 1,1-1 0,6-4 0,0-3-256,0-4 1,2 1 0,4-10 0,5-5-637,3-4 1,5-7 0,1-11 0,4-9-322,2-6 1,-6-6-1,2-6 1,-4-5 690,-1-1 0,-6 5 1,-2 0-1,-2 8 544,-3 7 990,-2 4 0,0 10-440,3 8 0,-1 6 1,5 7-1,0-4-453,0-2 1,2 4 0,6-5 0,-1-3-323,1-1 1,0-4-1,1-3 1,2-8-1,2-7 0,0-8 1,-7-9-1,-2-3-211,-2-2 1,-8-10 0,3-10 0,-4-6-268,-2-4 0,-13-5 0,-5 4 0,-4-1 250,-2 1 0,-6-3 0,3 10 1,-3 9 549,3 9 0,1 17 0,6 15 0,-2 10 465,2 10 0,3 7 0,4 13 0,4 11-261,2 12 1,1 5 0,8 8 0,3 5-154,6 5 1,6-1 0,3 9 0,4-1-406,2-2 1,3-3 0,8-12 0,3-8-936,3-12 0,-1-5 0,4-18 0,-4-10-895,-1-9 0,3-14 1866,-6-12 0,-8-6 0,1-7 0,-1-3 0,0 0 0</inkml:trace>
+  <inkml:trace contextRef="#ctx0" brushRef="#br0">8119 11195 7738,'-9'-2'983,"4"-3"0,12 1 0,10-7 1,10-4-857,10-5 1,7 0 0,9-8-1,4-3-394,2-6 1,7-10 0,6-8-1,-2 1-2249,-2 3 2516,-2 9 0,-7-14 0,-2 5 0</inkml:trace>
+  <inkml:trace contextRef="#ctx0" brushRef="#br0">8946 10567 7738,'-5'11'1257,"-3"-2"1,1 0-666,0 0 1,1-3 0,8 3-593,4-2 0,25-53 0,13-18 0</inkml:trace>
+  <inkml:trace contextRef="#ctx0" brushRef="#br0">3076 6813 8060,'-17'-17'224,"1"1"0,5-6 1,0 0-1,0 0 150,1-2 1,3 6 0,5-5 0,-1 5 422,-3 2 1,1-6-397,5-1 0,0 7 1,1 7-311,5 1 1,-4 5 0,3 8 0,-1 6-13,1 4 1,-3 11-1,4 5 1,-6 8-182,-6 3 0,4-4 0,-5 6 1,2 2-150,-1 2 1,-5 0-1,4-2 1,-1-4-11,1-1 0,1-5 1,6-8-524,0-6 746,0-4 0,6-10 1,1-7-1,3-6 153,2-4 1,3-2 0,2-4-13,-1 4 0,1-4 0,1 6 1,2-2-49,2 0 0,0 6 0,-5-5 1,1 3-5,4 3 0,-1 3 0,6 1 0,1 1-48,-3 5 0,7 3 0,-5 9 0,3 3-24,-3 1 0,-3 7 0,-7-3 0,-3 1 44,-3 1 1,-3 0 0,-10 3-1,-4-2 6,-5-1 1,-5-3 0,-6 7 0,-6-3-109,-3 0 1,3 6 0,1-9 0,-3 2-228,-1-1 0,0-7 0,3 1 1,6-9-337,4-6 0,1-4 0,3-4 642,3-4 0,-11-37 0,0-18 0,-1-7 0,0 0 0</inkml:trace>
+  <inkml:trace contextRef="#ctx0" brushRef="#br0">2960 7011 8134,'-5'-11'0,"-1"0"228,2-1 1,2 2 0,2-1 0,2 0 116,4 2 1,3-6 0,9 6 0,4-2-124,6 0 0,3 0 1,4-4-1,4 3-371,5 1 1,5 0-1,7-6 1,4 0-313,5 1 1,-1-1 0,-4 1 0,-4-1 53,-5 1 0,-11 1 0,-5 2 0,-7 2-129,-4-2 0,-2 6 382,-6 1 436,1-3 1,-10 7 0,-5-1 230,-6 6 1,-8 7 0,2 6 0,-1 3 17,0 3 0,2 3 1,-4 10-1,2 4-167,-2 5 0,6 4 0,0 3 0,1 2-189,1 3 0,-1 2 1,8-6-1,4-8-255,5-7 1,5-4-1,6-15 1,6-5-190,3-4 0,2-13 0,2-12 0,2-10-108,1-5 0,-1-9 0,-8-5 0,-5-2 32,-5-3 0,-1 2 1,-12 4-1,-3 4 213,-1-1 1,-9 8 0,-4-2 0,-6 6 229,-5 0 1,-2 7 0,-5 3 0,1 8 260,-1 4 1,-2 1 0,-1 6 0,3 0-12,1 0 1,3 8 0,-5 4-1,5 7-255,1 3 0,3 7 0,9 1 0,2 5-281,3 3 0,-4-1 0,6-8 1,1-3-367,2-2 0,11-4 0,6-9-40,5-5 1,10-8 0,-3-7-1,6-10 239,6-5 1,1-3 0,6-6 0,-2-2 354,2-4 0,-5 4 0,-1-3 0,-3 5 6,-4 5 1,2 4 0,-15 8 0,-4 1 102,-3 4 0,-9 5 1,1 14-1,-3 8 480,-2 10 1,0 5-1,2 4 1,2 4 70,1 5 1,1-2 0,-4 0 0,3-1-443,6-4 0,-2 1 1,4-3-1,4-7-225,3-8 0,9-2 0,1-14 1,5-6-73,3-7 1,6-15 0,-5-7-1,-4-8-127,-6-3 0,-1-2 0,-10-4 0,-5 2-23,-4 2 0,-3 5 0,-8-5 0,-5 0 227,-10 2 0,-1 7 0,-12 9 0,-3 2 250,-3 4 1,-10 9 0,1 6-1,-2 7-16,-3 9 0,6 9 0,0 18 0,0 6-394,2 4 1,8 7 0,12-1-1,4-5-1431,2-3 1593,6-9 0,32-26 0,15-15 0</inkml:trace>
+  <inkml:trace contextRef="#ctx0" brushRef="#br0">2580 6664 7655,'-30'0'0,"1"0"166,-1 0 1,-4 2 0,6 4 0,-1 6 235,1 9 1,-3 4-1,3 10 1,-1 6-116,1 8 1,4 12 0,8 16-1,1 9-153,4 4 0,4-42 1,1 0-1,3 42 0,4 0-126,9 0 1,-3-40 0,2 1 0,1-1 0,2-1 0,2 1-1,2 0-149,1-2 1,2-1 0,5-2-1,2-2 1,4-2 0,2-1 0,2-1-1,0-1-410,2 0 0,0-2 497,-3 0 1,6-4 0,14-13 0,12-7 0,0-1 0,7 3 0,-1-1 0,0 1 0</inkml:trace>
+  <inkml:trace contextRef="#ctx0" brushRef="#br0">4713 6152 8079,'11'-26'0,"0"4"0,2 3 267,1 3 1,12 7-1,7 3 1,10 4 398,4 2 1,10 0 0,4 4 0,1 5-199,-1 8 0,0 12 1,-10 4-1,-3 11-160,0 10 0,-8 6 0,-3 12 0,-8 9-350,-17-36 1,-2 2 0,-3 0-1,-3 1 1,0 7 0,-2 0-1,-2 1 1,-2-1-323,-3-1 1,-1 0-1,-2 3 1,-2 0 0,-6-3-1,-2 0 1,2 1 0,-1-1 363,4-4 0,-7 4 0,-15 12 0,-11 6 0,-1 2 0,9-15 0,-1 0 0,1 1 0,0-1 0</inkml:trace>
+  <inkml:trace contextRef="#ctx0" brushRef="#br0">8136 13196 7887,'-6'11'0,"-1"0"0,0 2 497,-1 2 0,3 1 0,5 3 0,0 4 104,0 11 0,7 0 0,4 11 1,4 1-671,1 1 0,7 10 0,-1 2 0,0 0-377,2-4 1,-6-5-1,4-6 1,-4-8-289,-1-6 0,-1-8 0,1-11 734,-1-6 0,-6-40 0,-3-10 0</inkml:trace>
+  <inkml:trace contextRef="#ctx0" brushRef="#br0">8401 13345 7899,'-17'0'640,"2"7"0,4 6 1,8 6-235,6 3 0,1 7 1,7-1-1,2 3-326,2 2 1,7-2 0,1-3-1,1-6-242,0-4 1,6-9 0,-3-5 0,6-10-92,6-10 1,-4-12 0,2-14 0,-8-8-158,-7-1 1,-6-6-1,-4 2 1,-7 2 121,-3 1 1,-17 10 0,-7 5 0,-7 8 877,-4 7 0,-6 11 1,0 5-1,3 4 173,1 2 1,2 13 0,2 6 0,3 4-440,6 7 1,4 1 0,3 2-1,2 2-321,2 4 1,5-4-1,-3 1 1,2-4-968,3-5 0,10-7 0,5 1 964,3-9 0,18-26 0,3-14 0</inkml:trace>
+  <inkml:trace contextRef="#ctx0" brushRef="#br0">8979 12601 9657,'-9'7'0,"4"4"455,3 4 0,2 12 1,0 12-1,2 16-345,3 13 1,4 22 0,-1-38 0,1 1-1,-1 3 1,0 2-233,1 2 1,-1 1 0,0-2 0,0 0 0,1 1 0,-1-1 0,0-4 0,1-2-200,-1-5 0,0-2 0,9 37 0,-3-21 0,-1-8-58,-2-16 0,-5-10 1,5-12-1,2 1 379,1-1 0,-5-6 0,-1-3 0</inkml:trace>
+  <inkml:trace contextRef="#ctx0" brushRef="#br0">6267 14106 7916,'-24'5'181,"-1"1"1,-3-3 199,1-1 1,12-2-1,0-2-106,6-3 1,11 1 0,9-7 0,5-4-98,6-5 1,2 2 0,6-6 0,-3 2 50,3 0 1,1-6 0,2 8 0,0 4-290,0 3 0,0 3 1,0-1-1,0 6-104,0 3 0,-5 11 0,-4 8 0,-4 9-56,-5 5 0,-10 9 0,1 6 1,-6 6 56,-6 3 1,-3 0 0,-7-4-1,-3 1 225,-3-3 0,2 5 0,-6-10 1,2 3 222,4 3 1,-2-2-1,4-6 1,5-7 506,4-6 1,3-14-663,6 2 0,7-19 0,6-4 0,6-8-251,3-8 0,9-12 0,0-10 0,6-3-227,0-3 1,3-1 0,1-3 0,-1-1-1105,0 2 0,-6 9 1452,-7 5 0,-7-40 0,4-9 0</inkml:trace>
+  <inkml:trace contextRef="#ctx0" brushRef="#br0">6830 13808 7976,'-17'0'0,"0"0"1812,1 0-1259,7 0 1,3-7 0,12-3-344,5 1 0,9-4 0,4 6 0,0-2-184,0-4 0,5 0 1,-3 0-1,1 4-143,1 2 0,-2 1 0,1 6 0,-5 2-337,-3 4 0,-3 3 0,1 9 0,-3 6 260,-3 9 1,-3 2-1,-8 7 1,0 0 211,0 1 1,-2-1 0,-2 2 0,-1-7 269,1-8 0,2-5-323,2-7 1,4-17 0,5-11 0,9-15-480,6-11 1,-2-12 0,6-12 513,1-3 0,-8-1 0,3-16 0,-1-1 0,4-8 0,-1 1 0,0 0 0</inkml:trace>
+  <inkml:trace contextRef="#ctx0" brushRef="#br0">7524 13047 7976,'-2'-16'285,"-3"-1"0,3 6 270,-4 0 0,5 11 0,1 6 0,0 14 84,0 9 1,0 19 0,0 9 0,0 13-471,0 12 0,3-30 1,1 3-1,1 8 1,1 3-1,1 7 1,1 3-139,0 7 0,0 3 0,0 4 0,1 1 0,-3-24 0,0 0 0,0 0 0,1-1 0,-1-1 0,1 0-229,0-2 0,1 0 1,-1-1-1,5 27 0,0-4 1,-2-13-1,0-2 0,1-4 1,-1-2-325,-3-4 1,0-2 0,10 34-1,-6-24 1,4-21-2132,1-17 2653,1-10 0,7-18 0,1-4 0</inkml:trace>
+  <inkml:trace contextRef="#ctx0" brushRef="#br0">8930 12965 7924,'-17'0'277,"1"0"1,1 7-1,4 4 1,5 5-20,5 7 1,8 2 0,6 8 0,7 0-82,8 0 0,-3-7 1,5-4-1,3-5-159,3-6 1,5-6 0,-4-12 0,-1-11-284,-4-14 0,-3-3 1,-12-7-1,-8 0-106,-6 0 1,-10 5-1,-6 0 1,-7 6 299,-8 3 0,-3 10 1,-2 0-1,0 7 282,0 3 1,0 3 0,0 8-1,2 7 292,3 6 1,4 17-1,8 4 1,1 7-75,4 8 0,4 1 0,8-5 0,5-2-469,5-2 0,9-9 1,4-2-1,2-11-268,3-10 0,8-8 1,3-15-1,1-13-23,-1-11 0,-3-9 0,-10-11 1,-6-5-146,-8-5 1,-6 6 0,-9 6 0,-5 7 494,-10 8 0,-7 10 0,-11 8 0,0 7 421,2 7 0,-3 19 0,10 9 0,0 11 50,4 12 0,0 8 0,4 18 1,5 5-184,4-1 1,3 11 0,6-1 0,2 3-305,4 2 0,3-13 1,9-16-1,2-19 41,2-16 1,8-13 0,-5-19 0,3-8-524,0-12 0,-1-9 1,4-16-1,-3-3-517,-6-1 0,-11 2 0,-5 9 0,-5 5 812,-1 4 0,-7 6 0,-4 7 0,-4 13 540,-1 11 0,-1 18 0,1 18 0,-1 17 203,1 13 0,6 8 0,5 6 1,3 3-54,2 3 0,9-5 1,6 0-1,7-14-324,4-12 0,3-13 1,8-22-1,3-12-401,3-12 0,-7-18 1,1-17-1,-6-13-77,-3-7 1,-10-3 0,-1-7 0,-10 3-127,-5 4 0,-4 3 0,-3 7 1,-6 4 323,-4 7 0,-4 10 0,-1 20 0,-4 9 628,-1 9 0,4 20 1,-1 12-1,4 10-58,1 10 0,8 3 0,4 6 1,3 4-245,2 3 1,4 5 0,7-12 0,11-7-422,7-12 0,12-18 1,3-20 192,3-17 0,10-64 0,-27 20 0,-1-1 0</inkml:trace>
+  <inkml:trace contextRef="#ctx0" brushRef="#br0">10005 3671 7920,'-17'0'1443,"0"0"1,6 0-1363,0 0 0,6 7-176,-6 4 1,7-1 0,-3 3 0,0 3-21,-4 4 0,-12 17 1,-4 2-1,-4 8-23,-2 8 0,-6 2 0,-1 4 1,-1-6 50,1-3 1,7-10 0,7-5 0,2-8 235,4-7-40,9-4 0,5-8-65,12-5 0,-3-3 0,9-4 7,0-3 0,-2 1 0,1-5 1,3 0 53,6-1 0,1-1 0,4-5 0,1-1 43,0 1 1,1-1-1,8 1 1,2-1-103,2 1 1,5 5-1,-6 0 1,1-2-127,1-2 1,-5 0-1,4 2 1,-4 4-97,-2 2 1,0 0 0,0 3 0,-2-2-212,-3 3 1,1 1-1,-7 2 1,0-2-152,2-3 0,-5 3 0,3-4 538,-4 4 0,-38 2 0,-10 0 0</inkml:trace>
+  <inkml:trace contextRef="#ctx0" brushRef="#br0">10071 3836 7844,'-17'-7'-312,"6"3"1578,0-7-977,7 8 0,-3 3 1,9 13-1,2 7-130,1 7 1,6 12-1,-5 7 1,-1 7-301,3 8 0,-5 3 1,6 2-1,1 0-37,-1 1 0,-4-3 1,6-5-1,2-8-298,2-5 0,-4-17 0,0-3 476,2-11 0,9-74 0,4-24 0</inkml:trace>
+  <inkml:trace contextRef="#ctx0" brushRef="#br0">10352 4085 7936,'-6'-17'394,"1"0"0,-1 10 0,6 7-34,0 9 1,0 6 0,0 3 0,0 3-228,0 1 1,8 5 0,1-3 0,2 0-89,0 0 0,2-2 0,7-6 1,2-1-355,-2-4 0,4-4 1,0-10-1,2-8-53,3-11 0,0-10 0,-1-6 0,-6-6 100,-4-4 0,-3-7 0,-4 0 1,-5 2 200,-4 1 0,-4 10 1,-4 3-1,-5 6 254,-4 6 0,-3 8 0,-2 10 0,-2 4 188,2 6 0,-4 7 0,0 8 0,-2 3-40,-3 3 0,-1 5 1,1 10-1,1 3-370,-1 3 1,0-5-1,1 4 1,6-3-392,4-8 0,8 1 0,5-10 0,5-4 420,5-5 0,27-28 0,12-12 0</inkml:trace>
+  <inkml:trace contextRef="#ctx0" brushRef="#br0">22308 11658 8030,'-6'-18'211,"1"-4"0,-3 3 1,5-3-1,-3 4 255,2 1 0,1 1 0,-1-1 18,-1 1 1,-1-1 0,4 1-317,-3-1 1,1 8-86,-7 4 1,6 3 0,-7 2-87,0 0 0,-3 9 0,-2 6 0,1 7 8,-1 3 1,1 8 0,-3 8-1,-1 3 61,-2 7 1,-5 1-1,5 7 1,1-1-27,3 1 0,1 2 0,3 3 0,3-3-173,5-6 1,8-11 0,7-5 0,10-6-146,4-6 0,5-3 0,5-7 0,0-3 99,0-3 1,0-1 0,0-7 0,-1 3 1,-5-3 0,3-8 1,-7-6-1,1-6-172,0-5 1,-2 2 0,-7-7 0,-2-3 348,-2-1 0,-37-46 0,-3-11 0</inkml:trace>
+  <inkml:trace contextRef="#ctx0" brushRef="#br0">22109 11956 7960,'-22'11'335,"0"0"1,2 0-1,11 4-118,9-4 0,7-4 0,11-7 0,5 0-173,4 0 0,4-7 0,2-6 0,2-6-50,4-3 0,-2 0 1,5 6-1,-2-1-137,-3 1 0,-2 1 0,-4 4 0,-3 5 137,-6 5 0,-9 2 0,-4 7 257,-2 8 1,-1 3 0,-6 8 0,0 3 22,0 1 0,-6 2 1,1 0-1,-1 2-176,-1 4 1,5-5 0,-4 5 0,3-4-387,-3-2 1,4-7 0,-1-6-587,6-7 1,7-6 873,6-7 0,15-59 0,4-14 0</inkml:trace>
+  <inkml:trace contextRef="#ctx0" brushRef="#br0">22705 11873 7940,'0'-16'982,"0"6"1,0 5-1,0 10-673,0 6 0,1 10 1,5 3-1,3 3-340,0 8 0,4-2 0,-7 6 1,-1-4-131,3-2 0,-7 2 1,7 0-1,-3-2-464,1-8 0,-1-4 409,-5-5 1,0-9 0,0-8-1,0-14 318,0-11 1,0-5 0,2-2-1,2-2 200,1-4 1,1 4 0,-6-3 0,2 3-24,3 2 1,-3 0-1,5 2 1,-1 1-133,-1 3 0,8 6 0,-2-1 1,4 4-793,1 1 1,3 6-1,1 2 645,2 2 0,37 9 0,3 7 0</inkml:trace>
+  <inkml:trace contextRef="#ctx0" brushRef="#br0">23101 12072 8706,'-7'0'1154,"5"-2"0,8-4-1271,3-5 1,0-3-1,4-3 1,-2-1-283,2-4 1,0 3-1,0-3 1,-4 2 272,-2-2 1,4 4-1,-5-5 1,-3 5 96,-1 2 1,-2-1 1932,0 0-829,0 1-811,0 7 1,0 0 110,0 3-431,0 4 0,0-7-382,0 4-21,0 3 926,8-6 591,-7 8-955,7 0-6,-8 0 492,0 0-488,-8 0 0,5 0-45,-8 0 1,5 2 147,-5 4 1,6-4-1,-5 5 251,3 0 1,-4-3-1,4 5-28,-2-2 0,-2 8 0,-4 0-255,4 5 1,-2 9 0,6-3 0,-1 4-221,1 3 1,1-4-1,6 8 1,0-6-400,0-3 0,8-8 1,3 2-1,3-6-86,3-5 1,5 2 0,2-9-1,2-6-80,3-7 1,2-8-1,2-3 1,0-4 112,0-1 1,-5-1 0,-2-4 0,-2 5 200,-4 1 0,-2 0 0,-1 4 0,-1-2 61,1 1 1,-2 3 0,-3 2-1,-1 1-357,2 4 1,-4-4 594,3 4 0,-9 2 0,3-2 0,-12 7 0,-3-3 0</inkml:trace>
+  <inkml:trace contextRef="#ctx0" brushRef="#br0">23465 11956 7848,'-9'7'402,"0"-5"536,3 4 0,14-6 1,1-6-1011,9-5 0,10-6 0,-4-3 0,0-4-242,-1-1 0,1-3 0,-5-3 1,-1 1 180,-3 3 1,-10 5 0,1-4 0,-4 2 293,-2 4 1,-10 9 0,-4 6 0,-6 3 433,-1 2 0,-3 7 0,2 4 0,0 6-168,-2 5 1,12-2 0,-5 9 0,2 4-279,1 4 0,5 3 0,3-3 0,4 2-86,2-2 0,2-8 0,5-3 0,10-4-533,9-8 1,7-4 0,5-10 0,6-4-179,4-7 1,-6-4-1,-3-16 1,-4-6 201,-2-3 0,-5 1 0,-5-3 0,-2 2 474,-7 3 1,-8 7-1,-1 5 1,-3-1 170,-2 0 1,0 12-1,0-3 1,-2 4 629,-3 4 0,1 2 0,-7 7-383,-2 0 1,4 0 0,0 1 0,0 5-281,0 5 1,3 4 0,-5 1 0,0 3 10,2 3 0,-6 5 0,6 10 0,-2 3-104,0 3 0,7 1 0,-1 7 1,3 2-435,2 3 1,2-10 0,5-13 0,8-11-314,5-10 1,9-6 0,-1-12 0,1-8 78,-1-12 0,-2-11 0,-6-16 0,2-6 407,-2-5 0,-9 9 1,-5-8-1,-5 6 456,-1 2 0,0-2 1,0 4-1,0 0 29,0 5 0,-5 6 0,-2 10 1,-1 5 848,1 5 1,-6 5-303,2 6 1,4 11-768,1 11 0,4 6 0,2 3 0,0 4 92,0 2 1,0 7 0,0 7 0,0 1-37,0-1 1,0 8 0,0-2 0,2 3-312,4-1 0,3-7 0,7-1 1,3-3-365,3-6 1,2-11-1,7-3 1,0-12-313,4-8 0,-2-12 0,-4-9 0,1-2 723,-6-3 0,-4-2 1,-3-3-1,-1 1 271,1 0 1,-8 6-1,-2 1 490,0 2 11,-5 2 0,6 17 0,-8 8 0,0 14-53,0 7 1,-2 9-1,-2 5 1,-1 1-480,1 1 0,2-3 1,4 4-1,2-5-674,1-4 0,8-12 0,-2-4 61,4-8 0,1-8 0,1-8 1,-1-8 57,1-10 0,-1-5 0,-1-2 1,-2 0 458,-2 0 1,-5 5 0,3 2 0,0 1 344,0-1 0,-5 6 0,3-2 215,0 3 0,-5 3 0,6 1-94,-1 4 1,-3 4-443,7 7 0,-2 1 1,4 5-1,-4 5-52,-2 4 1,6 3 0,-2 4-1,2 6 36,-2 3 0,4 4 0,-4 3 1,3 8-87,3 8 1,0-1-1,-1 6 1,1-1-304,-1 1 1,-5 2 0,-2 5-1,-1-2 200,-5-3 0,-1 3 1,-2-5-1,0 0-141,0-4 1,-5-11 0,-3-5 0,-3-6 430,-7-6 0,0-5 0,-8-11 0,0-5 152,0-4 1,4-2 0,-5-2 0,-3-4 23,-1-5 0,5-11 1,6-7-1,7-8-145,8-7 0,3-6 1,4-5-1,5-3-361,10-1 1,7-6 0,11 5 0,1-4-300,3-3 0,5 9 0,-4 2 0,1 7 156,-1 5 0,-1 3 0,-8 8 0,-3 4 189,-6 7 1,-9 2-1,-2 14 1,0 1-1400,-2-3 1561,5 6 0,-19 2 0,3 10 0</inkml:trace>
+  <inkml:trace contextRef="#ctx0" brushRef="#br0">22159 13494 7791,'-17'0'0,"1"0"185,-1 0 1,6 0 0,4 0-53,5 0 0,8-2 0,17-4 0,9-6-225,4-9 0,16-4 1,1-8-1,8-1-334,7 1 0,7 2 1,-5 4 425,-6 5 0,-12 11 0,-12 3 0</inkml:trace>
+  <inkml:trace contextRef="#ctx0" brushRef="#br0">22655 13312 7791,'-26'7'338,"2"-5"1,8 5-1,-1-1 123,1-1 0,-1 8 0,1-2 0,-1 4-102,1 2 0,5 6 0,1 7 0,3 7-188,3 7 0,3 3 0,1 3 1,1 0-346,5-1 0,3 1 0,8-1 0,-1-1-53,1-4 1,-3 4 0,-1-6 0,-2 1-354,2-5 1,-6-10 0,1-8-1,-3-5-1543,1-4 2123,7-8 0,-11-25 0,5-14 0</inkml:trace>
+  <inkml:trace contextRef="#ctx0" brushRef="#br0">22953 13593 8725,'-17'-18'0,"1"-3"642,-1-1 0,6 8-489,0 8 0,7 6 0,-1 7 0,3 10 170,2 9 1,0 12-1,2 6 1,1 4-352,3 2 0,7-6 0,-4-2 0,2-1-370,0-5 1,0 3-1,6-6 1,-1-7 8,1-6 1,-1-11 0,-1-5 0,-2-8 133,-2-7 1,-6-11 0,4-6 0,1-3 272,-1-2 1,-5 0 0,1 0-1,-3 2 658,-2 3 0,0 4 0,0 8 1134,0-1-1586,0 8 1,7 9 0,4 13 0,4 5-310,2 4 1,-1 0 0,2-5 0,3-2-240,1-4 0,5 2 1,-5-8-1,0-3-119,2-6 1,-5-5 0,3-8 0,-6-1 267,-5-4 1,2-4 0,-7-5 0,-3 2 289,-1 1 1,-4 8 0,-3-2 0,-4 4 524,-1 1 0,-4 8-470,3 3-921,-4 4 1,6 4 353,3 4 1,12-4 0,5 3 135,3-3 0,9-2 0,0-2 0,1-2 129,0-1 1,6-1 0,-5 5 0,3-3 348,-1-2 1,1 1 0,3 5 0,-1 0 161,-3 0 0,-7 0 1,2 0-1,-3 2-126,-3 3 0,-5 3 0,-1 4 1,-1-1-49,0 2 1,-5-3 0,3-1-220,0-2 0,-5 2-87,4-9 1,-5-5-1,-1-15 1,0-3 133,0 3 1,0-5-1,-1-1 1,-5-2 135,-5 1 1,2 6 0,-2-1 0,-2 6 131,-2 5 0,-1-2 0,-1 8 0,1 1 41,-1 2 1,-5 4 0,0 2-574,2 1 0,3 8 0,6-2 1,4 4-2033,0 1 2263,5 1 0,31 14 0,17 4 0</inkml:trace>
+  <inkml:trace contextRef="#ctx0" brushRef="#br0">24672 13146 7791,'-16'2'136,"-1"4"0,3 5 386,3 4 0,-2 8 0,7 7 1,3 8-199,1 12 1,4 5-1,3 8 1,8-3-284,7 3 1,0 1 0,6 0 0,0-5-475,0-9 0,-1-12 1,3-16-1,-6-11-334,-4-7 1,-3-8 0,-4-7 766,-6-11 0,-18-27 0,-8-12 0,-2-6 0,0 0 0</inkml:trace>
+  <inkml:trace contextRef="#ctx0" brushRef="#br0">24623 13361 7791,'-26'-25'100,"-3"1"0,8 7 1,7 1 619,6-1 1,8 8 0,6 2-538,5-1 0,11 5 0,6-7 0,3 1-276,2 0 0,7 4 0,4-5 1,2 3 72,-2 3 1,-3 3-1,-10 1 1,-3 1-44,-6 5 1,-6 5 0,-5 11 0,-5 6 26,-4 3 1,-12 2 0,-4 0-1,-7 0 187,1 0 0,-4 0 0,1-2 0,-1-1-213,0-3 1,2-8 0,7-5-471,4-12 1,5-11 0,12-13-1,7-6 152,7-3 0,-2-2 0,6 0 0,-2 0 149,0 0 1,6 2 0,-6 5 0,0 8 376,2 5 0,-6 9 0,4 0 507,-3 8 0,-8 11 1,-2 7-1,0 0-50,0 2 0,1-6 0,2 4 1,-1-5-336,2-6 0,2-4 1,1-7-1,1-2-322,0-3 1,-3-12 0,-1-10 0,-4-5-322,-1-1 1,-3-3 0,-5 1 0,-4 3 383,-7 1 1,-1 9 0,-16 4 0,-1 7 221,-3 3 0,5 3 1,1 5-1,0 2-294,1 3 1,6-1-1,3 7-696,8 2 759,7-6 0,52-22 0,13-12 0</inkml:trace>
+  <inkml:trace contextRef="#ctx0" brushRef="#br0">25268 12865 7791,'-11'0'632,"0"0"1,9 0 0,2 0 0,11 0-1210,9 0 577,-2 0 0,28 15 0,-2 3 0</inkml:trace>
+  <inkml:trace contextRef="#ctx0" brushRef="#br0">25417 13113 7787,'-6'24'266,"1"4"1,-1 3-1,6 2 1,0 0 339,0 0 0,0-5 0,2-1-519,3 3 0,5-8 1,6-6-790,1-8 0,-6-16 1,-2-8 701,-2-10 0,3-21 0,0-11 0,0-4 0,-1-1 0</inkml:trace>
+  <inkml:trace contextRef="#ctx0" brushRef="#br0">25532 13113 7787,'0'-16'199,"0"-1"1,0 1 834,0-1 1,0 10-447,0 7 0,8 7 1,3 12-1,2 1-444,-2 2 0,3 5 0,-3-3 0,4 0-322,2 0 1,-6 4-1,0-6 1,1-2-494,3-2 1,-4-9-1,0-3 252,2-4 0,-6-10 0,1-3 0,-3-5 219,1-6 1,-1 2-1,-3-6 1,2 2 731,1 4 1,1 1-1,-6 3 525,0-1 0,7 10-712,4 7 0,-3 7 0,-3 10 1,-1-1-295,1 1 1,-1 0 0,5-1 0,0-1-2611,0-4 2559,-5 4 0,18-43 0,-3-1 0</inkml:trace>
+  <inkml:trace contextRef="#ctx0" brushRef="#br0">26161 12435 7750,'-17'10'464,"2"-1"1,3-6-1,1 5-257,-2 1 1,5 4 0,3 7 120,3 2 1,2 2 0,2-2 0,3 7 131,6 8 0,6 11 0,5 11 0,6 5-326,3 10 0,4 5 1,1 1-1,5-4-849,1-10 1,-7-11 0,0-16-1,-8-14-1571,-3-10 2286,-9-8 0,-15-58 0,-9-13 0</inkml:trace>
+  <inkml:trace contextRef="#ctx0" brushRef="#br0">26359 13163 7997,'18'-17'184,"3"-1"0,3-2 46,1-2 1,1-8 0,3 3 0,-1-4-26,1-2 0,-3 0 0,-2-1 1,-4 3-371,-5 4 0,-4 3 0,0 7 1,-6 1 47,-3-1 1,-4 8-1,-3 3 363,-6 5 0,-4 1 1,-1 1 70,-1 5 0,1 5 1,-1 9-1,2 4 102,4 2 1,-1-4 0,4 7 0,1 4-82,-1 4 0,3 2 0,5-6 0,0 0-382,0 0 0,7-7 0,4-4 1,4-6-373,2-5 0,6-5 1,7-12-1,5-8-401,3-12 1,6-9-1,-7-17 1,-4-1 455,-3-2 0,-12 2 0,0 7 0,-7 4 406,-3 1 1,-3 4 0,-5 10-77,0 5 1,2 13 1078,4 9 0,-3 7 0,6 11 0,1 3-669,-1 1 0,-4 7 1,6-1-1,0 3-270,-1 2 1,2 0 0,-4-2-1,-1-1-172,1-3 1,-3-7-1,-5 2-718,0-3 1,0-12 268,0-7 1,-5-9 0,-1-11 0,0-4 409,-1-2 1,5 4 0,-5-6-1,1 1 83,1 1 1,-1 0-1,6 6 1,0-4 150,0-1 0,6-1 0,1-2 0,2 6 13,4 4 0,2 0 0,2-3 1,1-1-233,4 2 0,-2 0 1,8 0-1,1-2 2,2 1 1,1-2 0,-3 0 0,-3 3 182,-2 2 1,-2 3 84,-6 4 0,-1 6 0,-4 10 0,-6 6 81,-3 4 0,-2 7 0,0 2 0,-2 0-219,-3 0 1,3 3 0,-3-3 0,3 0-126,2 0 0,-6-2 1,1-6-1,1 1 3,2-1 0,8 1 1,1 0-1,2-1-7,4 1 0,4-6 1,5-2-1,3-2-3,1-3 0,4 0 0,-7-1 0,1 3 205,0-3 1,-2-1 0,-5 0 0,-1 2 193,1 1 1,-8 8 0,-3-2 0,-5 4-10,-1 1 1,-7 1 0,-6 1-1,-5 2-363,-4 3 0,-8 6 0,3-2 0,-4 3-807,-2-3 1,-8 3 0,-3-8 866,-4-2 0,4-10 0,-5-2 0,-4 1 0,1-1 0</inkml:trace>
+  <inkml:trace contextRef="#ctx0" brushRef="#br0">25962 12783 8298,'9'-17'3658,"6"1"-3380,5-1 0,19-1 0,5-3 0,13-1-410,7 2 0,8-4 0,0 2 0,-4 2 132,-6 2 0,-12-6 0,-10-2 0</inkml:trace>
+  <inkml:trace contextRef="#ctx0" brushRef="#br0">22820 15015 7767,'-7'-16'457,"0"-1"145,-4 0 0,3 10 0,8 7-260,0 9 1,0 8-1,0 7 1,0 7-144,0 6 1,6 9 0,-1-2-1,1 4-157,1 1 0,-3 1 0,5-1 0,0 1-494,0 0 0,1-3 0,2-3 1,-2-5-515,-3-4 0,4-9 1,-4-6-651,3-7 1616,-7-21 0,-4-48 0,-5-24 0,-3-10 0,-1 0 0</inkml:trace>
+  <inkml:trace contextRef="#ctx0" brushRef="#br0">22820 14965 7767,'-5'-25'272,"-1"3"0,-5 3 1,6 3-1,1-1 79,2 1 0,2 5 0,2 2 1,4-1-294,5 1 1,5 4-1,6-5 1,6 3-44,3 3 1,2-3 0,2 2 0,2 1-248,1 2 1,-1 8-1,-8 1 1,-3 2-38,-2 4 1,-9 7-1,-10 4 1,-3 0 49,-2 0 0,-2 5 0,-3-3 1,-6 2 218,-4-1 0,-16 8 0,-4 7 0</inkml:trace>
+  <inkml:trace contextRef="#ctx0" brushRef="#br0">23416 15114 7767,'0'22'194,"0"2"1,0 0 449,0 0 1,0 0 0,0-2-1,1 6-597,5 3 1,-2 7-1,5-1 1,-2-6-215,-3-7 0,-2-5-24,-2-3 0,5-14 0,1-9 0,-3-12-13,-1-8 0,-2-10 0,0-3 1,0-1 122,0 1 0,-2-4 0,-1 3 1,-3 3 321,3 3 0,1-2 0,2 9 0,2-1-11,3 1 1,-1-1 0,7 7 0,2 2-1097,1 1 0,10 8 866,4 0 0,54 22 0,-33-5 0,0-1 0</inkml:trace>
+  <inkml:trace contextRef="#ctx0" brushRef="#br0">23862 15296 7767,'-11'-5'93,"2"-3"32,2-1 0,1 4 0,8-8 1,2-4-44,1-3 0,8-9 0,-2 1 1,2-3-200,-2-2 1,2 5 0,-8 3 0,-1 1 221,-2 3 0,-2 9 1,-2 2 111,-4 3 0,-1 3 0,-6 12 0,2 6 225,-2 7 1,-1 8 0,-1-1 0,2 3 128,2 2 1,7 0-1,-1 0 1,3 0-339,2 0 0,2-7 0,3-4 1,6-4-645,4-1 1,9-2 0,5-6 0,8-9 107,7-9 0,4-8 0,2-7 0,-1-7-3663,1-6 3966,-8-9 0,-17-4 0,-2-8 0,-2-8 0,0-1 0</inkml:trace>
+  <inkml:trace contextRef="#ctx0" brushRef="#br0">24342 14684 8230,'0'-24'420,"-2"4"0,-2-5 1,-3 1-106,-2 3 1,5 3 333,-2 2 0,-1 8 0,2 8-465,1 9 0,2 8 1,2 5-1,0 6-173,0 3 0,2 9 1,3 6-1,6 6-190,4 3 0,2 13 1,-1-2-1,1 4-118,-1 3 0,6 1 0,2 6 0,2-2-43,3-5 1,-5 1 0,-2-21 0,-3-5-253,-3-8 0,-7-7 243,-3-5 1,-12-14 0,-5-14 0,-5-9 348,-6-5 0,-14-26 0,-5-10 0,-8-5 0,0 1 0</inkml:trace>
+  <inkml:trace contextRef="#ctx0" brushRef="#br0">24242 15280 7767,'-16'-8'912,"7"5"-804,3-8 1,6 5 0,6-5 0,7-2-314,7-1 1,6-10 0,7-4 0,0-5-656,0-6 0,5-1 860,1-4 0,0-12 0,5-9 0,0-2 0,0 0 0</inkml:trace>
+  <inkml:trace contextRef="#ctx0" brushRef="#br0">24656 14585 8798,'-17'0'-69,"8"2"0,4 4-216,3 5 1,9-2 0,4 2 0,4 2 284,1 1 0,16 32 0,3 8 0</inkml:trace>
+  <inkml:trace contextRef="#ctx0" brushRef="#br0">24805 14899 7758,'0'28'85,"0"-1"1,0 1-1,2 7 1,1 2 463,3 1 0,5 6 1,-4-5-1,0-4-863,1-6 0,5-7 1,-2-11 313,3-5 0,-3-48 0,-5-25 0,2-1 0,0-1 0</inkml:trace>
+  <inkml:trace contextRef="#ctx0" brushRef="#br0">24970 14701 7898,'11'7'462,"2"4"0,5 4-206,8 2 0,7-1 1,6 2-1,3 3-409,0 1 1,4-2-1,-7-7 1,-4-4-1342,-6-2 1494,2-1 0,-34-50 0,-1-11 0</inkml:trace>
+  <inkml:trace contextRef="#ctx0" brushRef="#br0">25334 14651 7050,'-17'-9'1289,"1"4"1,1 10-1,2 8 1,2 7-785,-2 8 0,4 10 0,-2 8 0,-2 8-669,-1 6 0,3 4 0,1 3 0,3-3 164,3-3 0,17-12 0,6-8 0</inkml:trace>
+  <inkml:trace contextRef="#ctx0" brushRef="#br0">26524 13957 7883,'-16'-6'219,"-1"1"1,1-8 0,-1 2-268,1-4 0,5 4 843,0 0 1,0 7 0,-8 1-537,-3 6 0,2 8 0,-9 12 0,-4 6-275,-4 8 0,-7 7 1,3 9-1,1 4 30,0 2 1,8-6-1,12 2 1,7-5-158,8-6 0,7-4 0,7-10 0,9-6-131,6-8 0,11-9 0,9 3 0,4-3 176,1-3 1,1 3-1,0-1 1,-1-3 233,1-1 0,-1 4 1,-1-1-1,-4 1 9,-5 1 1,-6 2 0,-6 10 0,-6 1-139,-8 2 1,-10 7 0,-14 1 0,-11 4 45,-7 5 1,-6 0 0,-2-6-1,-1-2-73,1-3 0,2-6 0,4-11 0,3-6-466,6-3 1,11-11-1,5-8 1,8-10 485,9-10 0,16-26 0,9-12 0,-7 19 0,1-1 0,-1 1 0</inkml:trace>
+  <inkml:trace contextRef="#ctx0" brushRef="#br0">26739 14337 7890,'8'-9'473,"-5"2"1,7 8 0,-3 5 278,-3 5 1,3 7 0,0 8 0,1 9-340,-1 5 1,4 4-1,-4 4 1,3-4-595,3-5 1,-1-6 0,3-7-1,0-10-361,3-8 1,4-10-1,-2-11 1,2-16-183,-1-17 0,3-11 0,-2-8 1,-4 5 258,-5 5 0,0 5 0,-8 6 1,-1 7 1006,-2 8 0,-4 8 49,-4 16 1,-1 3 0,-4 17-1,4 5 11,-1 4 1,6 3 0,-3 5-1,3-1-254,2 2 0,0-9 0,0 9 0,2-2-358,3 0 0,-1-3 0,7-2 0,2-4-534,2-7 1,1-6 0,1-11 0,1-5-165,4-10 1,-2-7 0,6-11-1,-2-2 352,-4-1 1,-1-1-1,-3 6 1,-1 0 450,-4 0 1,2 7 0,-8 4 0,1 6 733,1 5 1,-5 5-244,3 12 1,3 8-1,-1 10 1,1 2-273,-1 3 1,4 1 0,-4-1 0,2-1-334,4 1 0,-5-3 0,-1 0-453,0-3 1,-3-2-77,7-10 1,-5-11 0,3-13 0,-2-6 217,-3-3 1,-2-7-1,-1 3 1,3 1 263,2 3 1,-1-2-1,-5 2 1,2 1 438,3 3 1,-3 7 0,6 2 1828,-1 1-1698,-5 3 1,11 7-1,-8 3-270,-1 6 1,0 2 0,-1 0-527,3-2 1,1-2-429,-1 2 1,-3-2 220,8-3 0,-1-6 1,2 0 303,-1-9 1,0-6-1,4-3 1,-2-2 247,-2-3 0,-2 1 1,4 6-1,-2 1 503,2 4 0,-4-2 0,2 8 129,2 1 1,2 2 0,1 4-1,1 2-642,-1 1 1,6 3 0,2-5 0,0 3-559,0-2 0,5-3 0,-3-2 1,2-3-1115,-1-2-1,-1-8 1630,2-3 0,3-29 0,-5-14 0</inkml:trace>
+  <inkml:trace contextRef="#ctx0" brushRef="#br0">23316 16619 7734,'-16'-2'0,"-1"-1"25,1-3 1,7 8 0,3 9 0,4 7 382,2 10 1,0 7 0,2 16 0,4 4-231,5 6 1,5 5-1,4 4 1,2 2-328,-1-3 1,-3-2 0,0-9 0,3-8-300,1-10 1,-6-19-1,-7-12 1,1-11 108,-1-9 0,-6-13 1,1-9-1,-8-9 339,-7-6 0,-5-2 0,-4 1 0,-2-1 4,1 1 1,-2-1 0,0 2 0,3 4 499,2 5 1,1-1-1,1 1 1,1 5 483,4 4 1,4 6-1,9 8-771,3-1 1,4 6 0,10 2-1,3 2-164,5 3 0,6-3 0,4 1 0,3 2-99,3 3 1,1 1 0,5 1-1,-1 5-298,-4 5 1,-5 4-1,-12 3 1,-6 4-6,-8 6 1,-6 5 0,-9 3-1,-3 3 98,-6-2 1,-12 3 0,-4 1 0,-4-1 128,-2 1 1,-2-3 0,0-7-1,0-3 281,4-6 1,7-4 0,-2-3 262,2-4 1,9-5 0,12-10-118,6-2 1,8-5-1,10 4 1,3-2-119,1-4 1,8 4-1,8 0 1,-1-1-157,1 1 0,3 6 0,-4-3 0,1 4-14,-1 2 0,-9 0 1,-9 2-1,-5 4-158,-6 5 1,-4 11-1,-9 5 1,-3 4-19,-6 2 0,-6 6 0,-3 0 1,-4-3-12,-2-1 0,6-9 0,-2-6 0,4-7-448,1-7 0,1-14 618,-1-8 0,13-27 0,6-12 0,-1-7 0,0-1 0</inkml:trace>
+  <inkml:trace contextRef="#ctx0" brushRef="#br0">23895 16652 7734,'0'-16'157,"2"1"1,2 2-1,3 2 93,2-2 0,2 6 0,6 0 1,1 1-600,4 1 1,-2-1-1,6 8 1,-2 3 348,-4 6 0,-16 48 0,-6 13 0</inkml:trace>
+  <inkml:trace contextRef="#ctx0" brushRef="#br0">24127 16818 7734,'-6'16'48,"-1"1"0,-1 1 33,1 4 1,2 6-1,6 8 1,3 5-132,2 1 0,7-5 0,-2 1 0,3-3-333,3-2 1,-1-9 382,1-7 0,14-59 0,4-23 0</inkml:trace>
+  <inkml:trace contextRef="#ctx0" brushRef="#br0">24375 16768 7734,'0'11'179,"0"0"125,0 2 0,0 3 0,0 6 1,0 6-96,0 3 1,0 2 0,0 0 0,2 0-197,3 1 1,-3-9-1,5-5-224,1-7 1,-5-7-1,6-13 1,-1-10-222,-4-9 0,3-7 0,-2-4 0,-1-3 408,-2-2 0,-2 5 0,0-2 1,0 5 418,0 0 1,0 3 0,0 4-1,0 5 1387,0 3-1467,0 10 1,0 9 0,0 13 0,2 5-242,3 4 1,4 8 0,8-3 0,-1 5-170,1 1 0,0-8 0,1-3 0,2-3-81,2-3 0,8-1 1,-3-4-1,4-7-32,2-8 0,8-13 1,1-12-1,0-8-123,-3-7 0,-6-4 0,-5-1 0,-6-1 46,-4 1 0,-9 8 0,-3 8 0,-4 9 417,-2 6 1,-8 9-1,-3 3 1,-3 4 264,-3 2 0,0 9 1,1 6-1,-2 7 117,-5 4 1,11 2 0,-5 5 0,2 2-82,1 3 0,-3-3 1,1 4-1,1-4-286,4-2 0,-2-2 0,8-2 1,3-3-378,5-2 0,7-9 0,8-10 0,4-5-321,6-5 1,-3-12 0,3-12 0,1-8-5,2-7 0,-5-4 0,-4-2 0,-3 3 223,-3 2 0,-1 7 1,-4 10 224,-6 6 0,-5 13 952,-5 9 1,3 13 0,-4 11 0,5 2-368,1 3 1,0-3-1,0 1 1,1 1-529,5-2 1,-2-3 0,7-6 0,2 0-253,1-1 1,3-7-1,-1-5 1,3-8-13,3-7 0,-4-11 0,4-5 0,-3-6-330,-3-6 0,1 4 0,-3-2 1,-3 6 207,-5 3 1,-4 8 1223,-2-2 0,0 13 0,0 9-249,0 9 0,2 11 1,1 4-1,3 2-230,-3 3 0,5-3 0,-3 2 0,1-1-186,1-1 1,-5 3 0,3-7-398,-3-1 1,-2-12-313,0-9 1,0-15 0,0-12 0,-2-6 173,-3-6 0,-2 4 1,-6-4-1,4 5 296,1 0 0,-3 1 1,4 2-1,-1 4 564,1 5 1,0 9 285,1 2 1,6 7 0,2-2-414,13 5 1,1 1-1,8 0 1,0 0-315,4 0 1,3 0 0,2-2 0,0-4-278,0-5 0,-5 2 0,-3-2 0,1-2-196,0-2 0,-8 4 1,1 0-134,-7-1 734,-8 4 1,-2 3 0,-9 8 0,-3 5 249,-2 1 0,2 7 0,1 8 0,0 2 6,0 3 0,3-3 0,-3 2 1,2 1-244,3 2 0,2-5 0,2-4 0,2-3-454,4-3 0,-1-7 0,10-3 0,3-6-206,1-6 1,4-10 0,1-12 0,0-5 102,0-6 0,-2 5 0,-5-5 1,-1 4 474,1 2 0,-6 5 0,-2 3 0,0 1 500,0 4 1,-5 7-242,2 2 1,-5 9 0,-1 2-1,2 11 69,4 9 0,-3 0 0,7 10 0,-1 3-157,0 4 0,2 9 0,6-1 0,-1 11-388,1 10 0,-1 9 0,1 11 0,-1 3-157,1-3 0,-1 6 0,1 0 0,-2-2 32,-4-8 1,-4-3 0,-7-12 0,-2-9 30,-3-4 1,-5-12 0,-8-5 0,-2-8 305,-2-7 1,-8-5 0,3-6-1,-4-8 109,-3-6 0,-4-14 0,-3-12 1,1-10 57,0-10 0,3-14 1,11-10-1,10-3 79,8-3 0,6-3 1,6-3-1,9 1-91,15 3 1,12 7 0,-14 35 0,3 1 0,2-2-1,1 1-215,2-2 0,1 1 1,-1 2-1,0 1 0,3 0 1,0 2-1,-1 1 1,1 2-162,1 1 0,2 1 1,2-2-1,2 0 1,-1 2-1,0 1 0,-3 1 1,-1-1-293,29-20 1,-9 1-1,-11 9 1,-2 4-756,-2 6 1,-13 5 1206,2 8 0,-3-1 0,3 1 0</inkml:trace>
+  <inkml:trace contextRef="#ctx0" brushRef="#br0">14602 5573 7687,'-26'-9'-131,"-3"-4"0,5 5 0,0-1 153,0-4 0,0 4 0,4-2 0,-4 0 194,-2 2 0,4-6 0,-4 6 0,3-2-63,2 0 1,-3 7 0,1-1-1,-3 3-48,-4 2 1,-1 7-1,-4 6 1,-1 7-33,-3 8 1,-1 5 0,3 4-1,-2 3-109,2 2 0,3 1 0,0 3 0,3-2-18,4 2 1,1 1 0,6 3 0,-2 0 74,1-1 0,3 8 0,0 4 0,-2 1-6,-3-1 1,7 1 0,7-5-1,1 2-3,5 4 0,3-6 1,7 0-1,10-2-17,8 0 1,7 0 0,2-5 0,3-3-17,2-3 0,9-5 0,3-11 0,15-8-32,15-7 1,7-6 0,-40-7 0,0-2-1,-1-1 1,-1-1 47,2-3 1,0-3 0,5-1 0,1-3 0,2-4 0,0-1-1,0-1 1,0-1-15,-4 0 1,-1 0 0,-1 2-1,-1 0 1,-4-3 0,0-1-1,1 0 1,0-1 21,2-2 0,-1-2 0,-5 1 0,-3-3 0,-2 0 0,-2-2 0,22-27-91,-11 2 1,-6-3 0,-10 3 0,-8 0-43,-11 0 1,-8-11 0,-6 0 0,-8-4 135,-11-1 0,-13 1 0,-6 6 1,-1 0 163,-4-1 1,-5-4-1,-8 1 1,-9 6 28,-6 7 1,3 9-1,-5 9 1,3 12 107,3 7 0,7 10 0,1 9 0,-6 10-347,-7 13 1,-1 9 0,3 8-1,5 5-812,9 3 0,4 9 852,0-1 0,7 2 0,-3-2 0,3 5 0,4 5 0</inkml:trace>
+  <inkml:trace contextRef="#ctx0" brushRef="#br0">16024 1505 7903,'-15'-17'144,"2"3"411,2 3 1,6-2 0,-4 5 173,1-1 1,3 4-370,5-6 0,0 5 1,-2-3-64,-4 2 1,3 1-1,-8 8-332,-2 3 0,-2 5 1,-1 8-1,-3 4-111,-3 6 1,-5 10-1,-12 8 1,-5 6-12,-4 3 1,-3 9 0,-1-2 0,3 3-20,6-6 0,7-14 0,6-8 0,6-6-510,8-3 620,10-15 0,1 2 125,10-15 0,-1 0 0,7 0 119,2 0 0,2 0 0,1-2 0,2-2-57,4-1 0,10-3 0,8 5 1,2-5 107,4-1 0,2-2 0,2-6 0,1 1-392,4-1 1,-5 3 0,1 1 0,-7 4-432,-3 1 0,-1 3 0,-5 5 0,-2 0-233,-7 0 1,-13 7 0,-8 4 826,-3 4 0,-53-6 0,-14-2 0</inkml:trace>
+  <inkml:trace contextRef="#ctx0" brushRef="#br0">15991 1869 7933,'-15'-19'-33,"2"-1"0,4-2 299,2 2 0,-4 1 272,5 3 0,-1 7 0,3 5-91,-1 8 0,-1 7 0,6 13 0,0 7-184,0 6 0,0 9 0,0-2 0,2 5-483,3 6 0,-3-3 1,6 3-1,-3-4-625,1-1 1,8 0 0,1-3 844,5-3 0,24-10 0,0-11 0</inkml:trace>
+  <inkml:trace contextRef="#ctx0" brushRef="#br0">16652 1637 7893,'-9'-7'41,"-4"-2"0,6-6 0,-1 2 1195,1 2-580,2 7 1,5 1 0,0 14-311,0 11 1,0 14 0,0 10 0,0 6-258,0 3 0,1 7 0,3-1 0,3 3 7,3 3 1,1-9 0,5-3 0,1-5-1090,-1-6 0,1-9 1,-1-11 992,1-6 0,-30-93 0,3 20 0,0 0 0</inkml:trace>
+  <inkml:trace contextRef="#ctx0" brushRef="#br0">16570 1654 7908,'-2'-17'83,"-2"1"0,-1-1 293,1 0 0,9 6 0,6 0 0,6-1-14,5-3 0,9 0 0,8 2 0,-1 4-230,3 2 1,-4 1 0,5 6 0,-4 2-158,-6 4 1,-7 3 0,-10 7 0,-2 3-129,-2 3 1,-7-4 0,1 4 0,-5-3-26,-5-3 1,-5 6-1,-6 2 1,-1 0 90,1 0 0,-6 5 0,-2-3 0,-2 1-122,-3 1 1,-2-2 0,-1 1 0,7-5 208,8-3 0,23-54 0,12-13 0</inkml:trace>
+  <inkml:trace contextRef="#ctx0" brushRef="#br0">17479 1240 8334,'0'-11'1644,"0"0"-1277,0 0 1,-5 4 0,-1 7-1,2 9-125,3 6 0,-5 10 1,-1 8-1,-1 12-179,1 8 0,-6 8 1,0 12-1,-5 12-75,7-37 1,0 1 0,-4 4 0,0 0 0,2 5-1,-1 0 1,-1-1 0,-1 0-37,-1-2 1,1 0 0,0 1 0,0-1 0,1-6 0,1-1 0,-12 38-211,2-10 1,8-23 0,7-9-2500,1-7 2757,3-11 0,27-76 0,5-25 0</inkml:trace>
+  <inkml:trace contextRef="#ctx0" brushRef="#br0">17595 1753 8192,'-15'4'901,"4"7"1,4 7 0,9 15 0,1 2-536,3 4 1,5-3 0,-4 10-1,2 4-343,4 3 0,0 2 0,-2-3 1,-5 1-250,-5 2 0,-1 6 0,0-8 0,-1-5-71,-5-8 0,2-12 0,-5-6 0,0-6 196,0-5 0,5-5 1,-1-12-1,3-7 33,2-7 1,2-7-1,1-10 1,5-3 80,1-3 1,7 1-1,6-4 1,-1 4 25,-3 1 1,-1 3-1,-1 5 1,1 2 181,-1 3 0,1-1 1,-1 8-35,1 7 0,-6 4 0,0 10-189,2 0 1,-4 0 0,0 2-1,-2 4-73,-3 5 1,3-2-1,-1 2 1,-1 2-248,3 2 1,-6-4 0,3 0-1,-3 2-2120,-2 1 2442,0-5 0,-7-23 0,-3-14 0</inkml:trace>
+  <inkml:trace contextRef="#ctx0" brushRef="#br0">17777 1753 7850,'0'-17'183,"0"1"0,-2 1 1631,-4 4-1260,5-4 0,-7 15 0,6 2 1,-3 13-365,-6 11 1,-6 12 0,-5 8 0,-5 7-125,-5 8 1,1 3 0,2 3 0,1-1-144,-1 0 0,5-6 0,2 1 0,5-2-152,6-6 1,4-5 0,7-17-1,0-3-67,0-6 0,0-9 0,2-4 217,3-2 0,6-1 0,10-6 77,1 0 1,7-2 0,-1-4 0,5-3-8,5 0 0,6-8 0,10 3 0,3-6-266,1-1 1,-3 1 0,4 0 0,-4-2-351,-7 2 1,-13 3 0,-13 4-163,-4 2 0,-10 8 787,-8-3 0,-15 4 0,-33-42 0,-12-11 0</inkml:trace>
+  <inkml:trace contextRef="#ctx0" brushRef="#br0">17892 2001 7833,'-16'-9'707,"-1"1"-296,1 8 0,5 10 0,2 6 0,1 10 70,5 5 0,8 9 0,6 6 0,4 8-595,1 6 1,8-1 0,4 2-1,1-1-2590,-1-1 2704,3 6 0,9-14 0,12 6 0</inkml:trace>
+  <inkml:trace contextRef="#ctx0" brushRef="#br0">18389 1852 8006,'-11'7'305,"-1"4"1,9 10-1,-1 4 1,6 5 507,3 5 1,8 9 0,-2 2 0,4 5-832,2 4 0,-1 2 1,-1-5-1,-2-1-510,-2-3 0,-8-11 0,3-4-3,-4-9 1,-2-17 428,0-13 0,2-5 0,1-18 1,3-6 60,-3-7 0,1-6 0,0 0 0,3 2 258,2 2 0,-3 8 1,5-3-1,0 6 528,-2 5 1,6 1 0,-4 10-398,4 8 0,1 13 0,-1 10 0,-2 10-167,-2 9 0,-2 10 0,4-3 0,-2 2-199,2 4 0,-4-5 1,0-3-1,0-3-196,0-2 1,1-7 0,1-4 0,-4-5-646,0-6 500,-5 3 1,13-14 0,-6 0-155,0-9 1,6-11 0,-6-4 512,0-2 0,13-45 0,-3-18 0</inkml:trace>
+  <inkml:trace contextRef="#ctx0" brushRef="#br0">18934 2051 8761,'-9'-8'2305,"-6"-1"-2240,4-8 1,6 8-1,3 6 572,6 6 0,9 14 0,-2 10 0,3 5-252,3 1 1,-1 0-1,-1 2 1,-2 1-512,-2 3 0,-2 0 0,4-6 1,-4-2-318,-2-4 0,1-3 357,-3-7 0,-3-10 0,4-9 0,-4-12-75,-2-12 0,0-7 0,0-6 0,0-5 21,0-4 1,0-1 0,0-1 0,1 2 140,5 4 0,-2 2 0,7 5 0,1-1-103,3 1 0,2 4 0,-1 4 0,1 3-670,-1 2 0,6-4 772,0 6 0,22-14 0,1 1 0</inkml:trace>
+  <inkml:trace contextRef="#ctx0" brushRef="#br0">16983 5573 7796,'-17'-17'119,"1"1"1,-1 5-1,1 2 1,-1-1 103,1 1 1,-3 5-1,-1-1 1,-4 3-82,-1 2 1,2 0-1,-4 0 1,-2 2-143,-3 3 1,-3 5 0,-1 8 0,-3 2-6,2 2 1,4 2 0,4-2 0,1 6 2,-1 3 0,5-3 0,0-1 0,2 4 29,0 6 0,-2 0 1,2 5-1,-4 0 37,1 1 1,-5 6 0,6 6 0,0 0 23,1 2 0,1-12 0,7 0 0,4-6-29,5-6 1,4 4 0,4-10 0,6 3 26,8-3 1,8 5 0,11-5 0,4 6-46,5 6 0,5-4 0,5 2 0,2-6-85,3-4 0,13-12 0,12 0 0,-37-11 0,0-1-75,1-3 1,0-2 0,-1-1 0,1-3 0,3-4 0,-1-2 0,2-2 0,1-1-10,2-3 0,0-1 0,-2-4 1,-1-2-1,-2-3 0,-3-1 0,-3 0 1,-1-1 64,-3-1 0,-1 0 1,-1-1-1,1 0 1,1-1-1,-1-1 0,-2 1 1,-2-2-56,-4 0 0,-2-1 1,21-38-1,-12-3 1,-12 5 47,-11 4 0,-8 17 0,-10 7 0,-7 7 100,-6 4 0,-19-2 0,-4-2 1,-8-1 36,-9 1 1,-8 2 0,-8 4-1,1 2 70,-3 1 0,14 13 0,-3 1 0,3 4 76,-7 7 0,-6 3 0,-8 7 0,6 10-200,9 8 0,1 8 0,10 6 0,2 5-300,1 4 0,10-6 0,4-3 0,5-6-1240,5-6 1527,-3-3 0,20-29 0,-4-6 0</inkml:trace>
+  <inkml:trace contextRef="#ctx0" brushRef="#br0">15445 8401 7803,'-2'-10'-118,"-1"3"-127,-3 0 1,1 3 601,5-7 1,-2 5 223,-4-5 1,4 6-76,-3-6 0,3 5 398,2-5-348,0 8 1,2-5-272,3 8 1,-3 2-1,4 4 1,-4 5-57,-2 3 1,0 10-1,0 4 1,0 5-101,0 5 1,0 7-1,-2 10 1,-2 7-138,-2 8 0,1 7 0,5 10 0,-2-1-261,-3-5 1,3-8-1,-4-10 1,6-5-96,6-1 0,-3-11 0,7-11 1,-1-7-81,0-4 0,-3-8 0,5-7 1,1-1-283,3-5 0,-4-1 0,0-5 726,2-8 0,-4-44 0,-3-19 0,2-11 0,0-1 0</inkml:trace>
+  <inkml:trace contextRef="#ctx0" brushRef="#br0">15825 8483 7803,'0'-16'-79,"0"5"1,0 0 468,0-2 61,0 5 0,8 1-326,3 7 1,-4 7-1,0 4 29,1 4 0,-6 2 0,3-1 0,-3 3 62,-2 3 1,2 3 0,2 10 0,1 4-59,-1 5 1,-2 11 0,-4 6 0,-2 5-141,-1 6 0,-3-3 0,4 7 0,-1-3-192,1-3 0,2-9 0,2-8 0,0-9-190,0-11 1,0-7-404,0-10 1,0-8 766,0-8 0,-36-52 0,-10-19 0</inkml:trace>
+  <inkml:trace contextRef="#ctx0" brushRef="#br0">15296 9095 7635,'-16'0'1435,"5"0"-1185,0 0 1,7 7 0,-2 4 0,6 6-56,6 5 0,-2 6 0,7 10 0,2 6-83,1 4 1,3 2-1,-1-1 1,1 3-159,-1 3 0,3-11 0,1 0 0,2-9 22,-2-8 1,-1-3 0,-3-7 0,1-2-38,-1-4 1,1-2 0,-1-6 36,1 3 1,-6 0 154,0-6 0,-6 0 0,6 0-46,2 0 1,-4-8-1,2-3 1,4-4-51,5-1 1,1-8-1,4-4 1,1-3-19,0-2 0,1-5 1,6-1-1,0 0-154,1-1 1,-1 5 0,2-4 0,3 5-33,6 0 1,4 1 0,3 0 0,3 2-59,1 4 0,-6-5 1,-6 7-1,-5-1-44,-6 4 0,-7 3 0,-8 3 0,1-2-165,4-5 1,-11 11 435,0-5 0,-22 19 0,-7 0 0</inkml:trace>
+  <inkml:trace contextRef="#ctx0" brushRef="#br0">15065 9062 7803,'-15'-11'1,"2"2"1042,2 1 205,0-4-912,-5 10 1,8-6-1,8 8-98,9 0 0,6 10 0,3 6 0,5 12-86,4 8 1,6 8 0,4 12-1,3 4-253,3 5 0,-7-1 1,3-2-1,-4-3-79,-2-2 1,0-4-1,-2-9 1,-3-7 48,-6-7 0,-4-1 0,-1-7 1,-1-2 83,1-1 1,-1-10-1,1-2 1,-1-1 36,1-1 1,-6 1 0,0-6 48,2 0 1,-4 0-23,2 0-28,-7 0 0,3-2 1,-7-4-1,0-5-4,0-3 0,6-5 0,-1-1 0,1-4-35,1-2 0,0 6 0,6-4 0,-2 2-64,2 0 1,2-7 0,1 3 0,1-1-25,-1-1 1,1 0-1,1-6 1,4-5 56,6-5 0,3-4 0,2-2 0,2 1 36,4-1 0,-3 6 0,9 0 0,-1 2-109,-2 5 1,4 0 0,-8 15-1,-3 0-498,-5-2 1,-6 11 651,-8-3 0,8 3 0,2-3 0</inkml:trace>
+  <inkml:trace contextRef="#ctx0" brushRef="#br0">14122 10980 7607,'-16'0'-404,"-1"0"1293,1 0 0,5-5-478,-1-1 0,11 1 0,1 5-153,9 0 0,6-6 0,3 1 0,4 1-132,6 2 0,8 2 0,5 0 0,3 0-209,7 0 1,3-5-1,12-3 1,7-1-289,6-4 0,4-1 0,0-3 0,-3 0 93,-2 1 0,1-1 0,-10 3 1,-4 3-63,-8 5 0,-13 6 0,-6 7 0,-6 8 61,-10 5 1,-8 4-1,-14-3 1,0 1 14,0-2 0,-2-4 264,-3-5 0,-4-3 0,-37-23 0,-7-3 0</inkml:trace>
+  <inkml:trace contextRef="#ctx0" brushRef="#br0">14221 11013 7758,'-22'0'200,"0"0"-338,2 0 1,7 2 220,2 4 1,9 1 0,2 4 0,11-5 120,10-5 0,4 5 0,8-1 1,2-1-43,4-2 1,3-4 0,10-2 0,3-3-108,5-2 1,5-2 0,3-6 0,1 1-24,3-1 0,-2 3 1,-8 1-1,-3 3-279,-2 3 0,-2 2 0,-5 5 1,-4 1-154,-8 5 0,-3-2 0,-16 7-49,-5 2 1,-3 1 111,0 3 1,-5-8 336,-12-4 0,5-3 0,-36-16 0,0-5 0</inkml:trace>
+  <inkml:trace contextRef="#ctx0" brushRef="#br0">20555 3390 7739,'0'-17'-26,"0"6"1,0 0 95,0-1 1,0 2 0,0-1 383,0-2 1,0-1 0,0-3 0,0 1 9,0-1 1,0 6 0,0 0-1,0-2-174,0-1 1,-2-3 0,-2 0 0,-1 1-48,1-1 1,0 6-1,1 0 1,-5 0-57,-1 2 0,-2-4 0,-7 8 0,-4 1-69,-6 2 1,-3 4-1,-2 4 1,-2 6 14,-4 9 1,3 4 0,-7 10 0,3 4-15,3 5 1,4 6 0,4 3-1,3 6-23,2 5 0,-3 4 1,5 11-1,3-4-118,6-1 1,0 5 0,8 0 0,1 2-98,2-4 0,10-7 0,5-23 0,7-4-244,7-10 0,10-9 0,2-13 0,-3-8-43,-1-6 1,6-8 0,5-13 0,7-9-94,8-10 1,3-6-1,2-8 1,-3-9 75,-8-10 0,-28 37 1,-1-1-1,11-37 0,-6 6 177,-7 3 0,-8 1 0,-3 1 1,-4 0 303,-1 0 1,-3 13 0,-3 5 0,2 6 312,1 5 1,1 4 0,-4 3 0,3 5 209,6 1 0,-2 2 0,2 5 1,0 1-69,-1-1 0,3 6 1,-6 2-254,2 2 1,0 3 0,2 11 0,-5 8 37,-4 5 1,-2 15 0,-2 2 0,-2 7-51,-1 7 1,-8 12 0,2 1 0,-4 8-212,-2 3 1,6 2 0,0 6 0,-1-2-480,-3-4 1,6-3 0,3-10 0,4-7-406,2-13 0,2-13 1,2-22-1,3-11-112,2-12 0,1-17 0,1-14 0,-4-4 564,0-6 0,-5 1 1,4-6-1,-5-3 383,-1-1 0,0 3 0,0 1 0,0-1 218,0 2 0,0-9 0,0 10 0,0 4 399,0 6 0,0 17 1,2 0-1,2 5 107,1 6 1,8 9 0,-2 6 0,4 3-493,2 2 0,-1 7 1,3 6-1,1 7-52,2 8 1,0 5 0,-4 5-1,2 6-14,2 4 1,1 7 0,-9 2 0,-1 2-238,-2 4 1,0 5 0,4 0 0,-4-6-540,-6-3 0,3-11 0,-3-10 1,-1-5-718,-2-5 1,-2-14 0,-2-14 1338,-4-9 0,-54-57 0,19 26 0,1-1 0</inkml:trace>
+  <inkml:trace contextRef="#ctx0" brushRef="#br0">20935 3704 7772,'-33'-5'0,"2"-3"1879,3-1-1364,-3 5 0,22-3 0,3 7 0,16 0-395,10 0 0,5-5 0,10-3 0,4-1-60,5-4 0,9-7 0,2-4 0,-1-2-1023,-3-3 0,-1-4 0,1-6 0,1-5 395,-3-4 0,-5 1 0,-16 1 0,-6 3 568,-4 3 0,-8 3 0,-5 10 0,-3 5 166,-2 3 0,-7 8 0,-4 2 1161,-4 2 1,-2 1-472,1 6 0,1 8 0,4 3 0,6 5-347,3 6 1,2 11-1,0 13 1,0 7-246,0 8 0,5 9 1,3 3-1,-1 1-410,0-1 0,6 3 1,-2-10-1,2-11-712,-2-13 0,4-12 1,-4-19-1,2-9-194,-2-12 1,2-10 0,-8-18 0,-1-7 635,-2-2 1,-10-8-1,-1-2 1,-2-2 390,0-4 1,0-1 0,-6-4 0,1 0 341,-1 2 1,6 5 0,2 17-1,2 6 4039,3 3-3703,2 9 0,10 17 1,4 14-1,7 10-308,3 7 0,5 6 0,-3 10 0,0 6-257,0 4 1,4 7-1,-6 0 1,-2-1-159,-2-3 0,-1-1 1,-2-3-1,-3-4-298,-1-10 0,-5-9 0,5-15-457,2-9 0,0-8 0,0-10 0,-2-6 478,1-9 0,3-2 0,2-11 0,-1-3 204,1-5 1,-1-1 0,1 4-1,1-2 420,4-3 1,-3 3 0,3 7 0,-4 6 204,-1 5 1,-1 0 0,1 13 0,-1 4-34,1 5 1,-3 7-1,-1 12 1,-4 7-95,-1 7 1,5 13 0,-4 11-1,2 4-159,0 1 1,-2 8-1,4 4 1,-2 3-452,2 2 0,-4-5 0,2-2 0,0-4-425,-2-7 1,6-4 0,-6-15 0,2-10-582,0-8 0,-5-13 1261,5-9 0,-8-41 0,5-10 0</inkml:trace>
+  <inkml:trace contextRef="#ctx0" brushRef="#br0">22374 2861 7804,'0'-11'1546,"-2"0"835,-4-2-1826,5-2 0,1 13 0,11 10 0,3 12-300,3 13 1,1 9-1,2 13 1,4 6-333,2 3 0,0 17 0,3 7 1,-15-40-1,0 2 0,0 2 0,1 0 0,0 2 1,0-1-1,-1 2 0,1 0 1,-2-4-1,0-1-332,11 40 0,-2-5 0,-8-19 0,-1-7 0,-2-6 0,-2-7 0,2-7-284,-5-12 1,-4-18 0,-2-14-375,0-15 0,-8-12 1067,-3-6 0,1-9 0,-2-7 0,-1-8 0,1 1 0</inkml:trace>
+  <inkml:trace contextRef="#ctx0" brushRef="#br0">22473 2977 7998,'0'-34'210,"0"1"1,2 0-1,3 0-118,6 0 1,11 6-1,8 1 1,5 0 431,3 0 1,8 8 0,-3 2-1,-1 8-200,-4 6 1,-3 10 0,-3 5 0,-5 7 71,-5 7 0,-3 5 0,-5 1 0,-3 0 43,-5 0 1,-4 5-1,-2 1 1,-2 0-103,-4 1 1,-8-5-1,-10 5 1,-2 1-272,-3 3 0,-5-2 0,-4 2 1,-6 2-1002,-4 2 0,-7 0 0,0-4 0,3-7-3599,6-8 4534,6-5 0,-8-52 0,-3-10 0</inkml:trace>
+  <inkml:trace contextRef="#ctx0" brushRef="#br0">20158 4977 7772,'7'-11'1700,"6"-1"0,13-7-1625,18-7 1,31-7-1,-21 14 1,3-2-1,5-3 1,2-2-83,6-2 1,2-2-1,7-3 1,3-1-1,-23 10 1,1 0-1,0-1 1,0-1-1,0 0 1,0-1-122,2 0 1,0 0-1,-1 0 1,-2-1 0,0-1-1,0 2 1,2 1-1,0 2 1,0 0 0,0 0-1,0-1 1,-1 1 166,0-1 0,0 1 1,0-1-1,4-2 1,-1-2-1,0 1 0,-4 1 1,-1 0-1,-1 0 1,27-14-1,-1 1-274,-3 0 1,-2 1-1,1 4 1,-1 2 0,-2-1-1,-2 0 1,-4 3-1,-2 1 134,-8 2 1,-2-1 0,-4 0-1,-2 0 1,-8 3 0,-3 2-1,32-15-347,-16 14 0,-22 6 0,-22 19 448,-17 8 0,-7 1 0,-16 7 0,-1 5 0</inkml:trace>
+  <inkml:trace contextRef="#ctx0" brushRef="#br0">20687 5027 8560,'42'-7'0,"12"-4"248,15-4 1,22-11 0,-37 10 0,2-3 0,2-3 0,1-2-2,4-1 1,1-3 0,3-4 0,0 0 0,6 0 0,-1 0 0,0-4 0,-2 0-226,-1-1 0,0-1 0,-1-3 0,1-1 0,5-1 0,-1 0 0,2 1 1,-1 1 79,4 1 0,-1 1 1,-7 4-1,-1 0 0,6-2 1,-1 1-1,-3 0 0,0 0-108,1 0 0,-1 0 1,-4 1-1,0 0 0,1 4 1,-2 2-1,-6 1 0,-2 1-3,-4 0 1,-2 2 0,-4 3 0,0 2 0,1 0 0,-1 1-1,35-16-274,-15 2 1,-22 8 0,-13 3-1,-4 5-1405,-3 6 1,-2-2 1687,-8 8 0,-6-8 0,-3 4 0</inkml:trace>
+  <inkml:trace contextRef="#ctx0" brushRef="#br0">25499 8119 7999,'-11'-7'-481,"0"-4"822,7 4 0,4-3 0,12 7-54,2-3 1,10 1 0,6 3 0,6-2 29,8-1 1,6-6-1,5 3 1,8 1-210,6 0 1,1-1 0,9 5 0,8-5-96,-39 4 0,1-1 1,0 0-1,-1-1 1,3-1-1,-1-1 1,-2 2-1,-2 0-33,44-5 1,-39 5 0,1-1 0,-1-3 0,-1-1 0,1 0 0,-1 0-17,-2 1 0,-2 0 0,33-10 0,-8 0 0,-3-2-51,-1 2 0,-10 8 0,-8 5 0,-10 2-297,-10-1 1,-5 1 42,-7 5 1,-8 1 0,-6 5-659,-6 5 0,-6 4 999,-8 1 0,-51 23 0,-13 5 0</inkml:trace>
+  <inkml:trace contextRef="#ctx0" brushRef="#br0">25598 8334 7936,'-33'0'0,"2"0"-330,4 0 516,10 0 1,17 0-1,13 0 1,7 0-5,8 0 0,7 0 1,7 0-1,9 0 47,6 0 1,4 0 0,5-1 0,2-5-91,4-5 0,12-4 1,-36 6-1,2 0 1,2-2-1,0 0-124,3-2 1,-1-2-1,-2-1 1,0-1-1,4-1 1,1-1-1,0 0 1,1 0-92,2 0 0,0 1 1,-4 3-1,-2 1 1,-6 1-1,-2 0 1,34-9-179,-4 7 1,-8 1 0,3 8-1,-6 2-251,-10 3 0,-2 2 0,-14 3 505,-2 2 0,-8 5 0,-2-6 0,1 1 0</inkml:trace>
+</inkml:ink>
+</file>
+
+<file path=ppt/ink/ink2.xml><?xml version="1.0" encoding="utf-8"?>
+<inkml:ink xmlns:inkml="http://www.w3.org/2003/InkML">
+  <inkml:definitions>
+    <inkml:context xml:id="ctx0">
+      <inkml:inkSource xml:id="inkSrc0">
+        <inkml:traceFormat>
+          <inkml:channel name="X" type="integer" min="-2.14748E9" max="2.14748E9" units="cm"/>
+          <inkml:channel name="Y" type="integer" min="-2.14748E9" max="2.14748E9" units="cm"/>
+          <inkml:channel name="F" type="integer" max="32767" units="dev"/>
+        </inkml:traceFormat>
+        <inkml:channelProperties>
+          <inkml:channelProperty channel="X" name="resolution" value="1000" units="1/cm"/>
+          <inkml:channelProperty channel="Y" name="resolution" value="1000" units="1/cm"/>
+          <inkml:channelProperty channel="F" name="resolution" value="0" units="1/dev"/>
+        </inkml:channelProperties>
+      </inkml:inkSource>
+    </inkml:context>
+    <inkml:brush xml:id="br0">
+      <inkml:brushProperty name="width" value="0.09086" units="cm"/>
+      <inkml:brushProperty name="height" value="0.09086" units="cm"/>
+      <inkml:brushProperty name="color" value="#FF0000"/>
+    </inkml:brush>
+    <inkml:brush xml:id="br1">
+      <inkml:brushProperty name="width" value="0.12114" units="cm"/>
+      <inkml:brushProperty name="height" value="0.12114" units="cm"/>
+      <inkml:brushProperty name="color" value="#FF0000"/>
+    </inkml:brush>
+  </inkml:definitions>
+  <inkml:trace contextRef="#ctx0" brushRef="#br0">6548 9161 9813,'17'0'12,"1"-2"0,3-1 4,1-3 1,7 1 0,-1 3 0,5-2-29,5-1 1,-3-6 0,6 3 0,-3 1 5,1 0 0,7-4 0,-4 3 0,2 1-2,0-1 1,-2 3-1,4 5 1,-2 0-52,2 0 1,-5 0 0,-4 0-1,-6 0-12,-4 0 0,1 0 0,3 0 0,-1 0 61,-3 0 0,-5 0 0,6 0 0,-1 0-2,-1 0 0,5 0 0,-5 0 0,1 0-6,1 0 1,-2 5-1,3 1 1,-1-2 2,1-2 1,-3-2 0,0 0 0,-1 0-5,1 0 0,0 0 0,3 0 1,-1 0 42,1 0 0,2 0 0,2 0 0,0 0-5,1 0 1,-1 0 0,2 0 0,1 0-9,3 0 0,-2 0 0,-8 0 0,-1 0 1,1 0 1,2 0 0,0 0-1,-1 0 70,-3 0 0,1-6 0,7 0 0,2 3-84,1 1 0,1 2 0,-4 0 0,1 0-81,3 0 1,5 0 0,-7 2 0,-4 1 14,-4 3 1,-1 0 0,5-6 0,0 0 81,0 0 0,6 0 0,1 0 0,1 0 58,-1 0 1,4 0 0,-5 0 0,-3 0-59,-1 0 1,-7 0-1,-1 0 1,1 0-24,-2 0 1,3 0 0,-5 0-1,2 0 4,3 0 1,2 0 0,2 0 0,1 0 31,-1 0 0,5 0 0,1 0 1,-2 0 0,-3 0 0,-1 0 0,1 0 0,-1 1-61,0 5 1,5-4-1,1 5 1,-1-1-106,3-1 1,1 2 0,8-3 0,-2 2 87,-4-3 0,2-1 0,-8-2 1,-3 0 79,-6 0 1,1 0 0,-6 0 0,0 0 69,0 0 0,3 0 0,-1 0 0,1 0-18,3 0 0,5 0 1,-6 0-1,6 0-60,4 0 1,-1 0-1,-5 0 1,0 0-48,0 0 1,-5 0 0,-1 0 0,3 0 18,1 0 1,2 0 0,-2-2 0,1-1 2,1-3 1,-4 1 0,10 5 0,-4 0 41,-2 0 0,-2-2 0,-2-2 0,-1-1-23,1 1 0,-5 2 0,-2 2 0,-2 0 5,2 0 1,-3 0-1,5 0 1,-2 0-9,0 0 1,5 0 0,-1 0-1,2 0-17,1 0 0,12 0 0,-8 0 0,1 0 15,1 0 1,4 0 0,-2 0 0,-4 0 56,-4 0 0,-3-5 1,3-1-1,-1 2-65,1 3 1,3 1-1,1 0 1,0 0-2,0 0 0,7 0 1,2 0-1,3 0-9,-1 0 0,-8 0 1,5 0-1,-4 0-31,-4 0 1,3 0 0,-10 0 0,2 0 76,-1 0 1,1 0 0,5 0-1,2 0 6,3 0 1,-3 0-1,6 0 1,-3 0-38,1 0 0,-1-2 1,-5-2-1,-1-2 15,-5 3 1,3 1 0,-6 2-1,-1 0-36,1 0 1,-2 0 0,-5 0 0,-1 0 48,1 0 1,0 0 0,-1-2 169,1-3 1,-6 3-149,0-4 0,-6 4-248,6 2 1,-5 0-597,5 0 1,-6 2 785,6 4 0,-22-19 0,0 2 0</inkml:trace>
+  <inkml:trace contextRef="#ctx0" brushRef="#br0">17562 10534 7859,'-11'-26'90,"0"4"0,7 4 0,-3 3 636,-1 4 1,5 7 0,-7 13-341,3 8 0,-4 12 1,4 4-1,-1 10-249,1 4 0,-6 12 1,2 6-1,-4 6-59,-1 5 0,-1 3 0,1 7 0,-1 6 5,9-43 1,0-1 0,-9 40-1,9-41 1,0 0 0,-9 38-384,1-8 1,6-13-1,7-16 1,6-15 299,8-15 0,34-75 0,-19 16 0,1 0 0</inkml:trace>
+  <inkml:trace contextRef="#ctx0" brushRef="#br0">17446 10864 7859,'-6'-33'485,"1"2"0,1 4 2212,2 5-1960,2 11 1,8 3-1,3 8-589,3 0 0,-2 9 0,-1 6 0,1 7-87,3 4 0,-4 9 0,0 9 0,2 5-280,2 7 0,-1-3 0,-1 7 0,-2 3-378,2 1 0,-4-1 1,2-3-1,0-1-168,-1-7 1,-3-12 0,-7-3 0,0-8 296,0-7 1,-7-11 0,-4-5 0,-4-4 467,-2-2 0,-7-8 0,-1-3 0,-3-3 0,1-3 0,5 0 0,-6 1 0,0-1 4,3 1 0,-5 1 0,8 2 1,2 4 1137,2 2 1,8-1-776,5 3 1,7 3 0,7-3 0,9 1-276,6-2 1,4 3 0,7-8 0,3-2-292,6-2 0,6-1 1,3-1-1,6 0-230,5 1 1,-1-8 0,7-4 0,-6-3 294,-3-2 1,-12 0-1,-3 0 1,-13 2 309,-7 3 1,-6-1 112,-9 7 1,-11 9 0,-13 15 160,-7 12 0,2 5 1,-4 8-1,2 3 26,-3 1 0,5 4 1,-4 4-1,2 5 20,-2 3 1,3 1-1,-3-2 1,4-2-229,1 2 1,8 0 0,4-4 0,3-9-144,2-9 1,7-7-1,6-6 1,7-7-879,8-8 1,3-15-1,2-14 1,0-11-274,0-9 0,-1-4 0,-5-5 0,-5 1 661,-3-2 1,-10-1 0,-4 0-1,-5 1 592,-5 3 1,-4 6 0,-8-1 0,-1 4 497,-4 1 0,5 10 0,-1 7 0,5 9 3231,0 6-3429,6 8 1,-1 12-1,8 15 1,0 10-353,0 10 1,8 7 0,3 9 0,3 4-288,3 2 1,1 2 0,2 5 0,4-2-790,2-3 0,2 0 0,5-10 0,2-5-209,3-4 0,-3-12 0,2-14 1,-8-9 525,-7-5 0,-3-15 0,-5-5 0,-3-6 306,-5-5 0,-4-4 1,-2-4-1,0-2 241,0 3 1,0 1-1,0 2 1,0 0 452,0-1 0,-2 9 0,-2 3 0,-1 3 3010,1 3-2887,-5 7 1,7 10 0,-3 14 0,3 7-217,2 4 0,7 3 0,4 8 1,4 4-396,1 1 1,1-5 0,-1 1-1,3-1-264,3 1 1,4-10 0,7-2-1,0-12-25,0-8 1,-6-12 0,-1-6 0,-4-9 144,-7-6 1,-1-10-1,-8-3 1,-2-3 276,-3-3 1,-2 4 0,-5 0 0,-5 3 856,-4 8 0,-1-2 0,-1 9 0,1 2 178,-1 6 1,1 10 0,-1 1-1301,1 3 1,6 4 0,5 3-965,3 6 0,4 4 0,3 1 1168,6 1 0,34-1 0,8 1 0</inkml:trace>
+  <inkml:trace contextRef="#ctx0" brushRef="#br0">19067 11228 9657,'0'9'5786,"1"-1"-6517,5-8 731,-4 0 0,34 0 0,1 0 0</inkml:trace>
+  <inkml:trace contextRef="#ctx0" brushRef="#br0">20307 10435 7845,'-26'-24'0,"6"-2"451,7 0 0,-2 2 1,6 11 235,0 8 0,2 10 1,7 21-1,0 9-323,0 5 0,7 5 1,4 4-1,2 1-431,-2-1 0,9 3 0,-3 1 0,3 2-457,4-1 0,-4-9 1,6-4-1,-3-4 524,-2-6 0,-3-46 0,-1-7 0</inkml:trace>
+  <inkml:trace contextRef="#ctx0" brushRef="#br0">20224 10451 7979,'-16'-31'0,"1"1"195,4 3 1,3 5 0,10-6-1,4-1 422,5-2 1,7 3 0,8 0 0,11-1-237,9-2 0,9 5 0,13 4 1,0 6-345,-4 5 0,-9 3 0,-2 10 0,-5 5-335,-4 10 0,-14 7 0,-3 11 0,-8 1-44,-8 3 0,-4 7 0,-7-2 0,-2 4-48,-3 1 1,-5-1 0,-8-4 0,-2-3 155,-2-1 0,-2-5 0,4 2 1,-2-6-173,1-3 0,3-14 1,2 3 405,-1-2 0,8-8 0,16-59 0,12-21 0</inkml:trace>
+  <inkml:trace contextRef="#ctx0" brushRef="#br0">21101 10368 7864,'11'-27'854,"-2"1"409,-2 2-1116,-1 2 0,-6 20 0,0 8 1,0 7-72,0 3 1,0 8-1,0 2 1,-2 1-18,-4 1 0,4 0 0,-5 5 0,2-2-38,-1-4 0,-5 5 0,5-7 0,3 1 16,1-4 1,-4 2-1,1-2-243,1-2 1,8-7 0,3-4 0,2-3-353,4-8 1,2-7 0,2-11 0,-1-4 310,1-2 1,-3-7 0,-3-4 0,-3 4 745,-1 4 0,-5 8 0,3-1 1944,-3 4-1779,-2 9 0,0 9 1,0 11-1,2 4-587,4 1 1,-3 6 0,8-2 0,2-3-658,2-4 0,1-8 0,1 4 0,1-3-2894,4-8 3474,-3-5 0,4-34 0,0-16 0,-1-1 0,0-1 0</inkml:trace>
+  <inkml:trace contextRef="#ctx0" brushRef="#br0">21530 9955 7864,'-16'-6'1478,"-1"1"1,8 1-1040,4 10 0,10 8 0,6 10 0,4 4-46,1 7 1,1 5-1,1 10 1,3-1-582,1 1 1,0 5 0,-6-2 0,1-5-855,-1-7 0,-5-14 0,-1-5 1042,-3-3 0,-31-62 0,-13-14 0</inkml:trace>
+  <inkml:trace contextRef="#ctx0" brushRef="#br0">21514 10203 7839,'-18'0'1075,"-4"0"1,9 0-699,-4 0 0,13 0 1,4 0-1,11 0-274,10 0 0,6-6 0,12-1 0,5 0-81,4-1 0,1-4 1,-1 1-1,-2-4-508,-2-2 0,0 1 1,4-1-1,-2 1-280,-2-1 1,-9 1 0,0-1 468,-6 1 1,-14 5 450,1 0 0,-17 14 0,-7 3 0,-8 8 403,-6 8 1,-2-1 0,4 6 0,-2 3 339,1 1 0,-3 2 0,2-2 0,4-1-564,5-3 1,0-1 0,8 1 0,1-5-591,2-3 1,10-8 0,4-2 0,7-3-449,3-8 0,9-13 0,0-13 0,4-3-61,-3-2 0,-1 0 1,-9 0-1,-2 0 867,-2 0 1,-8 7-1,-5 4 2730,-3 4-1952,-2 9 0,0 9 1,-2 11-1,-2 5-485,-1 6 0,-1-4 1,8 6-1,2-2-1015,1 0 0,8 1 0,-4-7 0,2 1-138,1-1 0,-1-7 1,7-5-1,2-8-264,2-7 1,0-9 0,-3-4 0,1-2 978,2-3 0,0-4 0,-4-4 1,2-1-114,3 1 1,-1 2 0,-6 0-1,2-2 207,5-1 0,-5-1 0,4 6 0,-4 0 579,-1 0 0,5 0 1,0 2-1,-2 3 184,-1 6 1,3-2 0,0 2 0,-2 2-300,-2 2 0,-1 3 0,-1 4-536,1 5 0,-8 6 1,-3 6-1,-6 7 69,-6 7 0,-1 6 0,-6 5 0,2-2-40,-2-1 1,4-2 0,0 3 0,1-3-159,5-2 1,-5-2 0,3-6-455,1 1 1,2-6 0,4-2 4,4-2 1,-3-1-1,8-6 471,2 0 0,-4 0 0,2 0 1,2 0 133,2 0 0,9-2 0,3-2 1,5-1 119,1 1 1,2 0 0,3 1 0,4-5 32,1-1 0,3 5 0,-8-1 1,-3 3-121,-6 2 1,-10 0 0,-10 2 45,-2 3 1,-1 5 0,-6 6-1,-2 3 504,-3 3 0,-3-4 0,-5 4 0,2-2-352,-2 2 1,-7-3 0,-4 5-1,-3-2-292,-8 0 0,0 5 0,-7-5 1,1 0-91,5 2 1,-3-5 0,4 1 0,6-6-352,3-2 1,9-9-1,8 1 1,2-10 496,3-10 0,8-30 0,5-13 0,0-8 0,0 0 0</inkml:trace>
+  <inkml:trace contextRef="#ctx0" brushRef="#br0">23085 9343 7839,'-17'-16'262,"1"-1"0,-6 8 0,0 3 0,0 6-183,-2 6 0,4 5 1,-8 11-1,-1 5 437,-3 5 1,1 8-1,4 4 1,3 4-256,0 2 0,5-1 0,-4 1 0,2-1-247,5 1 0,3-10 1,13-6-1,2-11-173,3-4 1,6-10 0,11-3 0,6-5-112,3-1 0,2 0 1,2 0-1,4 0 143,5 0 0,4-1 1,3-3-1,4-2 131,6 3 0,1 1 1,-1 2-1,-6 0 278,-4 0 0,-8 2 0,-7 3 0,-8 8 34,-11 7 1,-8 0-1,-11 8 1,-5 1-71,-10 3 1,-7 6 0,-9 1 0,0-1-341,0 3 1,0-6-1,-2 3 1,-2-5-467,-1-5 0,-1-6 1,6-11 559,0-5 0,2-38 0,-1-15 0,-2-4 0,-1 0 0</inkml:trace>
+  <inkml:trace contextRef="#ctx0" brushRef="#br0">23531 10054 7836,'-16'0'675,"-1"0"1,8-2 198,4-3 0,10-6 0,6-11 0,4-8-627,1-6 0,8-7 0,2-8 0,0-4-703,-4-6 1,-6-1 0,-5-1 0,-5 4 101,-4 2 1,-2 2 0,-2 9 0,-6 8 263,-8 10 1,-1 10 0,-5 9 0,2 9 199,-2 9 1,4 9 0,-4 8 0,3 9 255,3 5 1,5 4 0,2 8 0,1 3-79,5 6 1,3 3-1,5 2 1,6-2-437,4-3 1,10-6 0,9-11 0,8-7-125,6-8 1,1-12 0,-1-13-1,-4-10-1,-5-10 1,-1-8-1,-5-9 1,-7-2-133,-6-4 0,-3-3 1,-3-6-1,-1 2 655,-2 2 0,-7 13 0,2 0 951,-5 5 0,-2 15-689,-5 16 1,4 6-1,-3 19 1,3 3-242,2 4 1,0 1 0,2-7 0,1-1-483,3-3 1,5-1-1,-4 2 1,2-8-486,4-7 1,-4 0-1,3-8 1,-1-3-114,-2-6 0,0-10 1,-5-10-1,1-4 481,-1-7 0,-2-3 1,-4-7-1,-2 5 538,-1 0 1,-6 10 0,3-3 0,1 4 1026,0 3 1,-5 8 38,7 7 0,1 7-1133,10-2 0,3 5 1,9 2-1,4 3-370,6 2 1,3-1 0,2-5-1,0 0-342,0 0 1,-1 0-1,-5 0 1,-5-2-76,-3-3 1,-8 3 526,0-4 412,-8 5 0,5 10 1,-10 5-1,-2 9 169,-1 2 0,-3 5 0,5 6 0,-5 3-212,-1-2 1,5-2-1,-1-4 1,3-4-253,2-4 1,2-7-1,3-5-417,7-5 1,2-14 0,3-10 0,-1-12-200,1-6 0,-1-8 0,1 3 0,-1 1 577,1-1 0,-1 3 1,-1 7-1,-4 3 2179,-5 6-1619,-4 4 0,-4 12 0,-2 10 0,-1 12 40,1 8 1,-3-2 0,1 6 0,2 1-435,2 2 0,2-3 1,0-1-1,2 1-642,4-2 1,3-4 0,8-9 0,-1-4-468,1-2 0,5-3 1,2-10-1,1-5-288,5-3 1,-6-8 1269,-2 0 0,-11-52 0,-4-7 0</inkml:trace>
+  <inkml:trace contextRef="#ctx0" brushRef="#br0">24887 9575 7834,'0'-11'599,"0"0"183,0-2 0,-1-2-105,-5-2 1,2 8 0,-7 4-125,-2 3 0,1 4 0,-1 5 1,2 10-169,-2 8 1,0 7-1,0 1 1,4 2-364,2 3 0,1-5 1,8 2-1,3-7-121,6-4 0,10-4 0,4-11 0,5-11-536,5-13 1,9-16-1,0-15 1,4-7-261,1-8 1,-6-3 0,-5-4 0,-5-4 619,-5-5 0,-12 2 1,-10-2-1,-4 0 333,-2 1 1,-6-1-1,-1 13 1,-2 10 240,-4 12 1,-2 17-1,-2 8 1,-1 10 285,-4 5 1,4 11 0,-4 8-1,3 8-7,3 6 0,-1 10 1,3 3-1,2 6-363,7 5 0,-2 5 0,1 12 0,4 3-290,6 1 1,7-3 0,11-9 0,7-5-370,8-9 1,5-10 0,8-14 0,0-11-60,-1-13 1,-1-12-1,-4-12 1,-5-7-81,-4-8 0,-15 2 0,-5-3 0,-4 3 444,-2 2 1,-6-6 0,3 1 0,-4 1 494,-2 2 1,0 2-1,0 2 282,0 3 0,-2 11 0,-2 16 178,-1 10 0,-8 9 0,4 17 0,-2 4-353,0 5 1,5-2 0,-3 2-1,2 0-360,3-1 1,2-9 0,4-8 0,3-4-306,6-7 1,6 0-1,5-12 1,6-6-147,3-12 0,4-9 1,1-11-1,3-2-741,-2-1 0,-4-3 1,-6 5-1,-4-3 651,-5 2 1,-9 8 0,-3 3 754,-5 2 0,-2 4 0,-5 9 316,-5 5 0,-2 6 1,0 6-1,2 7 90,-2 7 1,6-2-1,2 6 1,3-2-601,2 0 1,0 0 0,2-5-1,3-2-476,6-4 1,4 2-1,3-8 1,2-3-375,2-6 0,0 1 0,-5-10 0,0-4 220,-1-3 0,-1-9 0,-2 1 0,-4-1 649,-2 1 0,1-1 0,-5 7 0,3 1 63,-3 3 0,1 2 1,0-1 123,1 0 0,8 8 0,-2 4-154,4 3 1,1 2 0,1 0 0,-1 0-219,1 0 1,-6 2 0,-2 3 0,-1 6 228,-5 4 0,-1 2 0,-2 1 0,0 4 170,0 5 0,-5-1 0,-1 2 0,1 1-134,-3 2 0,6 1 0,-3-3 0,5-3-368,5-2 0,1-4 0,9-9 0,5-6-418,4-3 0,9-9 0,5-6 0,-1-9 108,-2-11 1,2-6 0,-4-7 0,-7 4 218,-6 2 0,-6-4 0,-3 5 0,-5 2 308,-4 2 1,-4 4-1,-4 5 1,-5 8 1167,-3 5 1,3 10 0,0-3-474,-2 4 1,0 10 0,2 3-1,5 3-521,5 3 0,1 5 0,1 0 0,5 0-374,5 2 1,4-6 0,3 4 0,2-5-566,2-6 1,10 2 0,1-8 0,11-1-1178,9-2 1871,13-10 0,-9-14 0,6-9 0,5-5 0,1 0 0</inkml:trace>
+  <inkml:trace contextRef="#ctx0" brushRef="#br0">24871 9194 8229,'16'-16'720,"1"-1"0,-1 1 0,5-1 0,6 1-830,12-1 0,16-7 1,11-2-1,9-1-711,6-1 0,-5-3 821,-5-2 0,-10-11 0,-4 9 0</inkml:trace>
+  <inkml:trace contextRef="#ctx0" brushRef="#br0">22754 9889 7803,'-24'0'186,"6"-8"0,-4-1 1,5-2 650,6 0 1,4 6-529,7-6 1,15 5 0,9-5 0,12-4-296,14-5 0,18-5 0,-25 8 0,2 0 0,6 0 0,1 0-14,0-1 0,8-3 0,4-2 0,12-4 0,4-2 0,0 0 0,6-5 0,0 1 0,1 0 0,-1 0 0</inkml:trace>
+  <inkml:trace contextRef="#ctx0" brushRef="#br0">21646 12485 7755,'-18'0'38,"-4"0"1,2 0 0,-6 0 0,0 0 218,0 0 1,-1-5-1,-8-3 1,-4-1 78,-5-4 1,-4-2 0,1-1 0,1-1-113,2 1 1,-8-1 0,-8 1 0,-7-1-127,-4 1 0,5 6 0,-2 5 0,7 3-4,4 2 1,11 2-1,11 2 0,8 3 82,3 2 1,11-5-292,13 1 0,7-10 0,12-6 0,3-6-214,5-5 1,6-2-1,4-5 1,4 1-7,1-1 0,9-2 1,10-2-1,1 1 88,-1 5 1,1-3 0,-6 8 0,-7 4 14,-8 5 0,-7 10 1,-17 12 270,-8 7 1,-12 19 0,-10 4 0,-6 7 416,-3 3 0,-7 8 0,1 6 0,-3 5-182,-2 3 1,2 7 0,3-7 0,4-1-31,0-2 0,8-9 0,-1-6 0,10-9 59,5-11 1,4-9 0,4-11 0,6-4-205,9-1 0,6-10 0,10-11 0,1-7-314,-1-8 0,4-9 0,-3-5 0,1-4-219,1-5 0,2-10 0,8 0 0,0-1 434,-1 1 0,-10 0 0,1-8 0,4-2 0,-1 0 0</inkml:trace>
+  <inkml:trace contextRef="#ctx0" brushRef="#br0">22721 11460 7729,'-26'-19'215,"4"-3"0,-2 9 0,2-3 1,2 3 227,2 4 0,1 2 0,3 8 0,1 5 10,2 5 1,1 11-1,-2 7 1,2 8-164,3 7 0,2 11 1,5 8-1,-2 7-215,-4 7 1,4 11 0,-3 4 0,5 2-235,2-48 1,1 1 0,1 45 0,5-2-1,0-14-655,1-20 0,1-21 0,5-20 0,1-15-1554,-1-15 2368,-7-16 0,-6-40 0,-6-18 0,0 24 0,0-1 0,0 1 0</inkml:trace>
+  <inkml:trace contextRef="#ctx0" brushRef="#br0">22539 11790 7768,'-11'-55'260,"0"0"1,7 2 0,-1 7 0,3 4 288,2 1 0,0 3 0,0 7 0,2 3-221,3 6 1,5 11 0,8 4 0,4 1-162,6 1 1,3 5-1,4 9 1,2 5-2,1 10 1,6 8-1,-3 6 1,-1 6-271,0 4 0,6 9 0,-3 4 1,-1 3-431,-3 2 1,-6 0-1,-6 0 1,-7-1-35,-7-5 1,0 1 0,-9-13-1,-8-12 96,-11-10 1,-8-13 0,-12-4 0,-4-1 220,-5-5 0,-4-8 0,0-6 0,4-4 412,6-2 0,-3 3 0,3 1 0,3 2 662,5-2 0,6 6 0,8-1 200,-1 1 1,10 3-1,7-5-727,9 2 1,13-4 0,6 3 0,5-1-342,6-4 0,10-9 0,14-5 1,6-6-258,9-6 1,-38 15 0,0-2 0,1-3 0,-1-2 0,-1-1-1,-2-1-527,29-33 0,-9-5 0,-15-1 0,-11 2 400,-12 2 1,-10 2 0,-9 0 0,0 2 458,0 3 0,-2 6 1,-4 11-1,-5 5 495,-3 4 0,-1 4 0,2 3 0,2 8 295,-2 7 1,4 6 0,-2 9-191,-2 3 0,6 6 0,1 13 1,4 9-306,2 10 0,0 12 1,0 5-1,2 7-153,4 4 0,3 10 1,9 9-1,3 0-421,1 0 1,9-2-1,2-9 1,9-7-381,6-11 1,2-17 0,-3-13 0,-3-13-685,-5-10 0,-6-16 1313,-5-8 0,3-60 0,-18 28 0,0-1 0</inkml:trace>
+  <inkml:trace contextRef="#ctx0" brushRef="#br0">24193 11526 7768,'0'-17'95,"0"1"1,0-1 676,0 1 1,-8-1-269,-3 1 1,-3 7-1,-3 5 1,-1 8-186,-4 7 1,3 11-1,-4 5 1,1 6-178,-1 6 1,-4 3 0,5 8-1,2-1-164,1 1 0,8-8 0,2-3 1,2-6-240,3-6 0,10-10 1,6-13-1,9-10-105,6-10 1,10-10 0,2-11 0,-3-3 94,-1-3 1,-4 7 0,-1-3 0,-4 6 494,-3 5 0,-1 1 0,-5 8 158,0 5 0,-3 10 0,-3 6 0,-3 11-71,-1 7 1,0 9 0,6 1 0,-2 5-220,2 3 0,4 3 0,3-3 0,4 6-220,1 4 1,3 7 0,5 0 0,0-1-268,0-3 1,-2-3-1,-3-2 1,-6-4 56,-4-1 0,-10-3 0,-8-7 0,-11-3 279,-9-6 1,-6-11 0,-9-5 0,-2-5 263,-1-1 1,-1-7 0,6-4 0,0-6 137,0-5 0,7 2 1,4-7-1,5-3 139,6-1 0,-1-8 0,6-1 0,4-2-627,6-4 1,5-4 0,9-5-1,3-6-139,1-3 1,9 0 0,0 3 0,6 8 154,0 7 0,-4 6 1,-6 10-1,-5 8 82,-3 11 1,-3 7 0,1 6 204,-1 4 0,-6 5 0,-5 9 0,-3 4 174,-2 2 1,0-1 0,2 3 0,1-6-233,3-4 1,1-3 0,-1-4 0,5-5-225,3-5 0,3-2 0,0-7 0,-1-8-67,1-10 1,-1-7 0,-1-4 0,-4-3 24,-6-3 1,-3 7 0,-4-3 0,-3 8 479,-6 9 1,-11 2 0,-6 14 0,-3 4-62,-2 6 1,0 5 0,0 8 0,2-1-501,3 1 0,4 5 1,9 0-1,4-2-711,6-2 958,3-8 0,46-18 0,11-10 0</inkml:trace>
+  <inkml:trace contextRef="#ctx0" brushRef="#br0">24904 11245 7756,'-6'-8'834,"1"8"1,-1 15 0,6 13 0,0 5-770,0 5 0,8-1 0,1 7 0,2 0 31,0-1 1,-6 1-1,5-9 1,-1-8-136,0-7 0,-3-1 0,5-16 47,1-4 0,-4-14 0,-3-15 0,-3-4 200,-2-5 1,0-5 0,0 3 0,0 1 141,0 0 0,0 1 1,0 6-1,0 0-88,0 0 1,6 0 0,3 0 0,4 1-586,5 5 1,4-3 0,-2 8 0,2 4-1433,-1 5 1,2 4 1754,0 3 0,13 19 0,-1-2 0</inkml:trace>
+  <inkml:trace contextRef="#ctx0" brushRef="#br0">25284 10831 7751,'-16'10'2298,"-1"-3"-2466,1-7 1,8-2 653,8-3 1,8 3 0,8-4 0,1 4-1006,-1 2 0,1 2 0,-1 4 519,1 5 0,-15 70 0,-3-32 0,0 1 0</inkml:trace>
+  <inkml:trace contextRef="#ctx0" brushRef="#br0">25367 11212 7751,'-15'16'163,"4"1"99,6-1 0,3 1 0,2-1-338,0 1 0,2-2 0,3-4-11,6-6 1,4-3 0,1-2 0,1-2-143,0-3 0,5-6 1,0-10 228,-2-1 0,0-39 0,0-17 0,2-4 0,0 0 0</inkml:trace>
+  <inkml:trace contextRef="#ctx0" brushRef="#br0">25714 10534 7751,'-16'-15'275,"-1"4"283,1 5 0,5 5 0,1 2 0,3 7-53,3 8 1,1 10-1,-1 13 1,-2 7-104,3 7 1,3 13-1,7 9 1,8 1-318,5-5 0,15-12 0,0-9 1,5-12-561,6-8 1,-3-16 0,-1-17 0,-2-17-19,-3-17 0,-2-11 0,-2-7 0,-2-8 125,-3-6 1,-4 1 0,-8-4-1,-1 4 315,-4 2 0,2 2 0,-8 1 0,-1 6 165,-2 6 0,-8 1 0,-1 17 340,-2 7 0,0 15 0,-4 11 0,3 13 437,3 13 1,-4 9 0,4 16-1,-1 4-623,1 6 0,0 9 1,3 1-1,-1-1-331,1-2 0,2 4 0,4-2 0,3-6-202,6-7 1,4-22 0,2-11 0,-1-11-118,1-6 1,-3-11 0,-1-12 0,-2-12-61,2-9 0,2 1 1,1-8-1,1-2 236,-1-2 1,-5 6 0,-1 5 0,-1 6 887,0 3 0,-3 10-391,5 1 1,-8 10 0,5 12 0,-3 6-50,1 4 0,1 3 0,-3 3 0,3 3-6,2 1 0,2-5 0,6 1 0,-1-8-567,1-8 0,-1-3 0,3-2 0,3-4-277,5-7 1,-3-2 0,0-14 0,-2-1 280,0 3 1,-2-5-1,-7 8 1,-4 2 237,-1 1 1,-3 8 423,-5 0 1,0 10 0,0 1 469,0 9 1,0 5-1,0 3-379,0 0 1,0-6 0,2-2-397,4-2 0,3-1 0,7-6 0,1 0-109,-1 0 0,1-6 0,1-1 0,3-4-213,1-8 0,0 3 0,-6-6 0,1 3 42,-1 3 1,1-1 0,-1 1 472,1-1 1,-6 3 376,0 3 1,-6 3-367,6 8 0,0 0 0,4-2 0,-2-1-123,-2-3 1,2-1-1,7 1 0,2-5-156,-2-3 1,6-3 0,2 1 0,3-3 10,2-3 1,-7 4 0,-4-3 0,-4 7 379,-1 3 0,-1 7-210,1-1 1,-8 10 0,-2 4-1,1 0 0,-5 4 1,8-7-202,2-2 1,2-3 0,1-1-1,1-1-137,0-5 0,-1-3 0,-1-10 0,-2-3-131,-2-5 1,0 1 0,3-1 0,-1-3 266,-2-1 0,-5 0 1,3 3-1,0 6 144,0 4 0,-3 3 255,5 4 1,-2 5-1,2 12 1,-4 5 67,1 4 0,-5 3 0,7 2 1,-1 4-227,0 2 1,0-4-1,4 6 1,-2-1-190,2-1 1,0 5 0,0-5 0,-4 1-10,-2 1 0,4-2 0,-5 1 0,-3-5-250,-1-3 0,-9-3 1,-4 1-1,-6-3-836,-5-3 0,-3 2 1111,-9-7 0,-57-8 0,37-3 0,1 1 0</inkml:trace>
+  <inkml:trace contextRef="#ctx0" brushRef="#br0">25483 10782 7747,'-15'-8'0,"4"-3"529,5-3 1,8-3-1,11 1 1,17-1-320,15 1 1,22-8 0,15-4-1,-37 12 1,0-1-211,-1 0 0,4-5 0,11-10 0,8-9 0,0-1 0,4-5 0,-1-1 0,0 1 0</inkml:trace>
+  <inkml:trace contextRef="#ctx0" brushRef="#br0">16785 5870 8156,'-50'17'-360,"0"0"1,-1-1 0,-2 2 0,-3 3 407,3 1 1,2 2 0,3-4 0,2 2 120,2-2 1,2 0-1,-4 0 1,3 4-90,3 2 0,9 2 0,9 7 0,3 1-60,3 3 1,5 7 0,2-4-1,1 0-33,5-3 0,10 0 0,9-5 0,14-2 6,12-1 1,4-9 0,17-6 0,3-8-4,4-6 0,3-2 1,-1-2-1,7-4 14,7-5 1,4-3 0,-42 6 0,0-1 0,-1 0-1,1 0 4,3-2 0,-1 0 0,1-1 0,-1 0 1,4-3-1,1-1 0,-2 0 0,0 0-20,-1 0 0,-1-3 0,2-2 0,-1-2 0,0 1 0,1 0 0,-1-1 1,0-2 0,-3 1 0,-2-1 0,-6-2 0,-3-1 0,26-29 0,-11-2-58,-7-4 0,-22 6 1,-4 2-1,-8 6-5,-9 5 0,-3-4 0,-7 4 0,-12-4 38,-12-2 1,-4 6 0,-11 2-1,-7 2 196,-11 3 1,-17 11-1,-11 8 1,0 7-32,4 3 1,4 5-1,1 10 1,0 11-261,0 14 0,1 10 0,42-16 0,1 3 0,1 1 1,2 3-388,2 1 0,2 1 518,-23 26 0,2 5 0,7-11 0,0 6 0,2 3 0</inkml:trace>
+  <inkml:trace contextRef="#ctx0" brushRef="#br0">16735 7574 8334,'-11'-6'-97,"2"-1"1,1-2 34,5-4 0,1 4 0,4-1 1,3 1 69,6 0 0,9 5 0,4-3 0,2 2-53,3-1 1,3 0 0,3 5 0,1-3 21,3-2 1,7 1-1,0 7 1,7 1-93,8 3 1,5 7 0,4-4-1,1 2 61,-1 0 0,2-5 0,5 3 0,11-2 49,-41-4 1,2-2 0,3-3-1,0-2 1,2-1 0,-1-1-1,3-1 1,0-2-54,6-2 0,-1 0 0,-3 1 0,0 1 0,3-2 0,1 0 0,-4 2 1,0 2 138,0 1 1,1 1 0,2-2 0,0 1 0,1 2 0,1 2 0,-5 0 0,-1 1-22,-3-1 0,-1 2 1,4 0-1,0 0 1,1 0-1,0 2 0,0 0 1,1 1-98,0 2 0,0 1 0,0 1 0,-1-1 1,2 0-1,0-1 0,1-2 0,1 0-65,0-2 0,1-1 1,-2 1-1,1-2 1,2 1-1,1 0 1,-2 0-1,0 0-33,-3 0 1,-2 0 0,-2 1 0,-2-2 0,-4 1 0,-1-1 134,1-2 0,0 0 0,2 0 0,0-1 0,-1-2 0,-1 1 0,42-1 0,-9 4 0</inkml:trace>
+  <inkml:trace contextRef="#ctx0" brushRef="#br0">28244 5507 8187,'0'-17'6,"0"1"0,-5 5 1,-1 0-1,1-1 353,-3 3 0,7-5 78,-5 3 1,-3 3 70,-2 3 0,2 3 0,-2 2-173,-2 0 0,4 9 0,-2 8 1,-2 8-87,-2 7 1,4 8-1,0 4 1,-2 6-106,-2 5 1,6-4 0,4 4-1,3-3-353,2-3 0,0-4 0,2-5 0,3-5-172,6-9 0,4-14 0,3-6 0,4-4 50,6-2 1,5-15-1,4-7 1,3-9 115,2-8 1,-5-5-1,2-9 1,-6-2 242,-6 1 0,-5 3 0,-11 3 0,-5 0 106,-4-1 1,-10 10 0,-4-5 0,-9 9 170,-6 8 1,1 3 0,-1 7 0,-3 3-40,-1 3 0,0 3 1,1 8-1,3 0-164,-3 0 0,5 8 1,-1 3-1,2 5-176,4 6 1,0 4-1,-1 7 1,1 0-372,5 0 1,1 6 0,8-1 0,3-1-604,1-2 0,4-4 1048,3-3 0,41-19 0,16-11 0</inkml:trace>
+  <inkml:trace contextRef="#ctx0" brushRef="#br0">28525 5606 9592,'0'16'297,"0"1"0,8 9 0,3 7 0,3 9-198,3 6 1,-6 16 0,0 8 0,0 7-253,-2 3 0,4-1 0,-7-5 0,-3-10-38,-1-9 1,-2-15 0,-2-11 0,-1-11-248,-3-7 1,-5-11 229,6-2 0,-1-9 0,6-13 0,0-8-203,0-6 1,-5-8 0,-1-10-1,1-1 315,-3 2 0,5-6 1,-9 0-1,1 1 294,2 2 0,-5 10 0,4 4 0,-1 0 87,0 0 1,8 12-1,-3 3 1,6 8 79,6 8 1,3-3-1,9 4 1,2-1 57,2 0 0,8 2 1,-4-4-1,3 2-141,4-2 0,-9 6 1,7 2-1,-5 3-255,-6 2 0,-3 7 0,-6 4 0,-8 6-31,-6 5 1,-6 3 0,-10 9 0,-1 0-83,-2 5 1,-6-4 0,6 4-1,2-5-323,2 0 1,1-1 0,1-4-1,1-5-1298,4-8 1707,4-10 0,43-87 0,-13 26 0,0 0 0</inkml:trace>
+  <inkml:trace contextRef="#ctx0" brushRef="#br0">29071 5275 8187,'-7'-24'144,"3"11"0,-5-3 0,0 3 3177,0 4-2809,5 1 1,-2 16-1,10 3 1,3 4-490,3 1 1,-1 8-1,4 2 1,-2 1-567,1 1 0,-2-1 0,-1 5 1,0-3 542,0-1 0,-5 43 0,3 17 0</inkml:trace>
+  <inkml:trace contextRef="#ctx0" brushRef="#br0">29088 5308 7921,'-17'0'455,"1"0"1,1 2-19,4 4 1,9 3-1,9 9 1,1 6-141,-1 9 0,4 9 0,-4 12 0,1 3-214,-1 1 1,4 3-1,-5 3 1,-3-1-228,-1-3 0,4-8 0,-1-3 0,-1-10-710,-2-10 1,0-5-1491,3-7 2344,-3-8 0,5-75 0,-7-26 0</inkml:trace>
+  <inkml:trace contextRef="#ctx0" brushRef="#br0">28889 5689 8169,'-26'-17'-366,"3"6"815,6 0 0,10 7 0,7-1-180,9 3 0,7 2 0,6 2 0,6 1-422,3 3 1,4 1 0,2-3-1,3 1-330,3-1 0,1-4 0,3-4 483,-2-1 0,2-26 0,5-10 0,1 0 0,0 0 0</inkml:trace>
+  <inkml:trace contextRef="#ctx0" brushRef="#br0">29501 5259 8382,'-16'-6'374,"-1"1"0,10-6-847,7 5 1,9 2 0,11 8 472,2 2 0,7 14 0,-3-2 0</inkml:trace>
+  <inkml:trace contextRef="#ctx0" brushRef="#br0">29551 5474 8169,'-17'25'340,"1"1"0,1-6 1,4 4-44,5 2 0,5 1 1,1 5-1,1-3-402,5-1 1,3-3 104,8 3 0,21-4 0,6-8 0</inkml:trace>
+  <inkml:trace contextRef="#ctx0" brushRef="#br0">29699 5540 8113,'-16'0'788,"1"2"-33,4 3 0,-2 4 0,8 8 1,1 1-790,2 4 1,10 4 0,1 7-1,2-2-966,0-3 1,-2 3 0,4-5 73,-2-1 0,0-10 725,6-15 1,-8-7 0,-4-12 0,-3-3 565,-2-5 0,0 1 1,0-1-1,0-3 164,0-1 0,2 3 1,2 3-1,1-1-11,-1 0 0,3 6 0,0-2 0,3 5-118,3 6 1,-4-1 0,2 6 0,2 4-134,1 6 1,-3 11-1,-1 8 1,-1 3-201,0 4 1,-5 4-1,1 1 1,-3-3-333,-2-1 1,0-5 0,0-1-437,0-1 0,0-7 1,0-10 300,0-5 0,5-2 0,3-15 0,-1-5 262,0-4 0,6 2 0,-2-6 1,2 1 637,-2 1 1,2-3 0,-6 7 576,3 2 0,1 3-694,5 6 1,-5 11-1,-2 11 1,1 4-387,-1 1 1,-6 6 0,5 0-1,-3-1-939,1-3 1,5-2 0,-4 1-2766,2 0 3707,2-8 0,-1-51 0,-3-27 0,1-4 0,0-1 0</inkml:trace>
+  <inkml:trace contextRef="#ctx0" brushRef="#br0">30229 5176 8113,'-10'-7'2148,"1"5"-1152,4-4 1,5 4 0,-2 4-1264,6 4 0,7 3 0,-6 7 0,1 3 267,1 3 0,-5 40 0,5 17 0</inkml:trace>
+  <inkml:trace contextRef="#ctx0" brushRef="#br0">30278 5424 8113,'-7'16'237,"0"1"0,-4 0 0,5-1 346,4 1 0,2 1 0,0 4 1,0 6-864,0 3 1,2-4-1,4-1 280,5-2 0,40-17 0,11-8 0</inkml:trace>
+  <inkml:trace contextRef="#ctx0" brushRef="#br0">30758 5457 8113,'-17'-7'124,"8"-3"1,4-6 0,3-2 308,2-4 1,0 3 0,0-3 0,2 2-116,3-2 0,2 3 0,4-3-81,-5 4 1,-4 11-198,-2 7 1,-8 7 0,-3 10-1,-5 1-202,-6 4 1,2 4 0,-8 7 0,1 0 137,1 0 1,2-7 0,9-2 0,2-2 7,2 0 0,8-6 0,-1-5 1,8 0-50,7-2 0,5-1 0,4-8 0,4 2 151,2 3 1,2-3 0,3 3 0,-2-3 171,-1-2 1,-8 2 0,2 2 0,-4 3-139,-1 2 0,-8 2 0,-3 8-50,-5 3 1,-2-4 0,-5 6 0,-7-2-144,-7 0 1,0 2 0,-6-4-1,2 2-171,4-1 1,2-9 0,1-2-18,1-3 0,6-3 1,9-12 10,10-8 1,9-10 0,17-13 0,4-5-23,5-3 1,3-3 0,5-2 0,3-1 104,6-2 0,1-4 0,-3 8 0,-11 5 474,-13 4 1,-10 12 0,-12 14 414,-7 8 1,-10 8-1,-16 6-147,-2 5 1,-2 5-1,4 6 1,-4 6-146,-2 3 0,-1 8 0,-5 1 1,3 1-342,1-1 0,8 1 0,-2-7 0,4 1-365,1-3 0,10-5 0,7-1-443,9-10 0,11-8 0,4-14 0,2-7 105,3-7 1,2-6-1,3-7 1,-3 0 489,-4 0 0,-3 6 0,-7 1 0,-3 2 793,-3 4 1,2 1-274,-7 3 0,1 7 0,-3 5-671,1 8 1,3 5-1,-5 7 1,5 1-831,1 0 1105,2-1 0,35-21 0,7-6 0</inkml:trace>
+  <inkml:trace contextRef="#ctx0" brushRef="#br0">31485 5556 8113,'-31'20'0,"5"-1"763,10-4 1,1-3-1,12 3-177,4-4 1,9-4 0,12-10 0,7-6-404,8-8 0,0-18 1,7-2-1,0-5-237,-2-2 0,-3 2 0,-10-4 0,-3 2-369,-2-2 1,-10-2-1,-8-2 1,-4-1 116,-2-4 1,-8 2-1,-3-6 1,-3 2 370,-3 4 1,0 3 0,1 8 0,-1 9 283,1 9 0,-1 13 0,1 5 1,-1 6 108,1 6 1,5 10 0,0 14 0,0 8-93,1 12 0,-2 7 0,6 11 0,2 3-388,3 7 1,2-5 0,5-3 0,5-8-447,4-6 0,7-7 0,2-5 0,-1-7-89,1-8 1,4-10 0,-6-10 0,-2-2 88,-1-3 0,-5-10 0,-1-5 0,-4-5 167,-1-6 0,3-4 0,-4-5 1,0 1 258,1 3 1,-3 5 0,-5-4-1,2 2 529,4 4 1,-5 2 0,5 1 622,-4 1 0,-2 8-719,0 8 0,0 13 0,0 11 1,0 0-382,0 0 0,0 3 0,2-3 1,3 0-449,6 0 0,6-4 0,5-7 0,3-4-83,1-1 1,5-5-1,-3-8 1,3-6 248,2-4 1,-7-2 0,-4 1 0,-4-2 332,-1-4 1,-1 3 0,-1-3 561,-4 4-124,-3 9 0,-8 3 0,0 12-185,0 5 1,1 3-1,3 3 1,3-1-393,3 1 1,-5-6 0,6-2 0,2-2-73,2-3 0,1-4 1,1-5 40,-1-6 0,-5-4 1,-1-2-1,-3 1 22,-3-1 1,-3-1 0,-2-2 0,-5-2 120,-5 1 1,-4 3 0,-3 2-1,-2 1 236,-2 4 0,-6 3 0,4 8 0,0 0-133,0 0 0,2 2 1,6 2-1,1 3-114,4 2 1,4 3-123,7 4 0,13-7 0,5-3 0,4-4-90,2-2 0,5-2 0,-1-4 0,3-5 168,2-3 1,-5-3-1,-2 0 1,-1-1 259,1-4 0,-4 4 0,4-4 0,-2 5 62,-4 6 0,-2 4 0,-1 7 0,-1 0 17,1 0 1,-8 7 0,-2 6-1,-1 5-75,-1 4 0,6 6 0,-3-6 0,-1-2-441,0-1 0,6-3 0,-2-1 0,4-2-246,2-2 1,-1-8 0,1 3 0,-1-4 55,1-2 1,5-8-1,0-5 1,-2-5 196,-2-4 1,-1 0 0,-1 5 0,1 3 495,0 3 1,-6-2 420,0 7 1,-6 1-413,6 5 1,-5 2-1,5 1-896,2 3 1,1 5 0,3-4-2371,-1 2 2952,1-5 0,-45 11 0,-10-6 0</inkml:trace>
+  <inkml:trace contextRef="#ctx0" brushRef="#br0">31469 5093 8729,'-26'-2'0,"4"-1"650,4-3 0,10 1 1,8 3-226,10-4 1,19 5 0,11-7 0,12 3-674,8-1 0,-3-5 0,0 6 248,0 1 0,9 2 0,10 2 0</inkml:trace>
+  <inkml:trace contextRef="#ctx0" brushRef="#br0">32230 4911 8113,'-17'-7'-143,"0"-4"0,3 2 143,3-2 0,33 7 0,15-3 0</inkml:trace>
+  <inkml:trace contextRef="#ctx0" brushRef="#br0">28410 7359 8130,'-17'-15'-52,"2"2"1,3 4 506,1 2 1,7-6-50,-2 2 1,6-2 0,6 0-1,5 2-259,4-2 0,1 6 1,1 1-1,1 4-111,4 2 0,-4 0 1,6 0-1,-2 2-49,0 4 0,0-3 1,-5 8-1,0 2-39,-1 2 0,1 2 0,-1-1 0,1 1-63,-1-1 1,-1 1-1,-2-3 1,-4-1-7,-2-2 1,-1 0 0,-6 6 0,0-1 104,0 1 1,0-1-1,-2 1 1,-4 1-11,-5 4 0,-3 4 0,-5 7 1,-1 0-41,-2 0 1,-5 2 0,3 2 0,0 2 50,0-3 1,-4-6 0,4-3 0,-1 1 47,-5-2 0,5-2 0,-1-8 1,2 1 138,4-1 0,1-5 0,5 0-85,3 2 1,5-6-1,12-1 35,5-4 0,3-2 0,5 0 0,1 0 58,2 0 0,7 0 0,1 0 0,5-2-136,3-4 0,1 3 0,-4-6 0,2-1-487,1 1 1,6 5 0,-5-3-1,-1 2-584,3-1 0,-4-1 1027,7 1 0,7-10 0,8-10 0</inkml:trace>
+  <inkml:trace contextRef="#ctx0" brushRef="#br0">28724 6896 8080,'-2'-17'389,"-4"1"1,3-1 1011,-8 1-1263,7 6 0,-1 10 0,8 11-29,3 4 0,-1 2 0,-3 1 0,2 2 41,1 2 0,1 8 1,-6-5-1,0 3-193,0 0 0,0-1 0,0 6 0,0-2-53,0-3 0,0 1 0,0-7 0,0-1-478,0-3 468,0-1 1,0-10 0,0-7-44,0-9 0,0-12 0,0-2 1,0-3 39,0-4 1,0-6-1,2-1 1,1 4 135,3 3 0,5 3 0,-4-6 0,1 2 66,-1 3 1,6-1 0,-2 7-1,2 1-67,-2 3 0,3-2 1,-3 1-1,4 7 264,2 2 0,-6-1-51,0 6 1,-2 1-55,2 10 0,-4 3 0,-7 7-63,0 1 1,0 1 0,0 3 0,0 1-39,0-2 0,0 0 1,0 0-1,0 2 13,0-2 1,0 4 0,0-2-1,0-1-242,0-3 1,2-1-1,4-1 1,5 1-293,3-1 0,3-5 0,1-2 1,2-1-546,3-5 0,11-3 982,-1-5 0,3-24 0,2-10 0,1-6 0,1 0 0</inkml:trace>
+  <inkml:trace contextRef="#ctx0" brushRef="#br0">29699 7623 8070,'-22'-14'272,"-1"1"0,0 2 3338,5-2-3159,-2 6-858,18-1 1,2 8-1,11 2 407,4 4 0,31-12 0,7 4 0</inkml:trace>
+  <inkml:trace contextRef="#ctx0" brushRef="#br0">30113 7326 8076,'-6'-11'0,"-1"1"20,-2 3 1,5-6 1020,-1 2-829,3 4 1,2 1 0,2 12-95,3 5 0,-1 4 0,5 3 0,0 4-85,0 6 1,-3 8-1,3 3 1,0-1-5,0 3 1,-3-4 0,3 7 0,0 0-114,1-2 0,-7 2 0,3-9 0,-3-4-466,3 1 439,-4-16 1,5-3-1,-7-20 1,0-10 27,0-9 0,0-7 0,-2-3 0,-1-5 13,-3-1 0,-1 0 1,3-2-1,-1 5 131,1 4 0,2-4 0,2 1 0,0 1 100,0 2 0,0 8 0,0 1 0,0 2-66,0 4 1,7 1 0,3 3-1,1-1-26,0 1 1,0 1-1,5 2-29,1 2 1,-1 9 0,1 2 0,-1 10 27,1 4 1,-1 8 0,-1 2 0,-2 4-28,-2 7 0,0-2 1,6 5-1,-3-3-35,-3-2 0,2 0 0,-6 0 0,3 1-100,3-1 1,-4-8-1,2-3 1,2-5-296,1-6 1,5-4 0,1-7 0,2-2 388,-2-3 0,6-41 0,0-16 0</inkml:trace>
+  <inkml:trace contextRef="#ctx0" brushRef="#br0">30394 6582 8096,'-15'-2'464,"4"-4"1,4 2-181,7-7 0,2 8 0,3-3 1,6 4-179,4 2 0,2 0 1,1 0-1,2 2-112,2 4 1,-5-3 0,-6 8-105,2 2 1,-6 2-1,-2 3 1,-3 3-85,-2 1 1,-7 0 0,-4-6-1,-4 3 31,-1 3 1,-1-4 0,1 4 0,-1-5 135,1-6 0,-1 3 0,2-3 54,4 4 1,0-6 50,11-3 0,-2-4 1,15-2-1,4 0 100,3 0 1,8 0 0,-5 0 0,1 0 101,0 0 0,0 0 0,-4 0 0,1 1 138,-7 5 1,1-2-349,-10 7 0,-6 0 0,-10 5 0,-6 1-516,-5-1 1,-2 6 0,-3 0 0,3 0-1395,0 2 1840,5-5 0,3-10 0,9-11 0</inkml:trace>
+  <inkml:trace contextRef="#ctx0" brushRef="#br0">30824 6548 8096,'-17'-16'-680,"6"5"931,0 0 1,8 0 641,-3-6 1,6 3-554,6 3 0,3 5-368,7 12 1,-6 8 0,-5 10 0,-3 4-128,-2 7 1,-2 0 0,-2 9 0,-3 2-154,-2 1 0,-2 10 1,-6 2-1,-1 4 308,-4 3 0,0-12 0,-4 6 0,-4 9 0,0-1 0</inkml:trace>
+  <inkml:trace contextRef="#ctx0" brushRef="#br0">31171 6482 8511,'-26'0'384,"4"0"0,-1 0 1,1 2-1,1 2-681,3 1 1,7 8 0,2-2 0,1 4 437,5 1 0,1 6 1,4 1-1,3-1-102,6 1 1,4-4 0,3 3 0,4-4-149,6-1 1,-2-8-1,1-3 1,3-5-18,1-1 1,-4-5 0,-1-3 0,0-1-122,0-4 0,-4-3 0,3-4 0,-1-2-273,-4 1 1,-7 3 519,-2 2 0,-51-45 0,-8-11 0</inkml:trace>
+  <inkml:trace contextRef="#ctx0" brushRef="#br0">31304 6433 8096,'-17'0'238,"0"0"1,1 2 0,-1 3 127,1 6 0,1 4 0,2 3 1,4 4-153,2 6 1,-4 5 0,5 4 0,3 3-227,1 2 1,2 1 0,0 2 0,0 0-2078,0 0 2089,7-4 0,10 36 0,8 2 0</inkml:trace>
+  <inkml:trace contextRef="#ctx0" brushRef="#br0">31485 6978 8096,'-23'0'0,"10"-5"0,-4-1 0,2 3 0,8 1 0,22 9 0,12 2 0</inkml:trace>
+  <inkml:trace contextRef="#ctx0" brushRef="#br0">29683 8103 9970,'0'-7'374,"0"7"0,0 7 0,0 9 0,2 3-374,3 3 0,-1 11 0,5 11 0,0 6-58,1 5 0,1 5 1,5 12-1,1 5-55,-1 4 0,1 0 0,-1-2 0,1-6-7,-1-5 1,1-7-1,-1-19 1,-1-9-174,-4-9 0,4-2 0,-4-5 3,4-8 0,-4-5 0,-2-6 0,-2-4-30,-3-5 1,-2-5 0,-2-4 0,0-4 70,0-2 0,0-2 1,-2-5-1,-4 0 249,-5 0 0,-6-16 0,-3-8 0,-2-6 0,0 1 0</inkml:trace>
+  <inkml:trace contextRef="#ctx0" brushRef="#br0">29948 8136 7904,'-10'-7'6,"-3"3"0,6-5 1070,-2 1-737,5 3 0,-3 12 0,7 4 0,0 4-120,0 1 1,5 8 0,3 4 0,1 5-175,4 6 0,-4-5 1,2 7-1,2-3-84,2 1-1,-1 5 1,-1-3 0,-2 1 4,2 4 0,2 2 1,-1 1-1,-1 1-103,-2-1 0,-1-5 0,2-1 0,-2-3-39,-3-3 1,0-10 0,-3-4-800,1-5 446,1-9 0,-6-3 0,0-12-145,0-5 1,-7-4 674,-4-1 0,-41-15 0,-10-4 0</inkml:trace>
+  <inkml:trace contextRef="#ctx0" brushRef="#br0">29699 8880 7891,'-11'-9'-73,"0"3"392,0 5 1,2 2-166,4 5 0,3 3 0,4 8 1,1-1 9,3 1 0,5 1 0,-4 4 1,2 4-52,4 0 1,2 5-1,2-4 1,-1 5-12,1 1 0,-1 0 0,1-2 0,-1-2-44,1-1 1,5-10 0,0 1 0,0-8-15,2-4 0,0-1 0,5-6 1,-3 0-6,-2 0 0,3-8 0,-5-5 0,-1-7 7,-3-7 1,-2-5-1,1-1 1,-2-2-81,-4-3 0,2 1 1,-6-7-1,0 0 116,1 2 0,-1-8 1,-2 2-1,5-5-35,-1 0 0,6 9 0,-4 5 0,3 4-181,3 2 1,5 2 0,0 5-1,-2 8-216,-2 5 1,-1 4 0,0-2-535,-1 5 1,-5 4-1017,0 2 1900,0 0 0,-2 8 0,-1 1 0</inkml:trace>
+  <inkml:trace contextRef="#ctx0" brushRef="#br0">29716 10286 8006,'-5'-17'257,"-1"1"1,-1 5 0,3 0-211,-2-2 0,1-2 0,7 0 238,3 4 0,-1 4-151,7 7 0,-2 2 1,4 3-1,-4 10 7,-1 11 1,4 3 0,-2 15 0,1 4-99,0 5 1,-2 1 0,4 6 0,-2 1-52,2-2 0,-4 5 1,0-5-1,-2 1-61,-3 1 1,-2-2 0,-2 0 0,0-10-52,0-8 0,-6-12 1,-1-5 72,-2-6 1,-2-7 35,-6-16 1,8-4 0,2-8 0,1-1-91,1-4 0,-1-4 0,6-9 1,-2-2 34,-3-1 1,3-10-1,-4 0 1,5-5 43,1 0 0,5 1 0,2 2 1,1 1 26,-1-1 1,6 6 0,-2 0-1,4 0 64,1 2 0,1 1 0,-1 10 1,1 3 203,-1 6 0,7-1 0,-1 2-104,-2 7 0,-2 4 1,-1 10-101,-1 0 1,1 0 0,-3 2 0,-1 4-8,-2 5 0,-1 4 1,1 1-1,-4 2-44,0 4 1,-5 4 0,5 9 0,-1 2-32,-1 1 1,1 8-1,-6-2 1,0 4 19,0 2 1,5-1 0,1 1 0,-2 0-42,-3-1 1,1-6 0,2-5-1,3-3-26,3-2 0,-5-9 1,6-7-1,2-8-173,2-2 0,1-5 0,3 2 0,3-6-335,5-4 1,6-12 0,4 0 567,2-6 0,4-37 0,4-16 0,-15 20 0,1 0 0,-1 0 0</inkml:trace>
+  <inkml:trace contextRef="#ctx0" brushRef="#br0">30262 9872 7891,'0'-16'807,"9"7"0,6 5 0,7 6-702,3 3 1,-3 8 0,6-4 0,0 2-266,-3 0 0,5 0 1,-10 6-64,-5-1 1,-6 1 0,-9-1-1,-2 1 123,-4 0 0,-5 1 0,-11 2 0,-5 4 35,-4 2 1,-1-4-1,3 4 1,3-1 416,2 1 0,2-8 0,8 1-106,3-6 1,5-10 0,13 3-1,10-6-577,9-6 1,7-8 0,7-10-1,8-2-163,5-3 1,8 3 0,-4-2 0,-2 1-47,-4 1 1,-5 2 539,-13 8 0,-22 14 0,-5 4 0</inkml:trace>
+  <inkml:trace contextRef="#ctx0" brushRef="#br0">28542 10583 7902,'-48'11'48,"4"0"1,-2 6 0,8 9 0,3 3 312,5 6 0,8 11 0,9 2 0,4 7-140,2 4 0,3 1 0,10 5 0,5-5-168,3-5 1,12-3-1,7-3 1,9-3-134,6-7 1,7-10 0,0-18-1,1-9-76,0-11 0,3-17 0,6-20 0,-5-9-107,-5-11 1,-5-7-1,-8-10 1,-11 0 3,-12 0 0,-12 6 1,-14 4-1,-10 3 310,-8 6 0,-20 5 0,-6 4 1,-4 11-46,-2 7 0,4 13 0,7 6 0,3 7 314,3 3 0,9 5 0,9 6 1,5 5-440,6 1 0,6 2 119,10 5 0,78-29 0,-29 3 0,0 0 0</inkml:trace>
+  <inkml:trace contextRef="#ctx0" brushRef="#br0">29485 9905 7888,'-26'0'70,"-5"0"1,5 0 0,-2 0 377,1 0 0,5 2 1,-4 4-1,2 5-95,4 3 1,1 3-1,3 1 1,-1 6-24,1 9 0,5 2 0,0 11 1,0 7-227,2 12 0,-1 14 0,7 11 0,0-44 0,0 1-132,1 4 0,1 0 0,0 2 0,2 2 0,1 5 0,1 1 0,2 1 0,1-1-100,1-1 1,1 0 0,0-3-1,2 0 1,0-7 0,2-1-1,2-1 1,2-1-345,1-2 0,2-1 0,4-1 0,4-4 0,35 20 1,6-17-454,4-14 1,5-12 0,-1-5 924,4-5 0,-4-4 0,8-2 0,-3 0 0,-4 0 0</inkml:trace>
+  <inkml:trace contextRef="#ctx0" brushRef="#br0">31237 9674 7892,'0'-17'131,"2"8"1,4 5 0,5 10 194,3 10 0,10 5 0,6 12 0,5 5 70,3 3 1,8 14 0,-2 0 0,4 9-250,2 8 1,-3 3 0,-24-33 0,-3 1 0,11 43-349,-13 2 1,-9 1 0,-10-7 0,-7-3-41,-8-7 1,-10 1 0,-14-8 0,-10 5-199,-9-1 0,-5-2 0,0-7 0,3-5 207,6-3 0,3-1 0,1 2 1,-2 1-202,-2-6 0,-1-8 433,7-13 0,7-10 0,1-10 0</inkml:trace>
+  <inkml:trace contextRef="#ctx0" brushRef="#br0">29236 12220 7892,'-16'0'-260,"5"-1"272,0-5 963,7 4-348,-3-5-355,7 7 1,7 0-89,4 0 0,-3 7 0,-1 4 0,-2 6-56,1 5 0,1 5 1,-3 12-1,3 7-26,3 7 0,-5 1 1,6 8-1,2 4-106,2 4 0,1 2 1,-1-6-1,-2-2-144,-2-3 0,0 3 0,5-7 0,1-2-110,-1-5 1,-1-12 0,-2-1 0,-4-6-845,-2-3 282,-1-8 1,-6-5 819,0-15 0,-15-22 0,-3-13 0</inkml:trace>
+  <inkml:trace contextRef="#ctx0" brushRef="#br0">29203 13146 7924,'-16'0'616,"7"8"-432,3 3 0,4 4 0,2 1 0,2 2-183,4 5 0,5-3 0,9 5 1,4 1-109,2 0 1,-4 1 0,5 7 0,1-3-62,-3-4 1,7 5-1,-7-7 1,1 1 14,-4-4 0,-3-5 168,-3-6 1,-7-6 0,-3-12 0,-4-12 147,-2-12 0,1-11 0,3-11 0,2-4 60,-3-2 0,6 0 0,1-2 0,1 4-231,0 1 1,5 4 0,6-1-1,0 7-304,2 7 1,-4 4 0,6 2 0,0 2 311,0 3 0,23 5 0,12 6 0</inkml:trace>
+  <inkml:trace contextRef="#ctx0" brushRef="#br0">29170 14370 7838,'-25'-9'-184,"1"-4"0,9 6 451,4-2 0,2 5 95,3-2 0,3 5 0,-7 2-119,3 5 0,-4 10 0,4 12 0,-1 5 4,1 6 1,1 10 0,6 12 0,0 3-125,0 2 0,2 8 1,6 1-1,6 1-205,7-5 0,8-10 1,-1-8-1,3-9-49,2-11 0,7-16 1,4-19-1,4-16 51,2-19 0,5-13 0,-2-18 0,-5-2-98,-8-1 0,-7-8 0,-7 3 1,-9-3-15,-10-3 1,-7 16 0,-7-4 0,-10 11 248,-9 11 0,-12 0 0,-8 10 0,-6 3 228,-3 6 1,0-1 0,7 10 0,3 3-17,0 5 0,9 8 1,-1-2-1,6 6 9,3 6 0,2 5 1,-3 11-1,3 6-321,2 3 1,2 4 0,8 3 0,1 8-1579,2 7 1,7-7 1620,-1 4 0,47 11 0,13 7 0</inkml:trace>
+  <inkml:trace contextRef="#ctx0" brushRef="#br0">30113 13841 8229,'-22'6'375,"0"-1"0,-6 8 1,4-2-1,0 4-277,1 1 1,1 10 0,5 7 0,2 11 162,4 9 1,-2 6-1,8 7 1,1-1 25,2-5 0,4 5 0,4-5 1,7 6-303,7 6 0,6-6 1,7 0-1,2-9-343,3-5 1,4-10 0,6-5-1,-2-8-358,-2-7 0,0-4 1,8-3 715,3-4 0,-12-28 0,2-10 0,6-5 0,1 0 0</inkml:trace>
+  <inkml:trace contextRef="#ctx0" brushRef="#br0">30444 14354 7870,'-24'-8'388,"5"6"0,-3-3 0,4 3 258,1 2 1,6 0 0,2 2-349,2 3 1,3-1 0,10 9-1,5 5-185,3 8 1,-1 2 0,2 3-1,3 4-225,1 0 0,-1 5 0,-1-1 0,-3-4-32,-3-6 1,2-5 0,-7-8-1,-1-1-322,3-4 1,-7-5 0,5-12-1,-4-7 212,-2-7 0,-2-11 1,-2-10-1,-1-1 463,1-4 1,2 0 0,2 2 0,0 6 50,0 3 1,0 3-1,2 5 1,2 5 97,1 3 1,8 5 0,-2 3-58,4 5 1,1 14 0,1 8 0,-1 10-208,1 5 0,-2 4 0,-2 2 0,-2 3-476,1 2 1,-2-3-1,1 1 1,2-3-2369,1-6 2750,3-9 0,14-49 0,4-21 0</inkml:trace>
+  <inkml:trace contextRef="#ctx0" brushRef="#br0">30973 13676 7870,'-24'0'156,"4"0"0,-6 0 0,2 1 671,4 5 1,9 3 0,3 10 0,3 3-393,-1 5 1,1 14 0,7 8 0,1 12-274,3 9 1,7 7-1,-2 9 1,4 2-439,1-1 1,2-10 0,5-5 0,4-4-759,4-2 0,1-9 1034,-5-8 0,19-43 0,-2-19 0</inkml:trace>
+  <inkml:trace contextRef="#ctx0" brushRef="#br0">31237 14271 8485,'-16'15'0,"-1"-2"452,1-2 0,7 5 0,3 6 1,4-2-124,2-1 0,8-3 0,3 1 0,3-1-169,3 1 1,-1-8 0,3-3 0,1-6-338,2-6 1,2-5 0,-4-11 0,0-7-212,-5-8 1,0 0 0,-10-5 0,-1 1 222,-2 5 0,-4 3 0,-2 5 0,-3 6 439,-2 4 0,-4 3 0,-7 4 1,-2 7-76,1 8 0,-3 7 1,2 9-1,2 4-198,2 2 1,1 1-1,3 6 1,3-1-408,5-5 1,4-1 0,4-8 0,4 1-843,5-5 0,3-8 1248,3-1 0,36-40 0,10-11 0</inkml:trace>
+  <inkml:trace contextRef="#ctx0" brushRef="#br0">31618 14039 7771,'14'-18'0,"-1"-2"-107,-2-2 1,0 0 0,4 5-1,-2 1 438,-2-1 0,-7 6 0,1 0 488,-3-2 1,-4 6-411,-3 1 1,1 5-1,-7 1 1,-2 1 181,-2 5 0,-1 5 0,-1 11 1,-1 6-437,-4 3 1,3 2 0,-3 0 0,4 0-97,1 0 1,6 0-1,0 0 1,0-2-535,2-3 0,4 1 0,10-8 80,6-7 0,11-5 0,6-10 0,3-5-41,2-5 0,0-5 1,0-5-1,-1-1 343,-5 2 1,-3 4-1,-7 5 1,-1 5 477,1 4 1,-1 10 0,-1 4 0,-2 9 12,-2 6 1,-2 12 0,4 5-1,-2 4-140,2 1 1,3 6 0,4 2-1,2 4-159,-1 7 0,-5-7 1,-3 3-1,-4-5-417,-1-6 1,-3-3-1,-7-6 1,-3-6-161,-6-3 1,-6-4 0,-3-3 0,-4-6 397,-2-4 0,6-10 0,-2-8 0,4-11 104,1-9 0,1-15 0,1-17 0,4-10 49,5-8 1,5-9 0,1 2 0,0-4-32,0-2 1,7 4-1,4 6 1,6 8-431,5 7 0,3 2 1,10 7-1,2 1-214,2 4 0,-1-2 0,-7 7 1,-1 3 201,-3 1 0,-14 4 0,-2 3 283,-7 6 1,-6 9-1,-3 4 310,-6 2 1,1 7-1,1 7 1,2 2 343,3 4 0,2-4 0,2 2 1,0 2 21,0 2 1,0 3 0,2 2 0,2 2-115,1-1 0,3 2 0,-5 1 0,5 2-139,1 3 1,-5-3-1,1 0 1,-1 0-157,1-1 1,-3-3 0,4 4 0,-5-2-803,-1-4 276,0-1 0,0-12 1,0-9-1,0-13 2,0-10 0,0-14 0,0-5 0,0-6 244,0-5 0,0 4 0,2-2 0,2 5 422,1 4 1,3 9 0,-5 2 0,3 9 967,-2 5 0,5 12-796,2 7 1,-4 7 0,1 12 0,-1 1-319,4 2 1,-2 9 0,0 1 0,0 4-421,1 1 0,-5-2 1,4-4-1,1-3-472,-1-6 0,0-4 0,4-3 0,-2-2-132,2-2 1,1-9-1,5-2 1,1-10 877,2-4 0,15-40 0,-2-8 0</inkml:trace>
+  <inkml:trace contextRef="#ctx0" brushRef="#br0">32494 13395 7833,'0'9'1002,"2"0"1,5-4 0,8 6-418,5 4 1,11 9-1,1 4 1,6 5-184,5 5 0,-1 6 1,2 10-1,-7 3-332,-8 1 0,-5-1 1,-9 8-1,-4 4-1243,-6 5 1,-12-2 0,-10 3 1172,-8-2 0,-31-15 0,-15 0 0,20-17 0,0-1 0,0 0 0</inkml:trace>
+  <inkml:trace contextRef="#ctx0" brushRef="#br1">16437 7772 13013,'9'-15'-807,"-1"-5"1,-3-5 697,1-3 0,7 8 1,0-4-1,7 4 357,7 3 1,5-3 0,2 11 0,5-2-248,5 0 0,4 1 1,2-2-1,-3 2 14,-3 3 0,2-6 0,-5 4 0,1-2-13,4 0 0,4 5 0,5-5 1,5 0-5,5 2 0,6-5 1,1 4-1,0-1 15,1 0 1,8 8 0,11-3 0,0 4 37,-2 2 0,0 6 0,-15 1 0,6 2-26,9 4 0,-40-8 1,1-1-1,0 1 1,1 0-1,-2-1 0,1-1-81,-1-1 0,1 0 0,1-1 0,1-1 0,7 1 0,1-2 0,1 1 0,-1-1 19,-1-2 1,0 0 0,4-1 0,0-1 0,-4-2-1,0-1 1,1 2 0,1-1-12,-2 1 1,1 1 0,-2 3 0,0 1 0,-2-2 0,-1 0 0,-1 2 0,-1 0-11,-4 1 1,-1 0-1,37 0 1,-7 0-1,2 0 22,0 0 0,4-7 0,-14-4 0,-3-4-5,-5-1 1,1-1 0,-5 1 0,1-1-1,1 1 0,-9-1 0,-3 2 0,-10 4 41,-10 6 0,-7 3 0,-11 2 0,-5 0 0</inkml:trace>
+  <inkml:trace contextRef="#ctx0" brushRef="#br0">17347 7772 8218,'-9'-7'-488,"3"-4"1,13-4 0,10-1 0,9-1 542,5 0 1,11 3 0,10 1 0,16 4-30,18 1 0,6-3 1,-39 8-1,0 1 0,0 0 1,-1 0-52,0 1 1,1 0 0,3 1 0,0 0 0,-2 0 0,0 0 0,1 0 0,-1 0-46,-2 1 1,0-2-1,5-1 1,0-1-1,1-1 1,0 0-1,1 0 1,0-1 100,0-1 1,-1-1 0,-2 3 0,0-1 0,3 0 0,0-1-1,3 0 1,1-1 52,1 0 1,1 0 0,-1 1 0,0 1 0,-4 0 0,0 0 0,2 1 0,1-1-30,3 0 0,0 1 0,-2 1 1,0 1-1,-3-3 0,0 0 1,-2 1-1,1 1-28,1 1 0,-1 0 0,-5 1 0,-1 0 0,0 1 0,0 0 1,-3 0-1,-1 0-136,1 0 0,-1 0 0,1 3 0,-1 2 0,42 6 109,-9 4 0,-2-1 0,-10 1 0,-1 1 0,-2 5 0</inkml:trace>
+  <inkml:trace contextRef="#ctx0" brushRef="#br0">21167 1075 7859,'-8'-22'179,"-1"0"0,-2 2 2534,0 1-2192,7 10 0,-5 3 1,6 14-1,-3 8-253,2 10 0,3 13 0,1 5 0,0 5-66,0 7 0,0 2 0,0 10 0,0 2-514,0 2 0,0-1 1,1-4-1,3-1-400,2 0 0,6-4 0,-2-7 0,1-10-1947,0-9 2659,0-17 0,13-63 0,1-30 0</inkml:trace>
+  <inkml:trace contextRef="#ctx0" brushRef="#br0">21183 1257 7961,'-5'-26'0,"-1"2"358,3 0 1,1 6-1,2-4 168,0 3 0,9 3 0,6 1 0,7 2-147,3 2 0,8 8 1,8-3-1,3 4-231,7 2 0,-1 0 0,5 2 1,-5 4-103,-6 5 1,-11 3-1,-11 5 1,-6 3-166,-5 5 1,-3 6 0,-10 6-1,-5 5 30,-10 4 0,-7 2 0,-9-1 1,-2 1-121,-3-1 0,1-1 1,-5-4-1,3-7-537,8-8 0,0-1 1,9-12 745,1-6 0,25-51 0,7-14 0</inkml:trace>
+  <inkml:trace contextRef="#ctx0" brushRef="#br0">22010 1042 7882,'17'-22'191,"-3"0"0,-1 3 750,-2 6 1,-5 6-1,3 9-394,-2 3 0,-1 12 1,-6 12-1,0 8-116,0 7 1,0 11-1,0 10 1,0 8-402,0 10 1,-3-36 0,0 1 0,0 2 0,1 1 0,0 6 0,0 0-225,1 5 0,0 1 1,1 3-1,0 1 0,1-4 1,0-1-1,1-7 0,2-2-547,0-5 0,3-2 1,7 23-1,3-10-109,-1-11 1,-1-24-1,-2-20 850,-2-17 0,-12-53 0,-9-24 0,6 23 0,1 1 0,-1 0 0</inkml:trace>
+  <inkml:trace contextRef="#ctx0" brushRef="#br0">22093 1323 7874,'-6'-44'139,"1"0"0,-1 12 1,6-1-1,2 4 372,4 3 0,5 2 0,9 8 0,4-1 10,1 1 1,3 1 0,7 2 0,2 4-364,1 2 0,6 1 1,-3 6-1,1 2-184,4 4 1,-2-3 0,-4 10 0,-8 4 32,-7 3 1,-10 4 0,-9-2 0,-8 7-101,-9 8 0,-8 0 1,-16 7-1,-3 2-47,-6 1 0,-4 3 1,-2-2-1,3-2-432,2-2 0,0-9 0,4 0 1,1-8-1648,-1-3 2219,10-9 0,-8-67 0,5-21 0</inkml:trace>
+  <inkml:trace contextRef="#ctx0" brushRef="#br0">21134 761 7890,'-22'-17'-94,"-1"1"0,1 1-255,-1 4 0,2 4 0,-4 7 1,1 0 636,4 0 1,-4 0 0,0 0 0,0 0 58,0 0 1,-5 0 0,3 1 0,-2 5 39,1 5 0,-6 5 0,-6 8 0,2 9 32,2 10 1,1 6-1,-5 8 1,-3 9-295,-1 10 0,20-32 0,0 2 0,3 3 0,2 1 0,0 4 0,1 2-237,1 3 1,3 2 0,0 0-1,4 1 1,2 1 0,4 1-1,3-5 1,2-1-490,3-3 1,5-3-1,7-6 1,6-4-1,38 22 601,12-12 0,-30-31 0,3-4 0,0-4 0,1-4 0,2-1 0,0-1 0</inkml:trace>
+  <inkml:trace contextRef="#ctx0" brushRef="#br0">22804 579 7941,'11'-9'200,"2"3"0,5 8 539,8 9 0,12 11 0,8 22 0,6 11-412,3 8 1,4 5-1,-10 3 1,-6 5-194,-7-1 1,-12 6-1,-7-4 1,-14 6-342,-12 5 0,-11-4 1,1-38-1,-2-2 0,-3 2 1,-2-2-562,-3 3 0,-1 0 0,-2 1 1,-2 0 767,2-2 0,-8 1 0,-21 2 0,-14 1 0,-4 0 0,15-11 0,0 0 0,-1 0 0,1 0 0</inkml:trace>
+  <inkml:trace contextRef="#ctx0" brushRef="#br0">16553 7772 8342,'0'-16'-772,"2"-1"487,3 1 0,3-1 0,5 2 0,-2 2 408,1 2 0,-2 2 1,-1-4 87,-2 2 1,4 6-17,-5-6 0,-1 0 23,-5-6 1,0 1-120,0-1 1,0 6-1,2 2-99,4 2 0,-3 1 0,8 6-34,2 0 0,2 0 0,1 0 0,1 0 3,-1 0 1,3 0 0,3 0-1,4 2 19,-1 3 0,7-3 0,-5 4 1,6-3 10,6 3 1,3-4 0,9 3-1,5-3 0,4-2 1,12 0 0,3 0 0,1 0-2,-5 0 0,-1 0 1,2 0-1,5 0-1,4 0 1,1-2 0,-1-1 0,-2-5 2,-2-1 1,8 4 0,-39 0 0,2-1 0,-1-1 0,1 1 9,-1-2 1,0 1 0,37-4 0,-6 2 0,2 0 23,7-1 0,-3 7 1,3-3-1,-8 4-6,-8 2 1,6-5-1,4-1 1,6 1-32,-1-2 1,-9 5-1,-7-4 1,-4 4-6,0 2 0,-3 0 1,8 0-1,-3 0-21,-1 0 1,-9 0 0,-4 2 0,-8 2-25,-8 1 1,3 1 0,-1-6-1,2 0-12,4 0 0,-4 0 1,1 0-1,-3 0 23,-3 0 0,-2 0 1,-4 0-1,-3 0-27,-6 0 0,-4 0 1,-1 0-1,-1 0-112,1 0 0,-6 5 0,0 3 181,2 1 0,-6 2 0,0 5 0</inkml:trace>
+  <inkml:trace contextRef="#ctx0" brushRef="#br0">22837 3704 8215,'-6'-16'268,"1"-1"0,-1 6 0,4 2 0,-1 0 123,-3 0 1,-1 5 0,3-4-107,-1 1 1,-8 5 0,2-3 0,-4 3-17,-1 2 1,-1 7 0,1 6-1,-3 7-25,-3 8 1,-4 5 0,-9 6 0,-1 7-21,-3 7 0,-1 13 0,3 11 0,-2 4-81,3 2 0,4-8 1,9-3-1,8-6-346,6-6 0,5-17 0,11-18 1,10-12-273,9-13 1,12-14-1,6-16 1,4-7-163,2-7 1,-3-5 0,-2-5-1,-7-3 76,-3-1 0,-9-1 1,-6-4-1,-7 5 580,-8 1 1,-3 7 0,-4 10-1,-1 5 1213,-3 9 1,-7 13-1,2 9-444,-3 8 1,4 11 0,5 9 0,3 3-452,2 8 1,0 0-1,2 7 1,2 1-385,1-1 1,8-5 0,-4 1-1,2-1-600,0 2 1,0-6 0,6 0 0,-1-9-657,1-6 1,-1-3 0,1-4 0,-1-8 322,1-6 1,-6-8 979,0-11 0,0-63 0,-3 32 0,1 0 0</inkml:trace>
+  <inkml:trace contextRef="#ctx0" brushRef="#br0">22936 3985 7887,'0'-51'0,"2"-1"0,2 5 577,1 10 0,1 9 0,-5 14 71,5 3 0,-2 3 0,7 10 0,2 4-385,1 5 0,3 5 0,-1 6 0,1 6-242,-1 3 1,1 2-1,-1 2 1,-1 4-267,-4 5 1,2-4 0,-6-1 0,1-4-1023,-1-2 1,0-8-1,-3-3-817,2-3 2084,-1-10 0,-20-90 0,6 26 0,0 0 0</inkml:trace>
+  <inkml:trace contextRef="#ctx0" brushRef="#br0">23135 3853 7917,'0'-31'140,"0"3"0,-6 4 1,0 6-1,5-2 401,4-2 1,7 1 0,8 9 0,2 1-374,2-2 0,8 0 0,-3 0 0,4 4-552,2 1 1,-5 3-1,-2 5 384,-2 0 0,12 0 0,-1 0 0</inkml:trace>
+  <inkml:trace contextRef="#ctx0" brushRef="#br0">23531 3638 7917,'-16'0'367,"5"0"307,0 0 0,7 9 1,-1 8-1,5 8-71,5 7 1,2 3 0,6 3-1,-2 6-724,2 4 0,2 4 0,1-1 0,-1-1-276,-4-8 1,4-7 0,-4-10-50,4-8 1,-6-10-1,-4-14 1,-3-10-154,-2-8 0,0-14 0,-2-3 0,-1-2 639,-3 0 1,-7 1 0,4-1-1,-2 4 520,0-1 0,6 12 0,-5-2 0,3 5 162,3 6 0,2 2 0,4 3 1,4 2-342,5 2 1,11 7 0,5-1 0,5 1-585,1-1 0,0 3 0,0-4 0,0 4-793,0 2 0,-2 0 0,-1 0 1,-5 0-1382,-1 0 2377,6 0 0,3-22 0,9-5 0</inkml:trace>
+  <inkml:trace contextRef="#ctx0" brushRef="#br0">24110 3456 7902,'-16'0'1349,"-1"0"-1180,1 0 0,5 0-83,-1 0 1,9 7 104,-3 4 0,6-3 0,4-1 195,1 1 1,3-7-112,-3 5 0,-1-4 446,7-2-72,-7 0-155,3 0-507,-7 0-265,0 0 277,0-8 0,0 5 147,0-8 1,0 5 52,0-5 1,-2 7 6,-3-1 0,1 3 18,-7 2 0,0 2 0,-6 3 0,1 6 134,-1 4 0,1 9 1,-1 5-1,1 8-127,-1 7 1,1 11 0,-1 6 0,2 2-221,4-3 0,6-5 0,12-11 1,8-7-776,5-7 0,11-14 1,1-14-1,4-9-214,1-10 1,-7-12-1,-5-3 1,-1-6 638,-4-4 0,-7 5 0,-4-4 1,-1 3 345,-5-1 0,-3 2 0,-3 8 0,-5 3 465,-1 2 1,4 4 0,-6 9 450,-2 6 0,6 7 1,1 7-1,4 9-594,2 6 0,0 4 0,0 5 0,2 0-511,4 0 0,3 0 0,7 0 1,1-2-562,-1-3 0,8-4 1,2-10-1,1-3-188,1-5 1,-2-12 0,1-7-1,-6-7 365,-9-7 1,1-10-1,-5-2 1,-1 1 538,0-3 0,-1 5 0,-6-7 0,-2 1 426,-4 0 0,5 11 0,-5-1 1248,4 7 1,-3 12-896,-1 13 0,1 7 1,7 11-1,1 5-594,3 4 0,1 3 0,-1-1 0,3-2-277,0 3 0,6-4 0,-4-1 0,3-3-382,3-7 1,1 0 0,3-10 0,2-3-159,3-6 1,-6-7-1,2-9 1,-3-4 411,-3-1 1,1-5 0,-1-7 0,-1-1 286,-4 1 0,4-3 0,-6 1 0,2 2 509,0 2 1,-5 10 0,3 3 280,-2 3 1,0 12 0,-3 9-361,2 12 0,1 12 0,-1 13 0,3 5-527,0 4 1,6 1-1,-4 3 1,3 1-161,3 2 1,-1 15 0,1 2 0,-1 8-138,1 9 0,5-3 0,-10-40 0,0 0 0,0 0 0,2 0 130,0 0 1,1 0 0,-3 0-1,0 1 1,-1 2 0,0 0 0,6 43 79,-6-10 0,-4-6 1,-9-14-1,-3-7 244,-6-11 1,-12-9-1,-4-7 1,-6-6 114,-6-4 1,10-9 0,-4-5 0,2-8-9,-1-7 1,-6-16 0,-3-8-1,1-6 210,-1-5 1,5-1 0,8-5 0,6-3-29,4-5 0,9 3 1,5 0-1,9 1-537,12 1 0,7-5 0,11 5 0,3 1-1152,6 3 1,10-4 1299,1 0 0,-14 7 0,10-12 0,5-6 0,-2 1 0,4-5 0,1 0 0,-1 0 0,0 0 0</inkml:trace>
+  <inkml:trace contextRef="#ctx0" brushRef="#br0">25830 3010 7848,'0'-26'374,"2"2"1,1 7 2171,3 1 1,-1 9-1930,-5 7 0,0 9 0,0 15 0,0 9-271,0 9 1,-7 15 0,-4 13-1,-5 16-422,5-36 1,0 3 0,-3 8 0,0 3 0,-4 6 0,-1 1 0,0 8 0,0 2-298,0 4 1,1 1 0,1-2 0,1-1 0,1 0 0,2-2 0,2-4 0,2-2-1741,2 0 0,1-4 2113,2-18 0,1 0 0,1 8 0,2-2 0,6 23 0,6 1 0</inkml:trace>
+  <inkml:trace contextRef="#ctx0" brushRef="#br0">26442 3655 7808,'-17'-34'-90,"1"7"1,-1 1 0,2 2 434,4 4 1,2 2 0,6 1 0,-3 1 765,2-1 1,4 6 0,6 2-547,5 2 1,9 8 0,2 12-1,-2 9-282,-1 11 1,3 2 0,0 9 0,-2 2-344,-2 2 0,5 0 1,0-4-1,1-4-206,0 1 1,4-14 0,-6-1 0,0-11 13,2-10 1,-6-12 0,4-10-1,-5-12-3,-6-13 0,2-4 0,-10-15 0,-3-1 261,-3-3 0,-10 1 0,2 2 0,-2 3-103,2 2 0,-2 4 1,7 8-1,3 9-558,1 6 0,9 12 1,6 9 654,7 1 0,58 18 0,-30-1 0,1 0 0</inkml:trace>
+  <inkml:trace contextRef="#ctx0" brushRef="#br0">27136 3522 9248,'17'-7'347,"1"-10"1,4-12 0,4-8-373,0-7 0,3-4 0,-7 1 0,-3 1-20,-7 2 0,-4 14 0,-10 4 0,-4 12 205,-5 8 1,-11 6-1,-5 6 1,-4 7 328,-3 7 0,1 11 0,0 9 0,0 5 59,0 6 1,7-1-1,6 3 1,7-5-283,8-4 1,3-7 0,4-1 0,3-6-287,6-8 1,11-11-1,8-6 1,7-5-456,7-5 1,9-6-1,4-11 1,0-8-422,0-6 1,-2-7-1,-7-6 1,-6 1 435,-9 4 1,-9-2-1,-13 7 1,-5 3 185,-5 1 1,-1 9 0,-1 2-60,-5 0 1,2 6 0,-7-2 332,-2 7 0,6 13 0,0 9 0</inkml:trace>
+  <inkml:trace contextRef="#ctx0" brushRef="#br0">27599 3175 7919,'-9'-17'308,"2"1"0,7-1 179,0 1 0,0-1-633,0 1 0,2 1-403,3 4 1,-1 4-145,7 7 0,-6 7 393,6 4 0,-7-2 1414,2 2 723,-5-7-1228,-1 3 1,-1-7 0,-5 0-48,-5 0 1,2 0 0,0 2-1,-1 4-17,1 5 0,-2 5 0,-5 6 1,-1 8-149,1 6 0,5 7 1,1 6-1,3 1-265,3 0 1,3-8 0,4-5 0,6-8-374,8-7 0,16-13 0,4-11 0,7-12-682,7-12 1,10-20-1,0-7 1,-1-6-83,-5-2 0,-7 6 0,-17-4 0,-3 1 829,-6-1 1,-11 0-1,-7-4 1,-6 3 273,-4-3 0,-1 6 1,3 4-1,-1 9 466,1 11 1,0 7 753,-1 10 0,3 8 0,-3 8-841,3 10 1,4 12 0,1 7 0,5 10-378,1 10 1,-4 8-1,6 11 1,0 4-398,-1 5 0,4 2 1,-3-2-1,6-5-391,5-4 0,-4-4 1,4-7-1,-3-11-2473,-3-11 3161,-7-20 0,-1-1 0</inkml:trace>
+  <inkml:trace contextRef="#ctx0" brushRef="#br0">27864 3142 7816,'-28'0'985,"3"0"0,3-2-759,7-3 1,8 3 0,12-6-181,6 1 0,13 3 0,9-7 0,11-2 270,9-1 0,1-3 1,5 1-1,-1-1-482,1 1 1,0-6-1,3 1 1,-3 5-28,-2 3 1,-16 9-1,-14-1 276,-7 3 1,-10 15 0,-5 5 0,-5 4 152,-5 2 0,-3 6 0,-5-5 0,4 3 199,2-1 1,1-6 0,6 1-362,0-4 0,8-9 1,3-3-1,5-8-157,6-9 0,-3-2 0,4-15 0,0-1-109,-1-2 1,-2-8 0,-7 1 0,-4-1 145,-2-1 1,-3 5-1,-8-2 1,-3 8 467,-2 6 1,-4 12 0,-9 6 0,-6 5-202,-3 5 0,-2 6 1,2 10-1,1 3-405,3 1 1,5 1 0,-2 3 0,5-3-385,10-2 0,5-2 1,6-5-1,6-3-3128,8-3 3696,8-3 0,21-31 0,9-13 0,4-1 0,0 0 0</inkml:trace>
+  <inkml:trace contextRef="#ctx0" brushRef="#br0">28757 2778 7816,'16'-15'0,"1"4"0,0 6 453,-1 3 0,1 2 0,-1 0 0,2 2 401,5 3 0,-5 6 1,4 10-1,-2 3-380,2 1 1,-5 3 0,1 5 0,-7 0-358,-3 0 0,-3 0 1,-7-2-1,-1-3-155,-3-6 1,-7-6-1,4-3 1,-2-3-101,0-3 1,5-2 0,-3-6 0,2-7-264,3-8 0,2-3 1,2-10-1,0-4 157,0-4 0,2-9 0,4 4 0,5-2 476,3 0 1,3 9 0,-1 0 0,1 7 241,0 4 1,5 2 0,1 8-1,3 1-227,4 2 0,8 2 0,6-4 1,6 4-669,5 1 1,-4-3 0,3 6-1,-8 1-537,-8 2 0,-5 2 0,-5 0 0,-6 0-2197,-4 0 3155,-8 0 0,-3 22 0,-7 6 0</inkml:trace>
+  <inkml:trace contextRef="#ctx0" brushRef="#br0">29799 2662 7816,'16'0'1194,"1"-1"0,-1-3-564,1-2 1,1 1-631,4 5 0,33-8 0,15-1 0</inkml:trace>
+  <inkml:trace contextRef="#ctx0" brushRef="#br1">19695 8401 15543,'0'-17'-1597,"0"6"1,0 0 1274,0-2 0,2 6 0,3 1 0,6 3 585,4-3 0,2 4 1,1-3-1,4 3-152,6 2 0,5 0 0,3 0 0,5 0-44,1 0 0,0 0 0,4 0 0,0-2 15,6-4 0,-3 3 0,8-6 0,0-1-27,4 1 1,3 4 0,0-4 0,-3-1-22,-6 1 1,-5 6 0,-4-5-1,-2 3 168,2-1 1,-6 1-1,-1 5 1,-6 0-111,-6 0 0,-3 0 0,-9 1-428,-4 5 0,-9-2 0,-11 5 0,-6 0-17,-9 0 363,-5 2 0,-23-5 0,-10-3 0,-5 1 1,0 0-1</inkml:trace>
+  <inkml:trace contextRef="#ctx0" brushRef="#br1">19662 8500 13557,'16'-6'0,"3"-1"-16,3-2 1,7 5 0,15-1 0,11 1 98,8-2 0,10 4 0,3-5 0,-1 2-1,-3-1 0,1-1 1,1 3-1,-1-1-112,1 1 1,-10 2 0,-11 2 0,-7 0-178,-7 0 1,-4 0 0,-4 0 158,-3 0 1,-12 7-1,-9 3 1</inkml:trace>
+  <inkml:trace contextRef="#ctx0" brushRef="#br1">21795 8417 9352,'0'-16'-744,"7"1"0,6 4 720,7 5 0,1 4 0,8 2 1,6 2 44,7 4 0,8-4 1,3 3-1,6-1 36,5 1 1,6-3-1,16 4 1,8-6-48,-42-3 0,1 0 0,-1 2 1,1-2-1,1-1 0,0-1 0,1 1 1,0-1-58,3 0 1,0 1-1,2 1 1,-1 0-1,-1-1 1,-2-1 0,-1 1-1,-1 1 91,-4 1 1,-1 0 0,3 1 0,-1 0 0,43 1-1,-6 0-126,-7 0 1,-21 8 0,-12 1 0,-6 2-31,-5 0 1,-2-2 0,-2 4 111,0-2 0,0-2 0,0 2 0,0-3 0</inkml:trace>
+  <inkml:trace contextRef="#ctx0" brushRef="#br0">25020 8483 8052,'-17'-7'-577,"6"3"1,2-7 0,0 0 1617,0 2 0,5-6-1023,-2 4 1,14 4 0,8 1 0,10 5-122,5 1 0,11 0 0,8 1 0,9 3 74,5 2 0,2-1 0,2-5 0,6 0-14,8 0 0,9-5 1,-41 1-1,1 0 0,-1 1 1,1-1 51,-2 0 1,1 0 0,1-1-1,1-1 1,-5 3 0,-1-1 0,3 0-1,0 1-4,0-1 0,1 0 1,-2 1-1,0-1 0,38 0 1,-11-1-1,-5 1 0,-7 1 0,10-1 1,-3-2-3,-4 3 0,-11-5 0,-16 3 1,-6 1-50,-6 2 1,-3 2 0,-7 0-129,-1 0 0,1 0-641,-1 0 815,-6 8 0,-18-29 0,-10 1 0</inkml:trace>
+  <inkml:trace contextRef="#ctx0" brushRef="#br1">17181 8417 9600,'-25'-31'0,"1"1"-521,0 3 0,6 1 0,-5-1 0,5 5 630,2 3 1,-3 3 0,-1-1 0,-2 1 25,2-1 0,-1 6 0,1 2 1,-4 1 91,-1 5 1,-3 1 0,-7 2 0,-2 0-26,-1 0 0,-10 7 0,0 6 0,-5 7-95,0 8 1,1 9 0,3 3 0,-1 2-62,0 4 0,1 0 1,1 0-1,2-4 69,2-1 1,7 5 0,-3 0-1,3 5-8,4 4 1,4 8 0,12-4 0,2 1-60,4 1 0,6-1 0,12 5 0,10-5-79,9-4 0,14-5 0,11-1 1,14-5 28,10-6 1,0-2-1,1-17 1,-1-3-76,0-5 1,14-8 0,-41-1-1,1-2 1,0-3 0,-1-2 44,1-3 1,0-2-1,1-3 1,1-2 0,-3-4-1,-1-3 1,3-1-1,0-2 50,0-2 1,-1-1 0,-5 1 0,-2-1 0,22-32 0,-12 2-27,-12 4 0,-12 3 1,-8 4-1,-7 2-34,-8-2 0,-3-9 1,-4-5-1,-3-5-2,-6-1 0,-11 7 1,-8 4-1,-8 4 88,-12 1 0,-16 2 0,-17 4 1,38 25-1,-1 2-7,-3 1 1,0 2-1,0 1 1,-1 2 0,-1 3-1,-1 2 1,-2 0-1,0 2-137,-4 3 0,0 2 0,1 6 0,2 3 1,2 5-1,1 3 0,1 3 0,1 2 100,0 3 0,1 1 0,0-1 0,2 2 0,2 1 0,2 2 0,3 0 0,-1-1 0</inkml:trace>
+  <inkml:trace contextRef="#ctx0" brushRef="#br0">15941 13758 8133,'-16'-14'174,"-1"-5"0,1-14 0,1 2-73,4 3 1,3-1 0,8 7-1,2 4 218,4 5 0,-3 5 1,9 8 81,0 0 0,5 0 1,3 0-1,4 2-130,2 4 0,3-3 0,8 7 1,5-1-250,6 0 0,-4-4 0,7 6 0,-5 1-67,0-3 0,0 7 0,-2-1 0,-7 5-93,-8 0 1,-5 4 0,-7 0 0,-2 2-182,-4 3 1,-6 2 0,-12 3 0,-10-1 135,-8 0 0,-9 2 0,-4 1 0,-6 5 127,-4 1 0,-9 0 0,-4 2 0,-5-3 57,-5-1 0,4-7 0,1 2 0,9-7 44,6-4 0,7-2 0,0-6 0,0 1-36,1-1 1,3-5 0,9-1-1,3-1 572,6 0 1,6-4-474,5 6 0,5-7 0,13 2 0,10-5-117,9-1 1,12 0-1,6-1 1,6-3-29,5-2 1,4-5-1,9 4 1,3 0-175,7-1 0,10-3 1,4 6-1,0 1-198,-4 2 1,-11 4 0,-5 4 0,-4 7 408,-2 7 0,-20-5 0,3 3 0,3 3 0,-1 0 0</inkml:trace>
+  <inkml:trace contextRef="#ctx0" brushRef="#br0">17876 13924 8140,'-26'-17'139,"2"-5"0,8 2 355,-1 5 1,6 13 0,0 15 0,-2 9-541,-1 11 0,-1 8 1,2 10-1,2 3 242,-2 1 0,6 7 0,1-1 0,4 3-48,2 2 0,2-5 0,4-4 0,7-4-111,7-5 0,4-11 0,5-6 0,-1-13-34,1-10 0,2-7 1,1-4-1,-5-8-78,-5-11 1,2-10 0,-2-6-1,-2-8-16,-1-7 1,-3 1-1,1-5 1,-2 2 178,-4 0 1,3-2 0,-5 4 0,2-1 274,0 7 1,-7 4-1,2 10 1,-5 2 533,-1 4-792,0 3 1,2 14-1,2 7-150,2 6 0,6 7 0,-1 6 0,4 3-170,2 3 1,1 3 0,2 10 0,4 2-115,2 2 0,1-1 0,6-5 0,-1 0-184,-5 0 1,3-7 0,-8-4 0,0-3 16,2-3 0,-11-7 0,3-3 308,-1-4 0,-8-4 1,-1-4 192,-5-5 1,-1-9 0,2-4 0,2-2 170,1-3 1,1-2 0,-6-2-1,0 0 191,0 0 1,0-2 0,0-2 0,0-2 35,0 3 0,-2 1 0,-2 0 0,-1-4 38,1-5 0,2 4 1,2 1-1,2 4-181,4 2 1,-4 0 0,3 2 0,-1 5-1019,1 9 314,-3 1 1,7 16 0,-5 0-1029,2 9 1,1 6 1471,-2 1 0,5 45 0,6 11 0</inkml:trace>
+  <inkml:trace contextRef="#ctx0" brushRef="#br0">18934 14403 8140,'17'-2'-1,"-1"-3"0,3-6-55,3-4 1,0-7 0,7-2 0,2-1 199,-1-5 0,-1-1 0,4-2 1,0-2-77,0-4 0,-7 3 1,-4-7-1,-3 3-4,-3 3 1,-5 2 0,-2 4 0,-1 3 11,-5 6 0,-8 10 0,-6 2 0,-6 3 48,-5 3 1,-2 4 0,-5 6 0,1 5 46,-1 4 1,-4 10-1,-2 7 1,0 4 136,4 1 0,9 5 1,0 1-1,3 1-98,3 0 0,7-2 1,3 2-1,6-5-220,6-4 1,12-4 0,17-4-1,13-5-268,11-3 1,18-10 0,7-4 0,6-5-51,-42-2 0,0-1 1,34-6-1,-6-10 1,-12-3 46,-9-5 0,-5-4 0,-6-3 0,-7 1 190,-8 0 1,-5 0 0,-9 0 0,-4 0 197,-6 0 1,-3 2-1,-4 1 1,-3 5 211,-6 1 1,-4 0-1,-2 6 1,-1-1 121,-4 4 0,4 10 1,-6-1-1,0 5-217,-4 1 0,3 1 0,-1 7 0,0 7-153,0 5 1,4 11 0,-3 0 0,1 8 30,4 3 0,7-3 0,3 3 0,3 0-120,3 0 0,10-5 0,9 0 0,10-8-21,14-7 1,11-5 0,8-6-1,10-6-19,6-3 0,1-11 0,2-7 0,-3-12-177,-1-9 1,-12-3-1,0-6 1,-10 2-45,-7-2 0,2-4 0,-9-3 1,-8-2 219,-10 2 0,-10 1 0,-9 2 0,0 1 6,0-1 1,-6 1-1,-1-1 1,0 0 490,-1 1 0,-3 5 1,4 3-1,0 6 626,-1 10 0,1 12-748,1 7 0,3 12 1,-7 7-1,3 7-287,3 7 1,-3 18 0,2 6-1,1 6-27,2 5 0,2 5 1,0 2-1,2 5-122,3 1 1,-1 2 0,7 4 0,2-4-220,2-5 0,1-9 0,3-8 1,1-8-408,2-10 0,-2-18 0,-7-5 0,-2-5-39,2-5 0,-4-2 1,0-6-1,0-5 785,1-7 0,2-29 0,1-12 0,5-1 0,-1-1 0</inkml:trace>
+  <inkml:trace contextRef="#ctx0" brushRef="#br0">20935 13907 8140,'0'-16'37,"2"1"1,2 2 415,1 2 1,-1 7-106,-10-1 0,3 3 0,-8 4 1,-4 2 11,-5 1 1,1 8 0,-5-2-1,2 4-201,0 1 0,-5 3 0,3 1 1,0 4-242,0 1 0,2-4 0,6 1 0,-1-4-159,1-1 1,4-1 0,3 1 111,2-1 1,1-5 302,6 0 1,2-5 0,4 3-54,5-2 0,4 4 0,1-3 1,2-1-23,4 0 0,-1 4 0,4-3 0,1-1-18,0 0 0,3 1 0,8-5 1,2 5-52,-3 1 0,1-5 0,0 1 0,3-3-234,2-2 1,-5 0 0,2 0-1,-6 0-111,-6 0 1,5 0 0,-7 0-1,1 0-393,-4 0 0,-3 0 0,-3 2 708,1 3 0,-38 12 0,-8 9 0</inkml:trace>
+  <inkml:trace contextRef="#ctx0" brushRef="#br0">16983 14370 8209,'-9'-16'59,"9"6"1,13 5-138,7 3 0,6 2 0,8 0 0,7 0-307,8 0 0,10 0 385,13 0 0,-8-12 0,6-5 0,8-2 0,0 1 0</inkml:trace>
+</inkml:ink>
+</file>
+
+<file path=ppt/ink/ink3.xml><?xml version="1.0" encoding="utf-8"?>
+<inkml:ink xmlns:inkml="http://www.w3.org/2003/InkML">
+  <inkml:definitions>
+    <inkml:context xml:id="ctx0">
+      <inkml:inkSource xml:id="inkSrc0">
+        <inkml:traceFormat>
+          <inkml:channel name="X" type="integer" min="-2.14748E9" max="2.14748E9" units="cm"/>
+          <inkml:channel name="Y" type="integer" min="-2.14748E9" max="2.14748E9" units="cm"/>
+          <inkml:channel name="F" type="integer" max="32767" units="dev"/>
+        </inkml:traceFormat>
+        <inkml:channelProperties>
+          <inkml:channelProperty channel="X" name="resolution" value="1000" units="1/cm"/>
+          <inkml:channelProperty channel="Y" name="resolution" value="1000" units="1/cm"/>
+          <inkml:channelProperty channel="F" name="resolution" value="0" units="1/dev"/>
+        </inkml:channelProperties>
+      </inkml:inkSource>
+    </inkml:context>
+    <inkml:brush xml:id="br0">
+      <inkml:brushProperty name="width" value="0.12114" units="cm"/>
+      <inkml:brushProperty name="height" value="0.12114" units="cm"/>
+      <inkml:brushProperty name="color" value="#FF0000"/>
+    </inkml:brush>
+    <inkml:brush xml:id="br1">
+      <inkml:brushProperty name="width" value="0.09086" units="cm"/>
+      <inkml:brushProperty name="height" value="0.09086" units="cm"/>
+      <inkml:brushProperty name="color" value="#FF0000"/>
+    </inkml:brush>
+  </inkml:definitions>
+  <inkml:trace contextRef="#ctx0" brushRef="#br0">9178 7408 10049,'-26'-33'-824,"4"0"0,2 0 667,-2 0 1,-2 7 0,-6 4 0,5 4 276,1 1 1,-11 3 0,-2 3 0,-7 5-141,-7 4 0,-12 2 0,-3 0 0,-8 2 25,-1 4 1,-4 3-1,6 7 1,-5 1-3,-6-1 1,-6 3 0,41-9 0,-1 0-1,0 2 1,1 0-21,-1 1 1,0 0-1,0-1 1,-1 1-1,0 2 1,-1 0-1,1-2 1,-1-1 33,3 1 1,1-2-1,-42 11 1,11-5-1,0-1 142,-6 1 0,8 7 0,-4 3 0,8 5-1,9 1 0,5 5 1,9 3-1,1 1-88,-1 4 0,2-6 1,6 1-1,11-4-73,12-4 1,10 3 0,11-8 0,7 3-57,13 2 0,13-2 1,20-1-1,8-3 21,7 3 0,5-1 1,9-1-1,-38-16 1,0-2 28,6-1 0,1 0 1,1 0-1,0-1 0,8 0 1,0 0-1,-1 1 0,1-1-72,1 0 0,0 0 0,5-2 0,0-1 0,2 1 0,0-1 0,1 1 0,1-1 110,3 0 1,1 0 0,4-1 0,2-1-1,4-3 1,0-2 0,2 0 0,-1-1-100,2-2 1,0-1 0,-1-1 0,1-1-1,1-1 1,2 0 0,0-1 0,1-1 81,-1 1 0,0-2 1,-30 3-1,0 0 1,-1 0-1,25-3 1,-1 0-1,0-1 0,-1 0-25,0-1 0,0-1 0,-4-1 0,-1 0 0,-3 0 0,-3-1 0,-5 1 0,-2-1-4,-2 1 0,-1-1 0,-5 3 0,-2 1 0,0-1 1,-2 0-1,-6 0 0,-2-1 12,35-16 0,-15-3 0,-11 1 0,-5-2 101,-6-3 1,-7-3 0,-15-4 0,-13 0-85,-11-1 0,-18-1 1,-21-3-1,-19 2-27,-19 4 1,36 21 0,-1 0 0,-5 3 0,-3 2-1,-5-2 1,-1 1-59,-8-1 1,-3 0 0,-4 1 0,-2 1 0,-8-3 0,-2 0 0,0 1 0,-1 1-16,-1 3 1,-2 1-1,25 4 1,-1 0-1,-1 2 1,-2 0-1,0 2 1,-1 1-1,-3-1 1,1 1-1,-1 0 48,-2 1 1,0 1-1,1 0 1,1 1 0,0 1-1,1 2 1,1 1 0,0 2-1,1 0 1,-1 2 0,0 0-1,0 2-7,1 0 0,0 1 0,0 2 0,-3 4 0,0 1 0,1 1 0,2-1 0,2 2 0,0 0 0,3 0 0,0 1 0,1 0-54,2 1 1,0 0 0,1 0 100,-21 10 0,1 1 0,-4 3 0,1 0 0,7 0 0,3 0 0</inkml:trace>
+  <inkml:trace contextRef="#ctx0" brushRef="#br1">11113 7425 8581,'-12'-6'117,"1"1"1,6-1 228,-6 6 1,7 2-1,-3 6 1,1 8 55,1 10 0,-6 12 1,3 8-1,1 8-174,0 6 0,-4 5 0,3 3 0,1-1-261,0 0 0,3-1 1,10-15-1,5-5-40,3-4 1,1 3 0,-2-9-1,-2-3-561,2-3 1,1-12 0,3 0-586,-1-5 1,1-11 1218,0-2 0,-1-66 0,1-24 0</inkml:trace>
+  <inkml:trace contextRef="#ctx0" brushRef="#br1">11195 7276 8506,'-7'-16'74,"5"-1"1,-4 0 171,5 1 1,10 7-1,7 1 1,10 3-316,5-1 1,17 1 0,7 5 0,10-2 28,6-4 1,5 3-1,10-8 1,6-4 71,-43 5 1,1 0 0,4 0 0,0 0 0,-2-3 0,-1 0 0,-2 1 0,0 0 10,41-8 0,0 1 1,-4 3-1,-7 1-75,-11 4 1,-11 4 0,-15 7 0,-9 0-64,-9 0 1,-11 0 0,-2 0 201,2 0 1,-6 7 0,1 4 81,-1 4 1,-5 7 0,3 2 0,-3 2 45,-2 3 0,0 4 0,0 4 0,-2 3 132,-3 2 0,3 8 1,-3 7-1,1 2-154,-2 3 0,3 4 1,-7 6-1,3 3-315,3 1 1,3-5-1,1-10 1,0-6-417,0-3 1,1-5 0,5-2-1,3-7-327,0-3 1,4-2 0,-7 2 844,-3 4 0,-67-34 0,-19-1 0</inkml:trace>
+  <inkml:trace contextRef="#ctx0" brushRef="#br1">11179 8516 8436,'16'-7'157,"3"3"1,4-5-1,12 2 112,13 3 0,18-5 1,17-2-1,9-4-160,-44 7 1,1 0 0,4-1 0,1-1 0,1 0 0,0-2-1,1 0 1,0-2-36,0 2 1,-2-1-1,-1-3 1,-1 0 0,-4 3-1,0 1 1,-2-1 0,1 0 25,1 2 1,0 0 0,40-13-1,-3 2 1,-10 2-500,-7 1 1,-4 8-1,-11 2 1,3 2-1134,-3 3 1532,-2-5 0,-16-22 0,-4-13 0</inkml:trace>
+</inkml:ink>
+</file>
+
+<file path=ppt/ink/ink4.xml><?xml version="1.0" encoding="utf-8"?>
+<inkml:ink xmlns:inkml="http://www.w3.org/2003/InkML">
+  <inkml:definitions>
+    <inkml:context xml:id="ctx0">
+      <inkml:inkSource xml:id="inkSrc0">
+        <inkml:traceFormat>
+          <inkml:channel name="X" type="integer" min="-2.14748E9" max="2.14748E9" units="cm"/>
+          <inkml:channel name="Y" type="integer" min="-2.14748E9" max="2.14748E9" units="cm"/>
+          <inkml:channel name="F" type="integer" max="32767" units="dev"/>
+        </inkml:traceFormat>
+        <inkml:channelProperties>
+          <inkml:channelProperty channel="X" name="resolution" value="1000" units="1/cm"/>
+          <inkml:channelProperty channel="Y" name="resolution" value="1000" units="1/cm"/>
+          <inkml:channelProperty channel="F" name="resolution" value="0" units="1/dev"/>
+        </inkml:channelProperties>
+      </inkml:inkSource>
+    </inkml:context>
+    <inkml:brush xml:id="br0">
+      <inkml:brushProperty name="width" value="0.09086" units="cm"/>
+      <inkml:brushProperty name="height" value="0.09086" units="cm"/>
+      <inkml:brushProperty name="color" value="#FF0000"/>
+    </inkml:brush>
+  </inkml:definitions>
+  <inkml:trace contextRef="#ctx0" brushRef="#br0">7987 12105 7764,'-26'0'378,"3"0"0,6 0 1447,0 0 0,5 0-1345,6 0 0,15 5 1,19 3-1,7-1-362,9 0 1,7 1 0,17-5 0,2 3-248,2-3 1,1-1 0,-3-2-1,0-2-420,-6-3 1,0 1 0,-8-5-1,-5 2-911,-5 3 1,-13 2 0,-11 4 1459,-4 4 0,-52 17 0,-14 12 0</inkml:trace>
+  <inkml:trace contextRef="#ctx0" brushRef="#br0">8665 12171 7764,'-16'0'90,"-3"0"0,-1 0 385,-2 0 0,5 13 0,6 5 1,0 6 75,2 5 1,2 12 0,7 8-1,0 8-347,0 2 1,0 5 0,2-5 0,1 2-242,3 0 0,5-8 0,-4 2 1,1-2-358,-1 2 1,0-1 0,-3 4 0,1-2-544,-1-9 1,-2-4-1,-4-12 937,-3-4 0,-27-10 0,-12-10 0</inkml:trace>
+  <inkml:trace contextRef="#ctx0" brushRef="#br0">8053 13262 7764,'-33'9'0,"2"-1"0,3-3 543,6 1 0,11 1 0,6-1-1,3 5 0,11-2 0,10 0 0,12-2-462,11-3 1,15 0 0,11-1 0,11 3-375,7-2 1,-1-10 0,-2-7 0,-38 4 0,1-2 88,5-2 1,-1-2-1,3 0 1,-1-1-1,1-1 1,-1-1 0,-5 0-1,-2-2-320,36-24 0,-41 18 0,-1-2 0,32-29 525,-1-1 0,-31 8 0,-3-5 0,2-6 0,0 1 0</inkml:trace>
+  <inkml:trace contextRef="#ctx0" brushRef="#br0">9426 12750 7764,'0'-26'462,"0"4"0,-2 9 0,-4 4 135,-5 1 1,-3 3-1,-3 7 1,1 5-14,-1 10 1,1 12-1,1 11 1,2 5-118,2 6 1,7 0-1,1 8 1,6-2-437,8-3 1,11-12 0,6-9-1,5-9-368,6-6 1,3-9-1,7-7 1,1-9-156,0-10 0,-6-18 0,-2-3 0,-3-8 89,-8-4 1,-13 1-1,-12-1 1,-6 2 209,-6 4 1,-10-4-1,-14 6 1,-5 0 308,-3 3 0,-6 4 1,5 4-1,2 5 162,2 10 0,2 7 0,2 9 0,2 1-43,1 5 1,10 3-2444,1 8 2208,8-8 0,61-68 0,-20 18 0,0-1 0</inkml:trace>
+  <inkml:trace contextRef="#ctx0" brushRef="#br0">9922 12237 7763,'16'0'264,"1"0"0,-1 0 1,3-2-1,1-2 292,2-1 1,9-2 0,2 1 0,10-3-100,4 0 0,9-6 1,1 4-1,-1-2-814,1 2 0,-3 4 0,-10 7 0,-6 0-1361,-3 0 1718,-9 0 0,-9 7 0,-10 2 0</inkml:trace>
+  <inkml:trace contextRef="#ctx0" brushRef="#br0">10517 12270 7732,'-16'29'0,"-1"3"243,1 3 0,5 11 0,1 1 0,3 7 250,3-1 0,3 4 0,1-4 0,1-3-525,5-4 0,-4-8 1,5 6-1,-1 2-732,-1 2 1,1 2 0,-6-1 0,-2-1-721,-4-4 1484,-3-3 0,-30-16 0,-5-1 0</inkml:trace>
+  <inkml:trace contextRef="#ctx0" brushRef="#br0">10186 13229 6671,'-16'0'2371,"9"0"1,7 0-2104,9 0 0,18 6 0,10-1 1,7-1-359,8-2 1,14-2 0,2-2-1,5-4-977,6-5 1,2-5 1066,2-6 0,-32 3 0,3-3 0,1-3 0,0-1 0</inkml:trace>
+  <inkml:trace contextRef="#ctx0" brushRef="#br0">9293 11278 6537,'-76'-20'15,"0"-1"1,4 4 0,1 1-1,4 4 1,0 2 81,-2 2 1,0 3 0,1 5 0,0 4 0,-2 5-1,0 4 1,0 5 0,0 5 218,-2 3 1,1 5 0,2 2 0,0 3 0,2 7 0,0 3-1,3-1 1,0 1-274,-1 0 0,1 0 1,2 3-1,1 0 1,4-2-1,2 1 1,6 2-1,2 1 71,1 1 1,2 1 0,3 3 0,1 2 0,-1 1 0,2 1 0,4 5 0,3 3 6,5 1 1,3 3 0,5 5 0,5 0 0,4-1 0,3 1 0,3 4 0,1 2-121,1 0 1,2 1 0,6-2 0,5-1 0,1-3 0,5-1 0,5-6 0,6-3-142,4-4 0,6-3 1,4-3-1,6-4 0,5-4 1,4-4-1,1-1 1,1-2 16,3-2 0,3-3 0,7-4 0,3-6 0,8-6 0,3-5 0,3 0 0,2-1 71,-27-6 1,1 0 0,1-2 0,4-1 0,0-2 0,1-1 0,3-2 0,1-1 0,0-2 0,1-1 0,0-2 0,0-1-94,1-2 1,0-3 0,1-1 0,0 0 0,1-3 0,1-1 0,4-3 0,1-2-1,-1-1 1,2-1 0,0-1 0,0-2 183,0 0 0,-1-2 1,1-1-1,-1-4 1,1-2-1,-2 0 0,-1 1 1,0-1-1,-1-2 1,0 0-1,0-2 1,-1-1-12,-2-3 1,0-1-1,0-1 1,2 0-1,-1-1 1,-1-2 0,-5 0-1,-2-2 1,-1 0-1,-3 1 1,-2 1 0,-1-1-80,-1 0 0,-1 0 1,-3-2-1,-6 2 0,-3-1 1,-2-1-1,-1 1 0,-2-1 1,-2-1-1,-4 1 0,-2-1 1,-2-1-40,16-24 1,-6-2 0,-10 1 0,-6 0 0,-6 2 0,-6 1 0,-7 0 0,-6 1 136,-6 1 0,-7 0 0,-6 3 0,-8 2 0,-11 5 1,-6 3-1,-3 4 0,-2 2 384,-3 3 0,-2 2 0,-5 4 0,-2 2 0,-5 4 0,-3 3 0,-6 1 0,-2 3-111,-2 1 1,-2 1 0,-7 3-1,-2 3 1,6 1 0,-1 2 0,-8-1-1,-1 1-298,26 7 0,0 1 1,-2 0-1,-2 2 1,-1 1-1,-1 1 1,-3 0-1,-1 1 1,0 2-1,0 0 1,0 1-1,0 2-151,-2 0 1,1 2 0,-1 2 0,-2 1-1,0 3 1,-1 1 0,-1 2 0,0 2 0,0 0-1,1 2 1,0-1 0,1 2-24,0 0 0,0 0 0,1 0 0,1 0 0,1 0 0,1 0 0,6 1 0,2 1 0,0-1 0,2 0 1,0-1-1,2 0-762,-25 6 1,1 0 0,2-3-1,2-3 914,14-2 0,2-2 0,-1 2 0,2-2 0,11-1 0,1-1 0,0-2 0,-1 1 0</inkml:trace>
+</inkml:ink>
 </file>
 
 <file path=ppt/notesMasters/notesMaster1.xml><?xml version="1.0" encoding="utf-8"?>
@@ -3764,7 +3595,7 @@
         </p:nvGraphicFramePr>
         <p:xfrm>
           <a:off x="812800" y="1638300"/>
-          <a:ext cx="10566400" cy="2551176"/>
+          <a:ext cx="10566400" cy="2154936"/>
         </p:xfrm>
         <a:graphic>
           <a:graphicData uri="http://schemas.openxmlformats.org/drawingml/2006/table">
@@ -4818,6 +4649,57 @@
           </a:graphicData>
         </a:graphic>
       </p:graphicFrame>
+      <mc:AlternateContent xmlns:mc="http://schemas.openxmlformats.org/markup-compatibility/2006">
+        <mc:Choice xmlns:p14="http://schemas.microsoft.com/office/powerpoint/2010/main" Requires="p14">
+          <p:contentPart p14:bwMode="auto" r:id="rId3">
+            <p14:nvContentPartPr>
+              <p14:cNvPr id="4" name="Ink 3">
+                <a:extLst>
+                  <a:ext uri="{FF2B5EF4-FFF2-40B4-BE49-F238E27FC236}">
+                    <a16:creationId xmlns:a16="http://schemas.microsoft.com/office/drawing/2014/main" id="{8905E4CF-77D9-2A46-62E9-CD127ABE0F7A}"/>
+                  </a:ext>
+                </a:extLst>
+              </p14:cNvPr>
+              <p14:cNvContentPartPr/>
+              <p14:nvPr/>
+            </p14:nvContentPartPr>
+            <p14:xfrm>
+              <a:off x="2321640" y="2506320"/>
+              <a:ext cx="2411280" cy="559800"/>
+            </p14:xfrm>
+          </p:contentPart>
+        </mc:Choice>
+        <mc:Fallback>
+          <p:pic>
+            <p:nvPicPr>
+              <p:cNvPr id="4" name="Ink 3">
+                <a:extLst>
+                  <a:ext uri="{FF2B5EF4-FFF2-40B4-BE49-F238E27FC236}">
+                    <a16:creationId xmlns:a16="http://schemas.microsoft.com/office/drawing/2014/main" id="{8905E4CF-77D9-2A46-62E9-CD127ABE0F7A}"/>
+                  </a:ext>
+                </a:extLst>
+              </p:cNvPr>
+              <p:cNvPicPr/>
+              <p:nvPr/>
+            </p:nvPicPr>
+            <p:blipFill>
+              <a:blip r:embed="rId4"/>
+              <a:stretch>
+                <a:fillRect/>
+              </a:stretch>
+            </p:blipFill>
+            <p:spPr>
+              <a:xfrm>
+                <a:off x="2299680" y="2490120"/>
+                <a:ext cx="2449080" cy="592200"/>
+              </a:xfrm>
+              <a:prstGeom prst="rect">
+                <a:avLst/>
+              </a:prstGeom>
+            </p:spPr>
+          </p:pic>
+        </mc:Fallback>
+      </mc:AlternateContent>
     </p:spTree>
   </p:cSld>
   <p:clrMapOvr>
@@ -7794,6 +7676,57 @@
           </a:p>
         </p:txBody>
       </p:sp>
+      <mc:AlternateContent xmlns:mc="http://schemas.openxmlformats.org/markup-compatibility/2006">
+        <mc:Choice xmlns:p14="http://schemas.microsoft.com/office/powerpoint/2010/main" Requires="p14">
+          <p:contentPart p14:bwMode="auto" r:id="rId3">
+            <p14:nvContentPartPr>
+              <p14:cNvPr id="8" name="Ink 7">
+                <a:extLst>
+                  <a:ext uri="{FF2B5EF4-FFF2-40B4-BE49-F238E27FC236}">
+                    <a16:creationId xmlns:a16="http://schemas.microsoft.com/office/drawing/2014/main" id="{73A50A1C-CEF5-7170-CF6E-B1F7E179C0B9}"/>
+                  </a:ext>
+                </a:extLst>
+              </p14:cNvPr>
+              <p14:cNvContentPartPr/>
+              <p14:nvPr/>
+            </p14:nvContentPartPr>
+            <p14:xfrm>
+              <a:off x="2476440" y="3902040"/>
+              <a:ext cx="2036880" cy="1252080"/>
+            </p14:xfrm>
+          </p:contentPart>
+        </mc:Choice>
+        <mc:Fallback>
+          <p:pic>
+            <p:nvPicPr>
+              <p:cNvPr id="8" name="Ink 7">
+                <a:extLst>
+                  <a:ext uri="{FF2B5EF4-FFF2-40B4-BE49-F238E27FC236}">
+                    <a16:creationId xmlns:a16="http://schemas.microsoft.com/office/drawing/2014/main" id="{73A50A1C-CEF5-7170-CF6E-B1F7E179C0B9}"/>
+                  </a:ext>
+                </a:extLst>
+              </p:cNvPr>
+              <p:cNvPicPr/>
+              <p:nvPr/>
+            </p:nvPicPr>
+            <p:blipFill>
+              <a:blip r:embed="rId4"/>
+              <a:stretch>
+                <a:fillRect/>
+              </a:stretch>
+            </p:blipFill>
+            <p:spPr>
+              <a:xfrm>
+                <a:off x="2460240" y="3885840"/>
+                <a:ext cx="2069280" cy="1284480"/>
+              </a:xfrm>
+              <a:prstGeom prst="rect">
+                <a:avLst/>
+              </a:prstGeom>
+            </p:spPr>
+          </p:pic>
+        </mc:Fallback>
+      </mc:AlternateContent>
     </p:spTree>
   </p:cSld>
   <p:clrMapOvr>
@@ -9671,7 +9604,7 @@
         </p:nvGraphicFramePr>
         <p:xfrm>
           <a:off x="812800" y="1638300"/>
-          <a:ext cx="10566400" cy="2602992"/>
+          <a:ext cx="10566400" cy="2389632"/>
         </p:xfrm>
         <a:graphic>
           <a:graphicData uri="http://schemas.openxmlformats.org/drawingml/2006/table">
@@ -12310,6 +12243,57 @@
           </a:p>
         </p:txBody>
       </p:sp>
+      <mc:AlternateContent xmlns:mc="http://schemas.openxmlformats.org/markup-compatibility/2006">
+        <mc:Choice xmlns:p14="http://schemas.microsoft.com/office/powerpoint/2010/main" Requires="p14">
+          <p:contentPart p14:bwMode="auto" r:id="rId3">
+            <p14:nvContentPartPr>
+              <p14:cNvPr id="38" name="Ink 37">
+                <a:extLst>
+                  <a:ext uri="{FF2B5EF4-FFF2-40B4-BE49-F238E27FC236}">
+                    <a16:creationId xmlns:a16="http://schemas.microsoft.com/office/drawing/2014/main" id="{0BC59E27-8FF2-43F1-8BF5-9C0ED9E2D947}"/>
+                  </a:ext>
+                </a:extLst>
+              </p14:cNvPr>
+              <p14:cNvContentPartPr/>
+              <p14:nvPr/>
+            </p14:nvContentPartPr>
+            <p14:xfrm>
+              <a:off x="782640" y="432000"/>
+              <a:ext cx="9344160" cy="5936760"/>
+            </p14:xfrm>
+          </p:contentPart>
+        </mc:Choice>
+        <mc:Fallback>
+          <p:pic>
+            <p:nvPicPr>
+              <p:cNvPr id="38" name="Ink 37">
+                <a:extLst>
+                  <a:ext uri="{FF2B5EF4-FFF2-40B4-BE49-F238E27FC236}">
+                    <a16:creationId xmlns:a16="http://schemas.microsoft.com/office/drawing/2014/main" id="{0BC59E27-8FF2-43F1-8BF5-9C0ED9E2D947}"/>
+                  </a:ext>
+                </a:extLst>
+              </p:cNvPr>
+              <p:cNvPicPr/>
+              <p:nvPr/>
+            </p:nvPicPr>
+            <p:blipFill>
+              <a:blip r:embed="rId4"/>
+              <a:stretch>
+                <a:fillRect/>
+              </a:stretch>
+            </p:blipFill>
+            <p:spPr>
+              <a:xfrm>
+                <a:off x="766440" y="415800"/>
+                <a:ext cx="9376560" cy="5969160"/>
+              </a:xfrm>
+              <a:prstGeom prst="rect">
+                <a:avLst/>
+              </a:prstGeom>
+            </p:spPr>
+          </p:pic>
+        </mc:Fallback>
+      </mc:AlternateContent>
     </p:spTree>
   </p:cSld>
   <p:clrMapOvr>
@@ -12424,6 +12408,1304 @@
       <p:graphicFrame>
         <p:nvGraphicFramePr>
           <p:cNvPr id="22" name="Table 0"/>
+          <p:cNvGraphicFramePr>
+            <a:graphicFrameLocks noGrp="1"/>
+          </p:cNvGraphicFramePr>
+          <p:nvPr>
+            <p:extLst>
+              <p:ext uri="{D42A27DB-BD31-4B8C-83A1-F6EECF244321}">
+                <p14:modId xmlns:p14="http://schemas.microsoft.com/office/powerpoint/2010/main" val="1579011935"/>
+              </p:ext>
+            </p:extLst>
+          </p:nvPr>
+        </p:nvGraphicFramePr>
+        <p:xfrm>
+          <a:off x="812800" y="1638300"/>
+          <a:ext cx="10566400" cy="3200400"/>
+        </p:xfrm>
+        <a:graphic>
+          <a:graphicData uri="http://schemas.openxmlformats.org/drawingml/2006/table">
+            <a:tbl>
+              <a:tblPr/>
+              <a:tblGrid>
+                <a:gridCol w="1584960">
+                  <a:extLst>
+                    <a:ext uri="{9D8B030D-6E8A-4147-A177-3AD203B41FA5}">
+                      <a16:colId xmlns:a16="http://schemas.microsoft.com/office/drawing/2014/main" val="20000"/>
+                    </a:ext>
+                  </a:extLst>
+                </a:gridCol>
+                <a:gridCol w="4226560">
+                  <a:extLst>
+                    <a:ext uri="{9D8B030D-6E8A-4147-A177-3AD203B41FA5}">
+                      <a16:colId xmlns:a16="http://schemas.microsoft.com/office/drawing/2014/main" val="20001"/>
+                    </a:ext>
+                  </a:extLst>
+                </a:gridCol>
+                <a:gridCol w="1796288">
+                  <a:extLst>
+                    <a:ext uri="{9D8B030D-6E8A-4147-A177-3AD203B41FA5}">
+                      <a16:colId xmlns:a16="http://schemas.microsoft.com/office/drawing/2014/main" val="20002"/>
+                    </a:ext>
+                  </a:extLst>
+                </a:gridCol>
+                <a:gridCol w="2958592">
+                  <a:extLst>
+                    <a:ext uri="{9D8B030D-6E8A-4147-A177-3AD203B41FA5}">
+                      <a16:colId xmlns:a16="http://schemas.microsoft.com/office/drawing/2014/main" val="20003"/>
+                    </a:ext>
+                  </a:extLst>
+                </a:gridCol>
+              </a:tblGrid>
+              <a:tr h="0">
+                <a:tc>
+                  <a:txBody>
+                    <a:bodyPr/>
+                    <a:lstStyle/>
+                    <a:p>
+                      <a:pPr marL="0" indent="0">
+                        <a:buNone/>
+                      </a:pPr>
+                      <a:r>
+                        <a:rPr lang="en-US" sz="1200" b="1" dirty="0">
+                          <a:solidFill>
+                            <a:srgbClr val="1F2328"/>
+                          </a:solidFill>
+                          <a:latin typeface="Mulish" pitchFamily="34" charset="0"/>
+                          <a:ea typeface="Mulish" pitchFamily="34" charset="-122"/>
+                          <a:cs typeface="Mulish" pitchFamily="34" charset="-120"/>
+                        </a:rPr>
+                        <a:t>Area</a:t>
+                      </a:r>
+                      <a:endParaRPr lang="en-US" sz="1200" dirty="0">
+                        <a:latin typeface="Mulish" charset="0"/>
+                        <a:ea typeface="Mulish" charset="0"/>
+                        <a:cs typeface="Mulish" charset="0"/>
+                      </a:endParaRPr>
+                    </a:p>
+                  </a:txBody>
+                  <a:tcPr marT="64008" marB="64008">
+                    <a:lnL w="0" cap="flat" cmpd="sng" algn="ctr">
+                      <a:noFill/>
+                    </a:lnL>
+                    <a:lnR w="0" cap="flat" cmpd="sng" algn="ctr">
+                      <a:noFill/>
+                    </a:lnR>
+                    <a:lnT w="0" cap="flat" cmpd="sng" algn="ctr">
+                      <a:noFill/>
+                    </a:lnT>
+                    <a:lnB w="19050" cap="flat" cmpd="sng" algn="ctr">
+                      <a:solidFill>
+                        <a:srgbClr val="1F2328"/>
+                      </a:solidFill>
+                      <a:prstDash val="solid"/>
+                      <a:round/>
+                      <a:headEnd type="none" w="med" len="med"/>
+                      <a:tailEnd type="none" w="med" len="med"/>
+                    </a:lnB>
+                    <a:solidFill>
+                      <a:srgbClr val="FFFFFF"/>
+                    </a:solidFill>
+                  </a:tcPr>
+                </a:tc>
+                <a:tc>
+                  <a:txBody>
+                    <a:bodyPr/>
+                    <a:lstStyle/>
+                    <a:p>
+                      <a:pPr marL="0" indent="0">
+                        <a:buNone/>
+                      </a:pPr>
+                      <a:r>
+                        <a:rPr lang="en-US" sz="1200" b="1" dirty="0">
+                          <a:solidFill>
+                            <a:srgbClr val="1F2328"/>
+                          </a:solidFill>
+                          <a:latin typeface="Mulish" pitchFamily="34" charset="0"/>
+                          <a:ea typeface="Mulish" pitchFamily="34" charset="-122"/>
+                          <a:cs typeface="Mulish" pitchFamily="34" charset="-120"/>
+                        </a:rPr>
+                        <a:t>Included (✓, ✓q, ✓p)</a:t>
+                      </a:r>
+                      <a:endParaRPr lang="en-US" sz="1200" dirty="0">
+                        <a:latin typeface="Mulish" charset="0"/>
+                        <a:ea typeface="Mulish" charset="0"/>
+                        <a:cs typeface="Mulish" charset="0"/>
+                      </a:endParaRPr>
+                    </a:p>
+                  </a:txBody>
+                  <a:tcPr marT="64008" marB="64008">
+                    <a:lnL w="0" cap="flat" cmpd="sng" algn="ctr">
+                      <a:noFill/>
+                    </a:lnL>
+                    <a:lnR w="0" cap="flat" cmpd="sng" algn="ctr">
+                      <a:noFill/>
+                    </a:lnR>
+                    <a:lnT w="0" cap="flat" cmpd="sng" algn="ctr">
+                      <a:noFill/>
+                    </a:lnT>
+                    <a:lnB w="19050" cap="flat" cmpd="sng" algn="ctr">
+                      <a:solidFill>
+                        <a:srgbClr val="1F2328"/>
+                      </a:solidFill>
+                      <a:prstDash val="solid"/>
+                      <a:round/>
+                      <a:headEnd type="none" w="med" len="med"/>
+                      <a:tailEnd type="none" w="med" len="med"/>
+                    </a:lnB>
+                    <a:solidFill>
+                      <a:srgbClr val="FFFFFF"/>
+                    </a:solidFill>
+                  </a:tcPr>
+                </a:tc>
+                <a:tc>
+                  <a:txBody>
+                    <a:bodyPr/>
+                    <a:lstStyle/>
+                    <a:p>
+                      <a:pPr marL="0" indent="0">
+                        <a:buNone/>
+                      </a:pPr>
+                      <a:r>
+                        <a:rPr lang="en-US" sz="1200" b="1" dirty="0">
+                          <a:solidFill>
+                            <a:srgbClr val="1F2328"/>
+                          </a:solidFill>
+                          <a:latin typeface="Mulish" pitchFamily="34" charset="0"/>
+                          <a:ea typeface="Mulish" pitchFamily="34" charset="-122"/>
+                          <a:cs typeface="Mulish" pitchFamily="34" charset="-120"/>
+                        </a:rPr>
+                        <a:t>Outside of focus (?)</a:t>
+                      </a:r>
+                      <a:endParaRPr lang="en-US" sz="1200" dirty="0">
+                        <a:latin typeface="Mulish" charset="0"/>
+                        <a:ea typeface="Mulish" charset="0"/>
+                        <a:cs typeface="Mulish" charset="0"/>
+                      </a:endParaRPr>
+                    </a:p>
+                  </a:txBody>
+                  <a:tcPr marT="64008" marB="64008">
+                    <a:lnL w="0" cap="flat" cmpd="sng" algn="ctr">
+                      <a:noFill/>
+                    </a:lnL>
+                    <a:lnR w="0" cap="flat" cmpd="sng" algn="ctr">
+                      <a:noFill/>
+                    </a:lnR>
+                    <a:lnT w="0" cap="flat" cmpd="sng" algn="ctr">
+                      <a:noFill/>
+                    </a:lnT>
+                    <a:lnB w="19050" cap="flat" cmpd="sng" algn="ctr">
+                      <a:solidFill>
+                        <a:srgbClr val="1F2328"/>
+                      </a:solidFill>
+                      <a:prstDash val="solid"/>
+                      <a:round/>
+                      <a:headEnd type="none" w="med" len="med"/>
+                      <a:tailEnd type="none" w="med" len="med"/>
+                    </a:lnB>
+                    <a:solidFill>
+                      <a:srgbClr val="FFFFFF"/>
+                    </a:solidFill>
+                  </a:tcPr>
+                </a:tc>
+                <a:tc>
+                  <a:txBody>
+                    <a:bodyPr/>
+                    <a:lstStyle/>
+                    <a:p>
+                      <a:pPr marL="0" indent="0">
+                        <a:buNone/>
+                      </a:pPr>
+                      <a:r>
+                        <a:rPr lang="en-US" sz="1200" b="1" dirty="0">
+                          <a:solidFill>
+                            <a:srgbClr val="1F2328"/>
+                          </a:solidFill>
+                          <a:latin typeface="Mulish" pitchFamily="34" charset="0"/>
+                          <a:ea typeface="Mulish" pitchFamily="34" charset="-122"/>
+                          <a:cs typeface="Mulish" pitchFamily="34" charset="-120"/>
+                        </a:rPr>
+                        <a:t>Excluded (✗)</a:t>
+                      </a:r>
+                      <a:endParaRPr lang="en-US" sz="1200" dirty="0">
+                        <a:latin typeface="Mulish" charset="0"/>
+                        <a:ea typeface="Mulish" charset="0"/>
+                        <a:cs typeface="Mulish" charset="0"/>
+                      </a:endParaRPr>
+                    </a:p>
+                  </a:txBody>
+                  <a:tcPr marT="64008" marB="64008">
+                    <a:lnL w="0" cap="flat" cmpd="sng" algn="ctr">
+                      <a:noFill/>
+                    </a:lnL>
+                    <a:lnR w="0" cap="flat" cmpd="sng" algn="ctr">
+                      <a:noFill/>
+                    </a:lnR>
+                    <a:lnT w="0" cap="flat" cmpd="sng" algn="ctr">
+                      <a:noFill/>
+                    </a:lnT>
+                    <a:lnB w="19050" cap="flat" cmpd="sng" algn="ctr">
+                      <a:solidFill>
+                        <a:srgbClr val="1F2328"/>
+                      </a:solidFill>
+                      <a:prstDash val="solid"/>
+                      <a:round/>
+                      <a:headEnd type="none" w="med" len="med"/>
+                      <a:tailEnd type="none" w="med" len="med"/>
+                    </a:lnB>
+                    <a:solidFill>
+                      <a:srgbClr val="FFFFFF"/>
+                    </a:solidFill>
+                  </a:tcPr>
+                </a:tc>
+                <a:extLst>
+                  <a:ext uri="{0D108BD9-81ED-4DB2-BD59-A6C34878D82A}">
+                    <a16:rowId xmlns:a16="http://schemas.microsoft.com/office/drawing/2014/main" val="10000"/>
+                  </a:ext>
+                </a:extLst>
+              </a:tr>
+              <a:tr h="0">
+                <a:tc>
+                  <a:txBody>
+                    <a:bodyPr/>
+                    <a:lstStyle/>
+                    <a:p>
+                      <a:pPr marL="0" indent="0">
+                        <a:buNone/>
+                      </a:pPr>
+                      <a:r>
+                        <a:rPr lang="en-US" sz="1200" dirty="0">
+                          <a:solidFill>
+                            <a:srgbClr val="1F2328"/>
+                          </a:solidFill>
+                          <a:latin typeface="Mulish" pitchFamily="34" charset="0"/>
+                          <a:ea typeface="Mulish" pitchFamily="34" charset="-122"/>
+                          <a:cs typeface="Mulish" pitchFamily="34" charset="-120"/>
+                        </a:rPr>
+                        <a:t>Arithmetic and geometry</a:t>
+                      </a:r>
+                      <a:endParaRPr lang="en-US" sz="1200" dirty="0">
+                        <a:latin typeface="Mulish" charset="0"/>
+                        <a:ea typeface="Mulish" charset="0"/>
+                        <a:cs typeface="Mulish" charset="0"/>
+                      </a:endParaRPr>
+                    </a:p>
+                  </a:txBody>
+                  <a:tcPr marT="64008" marB="64008">
+                    <a:lnL w="0" cap="flat" cmpd="sng" algn="ctr">
+                      <a:noFill/>
+                    </a:lnL>
+                    <a:lnR w="0" cap="flat" cmpd="sng" algn="ctr">
+                      <a:noFill/>
+                    </a:lnR>
+                    <a:lnT w="19050" cap="flat" cmpd="sng" algn="ctr">
+                      <a:solidFill>
+                        <a:srgbClr val="1F2328"/>
+                      </a:solidFill>
+                      <a:prstDash val="solid"/>
+                      <a:round/>
+                      <a:headEnd type="none" w="med" len="med"/>
+                      <a:tailEnd type="none" w="med" len="med"/>
+                    </a:lnT>
+                    <a:lnB w="9525" cap="flat" cmpd="sng" algn="ctr">
+                      <a:solidFill>
+                        <a:srgbClr val="DADDE0"/>
+                      </a:solidFill>
+                      <a:prstDash val="solid"/>
+                      <a:round/>
+                      <a:headEnd type="none" w="med" len="med"/>
+                      <a:tailEnd type="none" w="med" len="med"/>
+                    </a:lnB>
+                    <a:solidFill>
+                      <a:srgbClr val="FFFFFF"/>
+                    </a:solidFill>
+                  </a:tcPr>
+                </a:tc>
+                <a:tc>
+                  <a:txBody>
+                    <a:bodyPr/>
+                    <a:lstStyle/>
+                    <a:p>
+                      <a:pPr marL="0" indent="0">
+                        <a:buNone/>
+                      </a:pPr>
+                      <a:r>
+                        <a:rPr lang="en-US" sz="1200" dirty="0">
+                          <a:solidFill>
+                            <a:srgbClr val="1F2328"/>
+                          </a:solidFill>
+                          <a:latin typeface="Mulish" pitchFamily="34" charset="0"/>
+                          <a:ea typeface="Mulish" pitchFamily="34" charset="-122"/>
+                          <a:cs typeface="Mulish" pitchFamily="34" charset="-120"/>
+                        </a:rPr>
+                        <a:t>Integers, parity, divisibility; modular addition, subtraction, multiplication; fractions; points, vectors, polygons in the plane; primes; Euclidean distance; Pythagoras</a:t>
+                      </a:r>
+                      <a:endParaRPr lang="en-US" sz="1200" dirty="0">
+                        <a:latin typeface="Mulish" charset="0"/>
+                        <a:ea typeface="Mulish" charset="0"/>
+                        <a:cs typeface="Mulish" charset="0"/>
+                      </a:endParaRPr>
+                    </a:p>
+                  </a:txBody>
+                  <a:tcPr marT="64008" marB="64008">
+                    <a:lnL w="0" cap="flat" cmpd="sng" algn="ctr">
+                      <a:noFill/>
+                    </a:lnL>
+                    <a:lnR w="0" cap="flat" cmpd="sng" algn="ctr">
+                      <a:noFill/>
+                    </a:lnR>
+                    <a:lnT w="19050" cap="flat" cmpd="sng" algn="ctr">
+                      <a:solidFill>
+                        <a:srgbClr val="1F2328"/>
+                      </a:solidFill>
+                      <a:prstDash val="solid"/>
+                      <a:round/>
+                      <a:headEnd type="none" w="med" len="med"/>
+                      <a:tailEnd type="none" w="med" len="med"/>
+                    </a:lnT>
+                    <a:lnB w="9525" cap="flat" cmpd="sng" algn="ctr">
+                      <a:solidFill>
+                        <a:srgbClr val="DADDE0"/>
+                      </a:solidFill>
+                      <a:prstDash val="solid"/>
+                      <a:round/>
+                      <a:headEnd type="none" w="med" len="med"/>
+                      <a:tailEnd type="none" w="med" len="med"/>
+                    </a:lnB>
+                    <a:solidFill>
+                      <a:srgbClr val="FFFFFF"/>
+                    </a:solidFill>
+                  </a:tcPr>
+                </a:tc>
+                <a:tc>
+                  <a:txBody>
+                    <a:bodyPr/>
+                    <a:lstStyle/>
+                    <a:p>
+                      <a:pPr marL="0" indent="0">
+                        <a:buNone/>
+                      </a:pPr>
+                      <a:r>
+                        <a:rPr lang="en-US" sz="1200" dirty="0">
+                          <a:solidFill>
+                            <a:srgbClr val="1F2328"/>
+                          </a:solidFill>
+                          <a:latin typeface="Mulish" pitchFamily="34" charset="0"/>
+                          <a:ea typeface="Mulish" pitchFamily="34" charset="-122"/>
+                          <a:cs typeface="Mulish" pitchFamily="34" charset="-120"/>
+                        </a:rPr>
+                        <a:t>—</a:t>
+                      </a:r>
+                      <a:endParaRPr lang="en-US" sz="1200" dirty="0">
+                        <a:latin typeface="Mulish" charset="0"/>
+                        <a:ea typeface="Mulish" charset="0"/>
+                        <a:cs typeface="Mulish" charset="0"/>
+                      </a:endParaRPr>
+                    </a:p>
+                  </a:txBody>
+                  <a:tcPr marT="64008" marB="64008">
+                    <a:lnL w="0" cap="flat" cmpd="sng" algn="ctr">
+                      <a:noFill/>
+                    </a:lnL>
+                    <a:lnR w="0" cap="flat" cmpd="sng" algn="ctr">
+                      <a:noFill/>
+                    </a:lnR>
+                    <a:lnT w="19050" cap="flat" cmpd="sng" algn="ctr">
+                      <a:solidFill>
+                        <a:srgbClr val="1F2328"/>
+                      </a:solidFill>
+                      <a:prstDash val="solid"/>
+                      <a:round/>
+                      <a:headEnd type="none" w="med" len="med"/>
+                      <a:tailEnd type="none" w="med" len="med"/>
+                    </a:lnT>
+                    <a:lnB w="9525" cap="flat" cmpd="sng" algn="ctr">
+                      <a:solidFill>
+                        <a:srgbClr val="DADDE0"/>
+                      </a:solidFill>
+                      <a:prstDash val="solid"/>
+                      <a:round/>
+                      <a:headEnd type="none" w="med" len="med"/>
+                      <a:tailEnd type="none" w="med" len="med"/>
+                    </a:lnB>
+                    <a:solidFill>
+                      <a:srgbClr val="FFFFFF"/>
+                    </a:solidFill>
+                  </a:tcPr>
+                </a:tc>
+                <a:tc>
+                  <a:txBody>
+                    <a:bodyPr/>
+                    <a:lstStyle/>
+                    <a:p>
+                      <a:pPr marL="0" indent="0">
+                        <a:buNone/>
+                      </a:pPr>
+                      <a:r>
+                        <a:rPr lang="en-US" sz="1200" dirty="0">
+                          <a:solidFill>
+                            <a:srgbClr val="1F2328"/>
+                          </a:solidFill>
+                          <a:latin typeface="Mulish" pitchFamily="34" charset="0"/>
+                          <a:ea typeface="Mulish" pitchFamily="34" charset="-122"/>
+                          <a:cs typeface="Mulish" pitchFamily="34" charset="-120"/>
+                        </a:rPr>
+                        <a:t>3D geometry; floating-point precision work; modular division and inverses; complex numbers; conics; trigonometry</a:t>
+                      </a:r>
+                      <a:endParaRPr lang="en-US" sz="1200" dirty="0">
+                        <a:latin typeface="Mulish" charset="0"/>
+                        <a:ea typeface="Mulish" charset="0"/>
+                        <a:cs typeface="Mulish" charset="0"/>
+                      </a:endParaRPr>
+                    </a:p>
+                  </a:txBody>
+                  <a:tcPr marT="64008" marB="64008">
+                    <a:lnL w="0" cap="flat" cmpd="sng" algn="ctr">
+                      <a:noFill/>
+                    </a:lnL>
+                    <a:lnR w="0" cap="flat" cmpd="sng" algn="ctr">
+                      <a:noFill/>
+                    </a:lnR>
+                    <a:lnT w="19050" cap="flat" cmpd="sng" algn="ctr">
+                      <a:solidFill>
+                        <a:srgbClr val="1F2328"/>
+                      </a:solidFill>
+                      <a:prstDash val="solid"/>
+                      <a:round/>
+                      <a:headEnd type="none" w="med" len="med"/>
+                      <a:tailEnd type="none" w="med" len="med"/>
+                    </a:lnT>
+                    <a:lnB w="9525" cap="flat" cmpd="sng" algn="ctr">
+                      <a:solidFill>
+                        <a:srgbClr val="DADDE0"/>
+                      </a:solidFill>
+                      <a:prstDash val="solid"/>
+                      <a:round/>
+                      <a:headEnd type="none" w="med" len="med"/>
+                      <a:tailEnd type="none" w="med" len="med"/>
+                    </a:lnB>
+                    <a:solidFill>
+                      <a:srgbClr val="FFFFFF"/>
+                    </a:solidFill>
+                  </a:tcPr>
+                </a:tc>
+                <a:extLst>
+                  <a:ext uri="{0D108BD9-81ED-4DB2-BD59-A6C34878D82A}">
+                    <a16:rowId xmlns:a16="http://schemas.microsoft.com/office/drawing/2014/main" val="10001"/>
+                  </a:ext>
+                </a:extLst>
+              </a:tr>
+              <a:tr h="0">
+                <a:tc>
+                  <a:txBody>
+                    <a:bodyPr/>
+                    <a:lstStyle/>
+                    <a:p>
+                      <a:pPr marL="0" indent="0">
+                        <a:buNone/>
+                      </a:pPr>
+                      <a:r>
+                        <a:rPr lang="en-US" sz="1200" dirty="0">
+                          <a:solidFill>
+                            <a:srgbClr val="1F2328"/>
+                          </a:solidFill>
+                          <a:latin typeface="Mulish" pitchFamily="34" charset="0"/>
+                          <a:ea typeface="Mulish" pitchFamily="34" charset="-122"/>
+                          <a:cs typeface="Mulish" pitchFamily="34" charset="-120"/>
+                        </a:rPr>
+                        <a:t>Discrete maths</a:t>
+                      </a:r>
+                      <a:endParaRPr lang="en-US" sz="1200" dirty="0">
+                        <a:latin typeface="Mulish" charset="0"/>
+                        <a:ea typeface="Mulish" charset="0"/>
+                        <a:cs typeface="Mulish" charset="0"/>
+                      </a:endParaRPr>
+                    </a:p>
+                  </a:txBody>
+                  <a:tcPr marT="64008" marB="64008">
+                    <a:lnL w="0" cap="flat" cmpd="sng" algn="ctr">
+                      <a:noFill/>
+                    </a:lnL>
+                    <a:lnR w="0" cap="flat" cmpd="sng" algn="ctr">
+                      <a:noFill/>
+                    </a:lnR>
+                    <a:lnT w="9525" cap="flat" cmpd="sng" algn="ctr">
+                      <a:solidFill>
+                        <a:srgbClr val="DADDE0"/>
+                      </a:solidFill>
+                      <a:prstDash val="solid"/>
+                      <a:round/>
+                      <a:headEnd type="none" w="med" len="med"/>
+                      <a:tailEnd type="none" w="med" len="med"/>
+                    </a:lnT>
+                    <a:lnB w="9525" cap="flat" cmpd="sng" algn="ctr">
+                      <a:solidFill>
+                        <a:srgbClr val="DADDE0"/>
+                      </a:solidFill>
+                      <a:prstDash val="solid"/>
+                      <a:round/>
+                      <a:headEnd type="none" w="med" len="med"/>
+                      <a:tailEnd type="none" w="med" len="med"/>
+                    </a:lnB>
+                    <a:solidFill>
+                      <a:srgbClr val="FFFFFF"/>
+                    </a:solidFill>
+                  </a:tcPr>
+                </a:tc>
+                <a:tc>
+                  <a:txBody>
+                    <a:bodyPr/>
+                    <a:lstStyle/>
+                    <a:p>
+                      <a:pPr marL="0" indent="0">
+                        <a:buNone/>
+                      </a:pPr>
+                      <a:r>
+                        <a:rPr lang="en-US" sz="1200" dirty="0">
+                          <a:solidFill>
+                            <a:srgbClr val="1F2328"/>
+                          </a:solidFill>
+                          <a:latin typeface="Mulish" pitchFamily="34" charset="0"/>
+                          <a:ea typeface="Mulish" pitchFamily="34" charset="-122"/>
+                          <a:cs typeface="Mulish" pitchFamily="34" charset="-120"/>
+                        </a:rPr>
+                        <a:t>Functions, relations, sets; basic logic; proofs including induction; counting (permutations, combinations, binomial coefficients, inclusion-exclusion, pigeonhole); graph and tree vocabulary; centroids; planar graphs</a:t>
+                      </a:r>
+                      <a:endParaRPr lang="en-US" sz="1200" dirty="0">
+                        <a:latin typeface="Mulish" charset="0"/>
+                        <a:ea typeface="Mulish" charset="0"/>
+                        <a:cs typeface="Mulish" charset="0"/>
+                      </a:endParaRPr>
+                    </a:p>
+                  </a:txBody>
+                  <a:tcPr marT="64008" marB="64008">
+                    <a:lnL w="0" cap="flat" cmpd="sng" algn="ctr">
+                      <a:noFill/>
+                    </a:lnL>
+                    <a:lnR w="0" cap="flat" cmpd="sng" algn="ctr">
+                      <a:noFill/>
+                    </a:lnR>
+                    <a:lnT w="9525" cap="flat" cmpd="sng" algn="ctr">
+                      <a:solidFill>
+                        <a:srgbClr val="DADDE0"/>
+                      </a:solidFill>
+                      <a:prstDash val="solid"/>
+                      <a:round/>
+                      <a:headEnd type="none" w="med" len="med"/>
+                      <a:tailEnd type="none" w="med" len="med"/>
+                    </a:lnT>
+                    <a:lnB w="9525" cap="flat" cmpd="sng" algn="ctr">
+                      <a:solidFill>
+                        <a:srgbClr val="DADDE0"/>
+                      </a:solidFill>
+                      <a:prstDash val="solid"/>
+                      <a:round/>
+                      <a:headEnd type="none" w="med" len="med"/>
+                      <a:tailEnd type="none" w="med" len="med"/>
+                    </a:lnB>
+                    <a:solidFill>
+                      <a:srgbClr val="FFFFFF"/>
+                    </a:solidFill>
+                  </a:tcPr>
+                </a:tc>
+                <a:tc>
+                  <a:txBody>
+                    <a:bodyPr/>
+                    <a:lstStyle/>
+                    <a:p>
+                      <a:pPr marL="0" indent="0">
+                        <a:buNone/>
+                      </a:pPr>
+                      <a:r>
+                        <a:rPr lang="en-US" sz="1200" dirty="0">
+                          <a:solidFill>
+                            <a:srgbClr val="1F2328"/>
+                          </a:solidFill>
+                          <a:latin typeface="Mulish" pitchFamily="34" charset="0"/>
+                          <a:ea typeface="Mulish" pitchFamily="34" charset="-122"/>
+                          <a:cs typeface="Mulish" pitchFamily="34" charset="-120"/>
+                        </a:rPr>
+                        <a:t>Discrete probability (finite cases)</a:t>
+                      </a:r>
+                      <a:endParaRPr lang="en-US" sz="1200" dirty="0">
+                        <a:latin typeface="Mulish" charset="0"/>
+                        <a:ea typeface="Mulish" charset="0"/>
+                        <a:cs typeface="Mulish" charset="0"/>
+                      </a:endParaRPr>
+                    </a:p>
+                  </a:txBody>
+                  <a:tcPr marT="64008" marB="64008">
+                    <a:lnL w="0" cap="flat" cmpd="sng" algn="ctr">
+                      <a:noFill/>
+                    </a:lnL>
+                    <a:lnR w="0" cap="flat" cmpd="sng" algn="ctr">
+                      <a:noFill/>
+                    </a:lnR>
+                    <a:lnT w="9525" cap="flat" cmpd="sng" algn="ctr">
+                      <a:solidFill>
+                        <a:srgbClr val="DADDE0"/>
+                      </a:solidFill>
+                      <a:prstDash val="solid"/>
+                      <a:round/>
+                      <a:headEnd type="none" w="med" len="med"/>
+                      <a:tailEnd type="none" w="med" len="med"/>
+                    </a:lnT>
+                    <a:lnB w="9525" cap="flat" cmpd="sng" algn="ctr">
+                      <a:solidFill>
+                        <a:srgbClr val="DADDE0"/>
+                      </a:solidFill>
+                      <a:prstDash val="solid"/>
+                      <a:round/>
+                      <a:headEnd type="none" w="med" len="med"/>
+                      <a:tailEnd type="none" w="med" len="med"/>
+                    </a:lnB>
+                    <a:solidFill>
+                      <a:srgbClr val="FFFFFF"/>
+                    </a:solidFill>
+                  </a:tcPr>
+                </a:tc>
+                <a:tc>
+                  <a:txBody>
+                    <a:bodyPr/>
+                    <a:lstStyle/>
+                    <a:p>
+                      <a:pPr marL="0" indent="0">
+                        <a:buNone/>
+                      </a:pPr>
+                      <a:r>
+                        <a:rPr lang="en-US" sz="1200" dirty="0">
+                          <a:solidFill>
+                            <a:srgbClr val="1F2328"/>
+                          </a:solidFill>
+                          <a:latin typeface="Mulish" pitchFamily="34" charset="0"/>
+                          <a:ea typeface="Mulish" pitchFamily="34" charset="-122"/>
+                          <a:cs typeface="Mulish" pitchFamily="34" charset="-120"/>
+                        </a:rPr>
+                        <a:t>Solving recurrences; Burnside lemma; hypergraphs; treewidth; linear algebra and FFT; calculus; statistics</a:t>
+                      </a:r>
+                      <a:endParaRPr lang="en-US" sz="1200" dirty="0">
+                        <a:latin typeface="Mulish" charset="0"/>
+                        <a:ea typeface="Mulish" charset="0"/>
+                        <a:cs typeface="Mulish" charset="0"/>
+                      </a:endParaRPr>
+                    </a:p>
+                  </a:txBody>
+                  <a:tcPr marT="64008" marB="64008">
+                    <a:lnL w="0" cap="flat" cmpd="sng" algn="ctr">
+                      <a:noFill/>
+                    </a:lnL>
+                    <a:lnR w="0" cap="flat" cmpd="sng" algn="ctr">
+                      <a:noFill/>
+                    </a:lnR>
+                    <a:lnT w="9525" cap="flat" cmpd="sng" algn="ctr">
+                      <a:solidFill>
+                        <a:srgbClr val="DADDE0"/>
+                      </a:solidFill>
+                      <a:prstDash val="solid"/>
+                      <a:round/>
+                      <a:headEnd type="none" w="med" len="med"/>
+                      <a:tailEnd type="none" w="med" len="med"/>
+                    </a:lnT>
+                    <a:lnB w="9525" cap="flat" cmpd="sng" algn="ctr">
+                      <a:solidFill>
+                        <a:srgbClr val="DADDE0"/>
+                      </a:solidFill>
+                      <a:prstDash val="solid"/>
+                      <a:round/>
+                      <a:headEnd type="none" w="med" len="med"/>
+                      <a:tailEnd type="none" w="med" len="med"/>
+                    </a:lnB>
+                    <a:solidFill>
+                      <a:srgbClr val="FFFFFF"/>
+                    </a:solidFill>
+                  </a:tcPr>
+                </a:tc>
+                <a:extLst>
+                  <a:ext uri="{0D108BD9-81ED-4DB2-BD59-A6C34878D82A}">
+                    <a16:rowId xmlns:a16="http://schemas.microsoft.com/office/drawing/2014/main" val="10002"/>
+                  </a:ext>
+                </a:extLst>
+              </a:tr>
+              <a:tr h="0">
+                <a:tc>
+                  <a:txBody>
+                    <a:bodyPr/>
+                    <a:lstStyle/>
+                    <a:p>
+                      <a:pPr marL="0" indent="0">
+                        <a:buNone/>
+                      </a:pPr>
+                      <a:r>
+                        <a:rPr lang="en-US" sz="1200" dirty="0">
+                          <a:solidFill>
+                            <a:srgbClr val="1F2328"/>
+                          </a:solidFill>
+                          <a:latin typeface="Mulish" pitchFamily="34" charset="0"/>
+                          <a:ea typeface="Mulish" pitchFamily="34" charset="-122"/>
+                          <a:cs typeface="Mulish" pitchFamily="34" charset="-120"/>
+                        </a:rPr>
+                        <a:t>Programming</a:t>
+                      </a:r>
+                      <a:endParaRPr lang="en-US" sz="1200" dirty="0">
+                        <a:latin typeface="Mulish" charset="0"/>
+                        <a:ea typeface="Mulish" charset="0"/>
+                        <a:cs typeface="Mulish" charset="0"/>
+                      </a:endParaRPr>
+                    </a:p>
+                  </a:txBody>
+                  <a:tcPr marT="64008" marB="64008">
+                    <a:lnL w="0" cap="flat" cmpd="sng" algn="ctr">
+                      <a:noFill/>
+                    </a:lnL>
+                    <a:lnR w="0" cap="flat" cmpd="sng" algn="ctr">
+                      <a:noFill/>
+                    </a:lnR>
+                    <a:lnT w="9525" cap="flat" cmpd="sng" algn="ctr">
+                      <a:solidFill>
+                        <a:srgbClr val="DADDE0"/>
+                      </a:solidFill>
+                      <a:prstDash val="solid"/>
+                      <a:round/>
+                      <a:headEnd type="none" w="med" len="med"/>
+                      <a:tailEnd type="none" w="med" len="med"/>
+                    </a:lnT>
+                    <a:lnB w="9525" cap="flat" cmpd="sng" algn="ctr">
+                      <a:solidFill>
+                        <a:srgbClr val="DADDE0"/>
+                      </a:solidFill>
+                      <a:prstDash val="solid"/>
+                      <a:round/>
+                      <a:headEnd type="none" w="med" len="med"/>
+                      <a:tailEnd type="none" w="med" len="med"/>
+                    </a:lnB>
+                    <a:solidFill>
+                      <a:srgbClr val="FFFFFF"/>
+                    </a:solidFill>
+                  </a:tcPr>
+                </a:tc>
+                <a:tc>
+                  <a:txBody>
+                    <a:bodyPr/>
+                    <a:lstStyle/>
+                    <a:p>
+                      <a:pPr marL="0" indent="0">
+                        <a:buNone/>
+                      </a:pPr>
+                      <a:r>
+                        <a:rPr lang="en-US" sz="1200" dirty="0">
+                          <a:solidFill>
+                            <a:srgbClr val="1F2328"/>
+                          </a:solidFill>
+                          <a:latin typeface="Mulish" pitchFamily="34" charset="0"/>
+                          <a:ea typeface="Mulish" pitchFamily="34" charset="-122"/>
+                          <a:cs typeface="Mulish" pitchFamily="34" charset="-120"/>
+                        </a:rPr>
+                        <a:t>Language basics, arrays, strings, recursion, divide and conquer, backtracking, linked structures, pointers, simple floating point; interactive tasks</a:t>
+                      </a:r>
+                      <a:endParaRPr lang="en-US" sz="1200" dirty="0">
+                        <a:latin typeface="Mulish" charset="0"/>
+                        <a:ea typeface="Mulish" charset="0"/>
+                        <a:cs typeface="Mulish" charset="0"/>
+                      </a:endParaRPr>
+                    </a:p>
+                  </a:txBody>
+                  <a:tcPr marT="64008" marB="64008">
+                    <a:lnL w="0" cap="flat" cmpd="sng" algn="ctr">
+                      <a:noFill/>
+                    </a:lnL>
+                    <a:lnR w="0" cap="flat" cmpd="sng" algn="ctr">
+                      <a:noFill/>
+                    </a:lnR>
+                    <a:lnT w="9525" cap="flat" cmpd="sng" algn="ctr">
+                      <a:solidFill>
+                        <a:srgbClr val="DADDE0"/>
+                      </a:solidFill>
+                      <a:prstDash val="solid"/>
+                      <a:round/>
+                      <a:headEnd type="none" w="med" len="med"/>
+                      <a:tailEnd type="none" w="med" len="med"/>
+                    </a:lnT>
+                    <a:lnB w="9525" cap="flat" cmpd="sng" algn="ctr">
+                      <a:solidFill>
+                        <a:srgbClr val="DADDE0"/>
+                      </a:solidFill>
+                      <a:prstDash val="solid"/>
+                      <a:round/>
+                      <a:headEnd type="none" w="med" len="med"/>
+                      <a:tailEnd type="none" w="med" len="med"/>
+                    </a:lnB>
+                    <a:solidFill>
+                      <a:srgbClr val="FFFFFF"/>
+                    </a:solidFill>
+                  </a:tcPr>
+                </a:tc>
+                <a:tc>
+                  <a:txBody>
+                    <a:bodyPr/>
+                    <a:lstStyle/>
+                    <a:p>
+                      <a:pPr marL="0" indent="0">
+                        <a:buNone/>
+                      </a:pPr>
+                      <a:r>
+                        <a:rPr lang="en-US" sz="1200" dirty="0">
+                          <a:solidFill>
+                            <a:srgbClr val="1F2328"/>
+                          </a:solidFill>
+                          <a:latin typeface="Mulish" pitchFamily="34" charset="0"/>
+                          <a:ea typeface="Mulish" pitchFamily="34" charset="-122"/>
+                          <a:cs typeface="Mulish" pitchFamily="34" charset="-120"/>
+                        </a:rPr>
+                        <a:t>Memory representation; heap allocation; exact fractions</a:t>
+                      </a:r>
+                      <a:endParaRPr lang="en-US" sz="1200" dirty="0">
+                        <a:latin typeface="Mulish" charset="0"/>
+                        <a:ea typeface="Mulish" charset="0"/>
+                        <a:cs typeface="Mulish" charset="0"/>
+                      </a:endParaRPr>
+                    </a:p>
+                  </a:txBody>
+                  <a:tcPr marT="64008" marB="64008">
+                    <a:lnL w="0" cap="flat" cmpd="sng" algn="ctr">
+                      <a:noFill/>
+                    </a:lnL>
+                    <a:lnR w="0" cap="flat" cmpd="sng" algn="ctr">
+                      <a:noFill/>
+                    </a:lnR>
+                    <a:lnT w="9525" cap="flat" cmpd="sng" algn="ctr">
+                      <a:solidFill>
+                        <a:srgbClr val="DADDE0"/>
+                      </a:solidFill>
+                      <a:prstDash val="solid"/>
+                      <a:round/>
+                      <a:headEnd type="none" w="med" len="med"/>
+                      <a:tailEnd type="none" w="med" len="med"/>
+                    </a:lnT>
+                    <a:lnB w="9525" cap="flat" cmpd="sng" algn="ctr">
+                      <a:solidFill>
+                        <a:srgbClr val="DADDE0"/>
+                      </a:solidFill>
+                      <a:prstDash val="solid"/>
+                      <a:round/>
+                      <a:headEnd type="none" w="med" len="med"/>
+                      <a:tailEnd type="none" w="med" len="med"/>
+                    </a:lnB>
+                    <a:solidFill>
+                      <a:srgbClr val="FFFFFF"/>
+                    </a:solidFill>
+                  </a:tcPr>
+                </a:tc>
+                <a:tc>
+                  <a:txBody>
+                    <a:bodyPr/>
+                    <a:lstStyle/>
+                    <a:p>
+                      <a:pPr marL="0" indent="0">
+                        <a:buNone/>
+                      </a:pPr>
+                      <a:r>
+                        <a:rPr lang="en-US" sz="1200" dirty="0">
+                          <a:solidFill>
+                            <a:srgbClr val="1F2328"/>
+                          </a:solidFill>
+                          <a:latin typeface="Mulish" pitchFamily="34" charset="0"/>
+                          <a:ea typeface="Mulish" pitchFamily="34" charset="-122"/>
+                          <a:cs typeface="Mulish" pitchFamily="34" charset="-120"/>
+                        </a:rPr>
+                        <a:t>Non-trivial floating-point calculations</a:t>
+                      </a:r>
+                      <a:endParaRPr lang="en-US" sz="1200" dirty="0">
+                        <a:latin typeface="Mulish" charset="0"/>
+                        <a:ea typeface="Mulish" charset="0"/>
+                        <a:cs typeface="Mulish" charset="0"/>
+                      </a:endParaRPr>
+                    </a:p>
+                  </a:txBody>
+                  <a:tcPr marT="64008" marB="64008">
+                    <a:lnL w="0" cap="flat" cmpd="sng" algn="ctr">
+                      <a:noFill/>
+                    </a:lnL>
+                    <a:lnR w="0" cap="flat" cmpd="sng" algn="ctr">
+                      <a:noFill/>
+                    </a:lnR>
+                    <a:lnT w="9525" cap="flat" cmpd="sng" algn="ctr">
+                      <a:solidFill>
+                        <a:srgbClr val="DADDE0"/>
+                      </a:solidFill>
+                      <a:prstDash val="solid"/>
+                      <a:round/>
+                      <a:headEnd type="none" w="med" len="med"/>
+                      <a:tailEnd type="none" w="med" len="med"/>
+                    </a:lnT>
+                    <a:lnB w="9525" cap="flat" cmpd="sng" algn="ctr">
+                      <a:solidFill>
+                        <a:srgbClr val="DADDE0"/>
+                      </a:solidFill>
+                      <a:prstDash val="solid"/>
+                      <a:round/>
+                      <a:headEnd type="none" w="med" len="med"/>
+                      <a:tailEnd type="none" w="med" len="med"/>
+                    </a:lnB>
+                    <a:solidFill>
+                      <a:srgbClr val="FFFFFF"/>
+                    </a:solidFill>
+                  </a:tcPr>
+                </a:tc>
+                <a:extLst>
+                  <a:ext uri="{0D108BD9-81ED-4DB2-BD59-A6C34878D82A}">
+                    <a16:rowId xmlns:a16="http://schemas.microsoft.com/office/drawing/2014/main" val="10003"/>
+                  </a:ext>
+                </a:extLst>
+              </a:tr>
+              <a:tr h="0">
+                <a:tc>
+                  <a:txBody>
+                    <a:bodyPr/>
+                    <a:lstStyle/>
+                    <a:p>
+                      <a:pPr marL="0" indent="0">
+                        <a:buNone/>
+                      </a:pPr>
+                      <a:r>
+                        <a:rPr lang="en-US" sz="1200" dirty="0">
+                          <a:solidFill>
+                            <a:srgbClr val="1F2328"/>
+                          </a:solidFill>
+                          <a:latin typeface="Mulish" pitchFamily="34" charset="0"/>
+                          <a:ea typeface="Mulish" pitchFamily="34" charset="-122"/>
+                          <a:cs typeface="Mulish" pitchFamily="34" charset="-120"/>
+                        </a:rPr>
+                        <a:t>Analysis and strategies</a:t>
+                      </a:r>
+                      <a:endParaRPr lang="en-US" sz="1200" dirty="0">
+                        <a:latin typeface="Mulish" charset="0"/>
+                        <a:ea typeface="Mulish" charset="0"/>
+                        <a:cs typeface="Mulish" charset="0"/>
+                      </a:endParaRPr>
+                    </a:p>
+                  </a:txBody>
+                  <a:tcPr marT="64008" marB="64008">
+                    <a:lnL w="0" cap="flat" cmpd="sng" algn="ctr">
+                      <a:noFill/>
+                    </a:lnL>
+                    <a:lnR w="0" cap="flat" cmpd="sng" algn="ctr">
+                      <a:noFill/>
+                    </a:lnR>
+                    <a:lnT w="9525" cap="flat" cmpd="sng" algn="ctr">
+                      <a:solidFill>
+                        <a:srgbClr val="DADDE0"/>
+                      </a:solidFill>
+                      <a:prstDash val="solid"/>
+                      <a:round/>
+                      <a:headEnd type="none" w="med" len="med"/>
+                      <a:tailEnd type="none" w="med" len="med"/>
+                    </a:lnT>
+                    <a:lnB w="9525" cap="flat" cmpd="sng" algn="ctr">
+                      <a:solidFill>
+                        <a:srgbClr val="DADDE0"/>
+                      </a:solidFill>
+                      <a:prstDash val="solid"/>
+                      <a:round/>
+                      <a:headEnd type="none" w="med" len="med"/>
+                      <a:tailEnd type="none" w="med" len="med"/>
+                    </a:lnB>
+                    <a:solidFill>
+                      <a:srgbClr val="FFFFFF"/>
+                    </a:solidFill>
+                  </a:tcPr>
+                </a:tc>
+                <a:tc>
+                  <a:txBody>
+                    <a:bodyPr/>
+                    <a:lstStyle/>
+                    <a:p>
+                      <a:pPr marL="0" indent="0">
+                        <a:buNone/>
+                      </a:pPr>
+                      <a:r>
+                        <a:rPr lang="en-US" sz="1200" dirty="0">
+                          <a:solidFill>
+                            <a:srgbClr val="1F2328"/>
+                          </a:solidFill>
+                          <a:latin typeface="Mulish" pitchFamily="34" charset="0"/>
+                          <a:ea typeface="Mulish" pitchFamily="34" charset="-122"/>
+                          <a:cs typeface="Mulish" pitchFamily="34" charset="-120"/>
+                        </a:rPr>
+                        <a:t>Big O; amortized analysis; brute force; greedy; divide and conquer; branch and bound; dynamic programming</a:t>
+                      </a:r>
+                      <a:endParaRPr lang="en-US" sz="1200" dirty="0">
+                        <a:latin typeface="Mulish" charset="0"/>
+                        <a:ea typeface="Mulish" charset="0"/>
+                        <a:cs typeface="Mulish" charset="0"/>
+                      </a:endParaRPr>
+                    </a:p>
+                  </a:txBody>
+                  <a:tcPr marT="64008" marB="64008">
+                    <a:lnL w="0" cap="flat" cmpd="sng" algn="ctr">
+                      <a:noFill/>
+                    </a:lnL>
+                    <a:lnR w="0" cap="flat" cmpd="sng" algn="ctr">
+                      <a:noFill/>
+                    </a:lnR>
+                    <a:lnT w="9525" cap="flat" cmpd="sng" algn="ctr">
+                      <a:solidFill>
+                        <a:srgbClr val="DADDE0"/>
+                      </a:solidFill>
+                      <a:prstDash val="solid"/>
+                      <a:round/>
+                      <a:headEnd type="none" w="med" len="med"/>
+                      <a:tailEnd type="none" w="med" len="med"/>
+                    </a:lnT>
+                    <a:lnB w="9525" cap="flat" cmpd="sng" algn="ctr">
+                      <a:solidFill>
+                        <a:srgbClr val="DADDE0"/>
+                      </a:solidFill>
+                      <a:prstDash val="solid"/>
+                      <a:round/>
+                      <a:headEnd type="none" w="med" len="med"/>
+                      <a:tailEnd type="none" w="med" len="med"/>
+                    </a:lnB>
+                    <a:solidFill>
+                      <a:srgbClr val="FFFFFF"/>
+                    </a:solidFill>
+                  </a:tcPr>
+                </a:tc>
+                <a:tc>
+                  <a:txBody>
+                    <a:bodyPr/>
+                    <a:lstStyle/>
+                    <a:p>
+                      <a:pPr marL="0" indent="0">
+                        <a:buNone/>
+                      </a:pPr>
+                      <a:r>
+                        <a:rPr lang="en-US" sz="1200" dirty="0">
+                          <a:solidFill>
+                            <a:srgbClr val="1F2328"/>
+                          </a:solidFill>
+                          <a:latin typeface="Mulish" pitchFamily="34" charset="0"/>
+                          <a:ea typeface="Mulish" pitchFamily="34" charset="-122"/>
+                          <a:cs typeface="Mulish" pitchFamily="34" charset="-120"/>
+                        </a:rPr>
+                        <a:t>Heuristics; randomized and approximation algorithms</a:t>
+                      </a:r>
+                      <a:endParaRPr lang="en-US" sz="1200" dirty="0">
+                        <a:latin typeface="Mulish" charset="0"/>
+                        <a:ea typeface="Mulish" charset="0"/>
+                        <a:cs typeface="Mulish" charset="0"/>
+                      </a:endParaRPr>
+                    </a:p>
+                  </a:txBody>
+                  <a:tcPr marT="64008" marB="64008">
+                    <a:lnL w="0" cap="flat" cmpd="sng" algn="ctr">
+                      <a:noFill/>
+                    </a:lnL>
+                    <a:lnR w="0" cap="flat" cmpd="sng" algn="ctr">
+                      <a:noFill/>
+                    </a:lnR>
+                    <a:lnT w="9525" cap="flat" cmpd="sng" algn="ctr">
+                      <a:solidFill>
+                        <a:srgbClr val="DADDE0"/>
+                      </a:solidFill>
+                      <a:prstDash val="solid"/>
+                      <a:round/>
+                      <a:headEnd type="none" w="med" len="med"/>
+                      <a:tailEnd type="none" w="med" len="med"/>
+                    </a:lnT>
+                    <a:lnB w="9525" cap="flat" cmpd="sng" algn="ctr">
+                      <a:solidFill>
+                        <a:srgbClr val="DADDE0"/>
+                      </a:solidFill>
+                      <a:prstDash val="solid"/>
+                      <a:round/>
+                      <a:headEnd type="none" w="med" len="med"/>
+                      <a:tailEnd type="none" w="med" len="med"/>
+                    </a:lnB>
+                    <a:solidFill>
+                      <a:srgbClr val="FFFFFF"/>
+                    </a:solidFill>
+                  </a:tcPr>
+                </a:tc>
+                <a:tc>
+                  <a:txBody>
+                    <a:bodyPr/>
+                    <a:lstStyle/>
+                    <a:p>
+                      <a:pPr marL="0" indent="0">
+                        <a:buNone/>
+                      </a:pPr>
+                      <a:r>
+                        <a:rPr lang="en-US" sz="1200" dirty="0">
+                          <a:solidFill>
+                            <a:srgbClr val="1F2328"/>
+                          </a:solidFill>
+                          <a:latin typeface="Mulish" pitchFamily="34" charset="0"/>
+                          <a:ea typeface="Mulish" pitchFamily="34" charset="-122"/>
+                          <a:cs typeface="Mulish" pitchFamily="34" charset="-120"/>
+                        </a:rPr>
+                        <a:t>Average-case analysis; recurrence-based analysis; clustering; numerical optimization</a:t>
+                      </a:r>
+                      <a:endParaRPr lang="en-US" sz="1200" dirty="0">
+                        <a:latin typeface="Mulish" charset="0"/>
+                        <a:ea typeface="Mulish" charset="0"/>
+                        <a:cs typeface="Mulish" charset="0"/>
+                      </a:endParaRPr>
+                    </a:p>
+                  </a:txBody>
+                  <a:tcPr marT="64008" marB="64008">
+                    <a:lnL w="0" cap="flat" cmpd="sng" algn="ctr">
+                      <a:noFill/>
+                    </a:lnL>
+                    <a:lnR w="0" cap="flat" cmpd="sng" algn="ctr">
+                      <a:noFill/>
+                    </a:lnR>
+                    <a:lnT w="9525" cap="flat" cmpd="sng" algn="ctr">
+                      <a:solidFill>
+                        <a:srgbClr val="DADDE0"/>
+                      </a:solidFill>
+                      <a:prstDash val="solid"/>
+                      <a:round/>
+                      <a:headEnd type="none" w="med" len="med"/>
+                      <a:tailEnd type="none" w="med" len="med"/>
+                    </a:lnT>
+                    <a:lnB w="9525" cap="flat" cmpd="sng" algn="ctr">
+                      <a:solidFill>
+                        <a:srgbClr val="DADDE0"/>
+                      </a:solidFill>
+                      <a:prstDash val="solid"/>
+                      <a:round/>
+                      <a:headEnd type="none" w="med" len="med"/>
+                      <a:tailEnd type="none" w="med" len="med"/>
+                    </a:lnB>
+                    <a:solidFill>
+                      <a:srgbClr val="FFFFFF"/>
+                    </a:solidFill>
+                  </a:tcPr>
+                </a:tc>
+                <a:extLst>
+                  <a:ext uri="{0D108BD9-81ED-4DB2-BD59-A6C34878D82A}">
+                    <a16:rowId xmlns:a16="http://schemas.microsoft.com/office/drawing/2014/main" val="10004"/>
+                  </a:ext>
+                </a:extLst>
+              </a:tr>
+            </a:tbl>
+          </a:graphicData>
+        </a:graphic>
+      </p:graphicFrame>
+    </p:spTree>
+  </p:cSld>
+  <p:clrMapOvr>
+    <a:masterClrMapping/>
+  </p:clrMapOvr>
+</p:sld>
+</file>
+
+<file path=ppt/slides/slide21.xml><?xml version="1.0" encoding="utf-8"?>
+<p:sld xmlns:a="http://schemas.openxmlformats.org/drawingml/2006/main" xmlns:r="http://schemas.openxmlformats.org/officeDocument/2006/relationships" xmlns:p="http://schemas.openxmlformats.org/presentationml/2006/main">
+  <p:cSld name="Slide 22">
+    <p:spTree>
+      <p:nvGrpSpPr>
+        <p:cNvPr id="1" name=""/>
+        <p:cNvGrpSpPr/>
+        <p:nvPr/>
+      </p:nvGrpSpPr>
+      <p:grpSpPr>
+        <a:xfrm>
+          <a:off x="0" y="0"/>
+          <a:ext cx="0" cy="0"/>
+          <a:chOff x="0" y="0"/>
+          <a:chExt cx="0" cy="0"/>
+        </a:xfrm>
+      </p:grpSpPr>
+      <p:sp>
+        <p:nvSpPr>
+          <p:cNvPr id="2" name="Text 1"/>
+          <p:cNvSpPr>
+            <a:spLocks noGrp="1"/>
+          </p:cNvSpPr>
+          <p:nvPr>
+            <p:ph type="body" idx="101" hasCustomPrompt="1"/>
+          </p:nvPr>
+        </p:nvSpPr>
+        <p:spPr>
+          <a:xfrm>
+            <a:off x="812800" y="609600"/>
+            <a:ext cx="10566400" cy="279400"/>
+          </a:xfrm>
+          <a:prstGeom prst="rect">
+            <a:avLst/>
+          </a:prstGeom>
+          <a:noFill/>
+          <a:ln/>
+        </p:spPr>
+        <p:txBody>
+          <a:bodyPr wrap="square" lIns="0" tIns="0" rIns="0" bIns="0" rtlCol="0" anchor="t"/>
+          <a:lstStyle/>
+          <a:p>
+            <a:pPr marL="0" indent="0">
+              <a:buNone/>
+            </a:pPr>
+            <a:r>
+              <a:rPr lang="en-US" sz="1200" b="1" kern="0" spc="200" dirty="0">
+                <a:solidFill>
+                  <a:srgbClr val="287673"/>
+                </a:solidFill>
+                <a:latin typeface="Mulish" pitchFamily="34" charset="0"/>
+                <a:ea typeface="Mulish" pitchFamily="34" charset="-122"/>
+                <a:cs typeface="Mulish" pitchFamily="34" charset="-120"/>
+              </a:rPr>
+              <a:t>ADDENDUM · IOI SYLLABUS 2025 · 3 OF 3</a:t>
+            </a:r>
+            <a:endParaRPr lang="en-US" sz="1200" dirty="0"/>
+          </a:p>
+        </p:txBody>
+      </p:sp>
+      <p:sp>
+        <p:nvSpPr>
+          <p:cNvPr id="3" name="Text 1"/>
+          <p:cNvSpPr>
+            <a:spLocks noGrp="1"/>
+          </p:cNvSpPr>
+          <p:nvPr>
+            <p:ph type="title" idx="102" hasCustomPrompt="1"/>
+          </p:nvPr>
+        </p:nvSpPr>
+        <p:spPr>
+          <a:xfrm>
+            <a:off x="812800" y="952500"/>
+            <a:ext cx="10566400" cy="482600"/>
+          </a:xfrm>
+          <a:prstGeom prst="rect">
+            <a:avLst/>
+          </a:prstGeom>
+          <a:noFill/>
+          <a:ln/>
+        </p:spPr>
+        <p:txBody>
+          <a:bodyPr wrap="square" lIns="0" tIns="0" rIns="0" bIns="0" rtlCol="0" anchor="t"/>
+          <a:lstStyle/>
+          <a:p>
+            <a:pPr marL="0" indent="0" algn="l">
+              <a:buNone/>
+            </a:pPr>
+            <a:r>
+              <a:rPr lang="en-US" sz="2600" b="1" kern="0" spc="200" dirty="0">
+                <a:solidFill>
+                  <a:srgbClr val="1F2328"/>
+                </a:solidFill>
+                <a:latin typeface="Jost" pitchFamily="34" charset="0"/>
+                <a:ea typeface="Jost" pitchFamily="34" charset="-122"/>
+                <a:cs typeface="Jost" pitchFamily="34" charset="-120"/>
+              </a:rPr>
+              <a:t>ALGORITHMS AND DATA STRUCTURES</a:t>
+            </a:r>
+            <a:endParaRPr lang="en-US" sz="2600" dirty="0"/>
+          </a:p>
+        </p:txBody>
+      </p:sp>
+      <p:graphicFrame>
+        <p:nvGraphicFramePr>
+          <p:cNvPr id="23" name="Table 0"/>
           <p:cNvGraphicFramePr>
             <a:graphicFrameLocks noGrp="1"/>
           </p:cNvGraphicFramePr>
@@ -12698,1304 +13980,6 @@
                           <a:ea typeface="Mulish" pitchFamily="34" charset="-122"/>
                           <a:cs typeface="Mulish" pitchFamily="34" charset="-120"/>
                         </a:rPr>
-                        <a:t>Arithmetic and geometry</a:t>
-                      </a:r>
-                      <a:endParaRPr lang="en-US" sz="1200" dirty="0">
-                        <a:latin typeface="Mulish" charset="0"/>
-                        <a:ea typeface="Mulish" charset="0"/>
-                        <a:cs typeface="Mulish" charset="0"/>
-                      </a:endParaRPr>
-                    </a:p>
-                  </a:txBody>
-                  <a:tcPr marT="64008" marB="64008">
-                    <a:lnL w="0" cap="flat" cmpd="sng" algn="ctr">
-                      <a:noFill/>
-                    </a:lnL>
-                    <a:lnR w="0" cap="flat" cmpd="sng" algn="ctr">
-                      <a:noFill/>
-                    </a:lnR>
-                    <a:lnT w="19050" cap="flat" cmpd="sng" algn="ctr">
-                      <a:solidFill>
-                        <a:srgbClr val="1F2328"/>
-                      </a:solidFill>
-                      <a:prstDash val="solid"/>
-                      <a:round/>
-                      <a:headEnd type="none" w="med" len="med"/>
-                      <a:tailEnd type="none" w="med" len="med"/>
-                    </a:lnT>
-                    <a:lnB w="9525" cap="flat" cmpd="sng" algn="ctr">
-                      <a:solidFill>
-                        <a:srgbClr val="DADDE0"/>
-                      </a:solidFill>
-                      <a:prstDash val="solid"/>
-                      <a:round/>
-                      <a:headEnd type="none" w="med" len="med"/>
-                      <a:tailEnd type="none" w="med" len="med"/>
-                    </a:lnB>
-                    <a:solidFill>
-                      <a:srgbClr val="FFFFFF"/>
-                    </a:solidFill>
-                  </a:tcPr>
-                </a:tc>
-                <a:tc>
-                  <a:txBody>
-                    <a:bodyPr/>
-                    <a:lstStyle/>
-                    <a:p>
-                      <a:pPr marL="0" indent="0">
-                        <a:buNone/>
-                      </a:pPr>
-                      <a:r>
-                        <a:rPr lang="en-US" sz="1200" dirty="0">
-                          <a:solidFill>
-                            <a:srgbClr val="1F2328"/>
-                          </a:solidFill>
-                          <a:latin typeface="Mulish" pitchFamily="34" charset="0"/>
-                          <a:ea typeface="Mulish" pitchFamily="34" charset="-122"/>
-                          <a:cs typeface="Mulish" pitchFamily="34" charset="-120"/>
-                        </a:rPr>
-                        <a:t>Integers, parity, divisibility; modular addition, subtraction, multiplication; fractions; points, vectors, polygons in the plane; primes; Euclidean distance; Pythagoras</a:t>
-                      </a:r>
-                      <a:endParaRPr lang="en-US" sz="1200" dirty="0">
-                        <a:latin typeface="Mulish" charset="0"/>
-                        <a:ea typeface="Mulish" charset="0"/>
-                        <a:cs typeface="Mulish" charset="0"/>
-                      </a:endParaRPr>
-                    </a:p>
-                  </a:txBody>
-                  <a:tcPr marT="64008" marB="64008">
-                    <a:lnL w="0" cap="flat" cmpd="sng" algn="ctr">
-                      <a:noFill/>
-                    </a:lnL>
-                    <a:lnR w="0" cap="flat" cmpd="sng" algn="ctr">
-                      <a:noFill/>
-                    </a:lnR>
-                    <a:lnT w="19050" cap="flat" cmpd="sng" algn="ctr">
-                      <a:solidFill>
-                        <a:srgbClr val="1F2328"/>
-                      </a:solidFill>
-                      <a:prstDash val="solid"/>
-                      <a:round/>
-                      <a:headEnd type="none" w="med" len="med"/>
-                      <a:tailEnd type="none" w="med" len="med"/>
-                    </a:lnT>
-                    <a:lnB w="9525" cap="flat" cmpd="sng" algn="ctr">
-                      <a:solidFill>
-                        <a:srgbClr val="DADDE0"/>
-                      </a:solidFill>
-                      <a:prstDash val="solid"/>
-                      <a:round/>
-                      <a:headEnd type="none" w="med" len="med"/>
-                      <a:tailEnd type="none" w="med" len="med"/>
-                    </a:lnB>
-                    <a:solidFill>
-                      <a:srgbClr val="FFFFFF"/>
-                    </a:solidFill>
-                  </a:tcPr>
-                </a:tc>
-                <a:tc>
-                  <a:txBody>
-                    <a:bodyPr/>
-                    <a:lstStyle/>
-                    <a:p>
-                      <a:pPr marL="0" indent="0">
-                        <a:buNone/>
-                      </a:pPr>
-                      <a:r>
-                        <a:rPr lang="en-US" sz="1200" dirty="0">
-                          <a:solidFill>
-                            <a:srgbClr val="1F2328"/>
-                          </a:solidFill>
-                          <a:latin typeface="Mulish" pitchFamily="34" charset="0"/>
-                          <a:ea typeface="Mulish" pitchFamily="34" charset="-122"/>
-                          <a:cs typeface="Mulish" pitchFamily="34" charset="-120"/>
-                        </a:rPr>
-                        <a:t>—</a:t>
-                      </a:r>
-                      <a:endParaRPr lang="en-US" sz="1200" dirty="0">
-                        <a:latin typeface="Mulish" charset="0"/>
-                        <a:ea typeface="Mulish" charset="0"/>
-                        <a:cs typeface="Mulish" charset="0"/>
-                      </a:endParaRPr>
-                    </a:p>
-                  </a:txBody>
-                  <a:tcPr marT="64008" marB="64008">
-                    <a:lnL w="0" cap="flat" cmpd="sng" algn="ctr">
-                      <a:noFill/>
-                    </a:lnL>
-                    <a:lnR w="0" cap="flat" cmpd="sng" algn="ctr">
-                      <a:noFill/>
-                    </a:lnR>
-                    <a:lnT w="19050" cap="flat" cmpd="sng" algn="ctr">
-                      <a:solidFill>
-                        <a:srgbClr val="1F2328"/>
-                      </a:solidFill>
-                      <a:prstDash val="solid"/>
-                      <a:round/>
-                      <a:headEnd type="none" w="med" len="med"/>
-                      <a:tailEnd type="none" w="med" len="med"/>
-                    </a:lnT>
-                    <a:lnB w="9525" cap="flat" cmpd="sng" algn="ctr">
-                      <a:solidFill>
-                        <a:srgbClr val="DADDE0"/>
-                      </a:solidFill>
-                      <a:prstDash val="solid"/>
-                      <a:round/>
-                      <a:headEnd type="none" w="med" len="med"/>
-                      <a:tailEnd type="none" w="med" len="med"/>
-                    </a:lnB>
-                    <a:solidFill>
-                      <a:srgbClr val="FFFFFF"/>
-                    </a:solidFill>
-                  </a:tcPr>
-                </a:tc>
-                <a:tc>
-                  <a:txBody>
-                    <a:bodyPr/>
-                    <a:lstStyle/>
-                    <a:p>
-                      <a:pPr marL="0" indent="0">
-                        <a:buNone/>
-                      </a:pPr>
-                      <a:r>
-                        <a:rPr lang="en-US" sz="1200" dirty="0">
-                          <a:solidFill>
-                            <a:srgbClr val="1F2328"/>
-                          </a:solidFill>
-                          <a:latin typeface="Mulish" pitchFamily="34" charset="0"/>
-                          <a:ea typeface="Mulish" pitchFamily="34" charset="-122"/>
-                          <a:cs typeface="Mulish" pitchFamily="34" charset="-120"/>
-                        </a:rPr>
-                        <a:t>3D geometry; floating-point precision work; modular division and inverses; complex numbers; conics; trigonometry</a:t>
-                      </a:r>
-                      <a:endParaRPr lang="en-US" sz="1200" dirty="0">
-                        <a:latin typeface="Mulish" charset="0"/>
-                        <a:ea typeface="Mulish" charset="0"/>
-                        <a:cs typeface="Mulish" charset="0"/>
-                      </a:endParaRPr>
-                    </a:p>
-                  </a:txBody>
-                  <a:tcPr marT="64008" marB="64008">
-                    <a:lnL w="0" cap="flat" cmpd="sng" algn="ctr">
-                      <a:noFill/>
-                    </a:lnL>
-                    <a:lnR w="0" cap="flat" cmpd="sng" algn="ctr">
-                      <a:noFill/>
-                    </a:lnR>
-                    <a:lnT w="19050" cap="flat" cmpd="sng" algn="ctr">
-                      <a:solidFill>
-                        <a:srgbClr val="1F2328"/>
-                      </a:solidFill>
-                      <a:prstDash val="solid"/>
-                      <a:round/>
-                      <a:headEnd type="none" w="med" len="med"/>
-                      <a:tailEnd type="none" w="med" len="med"/>
-                    </a:lnT>
-                    <a:lnB w="9525" cap="flat" cmpd="sng" algn="ctr">
-                      <a:solidFill>
-                        <a:srgbClr val="DADDE0"/>
-                      </a:solidFill>
-                      <a:prstDash val="solid"/>
-                      <a:round/>
-                      <a:headEnd type="none" w="med" len="med"/>
-                      <a:tailEnd type="none" w="med" len="med"/>
-                    </a:lnB>
-                    <a:solidFill>
-                      <a:srgbClr val="FFFFFF"/>
-                    </a:solidFill>
-                  </a:tcPr>
-                </a:tc>
-                <a:extLst>
-                  <a:ext uri="{0D108BD9-81ED-4DB2-BD59-A6C34878D82A}">
-                    <a16:rowId xmlns:a16="http://schemas.microsoft.com/office/drawing/2014/main" val="10001"/>
-                  </a:ext>
-                </a:extLst>
-              </a:tr>
-              <a:tr h="0">
-                <a:tc>
-                  <a:txBody>
-                    <a:bodyPr/>
-                    <a:lstStyle/>
-                    <a:p>
-                      <a:pPr marL="0" indent="0">
-                        <a:buNone/>
-                      </a:pPr>
-                      <a:r>
-                        <a:rPr lang="en-US" sz="1200" dirty="0">
-                          <a:solidFill>
-                            <a:srgbClr val="1F2328"/>
-                          </a:solidFill>
-                          <a:latin typeface="Mulish" pitchFamily="34" charset="0"/>
-                          <a:ea typeface="Mulish" pitchFamily="34" charset="-122"/>
-                          <a:cs typeface="Mulish" pitchFamily="34" charset="-120"/>
-                        </a:rPr>
-                        <a:t>Discrete maths</a:t>
-                      </a:r>
-                      <a:endParaRPr lang="en-US" sz="1200" dirty="0">
-                        <a:latin typeface="Mulish" charset="0"/>
-                        <a:ea typeface="Mulish" charset="0"/>
-                        <a:cs typeface="Mulish" charset="0"/>
-                      </a:endParaRPr>
-                    </a:p>
-                  </a:txBody>
-                  <a:tcPr marT="64008" marB="64008">
-                    <a:lnL w="0" cap="flat" cmpd="sng" algn="ctr">
-                      <a:noFill/>
-                    </a:lnL>
-                    <a:lnR w="0" cap="flat" cmpd="sng" algn="ctr">
-                      <a:noFill/>
-                    </a:lnR>
-                    <a:lnT w="9525" cap="flat" cmpd="sng" algn="ctr">
-                      <a:solidFill>
-                        <a:srgbClr val="DADDE0"/>
-                      </a:solidFill>
-                      <a:prstDash val="solid"/>
-                      <a:round/>
-                      <a:headEnd type="none" w="med" len="med"/>
-                      <a:tailEnd type="none" w="med" len="med"/>
-                    </a:lnT>
-                    <a:lnB w="9525" cap="flat" cmpd="sng" algn="ctr">
-                      <a:solidFill>
-                        <a:srgbClr val="DADDE0"/>
-                      </a:solidFill>
-                      <a:prstDash val="solid"/>
-                      <a:round/>
-                      <a:headEnd type="none" w="med" len="med"/>
-                      <a:tailEnd type="none" w="med" len="med"/>
-                    </a:lnB>
-                    <a:solidFill>
-                      <a:srgbClr val="FFFFFF"/>
-                    </a:solidFill>
-                  </a:tcPr>
-                </a:tc>
-                <a:tc>
-                  <a:txBody>
-                    <a:bodyPr/>
-                    <a:lstStyle/>
-                    <a:p>
-                      <a:pPr marL="0" indent="0">
-                        <a:buNone/>
-                      </a:pPr>
-                      <a:r>
-                        <a:rPr lang="en-US" sz="1200" dirty="0">
-                          <a:solidFill>
-                            <a:srgbClr val="1F2328"/>
-                          </a:solidFill>
-                          <a:latin typeface="Mulish" pitchFamily="34" charset="0"/>
-                          <a:ea typeface="Mulish" pitchFamily="34" charset="-122"/>
-                          <a:cs typeface="Mulish" pitchFamily="34" charset="-120"/>
-                        </a:rPr>
-                        <a:t>Functions, relations, sets; basic logic; proofs including induction; counting (permutations, combinations, binomial coefficients, inclusion-exclusion, pigeonhole); graph and tree vocabulary; centroids; planar graphs</a:t>
-                      </a:r>
-                      <a:endParaRPr lang="en-US" sz="1200" dirty="0">
-                        <a:latin typeface="Mulish" charset="0"/>
-                        <a:ea typeface="Mulish" charset="0"/>
-                        <a:cs typeface="Mulish" charset="0"/>
-                      </a:endParaRPr>
-                    </a:p>
-                  </a:txBody>
-                  <a:tcPr marT="64008" marB="64008">
-                    <a:lnL w="0" cap="flat" cmpd="sng" algn="ctr">
-                      <a:noFill/>
-                    </a:lnL>
-                    <a:lnR w="0" cap="flat" cmpd="sng" algn="ctr">
-                      <a:noFill/>
-                    </a:lnR>
-                    <a:lnT w="9525" cap="flat" cmpd="sng" algn="ctr">
-                      <a:solidFill>
-                        <a:srgbClr val="DADDE0"/>
-                      </a:solidFill>
-                      <a:prstDash val="solid"/>
-                      <a:round/>
-                      <a:headEnd type="none" w="med" len="med"/>
-                      <a:tailEnd type="none" w="med" len="med"/>
-                    </a:lnT>
-                    <a:lnB w="9525" cap="flat" cmpd="sng" algn="ctr">
-                      <a:solidFill>
-                        <a:srgbClr val="DADDE0"/>
-                      </a:solidFill>
-                      <a:prstDash val="solid"/>
-                      <a:round/>
-                      <a:headEnd type="none" w="med" len="med"/>
-                      <a:tailEnd type="none" w="med" len="med"/>
-                    </a:lnB>
-                    <a:solidFill>
-                      <a:srgbClr val="FFFFFF"/>
-                    </a:solidFill>
-                  </a:tcPr>
-                </a:tc>
-                <a:tc>
-                  <a:txBody>
-                    <a:bodyPr/>
-                    <a:lstStyle/>
-                    <a:p>
-                      <a:pPr marL="0" indent="0">
-                        <a:buNone/>
-                      </a:pPr>
-                      <a:r>
-                        <a:rPr lang="en-US" sz="1200" dirty="0">
-                          <a:solidFill>
-                            <a:srgbClr val="1F2328"/>
-                          </a:solidFill>
-                          <a:latin typeface="Mulish" pitchFamily="34" charset="0"/>
-                          <a:ea typeface="Mulish" pitchFamily="34" charset="-122"/>
-                          <a:cs typeface="Mulish" pitchFamily="34" charset="-120"/>
-                        </a:rPr>
-                        <a:t>Discrete probability (finite cases)</a:t>
-                      </a:r>
-                      <a:endParaRPr lang="en-US" sz="1200" dirty="0">
-                        <a:latin typeface="Mulish" charset="0"/>
-                        <a:ea typeface="Mulish" charset="0"/>
-                        <a:cs typeface="Mulish" charset="0"/>
-                      </a:endParaRPr>
-                    </a:p>
-                  </a:txBody>
-                  <a:tcPr marT="64008" marB="64008">
-                    <a:lnL w="0" cap="flat" cmpd="sng" algn="ctr">
-                      <a:noFill/>
-                    </a:lnL>
-                    <a:lnR w="0" cap="flat" cmpd="sng" algn="ctr">
-                      <a:noFill/>
-                    </a:lnR>
-                    <a:lnT w="9525" cap="flat" cmpd="sng" algn="ctr">
-                      <a:solidFill>
-                        <a:srgbClr val="DADDE0"/>
-                      </a:solidFill>
-                      <a:prstDash val="solid"/>
-                      <a:round/>
-                      <a:headEnd type="none" w="med" len="med"/>
-                      <a:tailEnd type="none" w="med" len="med"/>
-                    </a:lnT>
-                    <a:lnB w="9525" cap="flat" cmpd="sng" algn="ctr">
-                      <a:solidFill>
-                        <a:srgbClr val="DADDE0"/>
-                      </a:solidFill>
-                      <a:prstDash val="solid"/>
-                      <a:round/>
-                      <a:headEnd type="none" w="med" len="med"/>
-                      <a:tailEnd type="none" w="med" len="med"/>
-                    </a:lnB>
-                    <a:solidFill>
-                      <a:srgbClr val="FFFFFF"/>
-                    </a:solidFill>
-                  </a:tcPr>
-                </a:tc>
-                <a:tc>
-                  <a:txBody>
-                    <a:bodyPr/>
-                    <a:lstStyle/>
-                    <a:p>
-                      <a:pPr marL="0" indent="0">
-                        <a:buNone/>
-                      </a:pPr>
-                      <a:r>
-                        <a:rPr lang="en-US" sz="1200" dirty="0">
-                          <a:solidFill>
-                            <a:srgbClr val="1F2328"/>
-                          </a:solidFill>
-                          <a:latin typeface="Mulish" pitchFamily="34" charset="0"/>
-                          <a:ea typeface="Mulish" pitchFamily="34" charset="-122"/>
-                          <a:cs typeface="Mulish" pitchFamily="34" charset="-120"/>
-                        </a:rPr>
-                        <a:t>Solving recurrences; Burnside lemma; hypergraphs; treewidth; linear algebra and FFT; calculus; statistics</a:t>
-                      </a:r>
-                      <a:endParaRPr lang="en-US" sz="1200" dirty="0">
-                        <a:latin typeface="Mulish" charset="0"/>
-                        <a:ea typeface="Mulish" charset="0"/>
-                        <a:cs typeface="Mulish" charset="0"/>
-                      </a:endParaRPr>
-                    </a:p>
-                  </a:txBody>
-                  <a:tcPr marT="64008" marB="64008">
-                    <a:lnL w="0" cap="flat" cmpd="sng" algn="ctr">
-                      <a:noFill/>
-                    </a:lnL>
-                    <a:lnR w="0" cap="flat" cmpd="sng" algn="ctr">
-                      <a:noFill/>
-                    </a:lnR>
-                    <a:lnT w="9525" cap="flat" cmpd="sng" algn="ctr">
-                      <a:solidFill>
-                        <a:srgbClr val="DADDE0"/>
-                      </a:solidFill>
-                      <a:prstDash val="solid"/>
-                      <a:round/>
-                      <a:headEnd type="none" w="med" len="med"/>
-                      <a:tailEnd type="none" w="med" len="med"/>
-                    </a:lnT>
-                    <a:lnB w="9525" cap="flat" cmpd="sng" algn="ctr">
-                      <a:solidFill>
-                        <a:srgbClr val="DADDE0"/>
-                      </a:solidFill>
-                      <a:prstDash val="solid"/>
-                      <a:round/>
-                      <a:headEnd type="none" w="med" len="med"/>
-                      <a:tailEnd type="none" w="med" len="med"/>
-                    </a:lnB>
-                    <a:solidFill>
-                      <a:srgbClr val="FFFFFF"/>
-                    </a:solidFill>
-                  </a:tcPr>
-                </a:tc>
-                <a:extLst>
-                  <a:ext uri="{0D108BD9-81ED-4DB2-BD59-A6C34878D82A}">
-                    <a16:rowId xmlns:a16="http://schemas.microsoft.com/office/drawing/2014/main" val="10002"/>
-                  </a:ext>
-                </a:extLst>
-              </a:tr>
-              <a:tr h="0">
-                <a:tc>
-                  <a:txBody>
-                    <a:bodyPr/>
-                    <a:lstStyle/>
-                    <a:p>
-                      <a:pPr marL="0" indent="0">
-                        <a:buNone/>
-                      </a:pPr>
-                      <a:r>
-                        <a:rPr lang="en-US" sz="1200" dirty="0">
-                          <a:solidFill>
-                            <a:srgbClr val="1F2328"/>
-                          </a:solidFill>
-                          <a:latin typeface="Mulish" pitchFamily="34" charset="0"/>
-                          <a:ea typeface="Mulish" pitchFamily="34" charset="-122"/>
-                          <a:cs typeface="Mulish" pitchFamily="34" charset="-120"/>
-                        </a:rPr>
-                        <a:t>Programming</a:t>
-                      </a:r>
-                      <a:endParaRPr lang="en-US" sz="1200" dirty="0">
-                        <a:latin typeface="Mulish" charset="0"/>
-                        <a:ea typeface="Mulish" charset="0"/>
-                        <a:cs typeface="Mulish" charset="0"/>
-                      </a:endParaRPr>
-                    </a:p>
-                  </a:txBody>
-                  <a:tcPr marT="64008" marB="64008">
-                    <a:lnL w="0" cap="flat" cmpd="sng" algn="ctr">
-                      <a:noFill/>
-                    </a:lnL>
-                    <a:lnR w="0" cap="flat" cmpd="sng" algn="ctr">
-                      <a:noFill/>
-                    </a:lnR>
-                    <a:lnT w="9525" cap="flat" cmpd="sng" algn="ctr">
-                      <a:solidFill>
-                        <a:srgbClr val="DADDE0"/>
-                      </a:solidFill>
-                      <a:prstDash val="solid"/>
-                      <a:round/>
-                      <a:headEnd type="none" w="med" len="med"/>
-                      <a:tailEnd type="none" w="med" len="med"/>
-                    </a:lnT>
-                    <a:lnB w="9525" cap="flat" cmpd="sng" algn="ctr">
-                      <a:solidFill>
-                        <a:srgbClr val="DADDE0"/>
-                      </a:solidFill>
-                      <a:prstDash val="solid"/>
-                      <a:round/>
-                      <a:headEnd type="none" w="med" len="med"/>
-                      <a:tailEnd type="none" w="med" len="med"/>
-                    </a:lnB>
-                    <a:solidFill>
-                      <a:srgbClr val="FFFFFF"/>
-                    </a:solidFill>
-                  </a:tcPr>
-                </a:tc>
-                <a:tc>
-                  <a:txBody>
-                    <a:bodyPr/>
-                    <a:lstStyle/>
-                    <a:p>
-                      <a:pPr marL="0" indent="0">
-                        <a:buNone/>
-                      </a:pPr>
-                      <a:r>
-                        <a:rPr lang="en-US" sz="1200" dirty="0">
-                          <a:solidFill>
-                            <a:srgbClr val="1F2328"/>
-                          </a:solidFill>
-                          <a:latin typeface="Mulish" pitchFamily="34" charset="0"/>
-                          <a:ea typeface="Mulish" pitchFamily="34" charset="-122"/>
-                          <a:cs typeface="Mulish" pitchFamily="34" charset="-120"/>
-                        </a:rPr>
-                        <a:t>Language basics, arrays, strings, recursion, divide and conquer, backtracking, linked structures, pointers, simple floating point; interactive tasks</a:t>
-                      </a:r>
-                      <a:endParaRPr lang="en-US" sz="1200" dirty="0">
-                        <a:latin typeface="Mulish" charset="0"/>
-                        <a:ea typeface="Mulish" charset="0"/>
-                        <a:cs typeface="Mulish" charset="0"/>
-                      </a:endParaRPr>
-                    </a:p>
-                  </a:txBody>
-                  <a:tcPr marT="64008" marB="64008">
-                    <a:lnL w="0" cap="flat" cmpd="sng" algn="ctr">
-                      <a:noFill/>
-                    </a:lnL>
-                    <a:lnR w="0" cap="flat" cmpd="sng" algn="ctr">
-                      <a:noFill/>
-                    </a:lnR>
-                    <a:lnT w="9525" cap="flat" cmpd="sng" algn="ctr">
-                      <a:solidFill>
-                        <a:srgbClr val="DADDE0"/>
-                      </a:solidFill>
-                      <a:prstDash val="solid"/>
-                      <a:round/>
-                      <a:headEnd type="none" w="med" len="med"/>
-                      <a:tailEnd type="none" w="med" len="med"/>
-                    </a:lnT>
-                    <a:lnB w="9525" cap="flat" cmpd="sng" algn="ctr">
-                      <a:solidFill>
-                        <a:srgbClr val="DADDE0"/>
-                      </a:solidFill>
-                      <a:prstDash val="solid"/>
-                      <a:round/>
-                      <a:headEnd type="none" w="med" len="med"/>
-                      <a:tailEnd type="none" w="med" len="med"/>
-                    </a:lnB>
-                    <a:solidFill>
-                      <a:srgbClr val="FFFFFF"/>
-                    </a:solidFill>
-                  </a:tcPr>
-                </a:tc>
-                <a:tc>
-                  <a:txBody>
-                    <a:bodyPr/>
-                    <a:lstStyle/>
-                    <a:p>
-                      <a:pPr marL="0" indent="0">
-                        <a:buNone/>
-                      </a:pPr>
-                      <a:r>
-                        <a:rPr lang="en-US" sz="1200" dirty="0">
-                          <a:solidFill>
-                            <a:srgbClr val="1F2328"/>
-                          </a:solidFill>
-                          <a:latin typeface="Mulish" pitchFamily="34" charset="0"/>
-                          <a:ea typeface="Mulish" pitchFamily="34" charset="-122"/>
-                          <a:cs typeface="Mulish" pitchFamily="34" charset="-120"/>
-                        </a:rPr>
-                        <a:t>Memory representation; heap allocation; exact fractions</a:t>
-                      </a:r>
-                      <a:endParaRPr lang="en-US" sz="1200" dirty="0">
-                        <a:latin typeface="Mulish" charset="0"/>
-                        <a:ea typeface="Mulish" charset="0"/>
-                        <a:cs typeface="Mulish" charset="0"/>
-                      </a:endParaRPr>
-                    </a:p>
-                  </a:txBody>
-                  <a:tcPr marT="64008" marB="64008">
-                    <a:lnL w="0" cap="flat" cmpd="sng" algn="ctr">
-                      <a:noFill/>
-                    </a:lnL>
-                    <a:lnR w="0" cap="flat" cmpd="sng" algn="ctr">
-                      <a:noFill/>
-                    </a:lnR>
-                    <a:lnT w="9525" cap="flat" cmpd="sng" algn="ctr">
-                      <a:solidFill>
-                        <a:srgbClr val="DADDE0"/>
-                      </a:solidFill>
-                      <a:prstDash val="solid"/>
-                      <a:round/>
-                      <a:headEnd type="none" w="med" len="med"/>
-                      <a:tailEnd type="none" w="med" len="med"/>
-                    </a:lnT>
-                    <a:lnB w="9525" cap="flat" cmpd="sng" algn="ctr">
-                      <a:solidFill>
-                        <a:srgbClr val="DADDE0"/>
-                      </a:solidFill>
-                      <a:prstDash val="solid"/>
-                      <a:round/>
-                      <a:headEnd type="none" w="med" len="med"/>
-                      <a:tailEnd type="none" w="med" len="med"/>
-                    </a:lnB>
-                    <a:solidFill>
-                      <a:srgbClr val="FFFFFF"/>
-                    </a:solidFill>
-                  </a:tcPr>
-                </a:tc>
-                <a:tc>
-                  <a:txBody>
-                    <a:bodyPr/>
-                    <a:lstStyle/>
-                    <a:p>
-                      <a:pPr marL="0" indent="0">
-                        <a:buNone/>
-                      </a:pPr>
-                      <a:r>
-                        <a:rPr lang="en-US" sz="1200" dirty="0">
-                          <a:solidFill>
-                            <a:srgbClr val="1F2328"/>
-                          </a:solidFill>
-                          <a:latin typeface="Mulish" pitchFamily="34" charset="0"/>
-                          <a:ea typeface="Mulish" pitchFamily="34" charset="-122"/>
-                          <a:cs typeface="Mulish" pitchFamily="34" charset="-120"/>
-                        </a:rPr>
-                        <a:t>Non-trivial floating-point calculations</a:t>
-                      </a:r>
-                      <a:endParaRPr lang="en-US" sz="1200" dirty="0">
-                        <a:latin typeface="Mulish" charset="0"/>
-                        <a:ea typeface="Mulish" charset="0"/>
-                        <a:cs typeface="Mulish" charset="0"/>
-                      </a:endParaRPr>
-                    </a:p>
-                  </a:txBody>
-                  <a:tcPr marT="64008" marB="64008">
-                    <a:lnL w="0" cap="flat" cmpd="sng" algn="ctr">
-                      <a:noFill/>
-                    </a:lnL>
-                    <a:lnR w="0" cap="flat" cmpd="sng" algn="ctr">
-                      <a:noFill/>
-                    </a:lnR>
-                    <a:lnT w="9525" cap="flat" cmpd="sng" algn="ctr">
-                      <a:solidFill>
-                        <a:srgbClr val="DADDE0"/>
-                      </a:solidFill>
-                      <a:prstDash val="solid"/>
-                      <a:round/>
-                      <a:headEnd type="none" w="med" len="med"/>
-                      <a:tailEnd type="none" w="med" len="med"/>
-                    </a:lnT>
-                    <a:lnB w="9525" cap="flat" cmpd="sng" algn="ctr">
-                      <a:solidFill>
-                        <a:srgbClr val="DADDE0"/>
-                      </a:solidFill>
-                      <a:prstDash val="solid"/>
-                      <a:round/>
-                      <a:headEnd type="none" w="med" len="med"/>
-                      <a:tailEnd type="none" w="med" len="med"/>
-                    </a:lnB>
-                    <a:solidFill>
-                      <a:srgbClr val="FFFFFF"/>
-                    </a:solidFill>
-                  </a:tcPr>
-                </a:tc>
-                <a:extLst>
-                  <a:ext uri="{0D108BD9-81ED-4DB2-BD59-A6C34878D82A}">
-                    <a16:rowId xmlns:a16="http://schemas.microsoft.com/office/drawing/2014/main" val="10003"/>
-                  </a:ext>
-                </a:extLst>
-              </a:tr>
-              <a:tr h="0">
-                <a:tc>
-                  <a:txBody>
-                    <a:bodyPr/>
-                    <a:lstStyle/>
-                    <a:p>
-                      <a:pPr marL="0" indent="0">
-                        <a:buNone/>
-                      </a:pPr>
-                      <a:r>
-                        <a:rPr lang="en-US" sz="1200" dirty="0">
-                          <a:solidFill>
-                            <a:srgbClr val="1F2328"/>
-                          </a:solidFill>
-                          <a:latin typeface="Mulish" pitchFamily="34" charset="0"/>
-                          <a:ea typeface="Mulish" pitchFamily="34" charset="-122"/>
-                          <a:cs typeface="Mulish" pitchFamily="34" charset="-120"/>
-                        </a:rPr>
-                        <a:t>Analysis and strategies</a:t>
-                      </a:r>
-                      <a:endParaRPr lang="en-US" sz="1200" dirty="0">
-                        <a:latin typeface="Mulish" charset="0"/>
-                        <a:ea typeface="Mulish" charset="0"/>
-                        <a:cs typeface="Mulish" charset="0"/>
-                      </a:endParaRPr>
-                    </a:p>
-                  </a:txBody>
-                  <a:tcPr marT="64008" marB="64008">
-                    <a:lnL w="0" cap="flat" cmpd="sng" algn="ctr">
-                      <a:noFill/>
-                    </a:lnL>
-                    <a:lnR w="0" cap="flat" cmpd="sng" algn="ctr">
-                      <a:noFill/>
-                    </a:lnR>
-                    <a:lnT w="9525" cap="flat" cmpd="sng" algn="ctr">
-                      <a:solidFill>
-                        <a:srgbClr val="DADDE0"/>
-                      </a:solidFill>
-                      <a:prstDash val="solid"/>
-                      <a:round/>
-                      <a:headEnd type="none" w="med" len="med"/>
-                      <a:tailEnd type="none" w="med" len="med"/>
-                    </a:lnT>
-                    <a:lnB w="9525" cap="flat" cmpd="sng" algn="ctr">
-                      <a:solidFill>
-                        <a:srgbClr val="DADDE0"/>
-                      </a:solidFill>
-                      <a:prstDash val="solid"/>
-                      <a:round/>
-                      <a:headEnd type="none" w="med" len="med"/>
-                      <a:tailEnd type="none" w="med" len="med"/>
-                    </a:lnB>
-                    <a:solidFill>
-                      <a:srgbClr val="FFFFFF"/>
-                    </a:solidFill>
-                  </a:tcPr>
-                </a:tc>
-                <a:tc>
-                  <a:txBody>
-                    <a:bodyPr/>
-                    <a:lstStyle/>
-                    <a:p>
-                      <a:pPr marL="0" indent="0">
-                        <a:buNone/>
-                      </a:pPr>
-                      <a:r>
-                        <a:rPr lang="en-US" sz="1200" dirty="0">
-                          <a:solidFill>
-                            <a:srgbClr val="1F2328"/>
-                          </a:solidFill>
-                          <a:latin typeface="Mulish" pitchFamily="34" charset="0"/>
-                          <a:ea typeface="Mulish" pitchFamily="34" charset="-122"/>
-                          <a:cs typeface="Mulish" pitchFamily="34" charset="-120"/>
-                        </a:rPr>
-                        <a:t>Big O; amortized analysis; brute force; greedy; divide and conquer; branch and bound; dynamic programming</a:t>
-                      </a:r>
-                      <a:endParaRPr lang="en-US" sz="1200" dirty="0">
-                        <a:latin typeface="Mulish" charset="0"/>
-                        <a:ea typeface="Mulish" charset="0"/>
-                        <a:cs typeface="Mulish" charset="0"/>
-                      </a:endParaRPr>
-                    </a:p>
-                  </a:txBody>
-                  <a:tcPr marT="64008" marB="64008">
-                    <a:lnL w="0" cap="flat" cmpd="sng" algn="ctr">
-                      <a:noFill/>
-                    </a:lnL>
-                    <a:lnR w="0" cap="flat" cmpd="sng" algn="ctr">
-                      <a:noFill/>
-                    </a:lnR>
-                    <a:lnT w="9525" cap="flat" cmpd="sng" algn="ctr">
-                      <a:solidFill>
-                        <a:srgbClr val="DADDE0"/>
-                      </a:solidFill>
-                      <a:prstDash val="solid"/>
-                      <a:round/>
-                      <a:headEnd type="none" w="med" len="med"/>
-                      <a:tailEnd type="none" w="med" len="med"/>
-                    </a:lnT>
-                    <a:lnB w="9525" cap="flat" cmpd="sng" algn="ctr">
-                      <a:solidFill>
-                        <a:srgbClr val="DADDE0"/>
-                      </a:solidFill>
-                      <a:prstDash val="solid"/>
-                      <a:round/>
-                      <a:headEnd type="none" w="med" len="med"/>
-                      <a:tailEnd type="none" w="med" len="med"/>
-                    </a:lnB>
-                    <a:solidFill>
-                      <a:srgbClr val="FFFFFF"/>
-                    </a:solidFill>
-                  </a:tcPr>
-                </a:tc>
-                <a:tc>
-                  <a:txBody>
-                    <a:bodyPr/>
-                    <a:lstStyle/>
-                    <a:p>
-                      <a:pPr marL="0" indent="0">
-                        <a:buNone/>
-                      </a:pPr>
-                      <a:r>
-                        <a:rPr lang="en-US" sz="1200" dirty="0">
-                          <a:solidFill>
-                            <a:srgbClr val="1F2328"/>
-                          </a:solidFill>
-                          <a:latin typeface="Mulish" pitchFamily="34" charset="0"/>
-                          <a:ea typeface="Mulish" pitchFamily="34" charset="-122"/>
-                          <a:cs typeface="Mulish" pitchFamily="34" charset="-120"/>
-                        </a:rPr>
-                        <a:t>Heuristics; randomized and approximation algorithms</a:t>
-                      </a:r>
-                      <a:endParaRPr lang="en-US" sz="1200" dirty="0">
-                        <a:latin typeface="Mulish" charset="0"/>
-                        <a:ea typeface="Mulish" charset="0"/>
-                        <a:cs typeface="Mulish" charset="0"/>
-                      </a:endParaRPr>
-                    </a:p>
-                  </a:txBody>
-                  <a:tcPr marT="64008" marB="64008">
-                    <a:lnL w="0" cap="flat" cmpd="sng" algn="ctr">
-                      <a:noFill/>
-                    </a:lnL>
-                    <a:lnR w="0" cap="flat" cmpd="sng" algn="ctr">
-                      <a:noFill/>
-                    </a:lnR>
-                    <a:lnT w="9525" cap="flat" cmpd="sng" algn="ctr">
-                      <a:solidFill>
-                        <a:srgbClr val="DADDE0"/>
-                      </a:solidFill>
-                      <a:prstDash val="solid"/>
-                      <a:round/>
-                      <a:headEnd type="none" w="med" len="med"/>
-                      <a:tailEnd type="none" w="med" len="med"/>
-                    </a:lnT>
-                    <a:lnB w="9525" cap="flat" cmpd="sng" algn="ctr">
-                      <a:solidFill>
-                        <a:srgbClr val="DADDE0"/>
-                      </a:solidFill>
-                      <a:prstDash val="solid"/>
-                      <a:round/>
-                      <a:headEnd type="none" w="med" len="med"/>
-                      <a:tailEnd type="none" w="med" len="med"/>
-                    </a:lnB>
-                    <a:solidFill>
-                      <a:srgbClr val="FFFFFF"/>
-                    </a:solidFill>
-                  </a:tcPr>
-                </a:tc>
-                <a:tc>
-                  <a:txBody>
-                    <a:bodyPr/>
-                    <a:lstStyle/>
-                    <a:p>
-                      <a:pPr marL="0" indent="0">
-                        <a:buNone/>
-                      </a:pPr>
-                      <a:r>
-                        <a:rPr lang="en-US" sz="1200" dirty="0">
-                          <a:solidFill>
-                            <a:srgbClr val="1F2328"/>
-                          </a:solidFill>
-                          <a:latin typeface="Mulish" pitchFamily="34" charset="0"/>
-                          <a:ea typeface="Mulish" pitchFamily="34" charset="-122"/>
-                          <a:cs typeface="Mulish" pitchFamily="34" charset="-120"/>
-                        </a:rPr>
-                        <a:t>Average-case analysis; recurrence-based analysis; clustering; numerical optimization</a:t>
-                      </a:r>
-                      <a:endParaRPr lang="en-US" sz="1200" dirty="0">
-                        <a:latin typeface="Mulish" charset="0"/>
-                        <a:ea typeface="Mulish" charset="0"/>
-                        <a:cs typeface="Mulish" charset="0"/>
-                      </a:endParaRPr>
-                    </a:p>
-                  </a:txBody>
-                  <a:tcPr marT="64008" marB="64008">
-                    <a:lnL w="0" cap="flat" cmpd="sng" algn="ctr">
-                      <a:noFill/>
-                    </a:lnL>
-                    <a:lnR w="0" cap="flat" cmpd="sng" algn="ctr">
-                      <a:noFill/>
-                    </a:lnR>
-                    <a:lnT w="9525" cap="flat" cmpd="sng" algn="ctr">
-                      <a:solidFill>
-                        <a:srgbClr val="DADDE0"/>
-                      </a:solidFill>
-                      <a:prstDash val="solid"/>
-                      <a:round/>
-                      <a:headEnd type="none" w="med" len="med"/>
-                      <a:tailEnd type="none" w="med" len="med"/>
-                    </a:lnT>
-                    <a:lnB w="9525" cap="flat" cmpd="sng" algn="ctr">
-                      <a:solidFill>
-                        <a:srgbClr val="DADDE0"/>
-                      </a:solidFill>
-                      <a:prstDash val="solid"/>
-                      <a:round/>
-                      <a:headEnd type="none" w="med" len="med"/>
-                      <a:tailEnd type="none" w="med" len="med"/>
-                    </a:lnB>
-                    <a:solidFill>
-                      <a:srgbClr val="FFFFFF"/>
-                    </a:solidFill>
-                  </a:tcPr>
-                </a:tc>
-                <a:extLst>
-                  <a:ext uri="{0D108BD9-81ED-4DB2-BD59-A6C34878D82A}">
-                    <a16:rowId xmlns:a16="http://schemas.microsoft.com/office/drawing/2014/main" val="10004"/>
-                  </a:ext>
-                </a:extLst>
-              </a:tr>
-            </a:tbl>
-          </a:graphicData>
-        </a:graphic>
-      </p:graphicFrame>
-    </p:spTree>
-  </p:cSld>
-  <p:clrMapOvr>
-    <a:masterClrMapping/>
-  </p:clrMapOvr>
-</p:sld>
-</file>
-
-<file path=ppt/slides/slide21.xml><?xml version="1.0" encoding="utf-8"?>
-<p:sld xmlns:a="http://schemas.openxmlformats.org/drawingml/2006/main" xmlns:r="http://schemas.openxmlformats.org/officeDocument/2006/relationships" xmlns:p="http://schemas.openxmlformats.org/presentationml/2006/main">
-  <p:cSld name="Slide 22">
-    <p:spTree>
-      <p:nvGrpSpPr>
-        <p:cNvPr id="1" name=""/>
-        <p:cNvGrpSpPr/>
-        <p:nvPr/>
-      </p:nvGrpSpPr>
-      <p:grpSpPr>
-        <a:xfrm>
-          <a:off x="0" y="0"/>
-          <a:ext cx="0" cy="0"/>
-          <a:chOff x="0" y="0"/>
-          <a:chExt cx="0" cy="0"/>
-        </a:xfrm>
-      </p:grpSpPr>
-      <p:sp>
-        <p:nvSpPr>
-          <p:cNvPr id="2" name="Text 1"/>
-          <p:cNvSpPr>
-            <a:spLocks noGrp="1"/>
-          </p:cNvSpPr>
-          <p:nvPr>
-            <p:ph type="body" idx="101" hasCustomPrompt="1"/>
-          </p:nvPr>
-        </p:nvSpPr>
-        <p:spPr>
-          <a:xfrm>
-            <a:off x="812800" y="609600"/>
-            <a:ext cx="10566400" cy="279400"/>
-          </a:xfrm>
-          <a:prstGeom prst="rect">
-            <a:avLst/>
-          </a:prstGeom>
-          <a:noFill/>
-          <a:ln/>
-        </p:spPr>
-        <p:txBody>
-          <a:bodyPr wrap="square" lIns="0" tIns="0" rIns="0" bIns="0" rtlCol="0" anchor="t"/>
-          <a:lstStyle/>
-          <a:p>
-            <a:pPr marL="0" indent="0">
-              <a:buNone/>
-            </a:pPr>
-            <a:r>
-              <a:rPr lang="en-US" sz="1200" b="1" kern="0" spc="200" dirty="0">
-                <a:solidFill>
-                  <a:srgbClr val="287673"/>
-                </a:solidFill>
-                <a:latin typeface="Mulish" pitchFamily="34" charset="0"/>
-                <a:ea typeface="Mulish" pitchFamily="34" charset="-122"/>
-                <a:cs typeface="Mulish" pitchFamily="34" charset="-120"/>
-              </a:rPr>
-              <a:t>ADDENDUM · IOI SYLLABUS 2025 · 3 OF 3</a:t>
-            </a:r>
-            <a:endParaRPr lang="en-US" sz="1200" dirty="0"/>
-          </a:p>
-        </p:txBody>
-      </p:sp>
-      <p:sp>
-        <p:nvSpPr>
-          <p:cNvPr id="3" name="Text 1"/>
-          <p:cNvSpPr>
-            <a:spLocks noGrp="1"/>
-          </p:cNvSpPr>
-          <p:nvPr>
-            <p:ph type="title" idx="102" hasCustomPrompt="1"/>
-          </p:nvPr>
-        </p:nvSpPr>
-        <p:spPr>
-          <a:xfrm>
-            <a:off x="812800" y="952500"/>
-            <a:ext cx="10566400" cy="482600"/>
-          </a:xfrm>
-          <a:prstGeom prst="rect">
-            <a:avLst/>
-          </a:prstGeom>
-          <a:noFill/>
-          <a:ln/>
-        </p:spPr>
-        <p:txBody>
-          <a:bodyPr wrap="square" lIns="0" tIns="0" rIns="0" bIns="0" rtlCol="0" anchor="t"/>
-          <a:lstStyle/>
-          <a:p>
-            <a:pPr marL="0" indent="0" algn="l">
-              <a:buNone/>
-            </a:pPr>
-            <a:r>
-              <a:rPr lang="en-US" sz="2600" b="1" kern="0" spc="200" dirty="0">
-                <a:solidFill>
-                  <a:srgbClr val="1F2328"/>
-                </a:solidFill>
-                <a:latin typeface="Jost" pitchFamily="34" charset="0"/>
-                <a:ea typeface="Jost" pitchFamily="34" charset="-122"/>
-                <a:cs typeface="Jost" pitchFamily="34" charset="-120"/>
-              </a:rPr>
-              <a:t>ALGORITHMS AND DATA STRUCTURES</a:t>
-            </a:r>
-            <a:endParaRPr lang="en-US" sz="2600" dirty="0"/>
-          </a:p>
-        </p:txBody>
-      </p:sp>
-      <p:graphicFrame>
-        <p:nvGraphicFramePr>
-          <p:cNvPr id="23" name="Table 0"/>
-          <p:cNvGraphicFramePr>
-            <a:graphicFrameLocks noGrp="1"/>
-          </p:cNvGraphicFramePr>
-          <p:nvPr>
-            <p:extLst>
-              <p:ext uri="{D42A27DB-BD31-4B8C-83A1-F6EECF244321}">
-                <p14:modId xmlns:p14="http://schemas.microsoft.com/office/powerpoint/2010/main" val="1579011935"/>
-              </p:ext>
-            </p:extLst>
-          </p:nvPr>
-        </p:nvGraphicFramePr>
-        <p:xfrm>
-          <a:off x="812800" y="1638300"/>
-          <a:ext cx="10566400" cy="4297680"/>
-        </p:xfrm>
-        <a:graphic>
-          <a:graphicData uri="http://schemas.openxmlformats.org/drawingml/2006/table">
-            <a:tbl>
-              <a:tblPr/>
-              <a:tblGrid>
-                <a:gridCol w="1584960">
-                  <a:extLst>
-                    <a:ext uri="{9D8B030D-6E8A-4147-A177-3AD203B41FA5}">
-                      <a16:colId xmlns:a16="http://schemas.microsoft.com/office/drawing/2014/main" val="20000"/>
-                    </a:ext>
-                  </a:extLst>
-                </a:gridCol>
-                <a:gridCol w="4226560">
-                  <a:extLst>
-                    <a:ext uri="{9D8B030D-6E8A-4147-A177-3AD203B41FA5}">
-                      <a16:colId xmlns:a16="http://schemas.microsoft.com/office/drawing/2014/main" val="20001"/>
-                    </a:ext>
-                  </a:extLst>
-                </a:gridCol>
-                <a:gridCol w="1796288">
-                  <a:extLst>
-                    <a:ext uri="{9D8B030D-6E8A-4147-A177-3AD203B41FA5}">
-                      <a16:colId xmlns:a16="http://schemas.microsoft.com/office/drawing/2014/main" val="20002"/>
-                    </a:ext>
-                  </a:extLst>
-                </a:gridCol>
-                <a:gridCol w="2958592">
-                  <a:extLst>
-                    <a:ext uri="{9D8B030D-6E8A-4147-A177-3AD203B41FA5}">
-                      <a16:colId xmlns:a16="http://schemas.microsoft.com/office/drawing/2014/main" val="20003"/>
-                    </a:ext>
-                  </a:extLst>
-                </a:gridCol>
-              </a:tblGrid>
-              <a:tr h="0">
-                <a:tc>
-                  <a:txBody>
-                    <a:bodyPr/>
-                    <a:lstStyle/>
-                    <a:p>
-                      <a:pPr marL="0" indent="0">
-                        <a:buNone/>
-                      </a:pPr>
-                      <a:r>
-                        <a:rPr lang="en-US" sz="1200" b="1" dirty="0">
-                          <a:solidFill>
-                            <a:srgbClr val="1F2328"/>
-                          </a:solidFill>
-                          <a:latin typeface="Mulish" pitchFamily="34" charset="0"/>
-                          <a:ea typeface="Mulish" pitchFamily="34" charset="-122"/>
-                          <a:cs typeface="Mulish" pitchFamily="34" charset="-120"/>
-                        </a:rPr>
-                        <a:t>Area</a:t>
-                      </a:r>
-                      <a:endParaRPr lang="en-US" sz="1200" dirty="0">
-                        <a:latin typeface="Mulish" charset="0"/>
-                        <a:ea typeface="Mulish" charset="0"/>
-                        <a:cs typeface="Mulish" charset="0"/>
-                      </a:endParaRPr>
-                    </a:p>
-                  </a:txBody>
-                  <a:tcPr marT="64008" marB="64008">
-                    <a:lnL w="0" cap="flat" cmpd="sng" algn="ctr">
-                      <a:noFill/>
-                    </a:lnL>
-                    <a:lnR w="0" cap="flat" cmpd="sng" algn="ctr">
-                      <a:noFill/>
-                    </a:lnR>
-                    <a:lnT w="0" cap="flat" cmpd="sng" algn="ctr">
-                      <a:noFill/>
-                    </a:lnT>
-                    <a:lnB w="19050" cap="flat" cmpd="sng" algn="ctr">
-                      <a:solidFill>
-                        <a:srgbClr val="1F2328"/>
-                      </a:solidFill>
-                      <a:prstDash val="solid"/>
-                      <a:round/>
-                      <a:headEnd type="none" w="med" len="med"/>
-                      <a:tailEnd type="none" w="med" len="med"/>
-                    </a:lnB>
-                    <a:solidFill>
-                      <a:srgbClr val="FFFFFF"/>
-                    </a:solidFill>
-                  </a:tcPr>
-                </a:tc>
-                <a:tc>
-                  <a:txBody>
-                    <a:bodyPr/>
-                    <a:lstStyle/>
-                    <a:p>
-                      <a:pPr marL="0" indent="0">
-                        <a:buNone/>
-                      </a:pPr>
-                      <a:r>
-                        <a:rPr lang="en-US" sz="1200" b="1" dirty="0">
-                          <a:solidFill>
-                            <a:srgbClr val="1F2328"/>
-                          </a:solidFill>
-                          <a:latin typeface="Mulish" pitchFamily="34" charset="0"/>
-                          <a:ea typeface="Mulish" pitchFamily="34" charset="-122"/>
-                          <a:cs typeface="Mulish" pitchFamily="34" charset="-120"/>
-                        </a:rPr>
-                        <a:t>Included (✓, ✓q, ✓p)</a:t>
-                      </a:r>
-                      <a:endParaRPr lang="en-US" sz="1200" dirty="0">
-                        <a:latin typeface="Mulish" charset="0"/>
-                        <a:ea typeface="Mulish" charset="0"/>
-                        <a:cs typeface="Mulish" charset="0"/>
-                      </a:endParaRPr>
-                    </a:p>
-                  </a:txBody>
-                  <a:tcPr marT="64008" marB="64008">
-                    <a:lnL w="0" cap="flat" cmpd="sng" algn="ctr">
-                      <a:noFill/>
-                    </a:lnL>
-                    <a:lnR w="0" cap="flat" cmpd="sng" algn="ctr">
-                      <a:noFill/>
-                    </a:lnR>
-                    <a:lnT w="0" cap="flat" cmpd="sng" algn="ctr">
-                      <a:noFill/>
-                    </a:lnT>
-                    <a:lnB w="19050" cap="flat" cmpd="sng" algn="ctr">
-                      <a:solidFill>
-                        <a:srgbClr val="1F2328"/>
-                      </a:solidFill>
-                      <a:prstDash val="solid"/>
-                      <a:round/>
-                      <a:headEnd type="none" w="med" len="med"/>
-                      <a:tailEnd type="none" w="med" len="med"/>
-                    </a:lnB>
-                    <a:solidFill>
-                      <a:srgbClr val="FFFFFF"/>
-                    </a:solidFill>
-                  </a:tcPr>
-                </a:tc>
-                <a:tc>
-                  <a:txBody>
-                    <a:bodyPr/>
-                    <a:lstStyle/>
-                    <a:p>
-                      <a:pPr marL="0" indent="0">
-                        <a:buNone/>
-                      </a:pPr>
-                      <a:r>
-                        <a:rPr lang="en-US" sz="1200" b="1" dirty="0">
-                          <a:solidFill>
-                            <a:srgbClr val="1F2328"/>
-                          </a:solidFill>
-                          <a:latin typeface="Mulish" pitchFamily="34" charset="0"/>
-                          <a:ea typeface="Mulish" pitchFamily="34" charset="-122"/>
-                          <a:cs typeface="Mulish" pitchFamily="34" charset="-120"/>
-                        </a:rPr>
-                        <a:t>Outside of focus (?)</a:t>
-                      </a:r>
-                      <a:endParaRPr lang="en-US" sz="1200" dirty="0">
-                        <a:latin typeface="Mulish" charset="0"/>
-                        <a:ea typeface="Mulish" charset="0"/>
-                        <a:cs typeface="Mulish" charset="0"/>
-                      </a:endParaRPr>
-                    </a:p>
-                  </a:txBody>
-                  <a:tcPr marT="64008" marB="64008">
-                    <a:lnL w="0" cap="flat" cmpd="sng" algn="ctr">
-                      <a:noFill/>
-                    </a:lnL>
-                    <a:lnR w="0" cap="flat" cmpd="sng" algn="ctr">
-                      <a:noFill/>
-                    </a:lnR>
-                    <a:lnT w="0" cap="flat" cmpd="sng" algn="ctr">
-                      <a:noFill/>
-                    </a:lnT>
-                    <a:lnB w="19050" cap="flat" cmpd="sng" algn="ctr">
-                      <a:solidFill>
-                        <a:srgbClr val="1F2328"/>
-                      </a:solidFill>
-                      <a:prstDash val="solid"/>
-                      <a:round/>
-                      <a:headEnd type="none" w="med" len="med"/>
-                      <a:tailEnd type="none" w="med" len="med"/>
-                    </a:lnB>
-                    <a:solidFill>
-                      <a:srgbClr val="FFFFFF"/>
-                    </a:solidFill>
-                  </a:tcPr>
-                </a:tc>
-                <a:tc>
-                  <a:txBody>
-                    <a:bodyPr/>
-                    <a:lstStyle/>
-                    <a:p>
-                      <a:pPr marL="0" indent="0">
-                        <a:buNone/>
-                      </a:pPr>
-                      <a:r>
-                        <a:rPr lang="en-US" sz="1200" b="1" dirty="0">
-                          <a:solidFill>
-                            <a:srgbClr val="1F2328"/>
-                          </a:solidFill>
-                          <a:latin typeface="Mulish" pitchFamily="34" charset="0"/>
-                          <a:ea typeface="Mulish" pitchFamily="34" charset="-122"/>
-                          <a:cs typeface="Mulish" pitchFamily="34" charset="-120"/>
-                        </a:rPr>
-                        <a:t>Excluded (✗)</a:t>
-                      </a:r>
-                      <a:endParaRPr lang="en-US" sz="1200" dirty="0">
-                        <a:latin typeface="Mulish" charset="0"/>
-                        <a:ea typeface="Mulish" charset="0"/>
-                        <a:cs typeface="Mulish" charset="0"/>
-                      </a:endParaRPr>
-                    </a:p>
-                  </a:txBody>
-                  <a:tcPr marT="64008" marB="64008">
-                    <a:lnL w="0" cap="flat" cmpd="sng" algn="ctr">
-                      <a:noFill/>
-                    </a:lnL>
-                    <a:lnR w="0" cap="flat" cmpd="sng" algn="ctr">
-                      <a:noFill/>
-                    </a:lnR>
-                    <a:lnT w="0" cap="flat" cmpd="sng" algn="ctr">
-                      <a:noFill/>
-                    </a:lnT>
-                    <a:lnB w="19050" cap="flat" cmpd="sng" algn="ctr">
-                      <a:solidFill>
-                        <a:srgbClr val="1F2328"/>
-                      </a:solidFill>
-                      <a:prstDash val="solid"/>
-                      <a:round/>
-                      <a:headEnd type="none" w="med" len="med"/>
-                      <a:tailEnd type="none" w="med" len="med"/>
-                    </a:lnB>
-                    <a:solidFill>
-                      <a:srgbClr val="FFFFFF"/>
-                    </a:solidFill>
-                  </a:tcPr>
-                </a:tc>
-                <a:extLst>
-                  <a:ext uri="{0D108BD9-81ED-4DB2-BD59-A6C34878D82A}">
-                    <a16:rowId xmlns:a16="http://schemas.microsoft.com/office/drawing/2014/main" val="10000"/>
-                  </a:ext>
-                </a:extLst>
-              </a:tr>
-              <a:tr h="0">
-                <a:tc>
-                  <a:txBody>
-                    <a:bodyPr/>
-                    <a:lstStyle/>
-                    <a:p>
-                      <a:pPr marL="0" indent="0">
-                        <a:buNone/>
-                      </a:pPr>
-                      <a:r>
-                        <a:rPr lang="en-US" sz="1200" dirty="0">
-                          <a:solidFill>
-                            <a:srgbClr val="1F2328"/>
-                          </a:solidFill>
-                          <a:latin typeface="Mulish" pitchFamily="34" charset="0"/>
-                          <a:ea typeface="Mulish" pitchFamily="34" charset="-122"/>
-                          <a:cs typeface="Mulish" pitchFamily="34" charset="-120"/>
-                        </a:rPr>
                         <a:t>Algorithms</a:t>
                       </a:r>
                       <a:endParaRPr lang="en-US" sz="1200" dirty="0">
@@ -15033,7 +15017,7 @@
         </p:nvGraphicFramePr>
         <p:xfrm>
           <a:off x="812800" y="1638300"/>
-          <a:ext cx="10566400" cy="2602992"/>
+          <a:ext cx="10566400" cy="2389632"/>
         </p:xfrm>
         <a:graphic>
           <a:graphicData uri="http://schemas.openxmlformats.org/drawingml/2006/table">
@@ -18507,6 +18491,57 @@
           </a:p>
         </p:txBody>
       </p:sp>
+      <mc:AlternateContent xmlns:mc="http://schemas.openxmlformats.org/markup-compatibility/2006">
+        <mc:Choice xmlns:p14="http://schemas.microsoft.com/office/powerpoint/2010/main" Requires="p14">
+          <p:contentPart p14:bwMode="auto" r:id="rId3">
+            <p14:nvContentPartPr>
+              <p14:cNvPr id="9" name="Ink 8">
+                <a:extLst>
+                  <a:ext uri="{FF2B5EF4-FFF2-40B4-BE49-F238E27FC236}">
+                    <a16:creationId xmlns:a16="http://schemas.microsoft.com/office/drawing/2014/main" id="{451E6347-03E3-2E39-D35A-7BDF9A66BE91}"/>
+                  </a:ext>
+                </a:extLst>
+              </p14:cNvPr>
+              <p14:cNvContentPartPr/>
+              <p14:nvPr/>
+            </p14:nvContentPartPr>
+            <p14:xfrm>
+              <a:off x="2357280" y="203040"/>
+              <a:ext cx="9537480" cy="5265000"/>
+            </p14:xfrm>
+          </p:contentPart>
+        </mc:Choice>
+        <mc:Fallback>
+          <p:pic>
+            <p:nvPicPr>
+              <p:cNvPr id="9" name="Ink 8">
+                <a:extLst>
+                  <a:ext uri="{FF2B5EF4-FFF2-40B4-BE49-F238E27FC236}">
+                    <a16:creationId xmlns:a16="http://schemas.microsoft.com/office/drawing/2014/main" id="{451E6347-03E3-2E39-D35A-7BDF9A66BE91}"/>
+                  </a:ext>
+                </a:extLst>
+              </p:cNvPr>
+              <p:cNvPicPr/>
+              <p:nvPr/>
+            </p:nvPicPr>
+            <p:blipFill>
+              <a:blip r:embed="rId4"/>
+              <a:stretch>
+                <a:fillRect/>
+              </a:stretch>
+            </p:blipFill>
+            <p:spPr>
+              <a:xfrm>
+                <a:off x="2341080" y="186840"/>
+                <a:ext cx="9569880" cy="5297400"/>
+              </a:xfrm>
+              <a:prstGeom prst="rect">
+                <a:avLst/>
+              </a:prstGeom>
+            </p:spPr>
+          </p:pic>
+        </mc:Fallback>
+      </mc:AlternateContent>
     </p:spTree>
   </p:cSld>
   <p:clrMapOvr>
